--- a/output/wordlabs-fresh-3day.pptx
+++ b/output/wordlabs-fresh-3day.pptx
@@ -6057,7 +6057,7 @@
                 <a:ea typeface="Calibri" pitchFamily="34" charset="-122"/>
                 <a:cs typeface="Calibri" pitchFamily="34" charset="-120"/>
               </a:rPr>
-              <a:t>refreshing</a:t>
+              <a:t>freshness</a:t>
             </a:r>
             <a:pPr algn="l" indent="0" marL="0">
               <a:buNone/>
@@ -6071,7 +6071,7 @@
                 <a:ea typeface="Calibri" pitchFamily="34" charset="-122"/>
                 <a:cs typeface="Calibri" pitchFamily="34" charset="-120"/>
               </a:rPr>
-              <a:t> lemonade and the </a:t>
+              <a:t> of the morning air was </a:t>
             </a:r>
             <a:pPr algn="l" indent="0" marL="0">
               <a:buNone/>
@@ -6088,7 +6088,7 @@
                 <a:ea typeface="Calibri" pitchFamily="34" charset="-122"/>
                 <a:cs typeface="Calibri" pitchFamily="34" charset="-120"/>
               </a:rPr>
-              <a:t>freshly</a:t>
+              <a:t>refreshing</a:t>
             </a:r>
             <a:pPr algn="l" indent="0" marL="0">
               <a:buNone/>
@@ -6102,7 +6102,7 @@
                 <a:ea typeface="Calibri" pitchFamily="34" charset="-122"/>
                 <a:cs typeface="Calibri" pitchFamily="34" charset="-120"/>
               </a:rPr>
-              <a:t> picked strawberries were perfect for a hot summer day.</a:t>
+              <a:t> after such a hot night.</a:t>
             </a:r>
             <a:endParaRPr lang="en-US" sz="1800" dirty="0"/>
           </a:p>
@@ -6257,7 +6257,7 @@
                 <a:ea typeface="Trebuchet MS" pitchFamily="34" charset="-122"/>
                 <a:cs typeface="Trebuchet MS" pitchFamily="34" charset="-120"/>
               </a:rPr>
-              <a:t>refreshing</a:t>
+              <a:t>freshness</a:t>
             </a:r>
             <a:endParaRPr lang="en-US" sz="1400" dirty="0"/>
           </a:p>
@@ -6385,7 +6385,7 @@
                 <a:ea typeface="Trebuchet MS" pitchFamily="34" charset="-122"/>
                 <a:cs typeface="Trebuchet MS" pitchFamily="34" charset="-120"/>
               </a:rPr>
-              <a:t>freshly</a:t>
+              <a:t>refreshing</a:t>
             </a:r>
             <a:endParaRPr lang="en-US" sz="1400" dirty="0"/>
           </a:p>
@@ -6855,7 +6855,7 @@
                 <a:ea typeface="Trebuchet MS" pitchFamily="34" charset="-122"/>
                 <a:cs typeface="Trebuchet MS" pitchFamily="34" charset="-120"/>
               </a:rPr>
-              <a:t>refreshing</a:t>
+              <a:t>freshness</a:t>
             </a:r>
             <a:endParaRPr lang="en-US" sz="2800" dirty="0"/>
           </a:p>
@@ -7682,7 +7682,7 @@
                 <a:ea typeface="Trebuchet MS" pitchFamily="34" charset="-122"/>
                 <a:cs typeface="Trebuchet MS" pitchFamily="34" charset="-120"/>
               </a:rPr>
-              <a:t>refreshing</a:t>
+              <a:t>freshness</a:t>
             </a:r>
             <a:endParaRPr lang="en-US" sz="2800" dirty="0"/>
           </a:p>
@@ -7762,7 +7762,7 @@
         </p:nvSpPr>
         <p:spPr>
           <a:xfrm>
-            <a:off x="2221992" y="2258568"/>
+            <a:off x="2938272" y="2258568"/>
             <a:ext cx="1828800" cy="292608"/>
           </a:xfrm>
           <a:prstGeom prst="rect">
@@ -7771,11 +7771,11 @@
             </a:avLst>
           </a:prstGeom>
           <a:solidFill>
-            <a:srgbClr val="DDD6FE"/>
+            <a:srgbClr val="CCFBF1"/>
           </a:solidFill>
           <a:ln w="19050">
             <a:solidFill>
-              <a:srgbClr val="7C3AED"/>
+              <a:srgbClr val="0D9488"/>
             </a:solidFill>
             <a:prstDash val="solid"/>
           </a:ln>
@@ -7796,7 +7796,7 @@
         </p:nvSpPr>
         <p:spPr>
           <a:xfrm>
-            <a:off x="2221992" y="2258568"/>
+            <a:off x="2938272" y="2258568"/>
             <a:ext cx="1828800" cy="292608"/>
           </a:xfrm>
           <a:prstGeom prst="rect">
@@ -7815,13 +7815,13 @@
             <a:r>
               <a:rPr lang="en-US" sz="1300" b="1" dirty="0">
                 <a:solidFill>
-                  <a:srgbClr val="4C1D95"/>
+                  <a:srgbClr val="0F766E"/>
                 </a:solidFill>
                 <a:latin typeface="Trebuchet MS" pitchFamily="34" charset="0"/>
                 <a:ea typeface="Trebuchet MS" pitchFamily="34" charset="-122"/>
                 <a:cs typeface="Trebuchet MS" pitchFamily="34" charset="-120"/>
               </a:rPr>
-              <a:t>re</a:t>
+              <a:t>fresh</a:t>
             </a:r>
             <a:endParaRPr lang="en-US" sz="1300" dirty="0"/>
           </a:p>
@@ -7835,7 +7835,7 @@
         </p:nvSpPr>
         <p:spPr>
           <a:xfrm>
-            <a:off x="2221992" y="2569464"/>
+            <a:off x="2938272" y="2569464"/>
             <a:ext cx="1828800" cy="201168"/>
           </a:xfrm>
           <a:prstGeom prst="rect">
@@ -7860,7 +7860,7 @@
                 <a:ea typeface="Calibri" pitchFamily="34" charset="-122"/>
                 <a:cs typeface="Calibri" pitchFamily="34" charset="-120"/>
               </a:rPr>
-              <a:t>again</a:t>
+              <a:t>new, clean, not stale</a:t>
             </a:r>
             <a:endParaRPr lang="en-US" sz="850" dirty="0"/>
           </a:p>
@@ -7874,7 +7874,7 @@
         </p:nvSpPr>
         <p:spPr>
           <a:xfrm>
-            <a:off x="4370832" y="2258568"/>
+            <a:off x="5803392" y="2258568"/>
             <a:ext cx="1828800" cy="292608"/>
           </a:xfrm>
           <a:prstGeom prst="rect">
@@ -7883,11 +7883,11 @@
             </a:avLst>
           </a:prstGeom>
           <a:solidFill>
-            <a:srgbClr val="CCFBF1"/>
+            <a:srgbClr val="FCE7F3"/>
           </a:solidFill>
           <a:ln w="19050">
             <a:solidFill>
-              <a:srgbClr val="0D9488"/>
+              <a:srgbClr val="DB2777"/>
             </a:solidFill>
             <a:prstDash val="solid"/>
           </a:ln>
@@ -7908,7 +7908,7 @@
         </p:nvSpPr>
         <p:spPr>
           <a:xfrm>
-            <a:off x="4370832" y="2258568"/>
+            <a:off x="5803392" y="2258568"/>
             <a:ext cx="1828800" cy="292608"/>
           </a:xfrm>
           <a:prstGeom prst="rect">
@@ -7927,13 +7927,13 @@
             <a:r>
               <a:rPr lang="en-US" sz="1300" b="1" dirty="0">
                 <a:solidFill>
-                  <a:srgbClr val="0F766E"/>
+                  <a:srgbClr val="9D174D"/>
                 </a:solidFill>
                 <a:latin typeface="Trebuchet MS" pitchFamily="34" charset="0"/>
                 <a:ea typeface="Trebuchet MS" pitchFamily="34" charset="-122"/>
                 <a:cs typeface="Trebuchet MS" pitchFamily="34" charset="-120"/>
               </a:rPr>
-              <a:t>fresh</a:t>
+              <a:t>ness</a:t>
             </a:r>
             <a:endParaRPr lang="en-US" sz="1300" dirty="0"/>
           </a:p>
@@ -7947,7 +7947,7 @@
         </p:nvSpPr>
         <p:spPr>
           <a:xfrm>
-            <a:off x="4370832" y="2569464"/>
+            <a:off x="5803392" y="2569464"/>
             <a:ext cx="1828800" cy="201168"/>
           </a:xfrm>
           <a:prstGeom prst="rect">
@@ -7972,7 +7972,7 @@
                 <a:ea typeface="Calibri" pitchFamily="34" charset="-122"/>
                 <a:cs typeface="Calibri" pitchFamily="34" charset="-120"/>
               </a:rPr>
-              <a:t>new, clean</a:t>
+              <a:t>quality or state of</a:t>
             </a:r>
             <a:endParaRPr lang="en-US" sz="850" dirty="0"/>
           </a:p>
@@ -7986,30 +7986,23 @@
         </p:nvSpPr>
         <p:spPr>
           <a:xfrm>
-            <a:off x="6519672" y="2258568"/>
-            <a:ext cx="1828800" cy="292608"/>
+            <a:off x="365760" y="3273552"/>
+            <a:ext cx="1371600" cy="658368"/>
           </a:xfrm>
           <a:prstGeom prst="rect">
             <a:avLst>
-              <a:gd name="adj" fmla="val 25000"/>
+              <a:gd name="adj" fmla="val 8333"/>
             </a:avLst>
           </a:prstGeom>
           <a:solidFill>
-            <a:srgbClr val="FCE7F3"/>
-          </a:solidFill>
-          <a:ln w="19050">
-            <a:solidFill>
-              <a:srgbClr val="DB2777"/>
-            </a:solidFill>
-            <a:prstDash val="solid"/>
-          </a:ln>
-          <a:effectLst>
-            <a:outerShdw sx="100000" sy="100000" kx="0" ky="0" algn="bl" rotWithShape="0" blurRad="101600" dist="38100" dir="8100000">
-              <a:srgbClr val="000000">
-                <a:alpha val="12000"/>
-              </a:srgbClr>
-            </a:outerShdw>
-          </a:effectLst>
+            <a:srgbClr val="E2E8F0"/>
+          </a:solidFill>
+          <a:ln w="12700">
+            <a:solidFill>
+              <a:srgbClr val="E2E8F0"/>
+            </a:solidFill>
+            <a:prstDash val="solid"/>
+          </a:ln>
         </p:spPr>
       </p:sp>
       <p:sp>
@@ -8020,90 +8013,117 @@
         </p:nvSpPr>
         <p:spPr>
           <a:xfrm>
-            <a:off x="6519672" y="2258568"/>
-            <a:ext cx="1828800" cy="292608"/>
-          </a:xfrm>
-          <a:prstGeom prst="rect">
-            <a:avLst/>
-          </a:prstGeom>
-          <a:noFill/>
-          <a:ln/>
-        </p:spPr>
-        <p:txBody>
-          <a:bodyPr wrap="square" lIns="0" tIns="0" rIns="0" bIns="0" rtlCol="0" anchor="ctr"/>
-          <a:lstStyle/>
-          <a:p>
-            <a:pPr algn="ctr" indent="0" marL="0">
-              <a:buNone/>
-            </a:pPr>
-            <a:r>
-              <a:rPr lang="en-US" sz="1300" b="1" dirty="0">
-                <a:solidFill>
-                  <a:srgbClr val="9D174D"/>
+            <a:off x="365760" y="3273552"/>
+            <a:ext cx="1371600" cy="658368"/>
+          </a:xfrm>
+          <a:prstGeom prst="rect">
+            <a:avLst/>
+          </a:prstGeom>
+          <a:noFill/>
+          <a:ln/>
+        </p:spPr>
+        <p:txBody>
+          <a:bodyPr wrap="square" lIns="0" tIns="0" rIns="0" bIns="0" rtlCol="0" anchor="ctr"/>
+          <a:lstStyle/>
+          <a:p>
+            <a:pPr algn="ctr" indent="0" marL="0">
+              <a:buNone/>
+            </a:pPr>
+            <a:r>
+              <a:rPr lang="en-US" sz="1100" b="1" dirty="0">
+                <a:solidFill>
+                  <a:srgbClr val="475569"/>
                 </a:solidFill>
                 <a:latin typeface="Trebuchet MS" pitchFamily="34" charset="0"/>
                 <a:ea typeface="Trebuchet MS" pitchFamily="34" charset="-122"/>
                 <a:cs typeface="Trebuchet MS" pitchFamily="34" charset="-120"/>
               </a:rPr>
-              <a:t>ing</a:t>
-            </a:r>
-            <a:endParaRPr lang="en-US" sz="1300" dirty="0"/>
-          </a:p>
-        </p:txBody>
-      </p:sp>
-      <p:sp>
-        <p:nvSpPr>
-          <p:cNvPr id="24" name="Text 22"/>
-          <p:cNvSpPr/>
-          <p:nvPr/>
-        </p:nvSpPr>
-        <p:spPr>
-          <a:xfrm>
-            <a:off x="6519672" y="2569464"/>
-            <a:ext cx="1828800" cy="201168"/>
-          </a:xfrm>
-          <a:prstGeom prst="rect">
-            <a:avLst/>
-          </a:prstGeom>
-          <a:noFill/>
-          <a:ln/>
-        </p:spPr>
-        <p:txBody>
-          <a:bodyPr wrap="square" lIns="0" tIns="0" rIns="0" bIns="0" rtlCol="0" anchor="t"/>
-          <a:lstStyle/>
-          <a:p>
-            <a:pPr algn="ctr" indent="0" marL="0">
-              <a:buNone/>
-            </a:pPr>
-            <a:r>
-              <a:rPr lang="en-US" sz="850" dirty="0">
-                <a:solidFill>
-                  <a:srgbClr val="475569"/>
+              <a:t>Syllables</a:t>
+            </a:r>
+            <a:endParaRPr lang="en-US" sz="1100" dirty="0"/>
+          </a:p>
+        </p:txBody>
+      </p:sp>
+      <p:sp>
+        <p:nvSpPr>
+          <p:cNvPr id="24" name="Shape 22"/>
+          <p:cNvSpPr/>
+          <p:nvPr/>
+        </p:nvSpPr>
+        <p:spPr>
+          <a:xfrm>
+            <a:off x="1874520" y="3273552"/>
+            <a:ext cx="6903720" cy="658368"/>
+          </a:xfrm>
+          <a:prstGeom prst="rect">
+            <a:avLst>
+              <a:gd name="adj" fmla="val 8333"/>
+            </a:avLst>
+          </a:prstGeom>
+          <a:solidFill>
+            <a:srgbClr val="F8FAFC"/>
+          </a:solidFill>
+          <a:ln w="12700">
+            <a:solidFill>
+              <a:srgbClr val="E2E8F0"/>
+            </a:solidFill>
+            <a:prstDash val="dash"/>
+          </a:ln>
+        </p:spPr>
+      </p:sp>
+      <p:sp>
+        <p:nvSpPr>
+          <p:cNvPr id="25" name="Text 23"/>
+          <p:cNvSpPr/>
+          <p:nvPr/>
+        </p:nvSpPr>
+        <p:spPr>
+          <a:xfrm>
+            <a:off x="1874520" y="3273552"/>
+            <a:ext cx="6903720" cy="658368"/>
+          </a:xfrm>
+          <a:prstGeom prst="rect">
+            <a:avLst/>
+          </a:prstGeom>
+          <a:noFill/>
+          <a:ln/>
+        </p:spPr>
+        <p:txBody>
+          <a:bodyPr wrap="square" rtlCol="0" anchor="ctr"/>
+          <a:lstStyle/>
+          <a:p>
+            <a:pPr algn="ctr" indent="0" marL="0">
+              <a:buNone/>
+            </a:pPr>
+            <a:r>
+              <a:rPr lang="en-US" sz="1100" i="1" dirty="0">
+                <a:solidFill>
+                  <a:srgbClr val="CBD5E1"/>
                 </a:solidFill>
                 <a:latin typeface="Calibri" pitchFamily="34" charset="0"/>
                 <a:ea typeface="Calibri" pitchFamily="34" charset="-122"/>
                 <a:cs typeface="Calibri" pitchFamily="34" charset="-120"/>
               </a:rPr>
-              <a:t>ongoing action or quality</a:t>
-            </a:r>
-            <a:endParaRPr lang="en-US" sz="850" dirty="0"/>
-          </a:p>
-        </p:txBody>
-      </p:sp>
-      <p:sp>
-        <p:nvSpPr>
-          <p:cNvPr id="25" name="Shape 23"/>
-          <p:cNvSpPr/>
-          <p:nvPr/>
-        </p:nvSpPr>
-        <p:spPr>
-          <a:xfrm>
-            <a:off x="365760" y="3273552"/>
-            <a:ext cx="1371600" cy="658368"/>
+              <a:t>Write here...</a:t>
+            </a:r>
+            <a:endParaRPr lang="en-US" sz="1100" dirty="0"/>
+          </a:p>
+        </p:txBody>
+      </p:sp>
+      <p:sp>
+        <p:nvSpPr>
+          <p:cNvPr id="26" name="Shape 24"/>
+          <p:cNvSpPr/>
+          <p:nvPr/>
+        </p:nvSpPr>
+        <p:spPr>
+          <a:xfrm>
+            <a:off x="365760" y="4096512"/>
+            <a:ext cx="1371600" cy="804672"/>
           </a:xfrm>
           <a:prstGeom prst="rect">
             <a:avLst>
-              <a:gd name="adj" fmla="val 8333"/>
+              <a:gd name="adj" fmla="val 6818"/>
             </a:avLst>
           </a:prstGeom>
           <a:solidFill>
@@ -8119,14 +8139,14 @@
       </p:sp>
       <p:sp>
         <p:nvSpPr>
-          <p:cNvPr id="26" name="Text 24"/>
-          <p:cNvSpPr/>
-          <p:nvPr/>
-        </p:nvSpPr>
-        <p:spPr>
-          <a:xfrm>
-            <a:off x="365760" y="3273552"/>
-            <a:ext cx="1371600" cy="658368"/>
+          <p:cNvPr id="27" name="Text 25"/>
+          <p:cNvSpPr/>
+          <p:nvPr/>
+        </p:nvSpPr>
+        <p:spPr>
+          <a:xfrm>
+            <a:off x="365760" y="4096512"/>
+            <a:ext cx="1371600" cy="804672"/>
           </a:xfrm>
           <a:prstGeom prst="rect">
             <a:avLst/>
@@ -8150,7 +8170,7 @@
                 <a:ea typeface="Trebuchet MS" pitchFamily="34" charset="-122"/>
                 <a:cs typeface="Trebuchet MS" pitchFamily="34" charset="-120"/>
               </a:rPr>
-              <a:t>Syllables</a:t>
+              <a:t>Phonemes</a:t>
             </a:r>
             <a:endParaRPr lang="en-US" sz="1100" dirty="0"/>
           </a:p>
@@ -8158,80 +8178,14 @@
       </p:sp>
       <p:sp>
         <p:nvSpPr>
-          <p:cNvPr id="27" name="Shape 25"/>
-          <p:cNvSpPr/>
-          <p:nvPr/>
-        </p:nvSpPr>
-        <p:spPr>
-          <a:xfrm>
-            <a:off x="1874520" y="3273552"/>
-            <a:ext cx="6903720" cy="658368"/>
-          </a:xfrm>
-          <a:prstGeom prst="rect">
-            <a:avLst>
-              <a:gd name="adj" fmla="val 8333"/>
-            </a:avLst>
-          </a:prstGeom>
-          <a:solidFill>
-            <a:srgbClr val="F8FAFC"/>
-          </a:solidFill>
-          <a:ln w="12700">
-            <a:solidFill>
-              <a:srgbClr val="E2E8F0"/>
-            </a:solidFill>
-            <a:prstDash val="dash"/>
-          </a:ln>
-        </p:spPr>
-      </p:sp>
-      <p:sp>
-        <p:nvSpPr>
-          <p:cNvPr id="28" name="Text 26"/>
-          <p:cNvSpPr/>
-          <p:nvPr/>
-        </p:nvSpPr>
-        <p:spPr>
-          <a:xfrm>
-            <a:off x="1874520" y="3273552"/>
-            <a:ext cx="6903720" cy="658368"/>
-          </a:xfrm>
-          <a:prstGeom prst="rect">
-            <a:avLst/>
-          </a:prstGeom>
-          <a:noFill/>
-          <a:ln/>
-        </p:spPr>
-        <p:txBody>
-          <a:bodyPr wrap="square" rtlCol="0" anchor="ctr"/>
-          <a:lstStyle/>
-          <a:p>
-            <a:pPr algn="ctr" indent="0" marL="0">
-              <a:buNone/>
-            </a:pPr>
-            <a:r>
-              <a:rPr lang="en-US" sz="1100" i="1" dirty="0">
-                <a:solidFill>
-                  <a:srgbClr val="CBD5E1"/>
-                </a:solidFill>
-                <a:latin typeface="Calibri" pitchFamily="34" charset="0"/>
-                <a:ea typeface="Calibri" pitchFamily="34" charset="-122"/>
-                <a:cs typeface="Calibri" pitchFamily="34" charset="-120"/>
-              </a:rPr>
-              <a:t>Write here...</a:t>
-            </a:r>
-            <a:endParaRPr lang="en-US" sz="1100" dirty="0"/>
-          </a:p>
-        </p:txBody>
-      </p:sp>
-      <p:sp>
-        <p:nvSpPr>
-          <p:cNvPr id="29" name="Shape 27"/>
-          <p:cNvSpPr/>
-          <p:nvPr/>
-        </p:nvSpPr>
-        <p:spPr>
-          <a:xfrm>
-            <a:off x="365760" y="4096512"/>
-            <a:ext cx="1371600" cy="804672"/>
+          <p:cNvPr id="28" name="Shape 26"/>
+          <p:cNvSpPr/>
+          <p:nvPr/>
+        </p:nvSpPr>
+        <p:spPr>
+          <a:xfrm>
+            <a:off x="1874520" y="4096512"/>
+            <a:ext cx="6903720" cy="804672"/>
           </a:xfrm>
           <a:prstGeom prst="rect">
             <a:avLst>
@@ -8239,85 +8193,19 @@
             </a:avLst>
           </a:prstGeom>
           <a:solidFill>
-            <a:srgbClr val="E2E8F0"/>
+            <a:srgbClr val="F8FAFC"/>
           </a:solidFill>
           <a:ln w="12700">
             <a:solidFill>
               <a:srgbClr val="E2E8F0"/>
             </a:solidFill>
-            <a:prstDash val="solid"/>
-          </a:ln>
-        </p:spPr>
-      </p:sp>
-      <p:sp>
-        <p:nvSpPr>
-          <p:cNvPr id="30" name="Text 28"/>
-          <p:cNvSpPr/>
-          <p:nvPr/>
-        </p:nvSpPr>
-        <p:spPr>
-          <a:xfrm>
-            <a:off x="365760" y="4096512"/>
-            <a:ext cx="1371600" cy="804672"/>
-          </a:xfrm>
-          <a:prstGeom prst="rect">
-            <a:avLst/>
-          </a:prstGeom>
-          <a:noFill/>
-          <a:ln/>
-        </p:spPr>
-        <p:txBody>
-          <a:bodyPr wrap="square" lIns="0" tIns="0" rIns="0" bIns="0" rtlCol="0" anchor="ctr"/>
-          <a:lstStyle/>
-          <a:p>
-            <a:pPr algn="ctr" indent="0" marL="0">
-              <a:buNone/>
-            </a:pPr>
-            <a:r>
-              <a:rPr lang="en-US" sz="1100" b="1" dirty="0">
-                <a:solidFill>
-                  <a:srgbClr val="475569"/>
-                </a:solidFill>
-                <a:latin typeface="Trebuchet MS" pitchFamily="34" charset="0"/>
-                <a:ea typeface="Trebuchet MS" pitchFamily="34" charset="-122"/>
-                <a:cs typeface="Trebuchet MS" pitchFamily="34" charset="-120"/>
-              </a:rPr>
-              <a:t>Phonemes</a:t>
-            </a:r>
-            <a:endParaRPr lang="en-US" sz="1100" dirty="0"/>
-          </a:p>
-        </p:txBody>
-      </p:sp>
-      <p:sp>
-        <p:nvSpPr>
-          <p:cNvPr id="31" name="Shape 29"/>
-          <p:cNvSpPr/>
-          <p:nvPr/>
-        </p:nvSpPr>
-        <p:spPr>
-          <a:xfrm>
-            <a:off x="1874520" y="4096512"/>
-            <a:ext cx="6903720" cy="804672"/>
-          </a:xfrm>
-          <a:prstGeom prst="rect">
-            <a:avLst>
-              <a:gd name="adj" fmla="val 6818"/>
-            </a:avLst>
-          </a:prstGeom>
-          <a:solidFill>
-            <a:srgbClr val="F8FAFC"/>
-          </a:solidFill>
-          <a:ln w="12700">
-            <a:solidFill>
-              <a:srgbClr val="E2E8F0"/>
-            </a:solidFill>
             <a:prstDash val="dash"/>
           </a:ln>
         </p:spPr>
       </p:sp>
       <p:sp>
         <p:nvSpPr>
-          <p:cNvPr id="32" name="Text 30"/>
+          <p:cNvPr id="29" name="Text 27"/>
           <p:cNvSpPr/>
           <p:nvPr/>
         </p:nvSpPr>
@@ -8779,7 +8667,7 @@
                 <a:ea typeface="Trebuchet MS" pitchFamily="34" charset="-122"/>
                 <a:cs typeface="Trebuchet MS" pitchFamily="34" charset="-120"/>
               </a:rPr>
-              <a:t>refreshing</a:t>
+              <a:t>freshness</a:t>
             </a:r>
             <a:endParaRPr lang="en-US" sz="2800" dirty="0"/>
           </a:p>
@@ -8859,7 +8747,7 @@
         </p:nvSpPr>
         <p:spPr>
           <a:xfrm>
-            <a:off x="2221992" y="2258568"/>
+            <a:off x="2938272" y="2258568"/>
             <a:ext cx="1828800" cy="292608"/>
           </a:xfrm>
           <a:prstGeom prst="rect">
@@ -8868,11 +8756,11 @@
             </a:avLst>
           </a:prstGeom>
           <a:solidFill>
-            <a:srgbClr val="DDD6FE"/>
+            <a:srgbClr val="CCFBF1"/>
           </a:solidFill>
           <a:ln w="19050">
             <a:solidFill>
-              <a:srgbClr val="7C3AED"/>
+              <a:srgbClr val="0D9488"/>
             </a:solidFill>
             <a:prstDash val="solid"/>
           </a:ln>
@@ -8893,7 +8781,7 @@
         </p:nvSpPr>
         <p:spPr>
           <a:xfrm>
-            <a:off x="2221992" y="2258568"/>
+            <a:off x="2938272" y="2258568"/>
             <a:ext cx="1828800" cy="292608"/>
           </a:xfrm>
           <a:prstGeom prst="rect">
@@ -8912,13 +8800,13 @@
             <a:r>
               <a:rPr lang="en-US" sz="1300" b="1" dirty="0">
                 <a:solidFill>
-                  <a:srgbClr val="4C1D95"/>
+                  <a:srgbClr val="0F766E"/>
                 </a:solidFill>
                 <a:latin typeface="Trebuchet MS" pitchFamily="34" charset="0"/>
                 <a:ea typeface="Trebuchet MS" pitchFamily="34" charset="-122"/>
                 <a:cs typeface="Trebuchet MS" pitchFamily="34" charset="-120"/>
               </a:rPr>
-              <a:t>re</a:t>
+              <a:t>fresh</a:t>
             </a:r>
             <a:endParaRPr lang="en-US" sz="1300" dirty="0"/>
           </a:p>
@@ -8932,7 +8820,7 @@
         </p:nvSpPr>
         <p:spPr>
           <a:xfrm>
-            <a:off x="2221992" y="2569464"/>
+            <a:off x="2938272" y="2569464"/>
             <a:ext cx="1828800" cy="201168"/>
           </a:xfrm>
           <a:prstGeom prst="rect">
@@ -8957,7 +8845,7 @@
                 <a:ea typeface="Calibri" pitchFamily="34" charset="-122"/>
                 <a:cs typeface="Calibri" pitchFamily="34" charset="-120"/>
               </a:rPr>
-              <a:t>again</a:t>
+              <a:t>new, clean, not stale</a:t>
             </a:r>
             <a:endParaRPr lang="en-US" sz="850" dirty="0"/>
           </a:p>
@@ -8971,7 +8859,7 @@
         </p:nvSpPr>
         <p:spPr>
           <a:xfrm>
-            <a:off x="4370832" y="2258568"/>
+            <a:off x="5803392" y="2258568"/>
             <a:ext cx="1828800" cy="292608"/>
           </a:xfrm>
           <a:prstGeom prst="rect">
@@ -8980,11 +8868,11 @@
             </a:avLst>
           </a:prstGeom>
           <a:solidFill>
-            <a:srgbClr val="CCFBF1"/>
+            <a:srgbClr val="FCE7F3"/>
           </a:solidFill>
           <a:ln w="19050">
             <a:solidFill>
-              <a:srgbClr val="0D9488"/>
+              <a:srgbClr val="DB2777"/>
             </a:solidFill>
             <a:prstDash val="solid"/>
           </a:ln>
@@ -9005,7 +8893,7 @@
         </p:nvSpPr>
         <p:spPr>
           <a:xfrm>
-            <a:off x="4370832" y="2258568"/>
+            <a:off x="5803392" y="2258568"/>
             <a:ext cx="1828800" cy="292608"/>
           </a:xfrm>
           <a:prstGeom prst="rect">
@@ -9024,13 +8912,13 @@
             <a:r>
               <a:rPr lang="en-US" sz="1300" b="1" dirty="0">
                 <a:solidFill>
-                  <a:srgbClr val="0F766E"/>
+                  <a:srgbClr val="9D174D"/>
                 </a:solidFill>
                 <a:latin typeface="Trebuchet MS" pitchFamily="34" charset="0"/>
                 <a:ea typeface="Trebuchet MS" pitchFamily="34" charset="-122"/>
                 <a:cs typeface="Trebuchet MS" pitchFamily="34" charset="-120"/>
               </a:rPr>
-              <a:t>fresh</a:t>
+              <a:t>ness</a:t>
             </a:r>
             <a:endParaRPr lang="en-US" sz="1300" dirty="0"/>
           </a:p>
@@ -9044,7 +8932,7 @@
         </p:nvSpPr>
         <p:spPr>
           <a:xfrm>
-            <a:off x="4370832" y="2569464"/>
+            <a:off x="5803392" y="2569464"/>
             <a:ext cx="1828800" cy="201168"/>
           </a:xfrm>
           <a:prstGeom prst="rect">
@@ -9069,7 +8957,7 @@
                 <a:ea typeface="Calibri" pitchFamily="34" charset="-122"/>
                 <a:cs typeface="Calibri" pitchFamily="34" charset="-120"/>
               </a:rPr>
-              <a:t>new, clean</a:t>
+              <a:t>quality or state of</a:t>
             </a:r>
             <a:endParaRPr lang="en-US" sz="850" dirty="0"/>
           </a:p>
@@ -9083,30 +8971,23 @@
         </p:nvSpPr>
         <p:spPr>
           <a:xfrm>
-            <a:off x="6519672" y="2258568"/>
-            <a:ext cx="1828800" cy="292608"/>
+            <a:off x="365760" y="3273552"/>
+            <a:ext cx="1371600" cy="658368"/>
           </a:xfrm>
           <a:prstGeom prst="rect">
             <a:avLst>
-              <a:gd name="adj" fmla="val 25000"/>
+              <a:gd name="adj" fmla="val 8333"/>
             </a:avLst>
           </a:prstGeom>
           <a:solidFill>
-            <a:srgbClr val="FCE7F3"/>
-          </a:solidFill>
-          <a:ln w="19050">
-            <a:solidFill>
-              <a:srgbClr val="DB2777"/>
-            </a:solidFill>
-            <a:prstDash val="solid"/>
-          </a:ln>
-          <a:effectLst>
-            <a:outerShdw sx="100000" sy="100000" kx="0" ky="0" algn="bl" rotWithShape="0" blurRad="101600" dist="38100" dir="8100000">
-              <a:srgbClr val="000000">
-                <a:alpha val="12000"/>
-              </a:srgbClr>
-            </a:outerShdw>
-          </a:effectLst>
+            <a:srgbClr val="E2E8F0"/>
+          </a:solidFill>
+          <a:ln w="12700">
+            <a:solidFill>
+              <a:srgbClr val="E2E8F0"/>
+            </a:solidFill>
+            <a:prstDash val="solid"/>
+          </a:ln>
         </p:spPr>
       </p:sp>
       <p:sp>
@@ -9117,86 +8998,47 @@
         </p:nvSpPr>
         <p:spPr>
           <a:xfrm>
-            <a:off x="6519672" y="2258568"/>
-            <a:ext cx="1828800" cy="292608"/>
-          </a:xfrm>
-          <a:prstGeom prst="rect">
-            <a:avLst/>
-          </a:prstGeom>
-          <a:noFill/>
-          <a:ln/>
-        </p:spPr>
-        <p:txBody>
-          <a:bodyPr wrap="square" lIns="0" tIns="0" rIns="0" bIns="0" rtlCol="0" anchor="ctr"/>
-          <a:lstStyle/>
-          <a:p>
-            <a:pPr algn="ctr" indent="0" marL="0">
-              <a:buNone/>
-            </a:pPr>
-            <a:r>
-              <a:rPr lang="en-US" sz="1300" b="1" dirty="0">
-                <a:solidFill>
-                  <a:srgbClr val="9D174D"/>
+            <a:off x="365760" y="3273552"/>
+            <a:ext cx="1371600" cy="658368"/>
+          </a:xfrm>
+          <a:prstGeom prst="rect">
+            <a:avLst/>
+          </a:prstGeom>
+          <a:noFill/>
+          <a:ln/>
+        </p:spPr>
+        <p:txBody>
+          <a:bodyPr wrap="square" lIns="0" tIns="0" rIns="0" bIns="0" rtlCol="0" anchor="ctr"/>
+          <a:lstStyle/>
+          <a:p>
+            <a:pPr algn="ctr" indent="0" marL="0">
+              <a:buNone/>
+            </a:pPr>
+            <a:r>
+              <a:rPr lang="en-US" sz="1100" b="1" dirty="0">
+                <a:solidFill>
+                  <a:srgbClr val="475569"/>
                 </a:solidFill>
                 <a:latin typeface="Trebuchet MS" pitchFamily="34" charset="0"/>
                 <a:ea typeface="Trebuchet MS" pitchFamily="34" charset="-122"/>
                 <a:cs typeface="Trebuchet MS" pitchFamily="34" charset="-120"/>
               </a:rPr>
-              <a:t>ing</a:t>
-            </a:r>
-            <a:endParaRPr lang="en-US" sz="1300" dirty="0"/>
-          </a:p>
-        </p:txBody>
-      </p:sp>
-      <p:sp>
-        <p:nvSpPr>
-          <p:cNvPr id="24" name="Text 22"/>
-          <p:cNvSpPr/>
-          <p:nvPr/>
-        </p:nvSpPr>
-        <p:spPr>
-          <a:xfrm>
-            <a:off x="6519672" y="2569464"/>
-            <a:ext cx="1828800" cy="201168"/>
-          </a:xfrm>
-          <a:prstGeom prst="rect">
-            <a:avLst/>
-          </a:prstGeom>
-          <a:noFill/>
-          <a:ln/>
-        </p:spPr>
-        <p:txBody>
-          <a:bodyPr wrap="square" lIns="0" tIns="0" rIns="0" bIns="0" rtlCol="0" anchor="t"/>
-          <a:lstStyle/>
-          <a:p>
-            <a:pPr algn="ctr" indent="0" marL="0">
-              <a:buNone/>
-            </a:pPr>
-            <a:r>
-              <a:rPr lang="en-US" sz="850" dirty="0">
-                <a:solidFill>
-                  <a:srgbClr val="475569"/>
-                </a:solidFill>
-                <a:latin typeface="Calibri" pitchFamily="34" charset="0"/>
-                <a:ea typeface="Calibri" pitchFamily="34" charset="-122"/>
-                <a:cs typeface="Calibri" pitchFamily="34" charset="-120"/>
-              </a:rPr>
-              <a:t>ongoing action or quality</a:t>
-            </a:r>
-            <a:endParaRPr lang="en-US" sz="850" dirty="0"/>
-          </a:p>
-        </p:txBody>
-      </p:sp>
-      <p:sp>
-        <p:nvSpPr>
-          <p:cNvPr id="25" name="Shape 23"/>
-          <p:cNvSpPr/>
-          <p:nvPr/>
-        </p:nvSpPr>
-        <p:spPr>
-          <a:xfrm>
-            <a:off x="365760" y="3273552"/>
-            <a:ext cx="1371600" cy="658368"/>
+              <a:t>Syllables</a:t>
+            </a:r>
+            <a:endParaRPr lang="en-US" sz="1100" dirty="0"/>
+          </a:p>
+        </p:txBody>
+      </p:sp>
+      <p:sp>
+        <p:nvSpPr>
+          <p:cNvPr id="24" name="Shape 22"/>
+          <p:cNvSpPr/>
+          <p:nvPr/>
+        </p:nvSpPr>
+        <p:spPr>
+          <a:xfrm>
+            <a:off x="1874520" y="3273552"/>
+            <a:ext cx="6903720" cy="658368"/>
           </a:xfrm>
           <a:prstGeom prst="rect">
             <a:avLst>
@@ -9204,11 +9046,38 @@
             </a:avLst>
           </a:prstGeom>
           <a:solidFill>
-            <a:srgbClr val="E2E8F0"/>
-          </a:solidFill>
-          <a:ln w="12700">
-            <a:solidFill>
-              <a:srgbClr val="E2E8F0"/>
+            <a:srgbClr val="CCFBF1"/>
+          </a:solidFill>
+          <a:ln w="12700">
+            <a:solidFill>
+              <a:srgbClr val="0D9488"/>
+            </a:solidFill>
+            <a:prstDash val="solid"/>
+          </a:ln>
+        </p:spPr>
+      </p:sp>
+      <p:sp>
+        <p:nvSpPr>
+          <p:cNvPr id="25" name="Shape 23"/>
+          <p:cNvSpPr/>
+          <p:nvPr/>
+        </p:nvSpPr>
+        <p:spPr>
+          <a:xfrm>
+            <a:off x="2999232" y="3364992"/>
+            <a:ext cx="1645920" cy="475488"/>
+          </a:xfrm>
+          <a:prstGeom prst="rect">
+            <a:avLst>
+              <a:gd name="adj" fmla="val 9615"/>
+            </a:avLst>
+          </a:prstGeom>
+          <a:solidFill>
+            <a:srgbClr val="FFFFFF"/>
+          </a:solidFill>
+          <a:ln w="12700">
+            <a:solidFill>
+              <a:srgbClr val="0D9488"/>
             </a:solidFill>
             <a:prstDash val="solid"/>
           </a:ln>
@@ -9222,63 +9091,75 @@
         </p:nvSpPr>
         <p:spPr>
           <a:xfrm>
-            <a:off x="365760" y="3273552"/>
-            <a:ext cx="1371600" cy="658368"/>
-          </a:xfrm>
-          <a:prstGeom prst="rect">
-            <a:avLst/>
-          </a:prstGeom>
-          <a:noFill/>
-          <a:ln/>
-        </p:spPr>
-        <p:txBody>
-          <a:bodyPr wrap="square" lIns="0" tIns="0" rIns="0" bIns="0" rtlCol="0" anchor="ctr"/>
-          <a:lstStyle/>
-          <a:p>
-            <a:pPr algn="ctr" indent="0" marL="0">
-              <a:buNone/>
-            </a:pPr>
-            <a:r>
-              <a:rPr lang="en-US" sz="1100" b="1" dirty="0">
-                <a:solidFill>
-                  <a:srgbClr val="475569"/>
+            <a:off x="2999232" y="3364992"/>
+            <a:ext cx="1645920" cy="475488"/>
+          </a:xfrm>
+          <a:prstGeom prst="rect">
+            <a:avLst/>
+          </a:prstGeom>
+          <a:noFill/>
+          <a:ln/>
+        </p:spPr>
+        <p:txBody>
+          <a:bodyPr wrap="square" lIns="0" tIns="0" rIns="0" bIns="0" rtlCol="0" anchor="ctr"/>
+          <a:lstStyle/>
+          <a:p>
+            <a:pPr algn="ctr" indent="0" marL="0">
+              <a:buNone/>
+            </a:pPr>
+            <a:r>
+              <a:rPr lang="en-US" sz="1400" b="1" dirty="0">
+                <a:solidFill>
+                  <a:srgbClr val="0D9488"/>
                 </a:solidFill>
                 <a:latin typeface="Trebuchet MS" pitchFamily="34" charset="0"/>
                 <a:ea typeface="Trebuchet MS" pitchFamily="34" charset="-122"/>
                 <a:cs typeface="Trebuchet MS" pitchFamily="34" charset="-120"/>
               </a:rPr>
-              <a:t>Syllables</a:t>
-            </a:r>
-            <a:endParaRPr lang="en-US" sz="1100" dirty="0"/>
-          </a:p>
-        </p:txBody>
-      </p:sp>
-      <p:sp>
-        <p:nvSpPr>
-          <p:cNvPr id="27" name="Shape 25"/>
-          <p:cNvSpPr/>
-          <p:nvPr/>
-        </p:nvSpPr>
-        <p:spPr>
-          <a:xfrm>
-            <a:off x="1874520" y="3273552"/>
-            <a:ext cx="6903720" cy="658368"/>
-          </a:xfrm>
-          <a:prstGeom prst="rect">
-            <a:avLst>
-              <a:gd name="adj" fmla="val 8333"/>
-            </a:avLst>
-          </a:prstGeom>
-          <a:solidFill>
-            <a:srgbClr val="CCFBF1"/>
-          </a:solidFill>
-          <a:ln w="12700">
-            <a:solidFill>
-              <a:srgbClr val="0D9488"/>
-            </a:solidFill>
-            <a:prstDash val="solid"/>
-          </a:ln>
-        </p:spPr>
+              <a:t>fresh</a:t>
+            </a:r>
+            <a:endParaRPr lang="en-US" sz="1400" dirty="0"/>
+          </a:p>
+        </p:txBody>
+      </p:sp>
+      <p:sp>
+        <p:nvSpPr>
+          <p:cNvPr id="27" name="Text 25"/>
+          <p:cNvSpPr/>
+          <p:nvPr/>
+        </p:nvSpPr>
+        <p:spPr>
+          <a:xfrm>
+            <a:off x="4645152" y="3364992"/>
+            <a:ext cx="1097280" cy="475488"/>
+          </a:xfrm>
+          <a:prstGeom prst="rect">
+            <a:avLst/>
+          </a:prstGeom>
+          <a:noFill/>
+          <a:ln/>
+        </p:spPr>
+        <p:txBody>
+          <a:bodyPr wrap="square" lIns="0" tIns="0" rIns="0" bIns="0" rtlCol="0" anchor="ctr"/>
+          <a:lstStyle/>
+          <a:p>
+            <a:pPr algn="ctr" indent="0" marL="0">
+              <a:buNone/>
+            </a:pPr>
+            <a:r>
+              <a:rPr lang="en-US" sz="1600" b="1" dirty="0">
+                <a:solidFill>
+                  <a:srgbClr val="0D9488"/>
+                </a:solidFill>
+                <a:latin typeface="Trebuchet MS" pitchFamily="34" charset="0"/>
+                <a:ea typeface="Trebuchet MS" pitchFamily="34" charset="-122"/>
+                <a:cs typeface="Trebuchet MS" pitchFamily="34" charset="-120"/>
+              </a:rPr>
+              <a:t>·</a:t>
+            </a:r>
+            <a:endParaRPr lang="en-US" sz="1600" dirty="0"/>
+          </a:p>
+        </p:txBody>
       </p:sp>
       <p:sp>
         <p:nvSpPr>
@@ -9288,7 +9169,7 @@
         </p:nvSpPr>
         <p:spPr>
           <a:xfrm>
-            <a:off x="2313432" y="3364992"/>
+            <a:off x="5742432" y="3364992"/>
             <a:ext cx="1645920" cy="475488"/>
           </a:xfrm>
           <a:prstGeom prst="rect">
@@ -9315,7 +9196,7 @@
         </p:nvSpPr>
         <p:spPr>
           <a:xfrm>
-            <a:off x="2313432" y="3364992"/>
+            <a:off x="5742432" y="3364992"/>
             <a:ext cx="1645920" cy="475488"/>
           </a:xfrm>
           <a:prstGeom prst="rect">
@@ -9340,7 +9221,7 @@
                 <a:ea typeface="Trebuchet MS" pitchFamily="34" charset="-122"/>
                 <a:cs typeface="Trebuchet MS" pitchFamily="34" charset="-120"/>
               </a:rPr>
-              <a:t>re</a:t>
+              <a:t>ness</a:t>
             </a:r>
             <a:endParaRPr lang="en-US" sz="1400" dirty="0"/>
           </a:p>
@@ -9348,224 +9229,80 @@
       </p:sp>
       <p:sp>
         <p:nvSpPr>
-          <p:cNvPr id="30" name="Text 28"/>
-          <p:cNvSpPr/>
-          <p:nvPr/>
-        </p:nvSpPr>
-        <p:spPr>
-          <a:xfrm>
-            <a:off x="3959352" y="3364992"/>
-            <a:ext cx="411480" cy="475488"/>
-          </a:xfrm>
-          <a:prstGeom prst="rect">
-            <a:avLst/>
-          </a:prstGeom>
-          <a:noFill/>
-          <a:ln/>
-        </p:spPr>
-        <p:txBody>
-          <a:bodyPr wrap="square" lIns="0" tIns="0" rIns="0" bIns="0" rtlCol="0" anchor="ctr"/>
-          <a:lstStyle/>
-          <a:p>
-            <a:pPr algn="ctr" indent="0" marL="0">
-              <a:buNone/>
-            </a:pPr>
-            <a:r>
-              <a:rPr lang="en-US" sz="1600" b="1" dirty="0">
-                <a:solidFill>
-                  <a:srgbClr val="0D9488"/>
+          <p:cNvPr id="30" name="Shape 28"/>
+          <p:cNvSpPr/>
+          <p:nvPr/>
+        </p:nvSpPr>
+        <p:spPr>
+          <a:xfrm>
+            <a:off x="365760" y="4096512"/>
+            <a:ext cx="1371600" cy="804672"/>
+          </a:xfrm>
+          <a:prstGeom prst="rect">
+            <a:avLst>
+              <a:gd name="adj" fmla="val 6818"/>
+            </a:avLst>
+          </a:prstGeom>
+          <a:solidFill>
+            <a:srgbClr val="E2E8F0"/>
+          </a:solidFill>
+          <a:ln w="12700">
+            <a:solidFill>
+              <a:srgbClr val="E2E8F0"/>
+            </a:solidFill>
+            <a:prstDash val="solid"/>
+          </a:ln>
+        </p:spPr>
+      </p:sp>
+      <p:sp>
+        <p:nvSpPr>
+          <p:cNvPr id="31" name="Text 29"/>
+          <p:cNvSpPr/>
+          <p:nvPr/>
+        </p:nvSpPr>
+        <p:spPr>
+          <a:xfrm>
+            <a:off x="365760" y="4096512"/>
+            <a:ext cx="1371600" cy="804672"/>
+          </a:xfrm>
+          <a:prstGeom prst="rect">
+            <a:avLst/>
+          </a:prstGeom>
+          <a:noFill/>
+          <a:ln/>
+        </p:spPr>
+        <p:txBody>
+          <a:bodyPr wrap="square" lIns="0" tIns="0" rIns="0" bIns="0" rtlCol="0" anchor="ctr"/>
+          <a:lstStyle/>
+          <a:p>
+            <a:pPr algn="ctr" indent="0" marL="0">
+              <a:buNone/>
+            </a:pPr>
+            <a:r>
+              <a:rPr lang="en-US" sz="1100" b="1" dirty="0">
+                <a:solidFill>
+                  <a:srgbClr val="475569"/>
                 </a:solidFill>
                 <a:latin typeface="Trebuchet MS" pitchFamily="34" charset="0"/>
                 <a:ea typeface="Trebuchet MS" pitchFamily="34" charset="-122"/>
                 <a:cs typeface="Trebuchet MS" pitchFamily="34" charset="-120"/>
               </a:rPr>
-              <a:t>·</a:t>
-            </a:r>
-            <a:endParaRPr lang="en-US" sz="1600" dirty="0"/>
-          </a:p>
-        </p:txBody>
-      </p:sp>
-      <p:sp>
-        <p:nvSpPr>
-          <p:cNvPr id="31" name="Shape 29"/>
-          <p:cNvSpPr/>
-          <p:nvPr/>
-        </p:nvSpPr>
-        <p:spPr>
-          <a:xfrm>
-            <a:off x="4370832" y="3364992"/>
-            <a:ext cx="1645920" cy="475488"/>
-          </a:xfrm>
-          <a:prstGeom prst="rect">
-            <a:avLst>
-              <a:gd name="adj" fmla="val 9615"/>
-            </a:avLst>
-          </a:prstGeom>
-          <a:solidFill>
-            <a:srgbClr val="FFFFFF"/>
-          </a:solidFill>
-          <a:ln w="12700">
-            <a:solidFill>
-              <a:srgbClr val="0D9488"/>
-            </a:solidFill>
-            <a:prstDash val="solid"/>
-          </a:ln>
-        </p:spPr>
-      </p:sp>
-      <p:sp>
-        <p:nvSpPr>
-          <p:cNvPr id="32" name="Text 30"/>
-          <p:cNvSpPr/>
-          <p:nvPr/>
-        </p:nvSpPr>
-        <p:spPr>
-          <a:xfrm>
-            <a:off x="4370832" y="3364992"/>
-            <a:ext cx="1645920" cy="475488"/>
-          </a:xfrm>
-          <a:prstGeom prst="rect">
-            <a:avLst/>
-          </a:prstGeom>
-          <a:noFill/>
-          <a:ln/>
-        </p:spPr>
-        <p:txBody>
-          <a:bodyPr wrap="square" lIns="0" tIns="0" rIns="0" bIns="0" rtlCol="0" anchor="ctr"/>
-          <a:lstStyle/>
-          <a:p>
-            <a:pPr algn="ctr" indent="0" marL="0">
-              <a:buNone/>
-            </a:pPr>
-            <a:r>
-              <a:rPr lang="en-US" sz="1400" b="1" dirty="0">
-                <a:solidFill>
-                  <a:srgbClr val="0D9488"/>
-                </a:solidFill>
-                <a:latin typeface="Trebuchet MS" pitchFamily="34" charset="0"/>
-                <a:ea typeface="Trebuchet MS" pitchFamily="34" charset="-122"/>
-                <a:cs typeface="Trebuchet MS" pitchFamily="34" charset="-120"/>
-              </a:rPr>
-              <a:t>fresh</a:t>
-            </a:r>
-            <a:endParaRPr lang="en-US" sz="1400" dirty="0"/>
-          </a:p>
-        </p:txBody>
-      </p:sp>
-      <p:sp>
-        <p:nvSpPr>
-          <p:cNvPr id="33" name="Text 31"/>
-          <p:cNvSpPr/>
-          <p:nvPr/>
-        </p:nvSpPr>
-        <p:spPr>
-          <a:xfrm>
-            <a:off x="6016752" y="3364992"/>
-            <a:ext cx="411480" cy="475488"/>
-          </a:xfrm>
-          <a:prstGeom prst="rect">
-            <a:avLst/>
-          </a:prstGeom>
-          <a:noFill/>
-          <a:ln/>
-        </p:spPr>
-        <p:txBody>
-          <a:bodyPr wrap="square" lIns="0" tIns="0" rIns="0" bIns="0" rtlCol="0" anchor="ctr"/>
-          <a:lstStyle/>
-          <a:p>
-            <a:pPr algn="ctr" indent="0" marL="0">
-              <a:buNone/>
-            </a:pPr>
-            <a:r>
-              <a:rPr lang="en-US" sz="1600" b="1" dirty="0">
-                <a:solidFill>
-                  <a:srgbClr val="0D9488"/>
-                </a:solidFill>
-                <a:latin typeface="Trebuchet MS" pitchFamily="34" charset="0"/>
-                <a:ea typeface="Trebuchet MS" pitchFamily="34" charset="-122"/>
-                <a:cs typeface="Trebuchet MS" pitchFamily="34" charset="-120"/>
-              </a:rPr>
-              <a:t>·</a:t>
-            </a:r>
-            <a:endParaRPr lang="en-US" sz="1600" dirty="0"/>
-          </a:p>
-        </p:txBody>
-      </p:sp>
-      <p:sp>
-        <p:nvSpPr>
-          <p:cNvPr id="34" name="Shape 32"/>
-          <p:cNvSpPr/>
-          <p:nvPr/>
-        </p:nvSpPr>
-        <p:spPr>
-          <a:xfrm>
-            <a:off x="6428232" y="3364992"/>
-            <a:ext cx="1645920" cy="475488"/>
-          </a:xfrm>
-          <a:prstGeom prst="rect">
-            <a:avLst>
-              <a:gd name="adj" fmla="val 9615"/>
-            </a:avLst>
-          </a:prstGeom>
-          <a:solidFill>
-            <a:srgbClr val="FFFFFF"/>
-          </a:solidFill>
-          <a:ln w="12700">
-            <a:solidFill>
-              <a:srgbClr val="0D9488"/>
-            </a:solidFill>
-            <a:prstDash val="solid"/>
-          </a:ln>
-        </p:spPr>
-      </p:sp>
-      <p:sp>
-        <p:nvSpPr>
-          <p:cNvPr id="35" name="Text 33"/>
-          <p:cNvSpPr/>
-          <p:nvPr/>
-        </p:nvSpPr>
-        <p:spPr>
-          <a:xfrm>
-            <a:off x="6428232" y="3364992"/>
-            <a:ext cx="1645920" cy="475488"/>
-          </a:xfrm>
-          <a:prstGeom prst="rect">
-            <a:avLst/>
-          </a:prstGeom>
-          <a:noFill/>
-          <a:ln/>
-        </p:spPr>
-        <p:txBody>
-          <a:bodyPr wrap="square" lIns="0" tIns="0" rIns="0" bIns="0" rtlCol="0" anchor="ctr"/>
-          <a:lstStyle/>
-          <a:p>
-            <a:pPr algn="ctr" indent="0" marL="0">
-              <a:buNone/>
-            </a:pPr>
-            <a:r>
-              <a:rPr lang="en-US" sz="1400" b="1" dirty="0">
-                <a:solidFill>
-                  <a:srgbClr val="0D9488"/>
-                </a:solidFill>
-                <a:latin typeface="Trebuchet MS" pitchFamily="34" charset="0"/>
-                <a:ea typeface="Trebuchet MS" pitchFamily="34" charset="-122"/>
-                <a:cs typeface="Trebuchet MS" pitchFamily="34" charset="-120"/>
-              </a:rPr>
-              <a:t>ing</a:t>
-            </a:r>
-            <a:endParaRPr lang="en-US" sz="1400" dirty="0"/>
-          </a:p>
-        </p:txBody>
-      </p:sp>
-      <p:sp>
-        <p:nvSpPr>
-          <p:cNvPr id="36" name="Shape 34"/>
-          <p:cNvSpPr/>
-          <p:nvPr/>
-        </p:nvSpPr>
-        <p:spPr>
-          <a:xfrm>
-            <a:off x="365760" y="4096512"/>
-            <a:ext cx="1371600" cy="804672"/>
+              <a:t>Phonemes</a:t>
+            </a:r>
+            <a:endParaRPr lang="en-US" sz="1100" dirty="0"/>
+          </a:p>
+        </p:txBody>
+      </p:sp>
+      <p:sp>
+        <p:nvSpPr>
+          <p:cNvPr id="32" name="Shape 30"/>
+          <p:cNvSpPr/>
+          <p:nvPr/>
+        </p:nvSpPr>
+        <p:spPr>
+          <a:xfrm>
+            <a:off x="1874520" y="4096512"/>
+            <a:ext cx="6903720" cy="804672"/>
           </a:xfrm>
           <a:prstGeom prst="rect">
             <a:avLst>
@@ -9573,85 +9310,19 @@
             </a:avLst>
           </a:prstGeom>
           <a:solidFill>
-            <a:srgbClr val="E2E8F0"/>
+            <a:srgbClr val="F8FAFC"/>
           </a:solidFill>
           <a:ln w="12700">
             <a:solidFill>
               <a:srgbClr val="E2E8F0"/>
             </a:solidFill>
-            <a:prstDash val="solid"/>
-          </a:ln>
-        </p:spPr>
-      </p:sp>
-      <p:sp>
-        <p:nvSpPr>
-          <p:cNvPr id="37" name="Text 35"/>
-          <p:cNvSpPr/>
-          <p:nvPr/>
-        </p:nvSpPr>
-        <p:spPr>
-          <a:xfrm>
-            <a:off x="365760" y="4096512"/>
-            <a:ext cx="1371600" cy="804672"/>
-          </a:xfrm>
-          <a:prstGeom prst="rect">
-            <a:avLst/>
-          </a:prstGeom>
-          <a:noFill/>
-          <a:ln/>
-        </p:spPr>
-        <p:txBody>
-          <a:bodyPr wrap="square" lIns="0" tIns="0" rIns="0" bIns="0" rtlCol="0" anchor="ctr"/>
-          <a:lstStyle/>
-          <a:p>
-            <a:pPr algn="ctr" indent="0" marL="0">
-              <a:buNone/>
-            </a:pPr>
-            <a:r>
-              <a:rPr lang="en-US" sz="1100" b="1" dirty="0">
-                <a:solidFill>
-                  <a:srgbClr val="475569"/>
-                </a:solidFill>
-                <a:latin typeface="Trebuchet MS" pitchFamily="34" charset="0"/>
-                <a:ea typeface="Trebuchet MS" pitchFamily="34" charset="-122"/>
-                <a:cs typeface="Trebuchet MS" pitchFamily="34" charset="-120"/>
-              </a:rPr>
-              <a:t>Phonemes</a:t>
-            </a:r>
-            <a:endParaRPr lang="en-US" sz="1100" dirty="0"/>
-          </a:p>
-        </p:txBody>
-      </p:sp>
-      <p:sp>
-        <p:nvSpPr>
-          <p:cNvPr id="38" name="Shape 36"/>
-          <p:cNvSpPr/>
-          <p:nvPr/>
-        </p:nvSpPr>
-        <p:spPr>
-          <a:xfrm>
-            <a:off x="1874520" y="4096512"/>
-            <a:ext cx="6903720" cy="804672"/>
-          </a:xfrm>
-          <a:prstGeom prst="rect">
-            <a:avLst>
-              <a:gd name="adj" fmla="val 6818"/>
-            </a:avLst>
-          </a:prstGeom>
-          <a:solidFill>
-            <a:srgbClr val="F8FAFC"/>
-          </a:solidFill>
-          <a:ln w="12700">
-            <a:solidFill>
-              <a:srgbClr val="E2E8F0"/>
-            </a:solidFill>
             <a:prstDash val="dash"/>
           </a:ln>
         </p:spPr>
       </p:sp>
       <p:sp>
         <p:nvSpPr>
-          <p:cNvPr id="39" name="Text 37"/>
+          <p:cNvPr id="33" name="Text 31"/>
           <p:cNvSpPr/>
           <p:nvPr/>
         </p:nvSpPr>
@@ -10113,7 +9784,7 @@
                 <a:ea typeface="Trebuchet MS" pitchFamily="34" charset="-122"/>
                 <a:cs typeface="Trebuchet MS" pitchFamily="34" charset="-120"/>
               </a:rPr>
-              <a:t>refreshing</a:t>
+              <a:t>freshness</a:t>
             </a:r>
             <a:endParaRPr lang="en-US" sz="2800" dirty="0"/>
           </a:p>
@@ -10193,7 +9864,7 @@
         </p:nvSpPr>
         <p:spPr>
           <a:xfrm>
-            <a:off x="2221992" y="2258568"/>
+            <a:off x="2938272" y="2258568"/>
             <a:ext cx="1828800" cy="292608"/>
           </a:xfrm>
           <a:prstGeom prst="rect">
@@ -10202,11 +9873,11 @@
             </a:avLst>
           </a:prstGeom>
           <a:solidFill>
-            <a:srgbClr val="DDD6FE"/>
+            <a:srgbClr val="CCFBF1"/>
           </a:solidFill>
           <a:ln w="19050">
             <a:solidFill>
-              <a:srgbClr val="7C3AED"/>
+              <a:srgbClr val="0D9488"/>
             </a:solidFill>
             <a:prstDash val="solid"/>
           </a:ln>
@@ -10227,7 +9898,7 @@
         </p:nvSpPr>
         <p:spPr>
           <a:xfrm>
-            <a:off x="2221992" y="2258568"/>
+            <a:off x="2938272" y="2258568"/>
             <a:ext cx="1828800" cy="292608"/>
           </a:xfrm>
           <a:prstGeom prst="rect">
@@ -10246,13 +9917,13 @@
             <a:r>
               <a:rPr lang="en-US" sz="1300" b="1" dirty="0">
                 <a:solidFill>
-                  <a:srgbClr val="4C1D95"/>
+                  <a:srgbClr val="0F766E"/>
                 </a:solidFill>
                 <a:latin typeface="Trebuchet MS" pitchFamily="34" charset="0"/>
                 <a:ea typeface="Trebuchet MS" pitchFamily="34" charset="-122"/>
                 <a:cs typeface="Trebuchet MS" pitchFamily="34" charset="-120"/>
               </a:rPr>
-              <a:t>re</a:t>
+              <a:t>fresh</a:t>
             </a:r>
             <a:endParaRPr lang="en-US" sz="1300" dirty="0"/>
           </a:p>
@@ -10266,7 +9937,7 @@
         </p:nvSpPr>
         <p:spPr>
           <a:xfrm>
-            <a:off x="2221992" y="2569464"/>
+            <a:off x="2938272" y="2569464"/>
             <a:ext cx="1828800" cy="201168"/>
           </a:xfrm>
           <a:prstGeom prst="rect">
@@ -10291,7 +9962,7 @@
                 <a:ea typeface="Calibri" pitchFamily="34" charset="-122"/>
                 <a:cs typeface="Calibri" pitchFamily="34" charset="-120"/>
               </a:rPr>
-              <a:t>again</a:t>
+              <a:t>new, clean, not stale</a:t>
             </a:r>
             <a:endParaRPr lang="en-US" sz="850" dirty="0"/>
           </a:p>
@@ -10305,7 +9976,7 @@
         </p:nvSpPr>
         <p:spPr>
           <a:xfrm>
-            <a:off x="4370832" y="2258568"/>
+            <a:off x="5803392" y="2258568"/>
             <a:ext cx="1828800" cy="292608"/>
           </a:xfrm>
           <a:prstGeom prst="rect">
@@ -10314,11 +9985,11 @@
             </a:avLst>
           </a:prstGeom>
           <a:solidFill>
-            <a:srgbClr val="CCFBF1"/>
+            <a:srgbClr val="FCE7F3"/>
           </a:solidFill>
           <a:ln w="19050">
             <a:solidFill>
-              <a:srgbClr val="0D9488"/>
+              <a:srgbClr val="DB2777"/>
             </a:solidFill>
             <a:prstDash val="solid"/>
           </a:ln>
@@ -10339,7 +10010,7 @@
         </p:nvSpPr>
         <p:spPr>
           <a:xfrm>
-            <a:off x="4370832" y="2258568"/>
+            <a:off x="5803392" y="2258568"/>
             <a:ext cx="1828800" cy="292608"/>
           </a:xfrm>
           <a:prstGeom prst="rect">
@@ -10358,13 +10029,13 @@
             <a:r>
               <a:rPr lang="en-US" sz="1300" b="1" dirty="0">
                 <a:solidFill>
-                  <a:srgbClr val="0F766E"/>
+                  <a:srgbClr val="9D174D"/>
                 </a:solidFill>
                 <a:latin typeface="Trebuchet MS" pitchFamily="34" charset="0"/>
                 <a:ea typeface="Trebuchet MS" pitchFamily="34" charset="-122"/>
                 <a:cs typeface="Trebuchet MS" pitchFamily="34" charset="-120"/>
               </a:rPr>
-              <a:t>fresh</a:t>
+              <a:t>ness</a:t>
             </a:r>
             <a:endParaRPr lang="en-US" sz="1300" dirty="0"/>
           </a:p>
@@ -10378,7 +10049,7 @@
         </p:nvSpPr>
         <p:spPr>
           <a:xfrm>
-            <a:off x="4370832" y="2569464"/>
+            <a:off x="5803392" y="2569464"/>
             <a:ext cx="1828800" cy="201168"/>
           </a:xfrm>
           <a:prstGeom prst="rect">
@@ -10403,7 +10074,7 @@
                 <a:ea typeface="Calibri" pitchFamily="34" charset="-122"/>
                 <a:cs typeface="Calibri" pitchFamily="34" charset="-120"/>
               </a:rPr>
-              <a:t>new, clean</a:t>
+              <a:t>quality or state of</a:t>
             </a:r>
             <a:endParaRPr lang="en-US" sz="850" dirty="0"/>
           </a:p>
@@ -10417,30 +10088,23 @@
         </p:nvSpPr>
         <p:spPr>
           <a:xfrm>
-            <a:off x="6519672" y="2258568"/>
-            <a:ext cx="1828800" cy="292608"/>
+            <a:off x="365760" y="3273552"/>
+            <a:ext cx="1371600" cy="658368"/>
           </a:xfrm>
           <a:prstGeom prst="rect">
             <a:avLst>
-              <a:gd name="adj" fmla="val 25000"/>
+              <a:gd name="adj" fmla="val 8333"/>
             </a:avLst>
           </a:prstGeom>
           <a:solidFill>
-            <a:srgbClr val="FCE7F3"/>
-          </a:solidFill>
-          <a:ln w="19050">
-            <a:solidFill>
-              <a:srgbClr val="DB2777"/>
-            </a:solidFill>
-            <a:prstDash val="solid"/>
-          </a:ln>
-          <a:effectLst>
-            <a:outerShdw sx="100000" sy="100000" kx="0" ky="0" algn="bl" rotWithShape="0" blurRad="101600" dist="38100" dir="8100000">
-              <a:srgbClr val="000000">
-                <a:alpha val="12000"/>
-              </a:srgbClr>
-            </a:outerShdw>
-          </a:effectLst>
+            <a:srgbClr val="E2E8F0"/>
+          </a:solidFill>
+          <a:ln w="12700">
+            <a:solidFill>
+              <a:srgbClr val="E2E8F0"/>
+            </a:solidFill>
+            <a:prstDash val="solid"/>
+          </a:ln>
         </p:spPr>
       </p:sp>
       <p:sp>
@@ -10451,86 +10115,47 @@
         </p:nvSpPr>
         <p:spPr>
           <a:xfrm>
-            <a:off x="6519672" y="2258568"/>
-            <a:ext cx="1828800" cy="292608"/>
-          </a:xfrm>
-          <a:prstGeom prst="rect">
-            <a:avLst/>
-          </a:prstGeom>
-          <a:noFill/>
-          <a:ln/>
-        </p:spPr>
-        <p:txBody>
-          <a:bodyPr wrap="square" lIns="0" tIns="0" rIns="0" bIns="0" rtlCol="0" anchor="ctr"/>
-          <a:lstStyle/>
-          <a:p>
-            <a:pPr algn="ctr" indent="0" marL="0">
-              <a:buNone/>
-            </a:pPr>
-            <a:r>
-              <a:rPr lang="en-US" sz="1300" b="1" dirty="0">
-                <a:solidFill>
-                  <a:srgbClr val="9D174D"/>
+            <a:off x="365760" y="3273552"/>
+            <a:ext cx="1371600" cy="658368"/>
+          </a:xfrm>
+          <a:prstGeom prst="rect">
+            <a:avLst/>
+          </a:prstGeom>
+          <a:noFill/>
+          <a:ln/>
+        </p:spPr>
+        <p:txBody>
+          <a:bodyPr wrap="square" lIns="0" tIns="0" rIns="0" bIns="0" rtlCol="0" anchor="ctr"/>
+          <a:lstStyle/>
+          <a:p>
+            <a:pPr algn="ctr" indent="0" marL="0">
+              <a:buNone/>
+            </a:pPr>
+            <a:r>
+              <a:rPr lang="en-US" sz="1100" b="1" dirty="0">
+                <a:solidFill>
+                  <a:srgbClr val="475569"/>
                 </a:solidFill>
                 <a:latin typeface="Trebuchet MS" pitchFamily="34" charset="0"/>
                 <a:ea typeface="Trebuchet MS" pitchFamily="34" charset="-122"/>
                 <a:cs typeface="Trebuchet MS" pitchFamily="34" charset="-120"/>
               </a:rPr>
-              <a:t>ing</a:t>
-            </a:r>
-            <a:endParaRPr lang="en-US" sz="1300" dirty="0"/>
-          </a:p>
-        </p:txBody>
-      </p:sp>
-      <p:sp>
-        <p:nvSpPr>
-          <p:cNvPr id="24" name="Text 22"/>
-          <p:cNvSpPr/>
-          <p:nvPr/>
-        </p:nvSpPr>
-        <p:spPr>
-          <a:xfrm>
-            <a:off x="6519672" y="2569464"/>
-            <a:ext cx="1828800" cy="201168"/>
-          </a:xfrm>
-          <a:prstGeom prst="rect">
-            <a:avLst/>
-          </a:prstGeom>
-          <a:noFill/>
-          <a:ln/>
-        </p:spPr>
-        <p:txBody>
-          <a:bodyPr wrap="square" lIns="0" tIns="0" rIns="0" bIns="0" rtlCol="0" anchor="t"/>
-          <a:lstStyle/>
-          <a:p>
-            <a:pPr algn="ctr" indent="0" marL="0">
-              <a:buNone/>
-            </a:pPr>
-            <a:r>
-              <a:rPr lang="en-US" sz="850" dirty="0">
-                <a:solidFill>
-                  <a:srgbClr val="475569"/>
-                </a:solidFill>
-                <a:latin typeface="Calibri" pitchFamily="34" charset="0"/>
-                <a:ea typeface="Calibri" pitchFamily="34" charset="-122"/>
-                <a:cs typeface="Calibri" pitchFamily="34" charset="-120"/>
-              </a:rPr>
-              <a:t>ongoing action or quality</a:t>
-            </a:r>
-            <a:endParaRPr lang="en-US" sz="850" dirty="0"/>
-          </a:p>
-        </p:txBody>
-      </p:sp>
-      <p:sp>
-        <p:nvSpPr>
-          <p:cNvPr id="25" name="Shape 23"/>
-          <p:cNvSpPr/>
-          <p:nvPr/>
-        </p:nvSpPr>
-        <p:spPr>
-          <a:xfrm>
-            <a:off x="365760" y="3273552"/>
-            <a:ext cx="1371600" cy="658368"/>
+              <a:t>Syllables</a:t>
+            </a:r>
+            <a:endParaRPr lang="en-US" sz="1100" dirty="0"/>
+          </a:p>
+        </p:txBody>
+      </p:sp>
+      <p:sp>
+        <p:nvSpPr>
+          <p:cNvPr id="24" name="Shape 22"/>
+          <p:cNvSpPr/>
+          <p:nvPr/>
+        </p:nvSpPr>
+        <p:spPr>
+          <a:xfrm>
+            <a:off x="1874520" y="3273552"/>
+            <a:ext cx="6903720" cy="658368"/>
           </a:xfrm>
           <a:prstGeom prst="rect">
             <a:avLst>
@@ -10538,11 +10163,38 @@
             </a:avLst>
           </a:prstGeom>
           <a:solidFill>
-            <a:srgbClr val="E2E8F0"/>
-          </a:solidFill>
-          <a:ln w="12700">
-            <a:solidFill>
-              <a:srgbClr val="E2E8F0"/>
+            <a:srgbClr val="CCFBF1"/>
+          </a:solidFill>
+          <a:ln w="12700">
+            <a:solidFill>
+              <a:srgbClr val="0D9488"/>
+            </a:solidFill>
+            <a:prstDash val="solid"/>
+          </a:ln>
+        </p:spPr>
+      </p:sp>
+      <p:sp>
+        <p:nvSpPr>
+          <p:cNvPr id="25" name="Shape 23"/>
+          <p:cNvSpPr/>
+          <p:nvPr/>
+        </p:nvSpPr>
+        <p:spPr>
+          <a:xfrm>
+            <a:off x="2999232" y="3364992"/>
+            <a:ext cx="1645920" cy="475488"/>
+          </a:xfrm>
+          <a:prstGeom prst="rect">
+            <a:avLst>
+              <a:gd name="adj" fmla="val 9615"/>
+            </a:avLst>
+          </a:prstGeom>
+          <a:solidFill>
+            <a:srgbClr val="FFFFFF"/>
+          </a:solidFill>
+          <a:ln w="12700">
+            <a:solidFill>
+              <a:srgbClr val="0D9488"/>
             </a:solidFill>
             <a:prstDash val="solid"/>
           </a:ln>
@@ -10556,32 +10208,203 @@
         </p:nvSpPr>
         <p:spPr>
           <a:xfrm>
-            <a:off x="365760" y="3273552"/>
-            <a:ext cx="1371600" cy="658368"/>
-          </a:xfrm>
-          <a:prstGeom prst="rect">
-            <a:avLst/>
-          </a:prstGeom>
-          <a:noFill/>
-          <a:ln/>
-        </p:spPr>
-        <p:txBody>
-          <a:bodyPr wrap="square" lIns="0" tIns="0" rIns="0" bIns="0" rtlCol="0" anchor="ctr"/>
-          <a:lstStyle/>
-          <a:p>
-            <a:pPr algn="ctr" indent="0" marL="0">
-              <a:buNone/>
-            </a:pPr>
-            <a:r>
-              <a:rPr lang="en-US" sz="1100" b="1" dirty="0">
-                <a:solidFill>
-                  <a:srgbClr val="475569"/>
+            <a:off x="2999232" y="3364992"/>
+            <a:ext cx="1645920" cy="475488"/>
+          </a:xfrm>
+          <a:prstGeom prst="rect">
+            <a:avLst/>
+          </a:prstGeom>
+          <a:noFill/>
+          <a:ln/>
+        </p:spPr>
+        <p:txBody>
+          <a:bodyPr wrap="square" lIns="0" tIns="0" rIns="0" bIns="0" rtlCol="0" anchor="ctr"/>
+          <a:lstStyle/>
+          <a:p>
+            <a:pPr algn="ctr" indent="0" marL="0">
+              <a:buNone/>
+            </a:pPr>
+            <a:r>
+              <a:rPr lang="en-US" sz="1400" b="1" dirty="0">
+                <a:solidFill>
+                  <a:srgbClr val="0D9488"/>
                 </a:solidFill>
                 <a:latin typeface="Trebuchet MS" pitchFamily="34" charset="0"/>
                 <a:ea typeface="Trebuchet MS" pitchFamily="34" charset="-122"/>
                 <a:cs typeface="Trebuchet MS" pitchFamily="34" charset="-120"/>
               </a:rPr>
-              <a:t>Syllables</a:t>
+              <a:t>fresh</a:t>
+            </a:r>
+            <a:endParaRPr lang="en-US" sz="1400" dirty="0"/>
+          </a:p>
+        </p:txBody>
+      </p:sp>
+      <p:sp>
+        <p:nvSpPr>
+          <p:cNvPr id="27" name="Text 25"/>
+          <p:cNvSpPr/>
+          <p:nvPr/>
+        </p:nvSpPr>
+        <p:spPr>
+          <a:xfrm>
+            <a:off x="4645152" y="3364992"/>
+            <a:ext cx="1097280" cy="475488"/>
+          </a:xfrm>
+          <a:prstGeom prst="rect">
+            <a:avLst/>
+          </a:prstGeom>
+          <a:noFill/>
+          <a:ln/>
+        </p:spPr>
+        <p:txBody>
+          <a:bodyPr wrap="square" lIns="0" tIns="0" rIns="0" bIns="0" rtlCol="0" anchor="ctr"/>
+          <a:lstStyle/>
+          <a:p>
+            <a:pPr algn="ctr" indent="0" marL="0">
+              <a:buNone/>
+            </a:pPr>
+            <a:r>
+              <a:rPr lang="en-US" sz="1600" b="1" dirty="0">
+                <a:solidFill>
+                  <a:srgbClr val="0D9488"/>
+                </a:solidFill>
+                <a:latin typeface="Trebuchet MS" pitchFamily="34" charset="0"/>
+                <a:ea typeface="Trebuchet MS" pitchFamily="34" charset="-122"/>
+                <a:cs typeface="Trebuchet MS" pitchFamily="34" charset="-120"/>
+              </a:rPr>
+              <a:t>·</a:t>
+            </a:r>
+            <a:endParaRPr lang="en-US" sz="1600" dirty="0"/>
+          </a:p>
+        </p:txBody>
+      </p:sp>
+      <p:sp>
+        <p:nvSpPr>
+          <p:cNvPr id="28" name="Shape 26"/>
+          <p:cNvSpPr/>
+          <p:nvPr/>
+        </p:nvSpPr>
+        <p:spPr>
+          <a:xfrm>
+            <a:off x="5742432" y="3364992"/>
+            <a:ext cx="1645920" cy="475488"/>
+          </a:xfrm>
+          <a:prstGeom prst="rect">
+            <a:avLst>
+              <a:gd name="adj" fmla="val 9615"/>
+            </a:avLst>
+          </a:prstGeom>
+          <a:solidFill>
+            <a:srgbClr val="FFFFFF"/>
+          </a:solidFill>
+          <a:ln w="12700">
+            <a:solidFill>
+              <a:srgbClr val="0D9488"/>
+            </a:solidFill>
+            <a:prstDash val="solid"/>
+          </a:ln>
+        </p:spPr>
+      </p:sp>
+      <p:sp>
+        <p:nvSpPr>
+          <p:cNvPr id="29" name="Text 27"/>
+          <p:cNvSpPr/>
+          <p:nvPr/>
+        </p:nvSpPr>
+        <p:spPr>
+          <a:xfrm>
+            <a:off x="5742432" y="3364992"/>
+            <a:ext cx="1645920" cy="475488"/>
+          </a:xfrm>
+          <a:prstGeom prst="rect">
+            <a:avLst/>
+          </a:prstGeom>
+          <a:noFill/>
+          <a:ln/>
+        </p:spPr>
+        <p:txBody>
+          <a:bodyPr wrap="square" lIns="0" tIns="0" rIns="0" bIns="0" rtlCol="0" anchor="ctr"/>
+          <a:lstStyle/>
+          <a:p>
+            <a:pPr algn="ctr" indent="0" marL="0">
+              <a:buNone/>
+            </a:pPr>
+            <a:r>
+              <a:rPr lang="en-US" sz="1400" b="1" dirty="0">
+                <a:solidFill>
+                  <a:srgbClr val="0D9488"/>
+                </a:solidFill>
+                <a:latin typeface="Trebuchet MS" pitchFamily="34" charset="0"/>
+                <a:ea typeface="Trebuchet MS" pitchFamily="34" charset="-122"/>
+                <a:cs typeface="Trebuchet MS" pitchFamily="34" charset="-120"/>
+              </a:rPr>
+              <a:t>ness</a:t>
+            </a:r>
+            <a:endParaRPr lang="en-US" sz="1400" dirty="0"/>
+          </a:p>
+        </p:txBody>
+      </p:sp>
+      <p:sp>
+        <p:nvSpPr>
+          <p:cNvPr id="30" name="Shape 28"/>
+          <p:cNvSpPr/>
+          <p:nvPr/>
+        </p:nvSpPr>
+        <p:spPr>
+          <a:xfrm>
+            <a:off x="365760" y="4096512"/>
+            <a:ext cx="1371600" cy="804672"/>
+          </a:xfrm>
+          <a:prstGeom prst="rect">
+            <a:avLst>
+              <a:gd name="adj" fmla="val 6818"/>
+            </a:avLst>
+          </a:prstGeom>
+          <a:solidFill>
+            <a:srgbClr val="E2E8F0"/>
+          </a:solidFill>
+          <a:ln w="12700">
+            <a:solidFill>
+              <a:srgbClr val="E2E8F0"/>
+            </a:solidFill>
+            <a:prstDash val="solid"/>
+          </a:ln>
+        </p:spPr>
+      </p:sp>
+      <p:sp>
+        <p:nvSpPr>
+          <p:cNvPr id="31" name="Text 29"/>
+          <p:cNvSpPr/>
+          <p:nvPr/>
+        </p:nvSpPr>
+        <p:spPr>
+          <a:xfrm>
+            <a:off x="365760" y="4096512"/>
+            <a:ext cx="1371600" cy="804672"/>
+          </a:xfrm>
+          <a:prstGeom prst="rect">
+            <a:avLst/>
+          </a:prstGeom>
+          <a:noFill/>
+          <a:ln/>
+        </p:spPr>
+        <p:txBody>
+          <a:bodyPr wrap="square" lIns="0" tIns="0" rIns="0" bIns="0" rtlCol="0" anchor="ctr"/>
+          <a:lstStyle/>
+          <a:p>
+            <a:pPr algn="ctr" indent="0" marL="0">
+              <a:buNone/>
+            </a:pPr>
+            <a:r>
+              <a:rPr lang="en-US" sz="1100" b="1" dirty="0">
+                <a:solidFill>
+                  <a:srgbClr val="475569"/>
+                </a:solidFill>
+                <a:latin typeface="Trebuchet MS" pitchFamily="34" charset="0"/>
+                <a:ea typeface="Trebuchet MS" pitchFamily="34" charset="-122"/>
+                <a:cs typeface="Trebuchet MS" pitchFamily="34" charset="-120"/>
+              </a:rPr>
+              <a:t>Phonemes</a:t>
             </a:r>
             <a:endParaRPr lang="en-US" sz="1100" dirty="0"/>
           </a:p>
@@ -10589,13 +10412,13 @@
       </p:sp>
       <p:sp>
         <p:nvSpPr>
-          <p:cNvPr id="27" name="Shape 25"/>
-          <p:cNvSpPr/>
-          <p:nvPr/>
-        </p:nvSpPr>
-        <p:spPr>
-          <a:xfrm>
-            <a:off x="1874520" y="3273552"/>
+          <p:cNvPr id="32" name="Shape 30"/>
+          <p:cNvSpPr/>
+          <p:nvPr/>
+        </p:nvSpPr>
+        <p:spPr>
+          <a:xfrm>
+            <a:off x="1874520" y="4096512"/>
             <a:ext cx="6903720" cy="658368"/>
           </a:xfrm>
           <a:prstGeom prst="rect">
@@ -10604,30 +10427,30 @@
             </a:avLst>
           </a:prstGeom>
           <a:solidFill>
-            <a:srgbClr val="CCFBF1"/>
-          </a:solidFill>
-          <a:ln w="12700">
-            <a:solidFill>
-              <a:srgbClr val="0D9488"/>
-            </a:solidFill>
-            <a:prstDash val="solid"/>
-          </a:ln>
-        </p:spPr>
-      </p:sp>
-      <p:sp>
-        <p:nvSpPr>
-          <p:cNvPr id="28" name="Shape 26"/>
-          <p:cNvSpPr/>
-          <p:nvPr/>
-        </p:nvSpPr>
-        <p:spPr>
-          <a:xfrm>
-            <a:off x="2313432" y="3364992"/>
-            <a:ext cx="1645920" cy="475488"/>
+            <a:srgbClr val="FCE7F3"/>
+          </a:solidFill>
+          <a:ln w="12700">
+            <a:solidFill>
+              <a:srgbClr val="DB2777"/>
+            </a:solidFill>
+            <a:prstDash val="solid"/>
+          </a:ln>
+        </p:spPr>
+      </p:sp>
+      <p:sp>
+        <p:nvSpPr>
+          <p:cNvPr id="33" name="Shape 31"/>
+          <p:cNvSpPr/>
+          <p:nvPr/>
+        </p:nvSpPr>
+        <p:spPr>
+          <a:xfrm>
+            <a:off x="2124837" y="4169664"/>
+            <a:ext cx="685800" cy="475488"/>
           </a:xfrm>
           <a:prstGeom prst="rect">
             <a:avLst>
-              <a:gd name="adj" fmla="val 9615"/>
+              <a:gd name="adj" fmla="val 7692"/>
             </a:avLst>
           </a:prstGeom>
           <a:solidFill>
@@ -10635,104 +10458,131 @@
           </a:solidFill>
           <a:ln w="12700">
             <a:solidFill>
-              <a:srgbClr val="0D9488"/>
-            </a:solidFill>
-            <a:prstDash val="solid"/>
-          </a:ln>
-        </p:spPr>
-      </p:sp>
-      <p:sp>
-        <p:nvSpPr>
-          <p:cNvPr id="29" name="Text 27"/>
-          <p:cNvSpPr/>
-          <p:nvPr/>
-        </p:nvSpPr>
-        <p:spPr>
-          <a:xfrm>
-            <a:off x="2313432" y="3364992"/>
-            <a:ext cx="1645920" cy="475488"/>
-          </a:xfrm>
-          <a:prstGeom prst="rect">
-            <a:avLst/>
-          </a:prstGeom>
-          <a:noFill/>
-          <a:ln/>
-        </p:spPr>
-        <p:txBody>
-          <a:bodyPr wrap="square" lIns="0" tIns="0" rIns="0" bIns="0" rtlCol="0" anchor="ctr"/>
-          <a:lstStyle/>
-          <a:p>
-            <a:pPr algn="ctr" indent="0" marL="0">
-              <a:buNone/>
-            </a:pPr>
-            <a:r>
-              <a:rPr lang="en-US" sz="1400" b="1" dirty="0">
-                <a:solidFill>
-                  <a:srgbClr val="0D9488"/>
+              <a:srgbClr val="DB2777"/>
+            </a:solidFill>
+            <a:prstDash val="solid"/>
+          </a:ln>
+        </p:spPr>
+      </p:sp>
+      <p:sp>
+        <p:nvSpPr>
+          <p:cNvPr id="34" name="Text 32"/>
+          <p:cNvSpPr/>
+          <p:nvPr/>
+        </p:nvSpPr>
+        <p:spPr>
+          <a:xfrm>
+            <a:off x="2124837" y="4169664"/>
+            <a:ext cx="685800" cy="475488"/>
+          </a:xfrm>
+          <a:prstGeom prst="rect">
+            <a:avLst/>
+          </a:prstGeom>
+          <a:noFill/>
+          <a:ln/>
+        </p:spPr>
+        <p:txBody>
+          <a:bodyPr wrap="square" lIns="0" tIns="0" rIns="0" bIns="0" rtlCol="0" anchor="ctr"/>
+          <a:lstStyle/>
+          <a:p>
+            <a:pPr algn="ctr" indent="0" marL="0">
+              <a:buNone/>
+            </a:pPr>
+            <a:r>
+              <a:rPr lang="en-US" sz="900" b="1" dirty="0">
+                <a:solidFill>
+                  <a:srgbClr val="9D174D"/>
                 </a:solidFill>
                 <a:latin typeface="Trebuchet MS" pitchFamily="34" charset="0"/>
                 <a:ea typeface="Trebuchet MS" pitchFamily="34" charset="-122"/>
                 <a:cs typeface="Trebuchet MS" pitchFamily="34" charset="-120"/>
               </a:rPr>
-              <a:t>re</a:t>
-            </a:r>
-            <a:endParaRPr lang="en-US" sz="1400" dirty="0"/>
-          </a:p>
-        </p:txBody>
-      </p:sp>
-      <p:sp>
-        <p:nvSpPr>
-          <p:cNvPr id="30" name="Text 28"/>
-          <p:cNvSpPr/>
-          <p:nvPr/>
-        </p:nvSpPr>
-        <p:spPr>
-          <a:xfrm>
-            <a:off x="3959352" y="3364992"/>
-            <a:ext cx="411480" cy="475488"/>
-          </a:xfrm>
-          <a:prstGeom prst="rect">
-            <a:avLst/>
-          </a:prstGeom>
-          <a:noFill/>
-          <a:ln/>
-        </p:spPr>
-        <p:txBody>
-          <a:bodyPr wrap="square" lIns="0" tIns="0" rIns="0" bIns="0" rtlCol="0" anchor="ctr"/>
-          <a:lstStyle/>
-          <a:p>
-            <a:pPr algn="ctr" indent="0" marL="0">
-              <a:buNone/>
-            </a:pPr>
-            <a:r>
-              <a:rPr lang="en-US" sz="1600" b="1" dirty="0">
-                <a:solidFill>
-                  <a:srgbClr val="0D9488"/>
+              <a:t>f</a:t>
+            </a:r>
+            <a:endParaRPr lang="en-US" sz="900" dirty="0"/>
+          </a:p>
+        </p:txBody>
+      </p:sp>
+      <p:sp>
+        <p:nvSpPr>
+          <p:cNvPr id="35" name="Shape 33"/>
+          <p:cNvSpPr/>
+          <p:nvPr/>
+        </p:nvSpPr>
+        <p:spPr>
+          <a:xfrm>
+            <a:off x="3033522" y="4169664"/>
+            <a:ext cx="685800" cy="475488"/>
+          </a:xfrm>
+          <a:prstGeom prst="rect">
+            <a:avLst>
+              <a:gd name="adj" fmla="val 7692"/>
+            </a:avLst>
+          </a:prstGeom>
+          <a:solidFill>
+            <a:srgbClr val="FFFFFF"/>
+          </a:solidFill>
+          <a:ln w="12700">
+            <a:solidFill>
+              <a:srgbClr val="DB2777"/>
+            </a:solidFill>
+            <a:prstDash val="solid"/>
+          </a:ln>
+        </p:spPr>
+      </p:sp>
+      <p:sp>
+        <p:nvSpPr>
+          <p:cNvPr id="36" name="Text 34"/>
+          <p:cNvSpPr/>
+          <p:nvPr/>
+        </p:nvSpPr>
+        <p:spPr>
+          <a:xfrm>
+            <a:off x="3033522" y="4169664"/>
+            <a:ext cx="685800" cy="475488"/>
+          </a:xfrm>
+          <a:prstGeom prst="rect">
+            <a:avLst/>
+          </a:prstGeom>
+          <a:noFill/>
+          <a:ln/>
+        </p:spPr>
+        <p:txBody>
+          <a:bodyPr wrap="square" lIns="0" tIns="0" rIns="0" bIns="0" rtlCol="0" anchor="ctr"/>
+          <a:lstStyle/>
+          <a:p>
+            <a:pPr algn="ctr" indent="0" marL="0">
+              <a:buNone/>
+            </a:pPr>
+            <a:r>
+              <a:rPr lang="en-US" sz="900" b="1" dirty="0">
+                <a:solidFill>
+                  <a:srgbClr val="9D174D"/>
                 </a:solidFill>
                 <a:latin typeface="Trebuchet MS" pitchFamily="34" charset="0"/>
                 <a:ea typeface="Trebuchet MS" pitchFamily="34" charset="-122"/>
                 <a:cs typeface="Trebuchet MS" pitchFamily="34" charset="-120"/>
               </a:rPr>
-              <a:t>·</a:t>
-            </a:r>
-            <a:endParaRPr lang="en-US" sz="1600" dirty="0"/>
-          </a:p>
-        </p:txBody>
-      </p:sp>
-      <p:sp>
-        <p:nvSpPr>
-          <p:cNvPr id="31" name="Shape 29"/>
-          <p:cNvSpPr/>
-          <p:nvPr/>
-        </p:nvSpPr>
-        <p:spPr>
-          <a:xfrm>
-            <a:off x="4370832" y="3364992"/>
-            <a:ext cx="1645920" cy="475488"/>
+              <a:t>r</a:t>
+            </a:r>
+            <a:endParaRPr lang="en-US" sz="900" dirty="0"/>
+          </a:p>
+        </p:txBody>
+      </p:sp>
+      <p:sp>
+        <p:nvSpPr>
+          <p:cNvPr id="37" name="Shape 35"/>
+          <p:cNvSpPr/>
+          <p:nvPr/>
+        </p:nvSpPr>
+        <p:spPr>
+          <a:xfrm>
+            <a:off x="3942207" y="4169664"/>
+            <a:ext cx="685800" cy="475488"/>
           </a:xfrm>
           <a:prstGeom prst="rect">
             <a:avLst>
-              <a:gd name="adj" fmla="val 9615"/>
+              <a:gd name="adj" fmla="val 7692"/>
             </a:avLst>
           </a:prstGeom>
           <a:solidFill>
@@ -10740,104 +10590,131 @@
           </a:solidFill>
           <a:ln w="12700">
             <a:solidFill>
-              <a:srgbClr val="0D9488"/>
-            </a:solidFill>
-            <a:prstDash val="solid"/>
-          </a:ln>
-        </p:spPr>
-      </p:sp>
-      <p:sp>
-        <p:nvSpPr>
-          <p:cNvPr id="32" name="Text 30"/>
-          <p:cNvSpPr/>
-          <p:nvPr/>
-        </p:nvSpPr>
-        <p:spPr>
-          <a:xfrm>
-            <a:off x="4370832" y="3364992"/>
-            <a:ext cx="1645920" cy="475488"/>
-          </a:xfrm>
-          <a:prstGeom prst="rect">
-            <a:avLst/>
-          </a:prstGeom>
-          <a:noFill/>
-          <a:ln/>
-        </p:spPr>
-        <p:txBody>
-          <a:bodyPr wrap="square" lIns="0" tIns="0" rIns="0" bIns="0" rtlCol="0" anchor="ctr"/>
-          <a:lstStyle/>
-          <a:p>
-            <a:pPr algn="ctr" indent="0" marL="0">
-              <a:buNone/>
-            </a:pPr>
-            <a:r>
-              <a:rPr lang="en-US" sz="1400" b="1" dirty="0">
-                <a:solidFill>
-                  <a:srgbClr val="0D9488"/>
+              <a:srgbClr val="DB2777"/>
+            </a:solidFill>
+            <a:prstDash val="solid"/>
+          </a:ln>
+        </p:spPr>
+      </p:sp>
+      <p:sp>
+        <p:nvSpPr>
+          <p:cNvPr id="38" name="Text 36"/>
+          <p:cNvSpPr/>
+          <p:nvPr/>
+        </p:nvSpPr>
+        <p:spPr>
+          <a:xfrm>
+            <a:off x="3942207" y="4169664"/>
+            <a:ext cx="685800" cy="475488"/>
+          </a:xfrm>
+          <a:prstGeom prst="rect">
+            <a:avLst/>
+          </a:prstGeom>
+          <a:noFill/>
+          <a:ln/>
+        </p:spPr>
+        <p:txBody>
+          <a:bodyPr wrap="square" lIns="0" tIns="0" rIns="0" bIns="0" rtlCol="0" anchor="ctr"/>
+          <a:lstStyle/>
+          <a:p>
+            <a:pPr algn="ctr" indent="0" marL="0">
+              <a:buNone/>
+            </a:pPr>
+            <a:r>
+              <a:rPr lang="en-US" sz="900" b="1" dirty="0">
+                <a:solidFill>
+                  <a:srgbClr val="9D174D"/>
                 </a:solidFill>
                 <a:latin typeface="Trebuchet MS" pitchFamily="34" charset="0"/>
                 <a:ea typeface="Trebuchet MS" pitchFamily="34" charset="-122"/>
                 <a:cs typeface="Trebuchet MS" pitchFamily="34" charset="-120"/>
               </a:rPr>
-              <a:t>fresh</a:t>
-            </a:r>
-            <a:endParaRPr lang="en-US" sz="1400" dirty="0"/>
-          </a:p>
-        </p:txBody>
-      </p:sp>
-      <p:sp>
-        <p:nvSpPr>
-          <p:cNvPr id="33" name="Text 31"/>
-          <p:cNvSpPr/>
-          <p:nvPr/>
-        </p:nvSpPr>
-        <p:spPr>
-          <a:xfrm>
-            <a:off x="6016752" y="3364992"/>
-            <a:ext cx="411480" cy="475488"/>
-          </a:xfrm>
-          <a:prstGeom prst="rect">
-            <a:avLst/>
-          </a:prstGeom>
-          <a:noFill/>
-          <a:ln/>
-        </p:spPr>
-        <p:txBody>
-          <a:bodyPr wrap="square" lIns="0" tIns="0" rIns="0" bIns="0" rtlCol="0" anchor="ctr"/>
-          <a:lstStyle/>
-          <a:p>
-            <a:pPr algn="ctr" indent="0" marL="0">
-              <a:buNone/>
-            </a:pPr>
-            <a:r>
-              <a:rPr lang="en-US" sz="1600" b="1" dirty="0">
-                <a:solidFill>
-                  <a:srgbClr val="0D9488"/>
+              <a:t>e</a:t>
+            </a:r>
+            <a:endParaRPr lang="en-US" sz="900" dirty="0"/>
+          </a:p>
+        </p:txBody>
+      </p:sp>
+      <p:sp>
+        <p:nvSpPr>
+          <p:cNvPr id="39" name="Shape 37"/>
+          <p:cNvSpPr/>
+          <p:nvPr/>
+        </p:nvSpPr>
+        <p:spPr>
+          <a:xfrm>
+            <a:off x="4850892" y="4169664"/>
+            <a:ext cx="685800" cy="475488"/>
+          </a:xfrm>
+          <a:prstGeom prst="rect">
+            <a:avLst>
+              <a:gd name="adj" fmla="val 7692"/>
+            </a:avLst>
+          </a:prstGeom>
+          <a:solidFill>
+            <a:srgbClr val="FFFFFF"/>
+          </a:solidFill>
+          <a:ln w="12700">
+            <a:solidFill>
+              <a:srgbClr val="DB2777"/>
+            </a:solidFill>
+            <a:prstDash val="solid"/>
+          </a:ln>
+        </p:spPr>
+      </p:sp>
+      <p:sp>
+        <p:nvSpPr>
+          <p:cNvPr id="40" name="Text 38"/>
+          <p:cNvSpPr/>
+          <p:nvPr/>
+        </p:nvSpPr>
+        <p:spPr>
+          <a:xfrm>
+            <a:off x="4850892" y="4169664"/>
+            <a:ext cx="685800" cy="475488"/>
+          </a:xfrm>
+          <a:prstGeom prst="rect">
+            <a:avLst/>
+          </a:prstGeom>
+          <a:noFill/>
+          <a:ln/>
+        </p:spPr>
+        <p:txBody>
+          <a:bodyPr wrap="square" lIns="0" tIns="0" rIns="0" bIns="0" rtlCol="0" anchor="ctr"/>
+          <a:lstStyle/>
+          <a:p>
+            <a:pPr algn="ctr" indent="0" marL="0">
+              <a:buNone/>
+            </a:pPr>
+            <a:r>
+              <a:rPr lang="en-US" sz="900" b="1" dirty="0">
+                <a:solidFill>
+                  <a:srgbClr val="9D174D"/>
                 </a:solidFill>
                 <a:latin typeface="Trebuchet MS" pitchFamily="34" charset="0"/>
                 <a:ea typeface="Trebuchet MS" pitchFamily="34" charset="-122"/>
                 <a:cs typeface="Trebuchet MS" pitchFamily="34" charset="-120"/>
               </a:rPr>
-              <a:t>·</a:t>
-            </a:r>
-            <a:endParaRPr lang="en-US" sz="1600" dirty="0"/>
-          </a:p>
-        </p:txBody>
-      </p:sp>
-      <p:sp>
-        <p:nvSpPr>
-          <p:cNvPr id="34" name="Shape 32"/>
-          <p:cNvSpPr/>
-          <p:nvPr/>
-        </p:nvSpPr>
-        <p:spPr>
-          <a:xfrm>
-            <a:off x="6428232" y="3364992"/>
-            <a:ext cx="1645920" cy="475488"/>
+              <a:t>sh</a:t>
+            </a:r>
+            <a:endParaRPr lang="en-US" sz="900" dirty="0"/>
+          </a:p>
+        </p:txBody>
+      </p:sp>
+      <p:sp>
+        <p:nvSpPr>
+          <p:cNvPr id="41" name="Shape 39"/>
+          <p:cNvSpPr/>
+          <p:nvPr/>
+        </p:nvSpPr>
+        <p:spPr>
+          <a:xfrm>
+            <a:off x="5759577" y="4169664"/>
+            <a:ext cx="685800" cy="475488"/>
           </a:xfrm>
           <a:prstGeom prst="rect">
             <a:avLst>
-              <a:gd name="adj" fmla="val 9615"/>
+              <a:gd name="adj" fmla="val 7692"/>
             </a:avLst>
           </a:prstGeom>
           <a:solidFill>
@@ -10845,153 +10722,126 @@
           </a:solidFill>
           <a:ln w="12700">
             <a:solidFill>
-              <a:srgbClr val="0D9488"/>
-            </a:solidFill>
-            <a:prstDash val="solid"/>
-          </a:ln>
-        </p:spPr>
-      </p:sp>
-      <p:sp>
-        <p:nvSpPr>
-          <p:cNvPr id="35" name="Text 33"/>
-          <p:cNvSpPr/>
-          <p:nvPr/>
-        </p:nvSpPr>
-        <p:spPr>
-          <a:xfrm>
-            <a:off x="6428232" y="3364992"/>
-            <a:ext cx="1645920" cy="475488"/>
-          </a:xfrm>
-          <a:prstGeom prst="rect">
-            <a:avLst/>
-          </a:prstGeom>
-          <a:noFill/>
-          <a:ln/>
-        </p:spPr>
-        <p:txBody>
-          <a:bodyPr wrap="square" lIns="0" tIns="0" rIns="0" bIns="0" rtlCol="0" anchor="ctr"/>
-          <a:lstStyle/>
-          <a:p>
-            <a:pPr algn="ctr" indent="0" marL="0">
-              <a:buNone/>
-            </a:pPr>
-            <a:r>
-              <a:rPr lang="en-US" sz="1400" b="1" dirty="0">
-                <a:solidFill>
-                  <a:srgbClr val="0D9488"/>
+              <a:srgbClr val="DB2777"/>
+            </a:solidFill>
+            <a:prstDash val="solid"/>
+          </a:ln>
+        </p:spPr>
+      </p:sp>
+      <p:sp>
+        <p:nvSpPr>
+          <p:cNvPr id="42" name="Text 40"/>
+          <p:cNvSpPr/>
+          <p:nvPr/>
+        </p:nvSpPr>
+        <p:spPr>
+          <a:xfrm>
+            <a:off x="5759577" y="4169664"/>
+            <a:ext cx="685800" cy="475488"/>
+          </a:xfrm>
+          <a:prstGeom prst="rect">
+            <a:avLst/>
+          </a:prstGeom>
+          <a:noFill/>
+          <a:ln/>
+        </p:spPr>
+        <p:txBody>
+          <a:bodyPr wrap="square" lIns="0" tIns="0" rIns="0" bIns="0" rtlCol="0" anchor="ctr"/>
+          <a:lstStyle/>
+          <a:p>
+            <a:pPr algn="ctr" indent="0" marL="0">
+              <a:buNone/>
+            </a:pPr>
+            <a:r>
+              <a:rPr lang="en-US" sz="900" b="1" dirty="0">
+                <a:solidFill>
+                  <a:srgbClr val="9D174D"/>
                 </a:solidFill>
                 <a:latin typeface="Trebuchet MS" pitchFamily="34" charset="0"/>
                 <a:ea typeface="Trebuchet MS" pitchFamily="34" charset="-122"/>
                 <a:cs typeface="Trebuchet MS" pitchFamily="34" charset="-120"/>
               </a:rPr>
-              <a:t>ing</a:t>
-            </a:r>
-            <a:endParaRPr lang="en-US" sz="1400" dirty="0"/>
-          </a:p>
-        </p:txBody>
-      </p:sp>
-      <p:sp>
-        <p:nvSpPr>
-          <p:cNvPr id="36" name="Shape 34"/>
-          <p:cNvSpPr/>
-          <p:nvPr/>
-        </p:nvSpPr>
-        <p:spPr>
-          <a:xfrm>
-            <a:off x="365760" y="4096512"/>
-            <a:ext cx="1371600" cy="804672"/>
+              <a:t>n</a:t>
+            </a:r>
+            <a:endParaRPr lang="en-US" sz="900" dirty="0"/>
+          </a:p>
+        </p:txBody>
+      </p:sp>
+      <p:sp>
+        <p:nvSpPr>
+          <p:cNvPr id="43" name="Shape 41"/>
+          <p:cNvSpPr/>
+          <p:nvPr/>
+        </p:nvSpPr>
+        <p:spPr>
+          <a:xfrm>
+            <a:off x="6668262" y="4169664"/>
+            <a:ext cx="685800" cy="475488"/>
           </a:xfrm>
           <a:prstGeom prst="rect">
             <a:avLst>
-              <a:gd name="adj" fmla="val 6818"/>
+              <a:gd name="adj" fmla="val 7692"/>
             </a:avLst>
           </a:prstGeom>
           <a:solidFill>
-            <a:srgbClr val="E2E8F0"/>
-          </a:solidFill>
-          <a:ln w="12700">
-            <a:solidFill>
-              <a:srgbClr val="E2E8F0"/>
-            </a:solidFill>
-            <a:prstDash val="solid"/>
-          </a:ln>
-        </p:spPr>
-      </p:sp>
-      <p:sp>
-        <p:nvSpPr>
-          <p:cNvPr id="37" name="Text 35"/>
-          <p:cNvSpPr/>
-          <p:nvPr/>
-        </p:nvSpPr>
-        <p:spPr>
-          <a:xfrm>
-            <a:off x="365760" y="4096512"/>
-            <a:ext cx="1371600" cy="804672"/>
-          </a:xfrm>
-          <a:prstGeom prst="rect">
-            <a:avLst/>
-          </a:prstGeom>
-          <a:noFill/>
-          <a:ln/>
-        </p:spPr>
-        <p:txBody>
-          <a:bodyPr wrap="square" lIns="0" tIns="0" rIns="0" bIns="0" rtlCol="0" anchor="ctr"/>
-          <a:lstStyle/>
-          <a:p>
-            <a:pPr algn="ctr" indent="0" marL="0">
-              <a:buNone/>
-            </a:pPr>
-            <a:r>
-              <a:rPr lang="en-US" sz="1100" b="1" dirty="0">
-                <a:solidFill>
-                  <a:srgbClr val="475569"/>
+            <a:srgbClr val="FFFFFF"/>
+          </a:solidFill>
+          <a:ln w="12700">
+            <a:solidFill>
+              <a:srgbClr val="DB2777"/>
+            </a:solidFill>
+            <a:prstDash val="solid"/>
+          </a:ln>
+        </p:spPr>
+      </p:sp>
+      <p:sp>
+        <p:nvSpPr>
+          <p:cNvPr id="44" name="Text 42"/>
+          <p:cNvSpPr/>
+          <p:nvPr/>
+        </p:nvSpPr>
+        <p:spPr>
+          <a:xfrm>
+            <a:off x="6668262" y="4169664"/>
+            <a:ext cx="685800" cy="475488"/>
+          </a:xfrm>
+          <a:prstGeom prst="rect">
+            <a:avLst/>
+          </a:prstGeom>
+          <a:noFill/>
+          <a:ln/>
+        </p:spPr>
+        <p:txBody>
+          <a:bodyPr wrap="square" lIns="0" tIns="0" rIns="0" bIns="0" rtlCol="0" anchor="ctr"/>
+          <a:lstStyle/>
+          <a:p>
+            <a:pPr algn="ctr" indent="0" marL="0">
+              <a:buNone/>
+            </a:pPr>
+            <a:r>
+              <a:rPr lang="en-US" sz="900" b="1" dirty="0">
+                <a:solidFill>
+                  <a:srgbClr val="9D174D"/>
                 </a:solidFill>
                 <a:latin typeface="Trebuchet MS" pitchFamily="34" charset="0"/>
                 <a:ea typeface="Trebuchet MS" pitchFamily="34" charset="-122"/>
                 <a:cs typeface="Trebuchet MS" pitchFamily="34" charset="-120"/>
               </a:rPr>
-              <a:t>Phonemes</a:t>
-            </a:r>
-            <a:endParaRPr lang="en-US" sz="1100" dirty="0"/>
-          </a:p>
-        </p:txBody>
-      </p:sp>
-      <p:sp>
-        <p:nvSpPr>
-          <p:cNvPr id="38" name="Shape 36"/>
-          <p:cNvSpPr/>
-          <p:nvPr/>
-        </p:nvSpPr>
-        <p:spPr>
-          <a:xfrm>
-            <a:off x="1874520" y="4096512"/>
-            <a:ext cx="6903720" cy="658368"/>
-          </a:xfrm>
-          <a:prstGeom prst="rect">
-            <a:avLst>
-              <a:gd name="adj" fmla="val 8333"/>
-            </a:avLst>
-          </a:prstGeom>
-          <a:solidFill>
-            <a:srgbClr val="FCE7F3"/>
-          </a:solidFill>
-          <a:ln w="12700">
-            <a:solidFill>
-              <a:srgbClr val="DB2777"/>
-            </a:solidFill>
-            <a:prstDash val="solid"/>
-          </a:ln>
-        </p:spPr>
-      </p:sp>
-      <p:sp>
-        <p:nvSpPr>
-          <p:cNvPr id="39" name="Shape 37"/>
-          <p:cNvSpPr/>
-          <p:nvPr/>
-        </p:nvSpPr>
-        <p:spPr>
-          <a:xfrm>
-            <a:off x="2023872" y="4169664"/>
+              <a:t>e</a:t>
+            </a:r>
+            <a:endParaRPr lang="en-US" sz="900" dirty="0"/>
+          </a:p>
+        </p:txBody>
+      </p:sp>
+      <p:sp>
+        <p:nvSpPr>
+          <p:cNvPr id="45" name="Shape 43"/>
+          <p:cNvSpPr/>
+          <p:nvPr/>
+        </p:nvSpPr>
+        <p:spPr>
+          <a:xfrm>
+            <a:off x="7576947" y="4169664"/>
             <a:ext cx="685800" cy="475488"/>
           </a:xfrm>
           <a:prstGeom prst="rect">
@@ -11012,13 +10862,13 @@
       </p:sp>
       <p:sp>
         <p:nvSpPr>
-          <p:cNvPr id="40" name="Text 38"/>
-          <p:cNvSpPr/>
-          <p:nvPr/>
-        </p:nvSpPr>
-        <p:spPr>
-          <a:xfrm>
-            <a:off x="2023872" y="4169664"/>
+          <p:cNvPr id="46" name="Text 44"/>
+          <p:cNvSpPr/>
+          <p:nvPr/>
+        </p:nvSpPr>
+        <p:spPr>
+          <a:xfrm>
+            <a:off x="7576947" y="4169664"/>
             <a:ext cx="685800" cy="475488"/>
           </a:xfrm>
           <a:prstGeom prst="rect">
@@ -11043,469 +10893,7 @@
                 <a:ea typeface="Trebuchet MS" pitchFamily="34" charset="-122"/>
                 <a:cs typeface="Trebuchet MS" pitchFamily="34" charset="-120"/>
               </a:rPr>
-              <a:t>r</a:t>
-            </a:r>
-            <a:endParaRPr lang="en-US" sz="900" dirty="0"/>
-          </a:p>
-        </p:txBody>
-      </p:sp>
-      <p:sp>
-        <p:nvSpPr>
-          <p:cNvPr id="41" name="Shape 39"/>
-          <p:cNvSpPr/>
-          <p:nvPr/>
-        </p:nvSpPr>
-        <p:spPr>
-          <a:xfrm>
-            <a:off x="2831592" y="4169664"/>
-            <a:ext cx="685800" cy="475488"/>
-          </a:xfrm>
-          <a:prstGeom prst="rect">
-            <a:avLst>
-              <a:gd name="adj" fmla="val 7692"/>
-            </a:avLst>
-          </a:prstGeom>
-          <a:solidFill>
-            <a:srgbClr val="FFFFFF"/>
-          </a:solidFill>
-          <a:ln w="12700">
-            <a:solidFill>
-              <a:srgbClr val="DB2777"/>
-            </a:solidFill>
-            <a:prstDash val="solid"/>
-          </a:ln>
-        </p:spPr>
-      </p:sp>
-      <p:sp>
-        <p:nvSpPr>
-          <p:cNvPr id="42" name="Text 40"/>
-          <p:cNvSpPr/>
-          <p:nvPr/>
-        </p:nvSpPr>
-        <p:spPr>
-          <a:xfrm>
-            <a:off x="2831592" y="4169664"/>
-            <a:ext cx="685800" cy="475488"/>
-          </a:xfrm>
-          <a:prstGeom prst="rect">
-            <a:avLst/>
-          </a:prstGeom>
-          <a:noFill/>
-          <a:ln/>
-        </p:spPr>
-        <p:txBody>
-          <a:bodyPr wrap="square" lIns="0" tIns="0" rIns="0" bIns="0" rtlCol="0" anchor="ctr"/>
-          <a:lstStyle/>
-          <a:p>
-            <a:pPr algn="ctr" indent="0" marL="0">
-              <a:buNone/>
-            </a:pPr>
-            <a:r>
-              <a:rPr lang="en-US" sz="900" b="1" dirty="0">
-                <a:solidFill>
-                  <a:srgbClr val="9D174D"/>
-                </a:solidFill>
-                <a:latin typeface="Trebuchet MS" pitchFamily="34" charset="0"/>
-                <a:ea typeface="Trebuchet MS" pitchFamily="34" charset="-122"/>
-                <a:cs typeface="Trebuchet MS" pitchFamily="34" charset="-120"/>
-              </a:rPr>
-              <a:t>e</a:t>
-            </a:r>
-            <a:endParaRPr lang="en-US" sz="900" dirty="0"/>
-          </a:p>
-        </p:txBody>
-      </p:sp>
-      <p:sp>
-        <p:nvSpPr>
-          <p:cNvPr id="43" name="Shape 41"/>
-          <p:cNvSpPr/>
-          <p:nvPr/>
-        </p:nvSpPr>
-        <p:spPr>
-          <a:xfrm>
-            <a:off x="3639312" y="4169664"/>
-            <a:ext cx="685800" cy="475488"/>
-          </a:xfrm>
-          <a:prstGeom prst="rect">
-            <a:avLst>
-              <a:gd name="adj" fmla="val 7692"/>
-            </a:avLst>
-          </a:prstGeom>
-          <a:solidFill>
-            <a:srgbClr val="FFFFFF"/>
-          </a:solidFill>
-          <a:ln w="12700">
-            <a:solidFill>
-              <a:srgbClr val="DB2777"/>
-            </a:solidFill>
-            <a:prstDash val="solid"/>
-          </a:ln>
-        </p:spPr>
-      </p:sp>
-      <p:sp>
-        <p:nvSpPr>
-          <p:cNvPr id="44" name="Text 42"/>
-          <p:cNvSpPr/>
-          <p:nvPr/>
-        </p:nvSpPr>
-        <p:spPr>
-          <a:xfrm>
-            <a:off x="3639312" y="4169664"/>
-            <a:ext cx="685800" cy="475488"/>
-          </a:xfrm>
-          <a:prstGeom prst="rect">
-            <a:avLst/>
-          </a:prstGeom>
-          <a:noFill/>
-          <a:ln/>
-        </p:spPr>
-        <p:txBody>
-          <a:bodyPr wrap="square" lIns="0" tIns="0" rIns="0" bIns="0" rtlCol="0" anchor="ctr"/>
-          <a:lstStyle/>
-          <a:p>
-            <a:pPr algn="ctr" indent="0" marL="0">
-              <a:buNone/>
-            </a:pPr>
-            <a:r>
-              <a:rPr lang="en-US" sz="900" b="1" dirty="0">
-                <a:solidFill>
-                  <a:srgbClr val="9D174D"/>
-                </a:solidFill>
-                <a:latin typeface="Trebuchet MS" pitchFamily="34" charset="0"/>
-                <a:ea typeface="Trebuchet MS" pitchFamily="34" charset="-122"/>
-                <a:cs typeface="Trebuchet MS" pitchFamily="34" charset="-120"/>
-              </a:rPr>
-              <a:t>f</a:t>
-            </a:r>
-            <a:endParaRPr lang="en-US" sz="900" dirty="0"/>
-          </a:p>
-        </p:txBody>
-      </p:sp>
-      <p:sp>
-        <p:nvSpPr>
-          <p:cNvPr id="45" name="Shape 43"/>
-          <p:cNvSpPr/>
-          <p:nvPr/>
-        </p:nvSpPr>
-        <p:spPr>
-          <a:xfrm>
-            <a:off x="4447032" y="4169664"/>
-            <a:ext cx="685800" cy="475488"/>
-          </a:xfrm>
-          <a:prstGeom prst="rect">
-            <a:avLst>
-              <a:gd name="adj" fmla="val 7692"/>
-            </a:avLst>
-          </a:prstGeom>
-          <a:solidFill>
-            <a:srgbClr val="FFFFFF"/>
-          </a:solidFill>
-          <a:ln w="12700">
-            <a:solidFill>
-              <a:srgbClr val="DB2777"/>
-            </a:solidFill>
-            <a:prstDash val="solid"/>
-          </a:ln>
-        </p:spPr>
-      </p:sp>
-      <p:sp>
-        <p:nvSpPr>
-          <p:cNvPr id="46" name="Text 44"/>
-          <p:cNvSpPr/>
-          <p:nvPr/>
-        </p:nvSpPr>
-        <p:spPr>
-          <a:xfrm>
-            <a:off x="4447032" y="4169664"/>
-            <a:ext cx="685800" cy="475488"/>
-          </a:xfrm>
-          <a:prstGeom prst="rect">
-            <a:avLst/>
-          </a:prstGeom>
-          <a:noFill/>
-          <a:ln/>
-        </p:spPr>
-        <p:txBody>
-          <a:bodyPr wrap="square" lIns="0" tIns="0" rIns="0" bIns="0" rtlCol="0" anchor="ctr"/>
-          <a:lstStyle/>
-          <a:p>
-            <a:pPr algn="ctr" indent="0" marL="0">
-              <a:buNone/>
-            </a:pPr>
-            <a:r>
-              <a:rPr lang="en-US" sz="900" b="1" dirty="0">
-                <a:solidFill>
-                  <a:srgbClr val="9D174D"/>
-                </a:solidFill>
-                <a:latin typeface="Trebuchet MS" pitchFamily="34" charset="0"/>
-                <a:ea typeface="Trebuchet MS" pitchFamily="34" charset="-122"/>
-                <a:cs typeface="Trebuchet MS" pitchFamily="34" charset="-120"/>
-              </a:rPr>
-              <a:t>r</a:t>
-            </a:r>
-            <a:endParaRPr lang="en-US" sz="900" dirty="0"/>
-          </a:p>
-        </p:txBody>
-      </p:sp>
-      <p:sp>
-        <p:nvSpPr>
-          <p:cNvPr id="47" name="Shape 45"/>
-          <p:cNvSpPr/>
-          <p:nvPr/>
-        </p:nvSpPr>
-        <p:spPr>
-          <a:xfrm>
-            <a:off x="5254752" y="4169664"/>
-            <a:ext cx="685800" cy="475488"/>
-          </a:xfrm>
-          <a:prstGeom prst="rect">
-            <a:avLst>
-              <a:gd name="adj" fmla="val 7692"/>
-            </a:avLst>
-          </a:prstGeom>
-          <a:solidFill>
-            <a:srgbClr val="FFFFFF"/>
-          </a:solidFill>
-          <a:ln w="12700">
-            <a:solidFill>
-              <a:srgbClr val="DB2777"/>
-            </a:solidFill>
-            <a:prstDash val="solid"/>
-          </a:ln>
-        </p:spPr>
-      </p:sp>
-      <p:sp>
-        <p:nvSpPr>
-          <p:cNvPr id="48" name="Text 46"/>
-          <p:cNvSpPr/>
-          <p:nvPr/>
-        </p:nvSpPr>
-        <p:spPr>
-          <a:xfrm>
-            <a:off x="5254752" y="4169664"/>
-            <a:ext cx="685800" cy="475488"/>
-          </a:xfrm>
-          <a:prstGeom prst="rect">
-            <a:avLst/>
-          </a:prstGeom>
-          <a:noFill/>
-          <a:ln/>
-        </p:spPr>
-        <p:txBody>
-          <a:bodyPr wrap="square" lIns="0" tIns="0" rIns="0" bIns="0" rtlCol="0" anchor="ctr"/>
-          <a:lstStyle/>
-          <a:p>
-            <a:pPr algn="ctr" indent="0" marL="0">
-              <a:buNone/>
-            </a:pPr>
-            <a:r>
-              <a:rPr lang="en-US" sz="900" b="1" dirty="0">
-                <a:solidFill>
-                  <a:srgbClr val="9D174D"/>
-                </a:solidFill>
-                <a:latin typeface="Trebuchet MS" pitchFamily="34" charset="0"/>
-                <a:ea typeface="Trebuchet MS" pitchFamily="34" charset="-122"/>
-                <a:cs typeface="Trebuchet MS" pitchFamily="34" charset="-120"/>
-              </a:rPr>
-              <a:t>e</a:t>
-            </a:r>
-            <a:endParaRPr lang="en-US" sz="900" dirty="0"/>
-          </a:p>
-        </p:txBody>
-      </p:sp>
-      <p:sp>
-        <p:nvSpPr>
-          <p:cNvPr id="49" name="Shape 47"/>
-          <p:cNvSpPr/>
-          <p:nvPr/>
-        </p:nvSpPr>
-        <p:spPr>
-          <a:xfrm>
-            <a:off x="6062472" y="4169664"/>
-            <a:ext cx="685800" cy="475488"/>
-          </a:xfrm>
-          <a:prstGeom prst="rect">
-            <a:avLst>
-              <a:gd name="adj" fmla="val 7692"/>
-            </a:avLst>
-          </a:prstGeom>
-          <a:solidFill>
-            <a:srgbClr val="FFFFFF"/>
-          </a:solidFill>
-          <a:ln w="12700">
-            <a:solidFill>
-              <a:srgbClr val="DB2777"/>
-            </a:solidFill>
-            <a:prstDash val="solid"/>
-          </a:ln>
-        </p:spPr>
-      </p:sp>
-      <p:sp>
-        <p:nvSpPr>
-          <p:cNvPr id="50" name="Text 48"/>
-          <p:cNvSpPr/>
-          <p:nvPr/>
-        </p:nvSpPr>
-        <p:spPr>
-          <a:xfrm>
-            <a:off x="6062472" y="4169664"/>
-            <a:ext cx="685800" cy="475488"/>
-          </a:xfrm>
-          <a:prstGeom prst="rect">
-            <a:avLst/>
-          </a:prstGeom>
-          <a:noFill/>
-          <a:ln/>
-        </p:spPr>
-        <p:txBody>
-          <a:bodyPr wrap="square" lIns="0" tIns="0" rIns="0" bIns="0" rtlCol="0" anchor="ctr"/>
-          <a:lstStyle/>
-          <a:p>
-            <a:pPr algn="ctr" indent="0" marL="0">
-              <a:buNone/>
-            </a:pPr>
-            <a:r>
-              <a:rPr lang="en-US" sz="900" b="1" dirty="0">
-                <a:solidFill>
-                  <a:srgbClr val="9D174D"/>
-                </a:solidFill>
-                <a:latin typeface="Trebuchet MS" pitchFamily="34" charset="0"/>
-                <a:ea typeface="Trebuchet MS" pitchFamily="34" charset="-122"/>
-                <a:cs typeface="Trebuchet MS" pitchFamily="34" charset="-120"/>
-              </a:rPr>
-              <a:t>sh</a:t>
-            </a:r>
-            <a:endParaRPr lang="en-US" sz="900" dirty="0"/>
-          </a:p>
-        </p:txBody>
-      </p:sp>
-      <p:sp>
-        <p:nvSpPr>
-          <p:cNvPr id="51" name="Shape 49"/>
-          <p:cNvSpPr/>
-          <p:nvPr/>
-        </p:nvSpPr>
-        <p:spPr>
-          <a:xfrm>
-            <a:off x="6870192" y="4169664"/>
-            <a:ext cx="685800" cy="475488"/>
-          </a:xfrm>
-          <a:prstGeom prst="rect">
-            <a:avLst>
-              <a:gd name="adj" fmla="val 7692"/>
-            </a:avLst>
-          </a:prstGeom>
-          <a:solidFill>
-            <a:srgbClr val="FFFFFF"/>
-          </a:solidFill>
-          <a:ln w="12700">
-            <a:solidFill>
-              <a:srgbClr val="DB2777"/>
-            </a:solidFill>
-            <a:prstDash val="solid"/>
-          </a:ln>
-        </p:spPr>
-      </p:sp>
-      <p:sp>
-        <p:nvSpPr>
-          <p:cNvPr id="52" name="Text 50"/>
-          <p:cNvSpPr/>
-          <p:nvPr/>
-        </p:nvSpPr>
-        <p:spPr>
-          <a:xfrm>
-            <a:off x="6870192" y="4169664"/>
-            <a:ext cx="685800" cy="475488"/>
-          </a:xfrm>
-          <a:prstGeom prst="rect">
-            <a:avLst/>
-          </a:prstGeom>
-          <a:noFill/>
-          <a:ln/>
-        </p:spPr>
-        <p:txBody>
-          <a:bodyPr wrap="square" lIns="0" tIns="0" rIns="0" bIns="0" rtlCol="0" anchor="ctr"/>
-          <a:lstStyle/>
-          <a:p>
-            <a:pPr algn="ctr" indent="0" marL="0">
-              <a:buNone/>
-            </a:pPr>
-            <a:r>
-              <a:rPr lang="en-US" sz="900" b="1" dirty="0">
-                <a:solidFill>
-                  <a:srgbClr val="9D174D"/>
-                </a:solidFill>
-                <a:latin typeface="Trebuchet MS" pitchFamily="34" charset="0"/>
-                <a:ea typeface="Trebuchet MS" pitchFamily="34" charset="-122"/>
-                <a:cs typeface="Trebuchet MS" pitchFamily="34" charset="-120"/>
-              </a:rPr>
-              <a:t>i</a:t>
-            </a:r>
-            <a:endParaRPr lang="en-US" sz="900" dirty="0"/>
-          </a:p>
-        </p:txBody>
-      </p:sp>
-      <p:sp>
-        <p:nvSpPr>
-          <p:cNvPr id="53" name="Shape 51"/>
-          <p:cNvSpPr/>
-          <p:nvPr/>
-        </p:nvSpPr>
-        <p:spPr>
-          <a:xfrm>
-            <a:off x="7677912" y="4169664"/>
-            <a:ext cx="685800" cy="475488"/>
-          </a:xfrm>
-          <a:prstGeom prst="rect">
-            <a:avLst>
-              <a:gd name="adj" fmla="val 7692"/>
-            </a:avLst>
-          </a:prstGeom>
-          <a:solidFill>
-            <a:srgbClr val="FFFFFF"/>
-          </a:solidFill>
-          <a:ln w="12700">
-            <a:solidFill>
-              <a:srgbClr val="DB2777"/>
-            </a:solidFill>
-            <a:prstDash val="solid"/>
-          </a:ln>
-        </p:spPr>
-      </p:sp>
-      <p:sp>
-        <p:nvSpPr>
-          <p:cNvPr id="54" name="Text 52"/>
-          <p:cNvSpPr/>
-          <p:nvPr/>
-        </p:nvSpPr>
-        <p:spPr>
-          <a:xfrm>
-            <a:off x="7677912" y="4169664"/>
-            <a:ext cx="685800" cy="475488"/>
-          </a:xfrm>
-          <a:prstGeom prst="rect">
-            <a:avLst/>
-          </a:prstGeom>
-          <a:noFill/>
-          <a:ln/>
-        </p:spPr>
-        <p:txBody>
-          <a:bodyPr wrap="square" lIns="0" tIns="0" rIns="0" bIns="0" rtlCol="0" anchor="ctr"/>
-          <a:lstStyle/>
-          <a:p>
-            <a:pPr algn="ctr" indent="0" marL="0">
-              <a:buNone/>
-            </a:pPr>
-            <a:r>
-              <a:rPr lang="en-US" sz="900" b="1" dirty="0">
-                <a:solidFill>
-                  <a:srgbClr val="9D174D"/>
-                </a:solidFill>
-                <a:latin typeface="Trebuchet MS" pitchFamily="34" charset="0"/>
-                <a:ea typeface="Trebuchet MS" pitchFamily="34" charset="-122"/>
-                <a:cs typeface="Trebuchet MS" pitchFamily="34" charset="-120"/>
-              </a:rPr>
-              <a:t>ng</a:t>
+              <a:t>ss</a:t>
             </a:r>
             <a:endParaRPr lang="en-US" sz="900" dirty="0"/>
           </a:p>
@@ -11936,7 +11324,7 @@
                 <a:ea typeface="Trebuchet MS" pitchFamily="34" charset="-122"/>
                 <a:cs typeface="Trebuchet MS" pitchFamily="34" charset="-120"/>
               </a:rPr>
-              <a:t>freshly</a:t>
+              <a:t>refreshing</a:t>
             </a:r>
             <a:endParaRPr lang="en-US" sz="2800" dirty="0"/>
           </a:p>
@@ -12763,7 +12151,7 @@
                 <a:ea typeface="Trebuchet MS" pitchFamily="34" charset="-122"/>
                 <a:cs typeface="Trebuchet MS" pitchFamily="34" charset="-120"/>
               </a:rPr>
-              <a:t>freshly</a:t>
+              <a:t>refreshing</a:t>
             </a:r>
             <a:endParaRPr lang="en-US" sz="2800" dirty="0"/>
           </a:p>
@@ -12843,7 +12231,7 @@
         </p:nvSpPr>
         <p:spPr>
           <a:xfrm>
-            <a:off x="2938272" y="2258568"/>
+            <a:off x="2221992" y="2258568"/>
             <a:ext cx="1828800" cy="292608"/>
           </a:xfrm>
           <a:prstGeom prst="rect">
@@ -12852,11 +12240,11 @@
             </a:avLst>
           </a:prstGeom>
           <a:solidFill>
-            <a:srgbClr val="CCFBF1"/>
+            <a:srgbClr val="DDD6FE"/>
           </a:solidFill>
           <a:ln w="19050">
             <a:solidFill>
-              <a:srgbClr val="0D9488"/>
+              <a:srgbClr val="7C3AED"/>
             </a:solidFill>
             <a:prstDash val="solid"/>
           </a:ln>
@@ -12877,7 +12265,7 @@
         </p:nvSpPr>
         <p:spPr>
           <a:xfrm>
-            <a:off x="2938272" y="2258568"/>
+            <a:off x="2221992" y="2258568"/>
             <a:ext cx="1828800" cy="292608"/>
           </a:xfrm>
           <a:prstGeom prst="rect">
@@ -12896,13 +12284,13 @@
             <a:r>
               <a:rPr lang="en-US" sz="1300" b="1" dirty="0">
                 <a:solidFill>
-                  <a:srgbClr val="0F766E"/>
+                  <a:srgbClr val="4C1D95"/>
                 </a:solidFill>
                 <a:latin typeface="Trebuchet MS" pitchFamily="34" charset="0"/>
                 <a:ea typeface="Trebuchet MS" pitchFamily="34" charset="-122"/>
                 <a:cs typeface="Trebuchet MS" pitchFamily="34" charset="-120"/>
               </a:rPr>
-              <a:t>fresh</a:t>
+              <a:t>re</a:t>
             </a:r>
             <a:endParaRPr lang="en-US" sz="1300" dirty="0"/>
           </a:p>
@@ -12916,7 +12304,7 @@
         </p:nvSpPr>
         <p:spPr>
           <a:xfrm>
-            <a:off x="2938272" y="2569464"/>
+            <a:off x="2221992" y="2569464"/>
             <a:ext cx="1828800" cy="201168"/>
           </a:xfrm>
           <a:prstGeom prst="rect">
@@ -12941,7 +12329,7 @@
                 <a:ea typeface="Calibri" pitchFamily="34" charset="-122"/>
                 <a:cs typeface="Calibri" pitchFamily="34" charset="-120"/>
               </a:rPr>
-              <a:t>new, clean</a:t>
+              <a:t>again</a:t>
             </a:r>
             <a:endParaRPr lang="en-US" sz="850" dirty="0"/>
           </a:p>
@@ -12955,7 +12343,7 @@
         </p:nvSpPr>
         <p:spPr>
           <a:xfrm>
-            <a:off x="5803392" y="2258568"/>
+            <a:off x="4370832" y="2258568"/>
             <a:ext cx="1828800" cy="292608"/>
           </a:xfrm>
           <a:prstGeom prst="rect">
@@ -12964,11 +12352,11 @@
             </a:avLst>
           </a:prstGeom>
           <a:solidFill>
-            <a:srgbClr val="FCE7F3"/>
+            <a:srgbClr val="CCFBF1"/>
           </a:solidFill>
           <a:ln w="19050">
             <a:solidFill>
-              <a:srgbClr val="DB2777"/>
+              <a:srgbClr val="0D9488"/>
             </a:solidFill>
             <a:prstDash val="solid"/>
           </a:ln>
@@ -12989,7 +12377,7 @@
         </p:nvSpPr>
         <p:spPr>
           <a:xfrm>
-            <a:off x="5803392" y="2258568"/>
+            <a:off x="4370832" y="2258568"/>
             <a:ext cx="1828800" cy="292608"/>
           </a:xfrm>
           <a:prstGeom prst="rect">
@@ -13008,13 +12396,13 @@
             <a:r>
               <a:rPr lang="en-US" sz="1300" b="1" dirty="0">
                 <a:solidFill>
-                  <a:srgbClr val="9D174D"/>
+                  <a:srgbClr val="0F766E"/>
                 </a:solidFill>
                 <a:latin typeface="Trebuchet MS" pitchFamily="34" charset="0"/>
                 <a:ea typeface="Trebuchet MS" pitchFamily="34" charset="-122"/>
                 <a:cs typeface="Trebuchet MS" pitchFamily="34" charset="-120"/>
               </a:rPr>
-              <a:t>ly</a:t>
+              <a:t>fresh</a:t>
             </a:r>
             <a:endParaRPr lang="en-US" sz="1300" dirty="0"/>
           </a:p>
@@ -13028,7 +12416,7 @@
         </p:nvSpPr>
         <p:spPr>
           <a:xfrm>
-            <a:off x="5803392" y="2569464"/>
+            <a:off x="4370832" y="2569464"/>
             <a:ext cx="1828800" cy="201168"/>
           </a:xfrm>
           <a:prstGeom prst="rect">
@@ -13053,7 +12441,7 @@
                 <a:ea typeface="Calibri" pitchFamily="34" charset="-122"/>
                 <a:cs typeface="Calibri" pitchFamily="34" charset="-120"/>
               </a:rPr>
-              <a:t>in a certain way</a:t>
+              <a:t>new, clean, not stale</a:t>
             </a:r>
             <a:endParaRPr lang="en-US" sz="850" dirty="0"/>
           </a:p>
@@ -13062,6 +12450,118 @@
       <p:sp>
         <p:nvSpPr>
           <p:cNvPr id="22" name="Shape 20"/>
+          <p:cNvSpPr/>
+          <p:nvPr/>
+        </p:nvSpPr>
+        <p:spPr>
+          <a:xfrm>
+            <a:off x="6519672" y="2258568"/>
+            <a:ext cx="1828800" cy="292608"/>
+          </a:xfrm>
+          <a:prstGeom prst="rect">
+            <a:avLst>
+              <a:gd name="adj" fmla="val 25000"/>
+            </a:avLst>
+          </a:prstGeom>
+          <a:solidFill>
+            <a:srgbClr val="FCE7F3"/>
+          </a:solidFill>
+          <a:ln w="19050">
+            <a:solidFill>
+              <a:srgbClr val="DB2777"/>
+            </a:solidFill>
+            <a:prstDash val="solid"/>
+          </a:ln>
+          <a:effectLst>
+            <a:outerShdw sx="100000" sy="100000" kx="0" ky="0" algn="bl" rotWithShape="0" blurRad="101600" dist="38100" dir="8100000">
+              <a:srgbClr val="000000">
+                <a:alpha val="12000"/>
+              </a:srgbClr>
+            </a:outerShdw>
+          </a:effectLst>
+        </p:spPr>
+      </p:sp>
+      <p:sp>
+        <p:nvSpPr>
+          <p:cNvPr id="23" name="Text 21"/>
+          <p:cNvSpPr/>
+          <p:nvPr/>
+        </p:nvSpPr>
+        <p:spPr>
+          <a:xfrm>
+            <a:off x="6519672" y="2258568"/>
+            <a:ext cx="1828800" cy="292608"/>
+          </a:xfrm>
+          <a:prstGeom prst="rect">
+            <a:avLst/>
+          </a:prstGeom>
+          <a:noFill/>
+          <a:ln/>
+        </p:spPr>
+        <p:txBody>
+          <a:bodyPr wrap="square" lIns="0" tIns="0" rIns="0" bIns="0" rtlCol="0" anchor="ctr"/>
+          <a:lstStyle/>
+          <a:p>
+            <a:pPr algn="ctr" indent="0" marL="0">
+              <a:buNone/>
+            </a:pPr>
+            <a:r>
+              <a:rPr lang="en-US" sz="1300" b="1" dirty="0">
+                <a:solidFill>
+                  <a:srgbClr val="9D174D"/>
+                </a:solidFill>
+                <a:latin typeface="Trebuchet MS" pitchFamily="34" charset="0"/>
+                <a:ea typeface="Trebuchet MS" pitchFamily="34" charset="-122"/>
+                <a:cs typeface="Trebuchet MS" pitchFamily="34" charset="-120"/>
+              </a:rPr>
+              <a:t>ing</a:t>
+            </a:r>
+            <a:endParaRPr lang="en-US" sz="1300" dirty="0"/>
+          </a:p>
+        </p:txBody>
+      </p:sp>
+      <p:sp>
+        <p:nvSpPr>
+          <p:cNvPr id="24" name="Text 22"/>
+          <p:cNvSpPr/>
+          <p:nvPr/>
+        </p:nvSpPr>
+        <p:spPr>
+          <a:xfrm>
+            <a:off x="6519672" y="2569464"/>
+            <a:ext cx="1828800" cy="201168"/>
+          </a:xfrm>
+          <a:prstGeom prst="rect">
+            <a:avLst/>
+          </a:prstGeom>
+          <a:noFill/>
+          <a:ln/>
+        </p:spPr>
+        <p:txBody>
+          <a:bodyPr wrap="square" lIns="0" tIns="0" rIns="0" bIns="0" rtlCol="0" anchor="t"/>
+          <a:lstStyle/>
+          <a:p>
+            <a:pPr algn="ctr" indent="0" marL="0">
+              <a:buNone/>
+            </a:pPr>
+            <a:r>
+              <a:rPr lang="en-US" sz="850" dirty="0">
+                <a:solidFill>
+                  <a:srgbClr val="475569"/>
+                </a:solidFill>
+                <a:latin typeface="Calibri" pitchFamily="34" charset="0"/>
+                <a:ea typeface="Calibri" pitchFamily="34" charset="-122"/>
+                <a:cs typeface="Calibri" pitchFamily="34" charset="-120"/>
+              </a:rPr>
+              <a:t>action in progress</a:t>
+            </a:r>
+            <a:endParaRPr lang="en-US" sz="850" dirty="0"/>
+          </a:p>
+        </p:txBody>
+      </p:sp>
+      <p:sp>
+        <p:nvSpPr>
+          <p:cNvPr id="25" name="Shape 23"/>
           <p:cNvSpPr/>
           <p:nvPr/>
         </p:nvSpPr>
@@ -13088,7 +12588,7 @@
       </p:sp>
       <p:sp>
         <p:nvSpPr>
-          <p:cNvPr id="23" name="Text 21"/>
+          <p:cNvPr id="26" name="Text 24"/>
           <p:cNvSpPr/>
           <p:nvPr/>
         </p:nvSpPr>
@@ -13127,7 +12627,7 @@
       </p:sp>
       <p:sp>
         <p:nvSpPr>
-          <p:cNvPr id="24" name="Shape 22"/>
+          <p:cNvPr id="27" name="Shape 25"/>
           <p:cNvSpPr/>
           <p:nvPr/>
         </p:nvSpPr>
@@ -13154,7 +12654,7 @@
       </p:sp>
       <p:sp>
         <p:nvSpPr>
-          <p:cNvPr id="25" name="Text 23"/>
+          <p:cNvPr id="28" name="Text 26"/>
           <p:cNvSpPr/>
           <p:nvPr/>
         </p:nvSpPr>
@@ -13193,7 +12693,7 @@
       </p:sp>
       <p:sp>
         <p:nvSpPr>
-          <p:cNvPr id="26" name="Shape 24"/>
+          <p:cNvPr id="29" name="Shape 27"/>
           <p:cNvSpPr/>
           <p:nvPr/>
         </p:nvSpPr>
@@ -13220,7 +12720,7 @@
       </p:sp>
       <p:sp>
         <p:nvSpPr>
-          <p:cNvPr id="27" name="Text 25"/>
+          <p:cNvPr id="30" name="Text 28"/>
           <p:cNvSpPr/>
           <p:nvPr/>
         </p:nvSpPr>
@@ -13259,7 +12759,7 @@
       </p:sp>
       <p:sp>
         <p:nvSpPr>
-          <p:cNvPr id="28" name="Shape 26"/>
+          <p:cNvPr id="31" name="Shape 29"/>
           <p:cNvSpPr/>
           <p:nvPr/>
         </p:nvSpPr>
@@ -13286,7 +12786,7 @@
       </p:sp>
       <p:sp>
         <p:nvSpPr>
-          <p:cNvPr id="29" name="Text 27"/>
+          <p:cNvPr id="32" name="Text 30"/>
           <p:cNvSpPr/>
           <p:nvPr/>
         </p:nvSpPr>
@@ -13748,7 +13248,7 @@
                 <a:ea typeface="Trebuchet MS" pitchFamily="34" charset="-122"/>
                 <a:cs typeface="Trebuchet MS" pitchFamily="34" charset="-120"/>
               </a:rPr>
-              <a:t>freshly</a:t>
+              <a:t>refreshing</a:t>
             </a:r>
             <a:endParaRPr lang="en-US" sz="2800" dirty="0"/>
           </a:p>
@@ -13828,7 +13328,7 @@
         </p:nvSpPr>
         <p:spPr>
           <a:xfrm>
-            <a:off x="2938272" y="2258568"/>
+            <a:off x="2221992" y="2258568"/>
             <a:ext cx="1828800" cy="292608"/>
           </a:xfrm>
           <a:prstGeom prst="rect">
@@ -13837,11 +13337,11 @@
             </a:avLst>
           </a:prstGeom>
           <a:solidFill>
-            <a:srgbClr val="CCFBF1"/>
+            <a:srgbClr val="DDD6FE"/>
           </a:solidFill>
           <a:ln w="19050">
             <a:solidFill>
-              <a:srgbClr val="0D9488"/>
+              <a:srgbClr val="7C3AED"/>
             </a:solidFill>
             <a:prstDash val="solid"/>
           </a:ln>
@@ -13862,7 +13362,7 @@
         </p:nvSpPr>
         <p:spPr>
           <a:xfrm>
-            <a:off x="2938272" y="2258568"/>
+            <a:off x="2221992" y="2258568"/>
             <a:ext cx="1828800" cy="292608"/>
           </a:xfrm>
           <a:prstGeom prst="rect">
@@ -13881,13 +13381,13 @@
             <a:r>
               <a:rPr lang="en-US" sz="1300" b="1" dirty="0">
                 <a:solidFill>
-                  <a:srgbClr val="0F766E"/>
+                  <a:srgbClr val="4C1D95"/>
                 </a:solidFill>
                 <a:latin typeface="Trebuchet MS" pitchFamily="34" charset="0"/>
                 <a:ea typeface="Trebuchet MS" pitchFamily="34" charset="-122"/>
                 <a:cs typeface="Trebuchet MS" pitchFamily="34" charset="-120"/>
               </a:rPr>
-              <a:t>fresh</a:t>
+              <a:t>re</a:t>
             </a:r>
             <a:endParaRPr lang="en-US" sz="1300" dirty="0"/>
           </a:p>
@@ -13901,7 +13401,7 @@
         </p:nvSpPr>
         <p:spPr>
           <a:xfrm>
-            <a:off x="2938272" y="2569464"/>
+            <a:off x="2221992" y="2569464"/>
             <a:ext cx="1828800" cy="201168"/>
           </a:xfrm>
           <a:prstGeom prst="rect">
@@ -13926,7 +13426,7 @@
                 <a:ea typeface="Calibri" pitchFamily="34" charset="-122"/>
                 <a:cs typeface="Calibri" pitchFamily="34" charset="-120"/>
               </a:rPr>
-              <a:t>new, clean</a:t>
+              <a:t>again</a:t>
             </a:r>
             <a:endParaRPr lang="en-US" sz="850" dirty="0"/>
           </a:p>
@@ -13940,7 +13440,7 @@
         </p:nvSpPr>
         <p:spPr>
           <a:xfrm>
-            <a:off x="5803392" y="2258568"/>
+            <a:off x="4370832" y="2258568"/>
             <a:ext cx="1828800" cy="292608"/>
           </a:xfrm>
           <a:prstGeom prst="rect">
@@ -13949,11 +13449,11 @@
             </a:avLst>
           </a:prstGeom>
           <a:solidFill>
-            <a:srgbClr val="FCE7F3"/>
+            <a:srgbClr val="CCFBF1"/>
           </a:solidFill>
           <a:ln w="19050">
             <a:solidFill>
-              <a:srgbClr val="DB2777"/>
+              <a:srgbClr val="0D9488"/>
             </a:solidFill>
             <a:prstDash val="solid"/>
           </a:ln>
@@ -13974,7 +13474,7 @@
         </p:nvSpPr>
         <p:spPr>
           <a:xfrm>
-            <a:off x="5803392" y="2258568"/>
+            <a:off x="4370832" y="2258568"/>
             <a:ext cx="1828800" cy="292608"/>
           </a:xfrm>
           <a:prstGeom prst="rect">
@@ -13993,13 +13493,13 @@
             <a:r>
               <a:rPr lang="en-US" sz="1300" b="1" dirty="0">
                 <a:solidFill>
-                  <a:srgbClr val="9D174D"/>
+                  <a:srgbClr val="0F766E"/>
                 </a:solidFill>
                 <a:latin typeface="Trebuchet MS" pitchFamily="34" charset="0"/>
                 <a:ea typeface="Trebuchet MS" pitchFamily="34" charset="-122"/>
                 <a:cs typeface="Trebuchet MS" pitchFamily="34" charset="-120"/>
               </a:rPr>
-              <a:t>ly</a:t>
+              <a:t>fresh</a:t>
             </a:r>
             <a:endParaRPr lang="en-US" sz="1300" dirty="0"/>
           </a:p>
@@ -14013,7 +13513,7 @@
         </p:nvSpPr>
         <p:spPr>
           <a:xfrm>
-            <a:off x="5803392" y="2569464"/>
+            <a:off x="4370832" y="2569464"/>
             <a:ext cx="1828800" cy="201168"/>
           </a:xfrm>
           <a:prstGeom prst="rect">
@@ -14038,7 +13538,7 @@
                 <a:ea typeface="Calibri" pitchFamily="34" charset="-122"/>
                 <a:cs typeface="Calibri" pitchFamily="34" charset="-120"/>
               </a:rPr>
-              <a:t>in a certain way</a:t>
+              <a:t>new, clean, not stale</a:t>
             </a:r>
             <a:endParaRPr lang="en-US" sz="850" dirty="0"/>
           </a:p>
@@ -14047,6 +13547,118 @@
       <p:sp>
         <p:nvSpPr>
           <p:cNvPr id="22" name="Shape 20"/>
+          <p:cNvSpPr/>
+          <p:nvPr/>
+        </p:nvSpPr>
+        <p:spPr>
+          <a:xfrm>
+            <a:off x="6519672" y="2258568"/>
+            <a:ext cx="1828800" cy="292608"/>
+          </a:xfrm>
+          <a:prstGeom prst="rect">
+            <a:avLst>
+              <a:gd name="adj" fmla="val 25000"/>
+            </a:avLst>
+          </a:prstGeom>
+          <a:solidFill>
+            <a:srgbClr val="FCE7F3"/>
+          </a:solidFill>
+          <a:ln w="19050">
+            <a:solidFill>
+              <a:srgbClr val="DB2777"/>
+            </a:solidFill>
+            <a:prstDash val="solid"/>
+          </a:ln>
+          <a:effectLst>
+            <a:outerShdw sx="100000" sy="100000" kx="0" ky="0" algn="bl" rotWithShape="0" blurRad="101600" dist="38100" dir="8100000">
+              <a:srgbClr val="000000">
+                <a:alpha val="12000"/>
+              </a:srgbClr>
+            </a:outerShdw>
+          </a:effectLst>
+        </p:spPr>
+      </p:sp>
+      <p:sp>
+        <p:nvSpPr>
+          <p:cNvPr id="23" name="Text 21"/>
+          <p:cNvSpPr/>
+          <p:nvPr/>
+        </p:nvSpPr>
+        <p:spPr>
+          <a:xfrm>
+            <a:off x="6519672" y="2258568"/>
+            <a:ext cx="1828800" cy="292608"/>
+          </a:xfrm>
+          <a:prstGeom prst="rect">
+            <a:avLst/>
+          </a:prstGeom>
+          <a:noFill/>
+          <a:ln/>
+        </p:spPr>
+        <p:txBody>
+          <a:bodyPr wrap="square" lIns="0" tIns="0" rIns="0" bIns="0" rtlCol="0" anchor="ctr"/>
+          <a:lstStyle/>
+          <a:p>
+            <a:pPr algn="ctr" indent="0" marL="0">
+              <a:buNone/>
+            </a:pPr>
+            <a:r>
+              <a:rPr lang="en-US" sz="1300" b="1" dirty="0">
+                <a:solidFill>
+                  <a:srgbClr val="9D174D"/>
+                </a:solidFill>
+                <a:latin typeface="Trebuchet MS" pitchFamily="34" charset="0"/>
+                <a:ea typeface="Trebuchet MS" pitchFamily="34" charset="-122"/>
+                <a:cs typeface="Trebuchet MS" pitchFamily="34" charset="-120"/>
+              </a:rPr>
+              <a:t>ing</a:t>
+            </a:r>
+            <a:endParaRPr lang="en-US" sz="1300" dirty="0"/>
+          </a:p>
+        </p:txBody>
+      </p:sp>
+      <p:sp>
+        <p:nvSpPr>
+          <p:cNvPr id="24" name="Text 22"/>
+          <p:cNvSpPr/>
+          <p:nvPr/>
+        </p:nvSpPr>
+        <p:spPr>
+          <a:xfrm>
+            <a:off x="6519672" y="2569464"/>
+            <a:ext cx="1828800" cy="201168"/>
+          </a:xfrm>
+          <a:prstGeom prst="rect">
+            <a:avLst/>
+          </a:prstGeom>
+          <a:noFill/>
+          <a:ln/>
+        </p:spPr>
+        <p:txBody>
+          <a:bodyPr wrap="square" lIns="0" tIns="0" rIns="0" bIns="0" rtlCol="0" anchor="t"/>
+          <a:lstStyle/>
+          <a:p>
+            <a:pPr algn="ctr" indent="0" marL="0">
+              <a:buNone/>
+            </a:pPr>
+            <a:r>
+              <a:rPr lang="en-US" sz="850" dirty="0">
+                <a:solidFill>
+                  <a:srgbClr val="475569"/>
+                </a:solidFill>
+                <a:latin typeface="Calibri" pitchFamily="34" charset="0"/>
+                <a:ea typeface="Calibri" pitchFamily="34" charset="-122"/>
+                <a:cs typeface="Calibri" pitchFamily="34" charset="-120"/>
+              </a:rPr>
+              <a:t>action in progress</a:t>
+            </a:r>
+            <a:endParaRPr lang="en-US" sz="850" dirty="0"/>
+          </a:p>
+        </p:txBody>
+      </p:sp>
+      <p:sp>
+        <p:nvSpPr>
+          <p:cNvPr id="25" name="Shape 23"/>
           <p:cNvSpPr/>
           <p:nvPr/>
         </p:nvSpPr>
@@ -14073,7 +13685,7 @@
       </p:sp>
       <p:sp>
         <p:nvSpPr>
-          <p:cNvPr id="23" name="Text 21"/>
+          <p:cNvPr id="26" name="Text 24"/>
           <p:cNvSpPr/>
           <p:nvPr/>
         </p:nvSpPr>
@@ -14112,7 +13724,7 @@
       </p:sp>
       <p:sp>
         <p:nvSpPr>
-          <p:cNvPr id="24" name="Shape 22"/>
+          <p:cNvPr id="27" name="Shape 25"/>
           <p:cNvSpPr/>
           <p:nvPr/>
         </p:nvSpPr>
@@ -14139,13 +13751,13 @@
       </p:sp>
       <p:sp>
         <p:nvSpPr>
-          <p:cNvPr id="25" name="Shape 23"/>
-          <p:cNvSpPr/>
-          <p:nvPr/>
-        </p:nvSpPr>
-        <p:spPr>
-          <a:xfrm>
-            <a:off x="2999232" y="3364992"/>
+          <p:cNvPr id="28" name="Shape 26"/>
+          <p:cNvSpPr/>
+          <p:nvPr/>
+        </p:nvSpPr>
+        <p:spPr>
+          <a:xfrm>
+            <a:off x="2313432" y="3364992"/>
             <a:ext cx="1645920" cy="475488"/>
           </a:xfrm>
           <a:prstGeom prst="rect">
@@ -14166,13 +13778,13 @@
       </p:sp>
       <p:sp>
         <p:nvSpPr>
-          <p:cNvPr id="26" name="Text 24"/>
-          <p:cNvSpPr/>
-          <p:nvPr/>
-        </p:nvSpPr>
-        <p:spPr>
-          <a:xfrm>
-            <a:off x="2999232" y="3364992"/>
+          <p:cNvPr id="29" name="Text 27"/>
+          <p:cNvSpPr/>
+          <p:nvPr/>
+        </p:nvSpPr>
+        <p:spPr>
+          <a:xfrm>
+            <a:off x="2313432" y="3364992"/>
             <a:ext cx="1645920" cy="475488"/>
           </a:xfrm>
           <a:prstGeom prst="rect">
@@ -14197,7 +13809,7 @@
                 <a:ea typeface="Trebuchet MS" pitchFamily="34" charset="-122"/>
                 <a:cs typeface="Trebuchet MS" pitchFamily="34" charset="-120"/>
               </a:rPr>
-              <a:t>fresh</a:t>
+              <a:t>re</a:t>
             </a:r>
             <a:endParaRPr lang="en-US" sz="1400" dirty="0"/>
           </a:p>
@@ -14205,14 +13817,14 @@
       </p:sp>
       <p:sp>
         <p:nvSpPr>
-          <p:cNvPr id="27" name="Text 25"/>
-          <p:cNvSpPr/>
-          <p:nvPr/>
-        </p:nvSpPr>
-        <p:spPr>
-          <a:xfrm>
-            <a:off x="4645152" y="3364992"/>
-            <a:ext cx="1097280" cy="475488"/>
+          <p:cNvPr id="30" name="Text 28"/>
+          <p:cNvSpPr/>
+          <p:nvPr/>
+        </p:nvSpPr>
+        <p:spPr>
+          <a:xfrm>
+            <a:off x="3959352" y="3364992"/>
+            <a:ext cx="411480" cy="475488"/>
           </a:xfrm>
           <a:prstGeom prst="rect">
             <a:avLst/>
@@ -14244,13 +13856,13 @@
       </p:sp>
       <p:sp>
         <p:nvSpPr>
-          <p:cNvPr id="28" name="Shape 26"/>
-          <p:cNvSpPr/>
-          <p:nvPr/>
-        </p:nvSpPr>
-        <p:spPr>
-          <a:xfrm>
-            <a:off x="5742432" y="3364992"/>
+          <p:cNvPr id="31" name="Shape 29"/>
+          <p:cNvSpPr/>
+          <p:nvPr/>
+        </p:nvSpPr>
+        <p:spPr>
+          <a:xfrm>
+            <a:off x="4370832" y="3364992"/>
             <a:ext cx="1645920" cy="475488"/>
           </a:xfrm>
           <a:prstGeom prst="rect">
@@ -14271,13 +13883,13 @@
       </p:sp>
       <p:sp>
         <p:nvSpPr>
-          <p:cNvPr id="29" name="Text 27"/>
-          <p:cNvSpPr/>
-          <p:nvPr/>
-        </p:nvSpPr>
-        <p:spPr>
-          <a:xfrm>
-            <a:off x="5742432" y="3364992"/>
+          <p:cNvPr id="32" name="Text 30"/>
+          <p:cNvSpPr/>
+          <p:nvPr/>
+        </p:nvSpPr>
+        <p:spPr>
+          <a:xfrm>
+            <a:off x="4370832" y="3364992"/>
             <a:ext cx="1645920" cy="475488"/>
           </a:xfrm>
           <a:prstGeom prst="rect">
@@ -14302,7 +13914,7 @@
                 <a:ea typeface="Trebuchet MS" pitchFamily="34" charset="-122"/>
                 <a:cs typeface="Trebuchet MS" pitchFamily="34" charset="-120"/>
               </a:rPr>
-              <a:t>ly</a:t>
+              <a:t>fresh</a:t>
             </a:r>
             <a:endParaRPr lang="en-US" sz="1400" dirty="0"/>
           </a:p>
@@ -14310,7 +13922,112 @@
       </p:sp>
       <p:sp>
         <p:nvSpPr>
-          <p:cNvPr id="30" name="Shape 28"/>
+          <p:cNvPr id="33" name="Text 31"/>
+          <p:cNvSpPr/>
+          <p:nvPr/>
+        </p:nvSpPr>
+        <p:spPr>
+          <a:xfrm>
+            <a:off x="6016752" y="3364992"/>
+            <a:ext cx="411480" cy="475488"/>
+          </a:xfrm>
+          <a:prstGeom prst="rect">
+            <a:avLst/>
+          </a:prstGeom>
+          <a:noFill/>
+          <a:ln/>
+        </p:spPr>
+        <p:txBody>
+          <a:bodyPr wrap="square" lIns="0" tIns="0" rIns="0" bIns="0" rtlCol="0" anchor="ctr"/>
+          <a:lstStyle/>
+          <a:p>
+            <a:pPr algn="ctr" indent="0" marL="0">
+              <a:buNone/>
+            </a:pPr>
+            <a:r>
+              <a:rPr lang="en-US" sz="1600" b="1" dirty="0">
+                <a:solidFill>
+                  <a:srgbClr val="0D9488"/>
+                </a:solidFill>
+                <a:latin typeface="Trebuchet MS" pitchFamily="34" charset="0"/>
+                <a:ea typeface="Trebuchet MS" pitchFamily="34" charset="-122"/>
+                <a:cs typeface="Trebuchet MS" pitchFamily="34" charset="-120"/>
+              </a:rPr>
+              <a:t>·</a:t>
+            </a:r>
+            <a:endParaRPr lang="en-US" sz="1600" dirty="0"/>
+          </a:p>
+        </p:txBody>
+      </p:sp>
+      <p:sp>
+        <p:nvSpPr>
+          <p:cNvPr id="34" name="Shape 32"/>
+          <p:cNvSpPr/>
+          <p:nvPr/>
+        </p:nvSpPr>
+        <p:spPr>
+          <a:xfrm>
+            <a:off x="6428232" y="3364992"/>
+            <a:ext cx="1645920" cy="475488"/>
+          </a:xfrm>
+          <a:prstGeom prst="rect">
+            <a:avLst>
+              <a:gd name="adj" fmla="val 9615"/>
+            </a:avLst>
+          </a:prstGeom>
+          <a:solidFill>
+            <a:srgbClr val="FFFFFF"/>
+          </a:solidFill>
+          <a:ln w="12700">
+            <a:solidFill>
+              <a:srgbClr val="0D9488"/>
+            </a:solidFill>
+            <a:prstDash val="solid"/>
+          </a:ln>
+        </p:spPr>
+      </p:sp>
+      <p:sp>
+        <p:nvSpPr>
+          <p:cNvPr id="35" name="Text 33"/>
+          <p:cNvSpPr/>
+          <p:nvPr/>
+        </p:nvSpPr>
+        <p:spPr>
+          <a:xfrm>
+            <a:off x="6428232" y="3364992"/>
+            <a:ext cx="1645920" cy="475488"/>
+          </a:xfrm>
+          <a:prstGeom prst="rect">
+            <a:avLst/>
+          </a:prstGeom>
+          <a:noFill/>
+          <a:ln/>
+        </p:spPr>
+        <p:txBody>
+          <a:bodyPr wrap="square" lIns="0" tIns="0" rIns="0" bIns="0" rtlCol="0" anchor="ctr"/>
+          <a:lstStyle/>
+          <a:p>
+            <a:pPr algn="ctr" indent="0" marL="0">
+              <a:buNone/>
+            </a:pPr>
+            <a:r>
+              <a:rPr lang="en-US" sz="1400" b="1" dirty="0">
+                <a:solidFill>
+                  <a:srgbClr val="0D9488"/>
+                </a:solidFill>
+                <a:latin typeface="Trebuchet MS" pitchFamily="34" charset="0"/>
+                <a:ea typeface="Trebuchet MS" pitchFamily="34" charset="-122"/>
+                <a:cs typeface="Trebuchet MS" pitchFamily="34" charset="-120"/>
+              </a:rPr>
+              <a:t>ing</a:t>
+            </a:r>
+            <a:endParaRPr lang="en-US" sz="1400" dirty="0"/>
+          </a:p>
+        </p:txBody>
+      </p:sp>
+      <p:sp>
+        <p:nvSpPr>
+          <p:cNvPr id="36" name="Shape 34"/>
           <p:cNvSpPr/>
           <p:nvPr/>
         </p:nvSpPr>
@@ -14337,7 +14054,7 @@
       </p:sp>
       <p:sp>
         <p:nvSpPr>
-          <p:cNvPr id="31" name="Text 29"/>
+          <p:cNvPr id="37" name="Text 35"/>
           <p:cNvSpPr/>
           <p:nvPr/>
         </p:nvSpPr>
@@ -14376,7 +14093,7 @@
       </p:sp>
       <p:sp>
         <p:nvSpPr>
-          <p:cNvPr id="32" name="Shape 30"/>
+          <p:cNvPr id="38" name="Shape 36"/>
           <p:cNvSpPr/>
           <p:nvPr/>
         </p:nvSpPr>
@@ -14403,7 +14120,7 @@
       </p:sp>
       <p:sp>
         <p:nvSpPr>
-          <p:cNvPr id="33" name="Text 31"/>
+          <p:cNvPr id="39" name="Text 37"/>
           <p:cNvSpPr/>
           <p:nvPr/>
         </p:nvSpPr>
@@ -15130,7 +14847,7 @@
                 <a:ea typeface="Trebuchet MS" pitchFamily="34" charset="-122"/>
                 <a:cs typeface="Trebuchet MS" pitchFamily="34" charset="-120"/>
               </a:rPr>
-              <a:t>freshly</a:t>
+              <a:t>refreshing</a:t>
             </a:r>
             <a:endParaRPr lang="en-US" sz="2800" dirty="0"/>
           </a:p>
@@ -15210,7 +14927,7 @@
         </p:nvSpPr>
         <p:spPr>
           <a:xfrm>
-            <a:off x="2938272" y="2258568"/>
+            <a:off x="2221992" y="2258568"/>
             <a:ext cx="1828800" cy="292608"/>
           </a:xfrm>
           <a:prstGeom prst="rect">
@@ -15219,11 +14936,11 @@
             </a:avLst>
           </a:prstGeom>
           <a:solidFill>
-            <a:srgbClr val="CCFBF1"/>
+            <a:srgbClr val="DDD6FE"/>
           </a:solidFill>
           <a:ln w="19050">
             <a:solidFill>
-              <a:srgbClr val="0D9488"/>
+              <a:srgbClr val="7C3AED"/>
             </a:solidFill>
             <a:prstDash val="solid"/>
           </a:ln>
@@ -15244,7 +14961,7 @@
         </p:nvSpPr>
         <p:spPr>
           <a:xfrm>
-            <a:off x="2938272" y="2258568"/>
+            <a:off x="2221992" y="2258568"/>
             <a:ext cx="1828800" cy="292608"/>
           </a:xfrm>
           <a:prstGeom prst="rect">
@@ -15263,13 +14980,13 @@
             <a:r>
               <a:rPr lang="en-US" sz="1300" b="1" dirty="0">
                 <a:solidFill>
-                  <a:srgbClr val="0F766E"/>
+                  <a:srgbClr val="4C1D95"/>
                 </a:solidFill>
                 <a:latin typeface="Trebuchet MS" pitchFamily="34" charset="0"/>
                 <a:ea typeface="Trebuchet MS" pitchFamily="34" charset="-122"/>
                 <a:cs typeface="Trebuchet MS" pitchFamily="34" charset="-120"/>
               </a:rPr>
-              <a:t>fresh</a:t>
+              <a:t>re</a:t>
             </a:r>
             <a:endParaRPr lang="en-US" sz="1300" dirty="0"/>
           </a:p>
@@ -15283,7 +15000,7 @@
         </p:nvSpPr>
         <p:spPr>
           <a:xfrm>
-            <a:off x="2938272" y="2569464"/>
+            <a:off x="2221992" y="2569464"/>
             <a:ext cx="1828800" cy="201168"/>
           </a:xfrm>
           <a:prstGeom prst="rect">
@@ -15308,7 +15025,7 @@
                 <a:ea typeface="Calibri" pitchFamily="34" charset="-122"/>
                 <a:cs typeface="Calibri" pitchFamily="34" charset="-120"/>
               </a:rPr>
-              <a:t>new, clean</a:t>
+              <a:t>again</a:t>
             </a:r>
             <a:endParaRPr lang="en-US" sz="850" dirty="0"/>
           </a:p>
@@ -15322,7 +15039,7 @@
         </p:nvSpPr>
         <p:spPr>
           <a:xfrm>
-            <a:off x="5803392" y="2258568"/>
+            <a:off x="4370832" y="2258568"/>
             <a:ext cx="1828800" cy="292608"/>
           </a:xfrm>
           <a:prstGeom prst="rect">
@@ -15331,11 +15048,11 @@
             </a:avLst>
           </a:prstGeom>
           <a:solidFill>
-            <a:srgbClr val="FCE7F3"/>
+            <a:srgbClr val="CCFBF1"/>
           </a:solidFill>
           <a:ln w="19050">
             <a:solidFill>
-              <a:srgbClr val="DB2777"/>
+              <a:srgbClr val="0D9488"/>
             </a:solidFill>
             <a:prstDash val="solid"/>
           </a:ln>
@@ -15356,7 +15073,7 @@
         </p:nvSpPr>
         <p:spPr>
           <a:xfrm>
-            <a:off x="5803392" y="2258568"/>
+            <a:off x="4370832" y="2258568"/>
             <a:ext cx="1828800" cy="292608"/>
           </a:xfrm>
           <a:prstGeom prst="rect">
@@ -15375,13 +15092,13 @@
             <a:r>
               <a:rPr lang="en-US" sz="1300" b="1" dirty="0">
                 <a:solidFill>
-                  <a:srgbClr val="9D174D"/>
+                  <a:srgbClr val="0F766E"/>
                 </a:solidFill>
                 <a:latin typeface="Trebuchet MS" pitchFamily="34" charset="0"/>
                 <a:ea typeface="Trebuchet MS" pitchFamily="34" charset="-122"/>
                 <a:cs typeface="Trebuchet MS" pitchFamily="34" charset="-120"/>
               </a:rPr>
-              <a:t>ly</a:t>
+              <a:t>fresh</a:t>
             </a:r>
             <a:endParaRPr lang="en-US" sz="1300" dirty="0"/>
           </a:p>
@@ -15395,7 +15112,7 @@
         </p:nvSpPr>
         <p:spPr>
           <a:xfrm>
-            <a:off x="5803392" y="2569464"/>
+            <a:off x="4370832" y="2569464"/>
             <a:ext cx="1828800" cy="201168"/>
           </a:xfrm>
           <a:prstGeom prst="rect">
@@ -15420,7 +15137,7 @@
                 <a:ea typeface="Calibri" pitchFamily="34" charset="-122"/>
                 <a:cs typeface="Calibri" pitchFamily="34" charset="-120"/>
               </a:rPr>
-              <a:t>in a certain way</a:t>
+              <a:t>new, clean, not stale</a:t>
             </a:r>
             <a:endParaRPr lang="en-US" sz="850" dirty="0"/>
           </a:p>
@@ -15429,6 +15146,118 @@
       <p:sp>
         <p:nvSpPr>
           <p:cNvPr id="22" name="Shape 20"/>
+          <p:cNvSpPr/>
+          <p:nvPr/>
+        </p:nvSpPr>
+        <p:spPr>
+          <a:xfrm>
+            <a:off x="6519672" y="2258568"/>
+            <a:ext cx="1828800" cy="292608"/>
+          </a:xfrm>
+          <a:prstGeom prst="rect">
+            <a:avLst>
+              <a:gd name="adj" fmla="val 25000"/>
+            </a:avLst>
+          </a:prstGeom>
+          <a:solidFill>
+            <a:srgbClr val="FCE7F3"/>
+          </a:solidFill>
+          <a:ln w="19050">
+            <a:solidFill>
+              <a:srgbClr val="DB2777"/>
+            </a:solidFill>
+            <a:prstDash val="solid"/>
+          </a:ln>
+          <a:effectLst>
+            <a:outerShdw sx="100000" sy="100000" kx="0" ky="0" algn="bl" rotWithShape="0" blurRad="101600" dist="38100" dir="8100000">
+              <a:srgbClr val="000000">
+                <a:alpha val="12000"/>
+              </a:srgbClr>
+            </a:outerShdw>
+          </a:effectLst>
+        </p:spPr>
+      </p:sp>
+      <p:sp>
+        <p:nvSpPr>
+          <p:cNvPr id="23" name="Text 21"/>
+          <p:cNvSpPr/>
+          <p:nvPr/>
+        </p:nvSpPr>
+        <p:spPr>
+          <a:xfrm>
+            <a:off x="6519672" y="2258568"/>
+            <a:ext cx="1828800" cy="292608"/>
+          </a:xfrm>
+          <a:prstGeom prst="rect">
+            <a:avLst/>
+          </a:prstGeom>
+          <a:noFill/>
+          <a:ln/>
+        </p:spPr>
+        <p:txBody>
+          <a:bodyPr wrap="square" lIns="0" tIns="0" rIns="0" bIns="0" rtlCol="0" anchor="ctr"/>
+          <a:lstStyle/>
+          <a:p>
+            <a:pPr algn="ctr" indent="0" marL="0">
+              <a:buNone/>
+            </a:pPr>
+            <a:r>
+              <a:rPr lang="en-US" sz="1300" b="1" dirty="0">
+                <a:solidFill>
+                  <a:srgbClr val="9D174D"/>
+                </a:solidFill>
+                <a:latin typeface="Trebuchet MS" pitchFamily="34" charset="0"/>
+                <a:ea typeface="Trebuchet MS" pitchFamily="34" charset="-122"/>
+                <a:cs typeface="Trebuchet MS" pitchFamily="34" charset="-120"/>
+              </a:rPr>
+              <a:t>ing</a:t>
+            </a:r>
+            <a:endParaRPr lang="en-US" sz="1300" dirty="0"/>
+          </a:p>
+        </p:txBody>
+      </p:sp>
+      <p:sp>
+        <p:nvSpPr>
+          <p:cNvPr id="24" name="Text 22"/>
+          <p:cNvSpPr/>
+          <p:nvPr/>
+        </p:nvSpPr>
+        <p:spPr>
+          <a:xfrm>
+            <a:off x="6519672" y="2569464"/>
+            <a:ext cx="1828800" cy="201168"/>
+          </a:xfrm>
+          <a:prstGeom prst="rect">
+            <a:avLst/>
+          </a:prstGeom>
+          <a:noFill/>
+          <a:ln/>
+        </p:spPr>
+        <p:txBody>
+          <a:bodyPr wrap="square" lIns="0" tIns="0" rIns="0" bIns="0" rtlCol="0" anchor="t"/>
+          <a:lstStyle/>
+          <a:p>
+            <a:pPr algn="ctr" indent="0" marL="0">
+              <a:buNone/>
+            </a:pPr>
+            <a:r>
+              <a:rPr lang="en-US" sz="850" dirty="0">
+                <a:solidFill>
+                  <a:srgbClr val="475569"/>
+                </a:solidFill>
+                <a:latin typeface="Calibri" pitchFamily="34" charset="0"/>
+                <a:ea typeface="Calibri" pitchFamily="34" charset="-122"/>
+                <a:cs typeface="Calibri" pitchFamily="34" charset="-120"/>
+              </a:rPr>
+              <a:t>action in progress</a:t>
+            </a:r>
+            <a:endParaRPr lang="en-US" sz="850" dirty="0"/>
+          </a:p>
+        </p:txBody>
+      </p:sp>
+      <p:sp>
+        <p:nvSpPr>
+          <p:cNvPr id="25" name="Shape 23"/>
           <p:cNvSpPr/>
           <p:nvPr/>
         </p:nvSpPr>
@@ -15455,7 +15284,7 @@
       </p:sp>
       <p:sp>
         <p:nvSpPr>
-          <p:cNvPr id="23" name="Text 21"/>
+          <p:cNvPr id="26" name="Text 24"/>
           <p:cNvSpPr/>
           <p:nvPr/>
         </p:nvSpPr>
@@ -15494,7 +15323,7 @@
       </p:sp>
       <p:sp>
         <p:nvSpPr>
-          <p:cNvPr id="24" name="Shape 22"/>
+          <p:cNvPr id="27" name="Shape 25"/>
           <p:cNvSpPr/>
           <p:nvPr/>
         </p:nvSpPr>
@@ -15521,13 +15350,13 @@
       </p:sp>
       <p:sp>
         <p:nvSpPr>
-          <p:cNvPr id="25" name="Shape 23"/>
-          <p:cNvSpPr/>
-          <p:nvPr/>
-        </p:nvSpPr>
-        <p:spPr>
-          <a:xfrm>
-            <a:off x="2999232" y="3364992"/>
+          <p:cNvPr id="28" name="Shape 26"/>
+          <p:cNvSpPr/>
+          <p:nvPr/>
+        </p:nvSpPr>
+        <p:spPr>
+          <a:xfrm>
+            <a:off x="2313432" y="3364992"/>
             <a:ext cx="1645920" cy="475488"/>
           </a:xfrm>
           <a:prstGeom prst="rect">
@@ -15548,13 +15377,13 @@
       </p:sp>
       <p:sp>
         <p:nvSpPr>
-          <p:cNvPr id="26" name="Text 24"/>
-          <p:cNvSpPr/>
-          <p:nvPr/>
-        </p:nvSpPr>
-        <p:spPr>
-          <a:xfrm>
-            <a:off x="2999232" y="3364992"/>
+          <p:cNvPr id="29" name="Text 27"/>
+          <p:cNvSpPr/>
+          <p:nvPr/>
+        </p:nvSpPr>
+        <p:spPr>
+          <a:xfrm>
+            <a:off x="2313432" y="3364992"/>
             <a:ext cx="1645920" cy="475488"/>
           </a:xfrm>
           <a:prstGeom prst="rect">
@@ -15579,7 +15408,7 @@
                 <a:ea typeface="Trebuchet MS" pitchFamily="34" charset="-122"/>
                 <a:cs typeface="Trebuchet MS" pitchFamily="34" charset="-120"/>
               </a:rPr>
-              <a:t>fresh</a:t>
+              <a:t>re</a:t>
             </a:r>
             <a:endParaRPr lang="en-US" sz="1400" dirty="0"/>
           </a:p>
@@ -15587,14 +15416,14 @@
       </p:sp>
       <p:sp>
         <p:nvSpPr>
-          <p:cNvPr id="27" name="Text 25"/>
-          <p:cNvSpPr/>
-          <p:nvPr/>
-        </p:nvSpPr>
-        <p:spPr>
-          <a:xfrm>
-            <a:off x="4645152" y="3364992"/>
-            <a:ext cx="1097280" cy="475488"/>
+          <p:cNvPr id="30" name="Text 28"/>
+          <p:cNvSpPr/>
+          <p:nvPr/>
+        </p:nvSpPr>
+        <p:spPr>
+          <a:xfrm>
+            <a:off x="3959352" y="3364992"/>
+            <a:ext cx="411480" cy="475488"/>
           </a:xfrm>
           <a:prstGeom prst="rect">
             <a:avLst/>
@@ -15626,13 +15455,13 @@
       </p:sp>
       <p:sp>
         <p:nvSpPr>
-          <p:cNvPr id="28" name="Shape 26"/>
-          <p:cNvSpPr/>
-          <p:nvPr/>
-        </p:nvSpPr>
-        <p:spPr>
-          <a:xfrm>
-            <a:off x="5742432" y="3364992"/>
+          <p:cNvPr id="31" name="Shape 29"/>
+          <p:cNvSpPr/>
+          <p:nvPr/>
+        </p:nvSpPr>
+        <p:spPr>
+          <a:xfrm>
+            <a:off x="4370832" y="3364992"/>
             <a:ext cx="1645920" cy="475488"/>
           </a:xfrm>
           <a:prstGeom prst="rect">
@@ -15653,13 +15482,13 @@
       </p:sp>
       <p:sp>
         <p:nvSpPr>
-          <p:cNvPr id="29" name="Text 27"/>
-          <p:cNvSpPr/>
-          <p:nvPr/>
-        </p:nvSpPr>
-        <p:spPr>
-          <a:xfrm>
-            <a:off x="5742432" y="3364992"/>
+          <p:cNvPr id="32" name="Text 30"/>
+          <p:cNvSpPr/>
+          <p:nvPr/>
+        </p:nvSpPr>
+        <p:spPr>
+          <a:xfrm>
+            <a:off x="4370832" y="3364992"/>
             <a:ext cx="1645920" cy="475488"/>
           </a:xfrm>
           <a:prstGeom prst="rect">
@@ -15684,7 +15513,7 @@
                 <a:ea typeface="Trebuchet MS" pitchFamily="34" charset="-122"/>
                 <a:cs typeface="Trebuchet MS" pitchFamily="34" charset="-120"/>
               </a:rPr>
-              <a:t>ly</a:t>
+              <a:t>fresh</a:t>
             </a:r>
             <a:endParaRPr lang="en-US" sz="1400" dirty="0"/>
           </a:p>
@@ -15692,7 +15521,112 @@
       </p:sp>
       <p:sp>
         <p:nvSpPr>
-          <p:cNvPr id="30" name="Shape 28"/>
+          <p:cNvPr id="33" name="Text 31"/>
+          <p:cNvSpPr/>
+          <p:nvPr/>
+        </p:nvSpPr>
+        <p:spPr>
+          <a:xfrm>
+            <a:off x="6016752" y="3364992"/>
+            <a:ext cx="411480" cy="475488"/>
+          </a:xfrm>
+          <a:prstGeom prst="rect">
+            <a:avLst/>
+          </a:prstGeom>
+          <a:noFill/>
+          <a:ln/>
+        </p:spPr>
+        <p:txBody>
+          <a:bodyPr wrap="square" lIns="0" tIns="0" rIns="0" bIns="0" rtlCol="0" anchor="ctr"/>
+          <a:lstStyle/>
+          <a:p>
+            <a:pPr algn="ctr" indent="0" marL="0">
+              <a:buNone/>
+            </a:pPr>
+            <a:r>
+              <a:rPr lang="en-US" sz="1600" b="1" dirty="0">
+                <a:solidFill>
+                  <a:srgbClr val="0D9488"/>
+                </a:solidFill>
+                <a:latin typeface="Trebuchet MS" pitchFamily="34" charset="0"/>
+                <a:ea typeface="Trebuchet MS" pitchFamily="34" charset="-122"/>
+                <a:cs typeface="Trebuchet MS" pitchFamily="34" charset="-120"/>
+              </a:rPr>
+              <a:t>·</a:t>
+            </a:r>
+            <a:endParaRPr lang="en-US" sz="1600" dirty="0"/>
+          </a:p>
+        </p:txBody>
+      </p:sp>
+      <p:sp>
+        <p:nvSpPr>
+          <p:cNvPr id="34" name="Shape 32"/>
+          <p:cNvSpPr/>
+          <p:nvPr/>
+        </p:nvSpPr>
+        <p:spPr>
+          <a:xfrm>
+            <a:off x="6428232" y="3364992"/>
+            <a:ext cx="1645920" cy="475488"/>
+          </a:xfrm>
+          <a:prstGeom prst="rect">
+            <a:avLst>
+              <a:gd name="adj" fmla="val 9615"/>
+            </a:avLst>
+          </a:prstGeom>
+          <a:solidFill>
+            <a:srgbClr val="FFFFFF"/>
+          </a:solidFill>
+          <a:ln w="12700">
+            <a:solidFill>
+              <a:srgbClr val="0D9488"/>
+            </a:solidFill>
+            <a:prstDash val="solid"/>
+          </a:ln>
+        </p:spPr>
+      </p:sp>
+      <p:sp>
+        <p:nvSpPr>
+          <p:cNvPr id="35" name="Text 33"/>
+          <p:cNvSpPr/>
+          <p:nvPr/>
+        </p:nvSpPr>
+        <p:spPr>
+          <a:xfrm>
+            <a:off x="6428232" y="3364992"/>
+            <a:ext cx="1645920" cy="475488"/>
+          </a:xfrm>
+          <a:prstGeom prst="rect">
+            <a:avLst/>
+          </a:prstGeom>
+          <a:noFill/>
+          <a:ln/>
+        </p:spPr>
+        <p:txBody>
+          <a:bodyPr wrap="square" lIns="0" tIns="0" rIns="0" bIns="0" rtlCol="0" anchor="ctr"/>
+          <a:lstStyle/>
+          <a:p>
+            <a:pPr algn="ctr" indent="0" marL="0">
+              <a:buNone/>
+            </a:pPr>
+            <a:r>
+              <a:rPr lang="en-US" sz="1400" b="1" dirty="0">
+                <a:solidFill>
+                  <a:srgbClr val="0D9488"/>
+                </a:solidFill>
+                <a:latin typeface="Trebuchet MS" pitchFamily="34" charset="0"/>
+                <a:ea typeface="Trebuchet MS" pitchFamily="34" charset="-122"/>
+                <a:cs typeface="Trebuchet MS" pitchFamily="34" charset="-120"/>
+              </a:rPr>
+              <a:t>ing</a:t>
+            </a:r>
+            <a:endParaRPr lang="en-US" sz="1400" dirty="0"/>
+          </a:p>
+        </p:txBody>
+      </p:sp>
+      <p:sp>
+        <p:nvSpPr>
+          <p:cNvPr id="36" name="Shape 34"/>
           <p:cNvSpPr/>
           <p:nvPr/>
         </p:nvSpPr>
@@ -15719,7 +15653,7 @@
       </p:sp>
       <p:sp>
         <p:nvSpPr>
-          <p:cNvPr id="31" name="Text 29"/>
+          <p:cNvPr id="37" name="Text 35"/>
           <p:cNvSpPr/>
           <p:nvPr/>
         </p:nvSpPr>
@@ -15758,7 +15692,7 @@
       </p:sp>
       <p:sp>
         <p:nvSpPr>
-          <p:cNvPr id="32" name="Shape 30"/>
+          <p:cNvPr id="38" name="Shape 36"/>
           <p:cNvSpPr/>
           <p:nvPr/>
         </p:nvSpPr>
@@ -15785,13 +15719,13 @@
       </p:sp>
       <p:sp>
         <p:nvSpPr>
-          <p:cNvPr id="33" name="Shape 31"/>
-          <p:cNvSpPr/>
-          <p:nvPr/>
-        </p:nvSpPr>
-        <p:spPr>
-          <a:xfrm>
-            <a:off x="2254649" y="4169664"/>
+          <p:cNvPr id="39" name="Shape 37"/>
+          <p:cNvSpPr/>
+          <p:nvPr/>
+        </p:nvSpPr>
+        <p:spPr>
+          <a:xfrm>
+            <a:off x="2023872" y="4169664"/>
             <a:ext cx="685800" cy="475488"/>
           </a:xfrm>
           <a:prstGeom prst="rect">
@@ -15812,13 +15746,13 @@
       </p:sp>
       <p:sp>
         <p:nvSpPr>
-          <p:cNvPr id="34" name="Text 32"/>
-          <p:cNvSpPr/>
-          <p:nvPr/>
-        </p:nvSpPr>
-        <p:spPr>
-          <a:xfrm>
-            <a:off x="2254649" y="4169664"/>
+          <p:cNvPr id="40" name="Text 38"/>
+          <p:cNvSpPr/>
+          <p:nvPr/>
+        </p:nvSpPr>
+        <p:spPr>
+          <a:xfrm>
+            <a:off x="2023872" y="4169664"/>
             <a:ext cx="685800" cy="475488"/>
           </a:xfrm>
           <a:prstGeom prst="rect">
@@ -15843,7 +15777,7 @@
                 <a:ea typeface="Trebuchet MS" pitchFamily="34" charset="-122"/>
                 <a:cs typeface="Trebuchet MS" pitchFamily="34" charset="-120"/>
               </a:rPr>
-              <a:t>f</a:t>
+              <a:t>r</a:t>
             </a:r>
             <a:endParaRPr lang="en-US" sz="900" dirty="0"/>
           </a:p>
@@ -15851,13 +15785,13 @@
       </p:sp>
       <p:sp>
         <p:nvSpPr>
-          <p:cNvPr id="35" name="Shape 33"/>
-          <p:cNvSpPr/>
-          <p:nvPr/>
-        </p:nvSpPr>
-        <p:spPr>
-          <a:xfrm>
-            <a:off x="3293146" y="4169664"/>
+          <p:cNvPr id="41" name="Shape 39"/>
+          <p:cNvSpPr/>
+          <p:nvPr/>
+        </p:nvSpPr>
+        <p:spPr>
+          <a:xfrm>
+            <a:off x="2831592" y="4169664"/>
             <a:ext cx="685800" cy="475488"/>
           </a:xfrm>
           <a:prstGeom prst="rect">
@@ -15878,13 +15812,13 @@
       </p:sp>
       <p:sp>
         <p:nvSpPr>
-          <p:cNvPr id="36" name="Text 34"/>
-          <p:cNvSpPr/>
-          <p:nvPr/>
-        </p:nvSpPr>
-        <p:spPr>
-          <a:xfrm>
-            <a:off x="3293146" y="4169664"/>
+          <p:cNvPr id="42" name="Text 40"/>
+          <p:cNvSpPr/>
+          <p:nvPr/>
+        </p:nvSpPr>
+        <p:spPr>
+          <a:xfrm>
+            <a:off x="2831592" y="4169664"/>
             <a:ext cx="685800" cy="475488"/>
           </a:xfrm>
           <a:prstGeom prst="rect">
@@ -15909,7 +15843,7 @@
                 <a:ea typeface="Trebuchet MS" pitchFamily="34" charset="-122"/>
                 <a:cs typeface="Trebuchet MS" pitchFamily="34" charset="-120"/>
               </a:rPr>
-              <a:t>r</a:t>
+              <a:t>e</a:t>
             </a:r>
             <a:endParaRPr lang="en-US" sz="900" dirty="0"/>
           </a:p>
@@ -15917,13 +15851,13 @@
       </p:sp>
       <p:sp>
         <p:nvSpPr>
-          <p:cNvPr id="37" name="Shape 35"/>
-          <p:cNvSpPr/>
-          <p:nvPr/>
-        </p:nvSpPr>
-        <p:spPr>
-          <a:xfrm>
-            <a:off x="4331643" y="4169664"/>
+          <p:cNvPr id="43" name="Shape 41"/>
+          <p:cNvSpPr/>
+          <p:nvPr/>
+        </p:nvSpPr>
+        <p:spPr>
+          <a:xfrm>
+            <a:off x="3639312" y="4169664"/>
             <a:ext cx="685800" cy="475488"/>
           </a:xfrm>
           <a:prstGeom prst="rect">
@@ -15944,13 +15878,13 @@
       </p:sp>
       <p:sp>
         <p:nvSpPr>
-          <p:cNvPr id="38" name="Text 36"/>
-          <p:cNvSpPr/>
-          <p:nvPr/>
-        </p:nvSpPr>
-        <p:spPr>
-          <a:xfrm>
-            <a:off x="4331643" y="4169664"/>
+          <p:cNvPr id="44" name="Text 42"/>
+          <p:cNvSpPr/>
+          <p:nvPr/>
+        </p:nvSpPr>
+        <p:spPr>
+          <a:xfrm>
+            <a:off x="3639312" y="4169664"/>
             <a:ext cx="685800" cy="475488"/>
           </a:xfrm>
           <a:prstGeom prst="rect">
@@ -15975,7 +15909,7 @@
                 <a:ea typeface="Trebuchet MS" pitchFamily="34" charset="-122"/>
                 <a:cs typeface="Trebuchet MS" pitchFamily="34" charset="-120"/>
               </a:rPr>
-              <a:t>e</a:t>
+              <a:t>f</a:t>
             </a:r>
             <a:endParaRPr lang="en-US" sz="900" dirty="0"/>
           </a:p>
@@ -15983,13 +15917,13 @@
       </p:sp>
       <p:sp>
         <p:nvSpPr>
-          <p:cNvPr id="39" name="Shape 37"/>
-          <p:cNvSpPr/>
-          <p:nvPr/>
-        </p:nvSpPr>
-        <p:spPr>
-          <a:xfrm>
-            <a:off x="5370141" y="4169664"/>
+          <p:cNvPr id="45" name="Shape 43"/>
+          <p:cNvSpPr/>
+          <p:nvPr/>
+        </p:nvSpPr>
+        <p:spPr>
+          <a:xfrm>
+            <a:off x="4447032" y="4169664"/>
             <a:ext cx="685800" cy="475488"/>
           </a:xfrm>
           <a:prstGeom prst="rect">
@@ -16010,13 +15944,13 @@
       </p:sp>
       <p:sp>
         <p:nvSpPr>
-          <p:cNvPr id="40" name="Text 38"/>
-          <p:cNvSpPr/>
-          <p:nvPr/>
-        </p:nvSpPr>
-        <p:spPr>
-          <a:xfrm>
-            <a:off x="5370141" y="4169664"/>
+          <p:cNvPr id="46" name="Text 44"/>
+          <p:cNvSpPr/>
+          <p:nvPr/>
+        </p:nvSpPr>
+        <p:spPr>
+          <a:xfrm>
+            <a:off x="4447032" y="4169664"/>
             <a:ext cx="685800" cy="475488"/>
           </a:xfrm>
           <a:prstGeom prst="rect">
@@ -16041,7 +15975,7 @@
                 <a:ea typeface="Trebuchet MS" pitchFamily="34" charset="-122"/>
                 <a:cs typeface="Trebuchet MS" pitchFamily="34" charset="-120"/>
               </a:rPr>
-              <a:t>sh</a:t>
+              <a:t>r</a:t>
             </a:r>
             <a:endParaRPr lang="en-US" sz="900" dirty="0"/>
           </a:p>
@@ -16049,13 +15983,13 @@
       </p:sp>
       <p:sp>
         <p:nvSpPr>
-          <p:cNvPr id="41" name="Shape 39"/>
-          <p:cNvSpPr/>
-          <p:nvPr/>
-        </p:nvSpPr>
-        <p:spPr>
-          <a:xfrm>
-            <a:off x="6408638" y="4169664"/>
+          <p:cNvPr id="47" name="Shape 45"/>
+          <p:cNvSpPr/>
+          <p:nvPr/>
+        </p:nvSpPr>
+        <p:spPr>
+          <a:xfrm>
+            <a:off x="5254752" y="4169664"/>
             <a:ext cx="685800" cy="475488"/>
           </a:xfrm>
           <a:prstGeom prst="rect">
@@ -16076,13 +16010,13 @@
       </p:sp>
       <p:sp>
         <p:nvSpPr>
-          <p:cNvPr id="42" name="Text 40"/>
-          <p:cNvSpPr/>
-          <p:nvPr/>
-        </p:nvSpPr>
-        <p:spPr>
-          <a:xfrm>
-            <a:off x="6408638" y="4169664"/>
+          <p:cNvPr id="48" name="Text 46"/>
+          <p:cNvSpPr/>
+          <p:nvPr/>
+        </p:nvSpPr>
+        <p:spPr>
+          <a:xfrm>
+            <a:off x="5254752" y="4169664"/>
             <a:ext cx="685800" cy="475488"/>
           </a:xfrm>
           <a:prstGeom prst="rect">
@@ -16107,7 +16041,7 @@
                 <a:ea typeface="Trebuchet MS" pitchFamily="34" charset="-122"/>
                 <a:cs typeface="Trebuchet MS" pitchFamily="34" charset="-120"/>
               </a:rPr>
-              <a:t>l</a:t>
+              <a:t>e</a:t>
             </a:r>
             <a:endParaRPr lang="en-US" sz="900" dirty="0"/>
           </a:p>
@@ -16115,13 +16049,13 @@
       </p:sp>
       <p:sp>
         <p:nvSpPr>
-          <p:cNvPr id="43" name="Shape 41"/>
-          <p:cNvSpPr/>
-          <p:nvPr/>
-        </p:nvSpPr>
-        <p:spPr>
-          <a:xfrm>
-            <a:off x="7447135" y="4169664"/>
+          <p:cNvPr id="49" name="Shape 47"/>
+          <p:cNvSpPr/>
+          <p:nvPr/>
+        </p:nvSpPr>
+        <p:spPr>
+          <a:xfrm>
+            <a:off x="6062472" y="4169664"/>
             <a:ext cx="685800" cy="475488"/>
           </a:xfrm>
           <a:prstGeom prst="rect">
@@ -16142,13 +16076,13 @@
       </p:sp>
       <p:sp>
         <p:nvSpPr>
-          <p:cNvPr id="44" name="Text 42"/>
-          <p:cNvSpPr/>
-          <p:nvPr/>
-        </p:nvSpPr>
-        <p:spPr>
-          <a:xfrm>
-            <a:off x="7447135" y="4169664"/>
+          <p:cNvPr id="50" name="Text 48"/>
+          <p:cNvSpPr/>
+          <p:nvPr/>
+        </p:nvSpPr>
+        <p:spPr>
+          <a:xfrm>
+            <a:off x="6062472" y="4169664"/>
             <a:ext cx="685800" cy="475488"/>
           </a:xfrm>
           <a:prstGeom prst="rect">
@@ -16173,7 +16107,139 @@
                 <a:ea typeface="Trebuchet MS" pitchFamily="34" charset="-122"/>
                 <a:cs typeface="Trebuchet MS" pitchFamily="34" charset="-120"/>
               </a:rPr>
-              <a:t>y</a:t>
+              <a:t>sh</a:t>
+            </a:r>
+            <a:endParaRPr lang="en-US" sz="900" dirty="0"/>
+          </a:p>
+        </p:txBody>
+      </p:sp>
+      <p:sp>
+        <p:nvSpPr>
+          <p:cNvPr id="51" name="Shape 49"/>
+          <p:cNvSpPr/>
+          <p:nvPr/>
+        </p:nvSpPr>
+        <p:spPr>
+          <a:xfrm>
+            <a:off x="6870192" y="4169664"/>
+            <a:ext cx="685800" cy="475488"/>
+          </a:xfrm>
+          <a:prstGeom prst="rect">
+            <a:avLst>
+              <a:gd name="adj" fmla="val 7692"/>
+            </a:avLst>
+          </a:prstGeom>
+          <a:solidFill>
+            <a:srgbClr val="FFFFFF"/>
+          </a:solidFill>
+          <a:ln w="12700">
+            <a:solidFill>
+              <a:srgbClr val="DB2777"/>
+            </a:solidFill>
+            <a:prstDash val="solid"/>
+          </a:ln>
+        </p:spPr>
+      </p:sp>
+      <p:sp>
+        <p:nvSpPr>
+          <p:cNvPr id="52" name="Text 50"/>
+          <p:cNvSpPr/>
+          <p:nvPr/>
+        </p:nvSpPr>
+        <p:spPr>
+          <a:xfrm>
+            <a:off x="6870192" y="4169664"/>
+            <a:ext cx="685800" cy="475488"/>
+          </a:xfrm>
+          <a:prstGeom prst="rect">
+            <a:avLst/>
+          </a:prstGeom>
+          <a:noFill/>
+          <a:ln/>
+        </p:spPr>
+        <p:txBody>
+          <a:bodyPr wrap="square" lIns="0" tIns="0" rIns="0" bIns="0" rtlCol="0" anchor="ctr"/>
+          <a:lstStyle/>
+          <a:p>
+            <a:pPr algn="ctr" indent="0" marL="0">
+              <a:buNone/>
+            </a:pPr>
+            <a:r>
+              <a:rPr lang="en-US" sz="900" b="1" dirty="0">
+                <a:solidFill>
+                  <a:srgbClr val="9D174D"/>
+                </a:solidFill>
+                <a:latin typeface="Trebuchet MS" pitchFamily="34" charset="0"/>
+                <a:ea typeface="Trebuchet MS" pitchFamily="34" charset="-122"/>
+                <a:cs typeface="Trebuchet MS" pitchFamily="34" charset="-120"/>
+              </a:rPr>
+              <a:t>i</a:t>
+            </a:r>
+            <a:endParaRPr lang="en-US" sz="900" dirty="0"/>
+          </a:p>
+        </p:txBody>
+      </p:sp>
+      <p:sp>
+        <p:nvSpPr>
+          <p:cNvPr id="53" name="Shape 51"/>
+          <p:cNvSpPr/>
+          <p:nvPr/>
+        </p:nvSpPr>
+        <p:spPr>
+          <a:xfrm>
+            <a:off x="7677912" y="4169664"/>
+            <a:ext cx="685800" cy="475488"/>
+          </a:xfrm>
+          <a:prstGeom prst="rect">
+            <a:avLst>
+              <a:gd name="adj" fmla="val 7692"/>
+            </a:avLst>
+          </a:prstGeom>
+          <a:solidFill>
+            <a:srgbClr val="FFFFFF"/>
+          </a:solidFill>
+          <a:ln w="12700">
+            <a:solidFill>
+              <a:srgbClr val="DB2777"/>
+            </a:solidFill>
+            <a:prstDash val="solid"/>
+          </a:ln>
+        </p:spPr>
+      </p:sp>
+      <p:sp>
+        <p:nvSpPr>
+          <p:cNvPr id="54" name="Text 52"/>
+          <p:cNvSpPr/>
+          <p:nvPr/>
+        </p:nvSpPr>
+        <p:spPr>
+          <a:xfrm>
+            <a:off x="7677912" y="4169664"/>
+            <a:ext cx="685800" cy="475488"/>
+          </a:xfrm>
+          <a:prstGeom prst="rect">
+            <a:avLst/>
+          </a:prstGeom>
+          <a:noFill/>
+          <a:ln/>
+        </p:spPr>
+        <p:txBody>
+          <a:bodyPr wrap="square" lIns="0" tIns="0" rIns="0" bIns="0" rtlCol="0" anchor="ctr"/>
+          <a:lstStyle/>
+          <a:p>
+            <a:pPr algn="ctr" indent="0" marL="0">
+              <a:buNone/>
+            </a:pPr>
+            <a:r>
+              <a:rPr lang="en-US" sz="900" b="1" dirty="0">
+                <a:solidFill>
+                  <a:srgbClr val="9D174D"/>
+                </a:solidFill>
+                <a:latin typeface="Trebuchet MS" pitchFamily="34" charset="0"/>
+                <a:ea typeface="Trebuchet MS" pitchFamily="34" charset="-122"/>
+                <a:cs typeface="Trebuchet MS" pitchFamily="34" charset="-120"/>
+              </a:rPr>
+              <a:t>ng</a:t>
             </a:r>
             <a:endParaRPr lang="en-US" sz="900" dirty="0"/>
           </a:p>
@@ -17499,7 +17565,7 @@
                 <a:ea typeface="Calibri" pitchFamily="34" charset="-122"/>
                 <a:cs typeface="Calibri" pitchFamily="34" charset="-120"/>
               </a:rPr>
-              <a:t>After they </a:t>
+              <a:t>She used a </a:t>
             </a:r>
             <a:pPr algn="l" indent="0" marL="0">
               <a:buNone/>
@@ -17516,7 +17582,7 @@
                 <a:ea typeface="Calibri" pitchFamily="34" charset="-122"/>
                 <a:cs typeface="Calibri" pitchFamily="34" charset="-120"/>
               </a:rPr>
-              <a:t>refreshed</a:t>
+              <a:t>freshener</a:t>
             </a:r>
             <a:pPr algn="l" indent="0" marL="0">
               <a:buNone/>
@@ -17530,7 +17596,7 @@
                 <a:ea typeface="Calibri" pitchFamily="34" charset="-122"/>
                 <a:cs typeface="Calibri" pitchFamily="34" charset="-120"/>
               </a:rPr>
-              <a:t> themselves with cold drinks, the </a:t>
+              <a:t> to </a:t>
             </a:r>
             <a:pPr algn="l" indent="0" marL="0">
               <a:buNone/>
@@ -17547,7 +17613,7 @@
                 <a:ea typeface="Calibri" pitchFamily="34" charset="-122"/>
                 <a:cs typeface="Calibri" pitchFamily="34" charset="-120"/>
               </a:rPr>
-              <a:t>freshness</a:t>
+              <a:t>freshen</a:t>
             </a:r>
             <a:pPr algn="l" indent="0" marL="0">
               <a:buNone/>
@@ -17561,7 +17627,7 @@
                 <a:ea typeface="Calibri" pitchFamily="34" charset="-122"/>
                 <a:cs typeface="Calibri" pitchFamily="34" charset="-120"/>
               </a:rPr>
-              <a:t> of the evening air and the </a:t>
+              <a:t> the room, and everyone found the smell </a:t>
             </a:r>
             <a:pPr algn="l" indent="0" marL="0">
               <a:buNone/>
@@ -17592,7 +17658,7 @@
                 <a:ea typeface="Calibri" pitchFamily="34" charset="-122"/>
                 <a:cs typeface="Calibri" pitchFamily="34" charset="-120"/>
               </a:rPr>
-              <a:t> cut grass made everyone feel calm.</a:t>
+              <a:t> pleasant.</a:t>
             </a:r>
             <a:endParaRPr lang="en-US" sz="1800" dirty="0"/>
           </a:p>
@@ -17747,7 +17813,7 @@
                 <a:ea typeface="Trebuchet MS" pitchFamily="34" charset="-122"/>
                 <a:cs typeface="Trebuchet MS" pitchFamily="34" charset="-120"/>
               </a:rPr>
-              <a:t>refreshed</a:t>
+              <a:t>freshener</a:t>
             </a:r>
             <a:endParaRPr lang="en-US" sz="1400" dirty="0"/>
           </a:p>
@@ -17875,7 +17941,7 @@
                 <a:ea typeface="Trebuchet MS" pitchFamily="34" charset="-122"/>
                 <a:cs typeface="Trebuchet MS" pitchFamily="34" charset="-120"/>
               </a:rPr>
-              <a:t>freshness</a:t>
+              <a:t>freshen</a:t>
             </a:r>
             <a:endParaRPr lang="en-US" sz="1400" dirty="0"/>
           </a:p>
@@ -18473,7 +18539,7 @@
                 <a:ea typeface="Trebuchet MS" pitchFamily="34" charset="-122"/>
                 <a:cs typeface="Trebuchet MS" pitchFamily="34" charset="-120"/>
               </a:rPr>
-              <a:t>refreshed</a:t>
+              <a:t>freshener</a:t>
             </a:r>
             <a:endParaRPr lang="en-US" sz="2800" dirty="0"/>
           </a:p>
@@ -19300,7 +19366,7 @@
                 <a:ea typeface="Trebuchet MS" pitchFamily="34" charset="-122"/>
                 <a:cs typeface="Trebuchet MS" pitchFamily="34" charset="-120"/>
               </a:rPr>
-              <a:t>refreshed</a:t>
+              <a:t>freshener</a:t>
             </a:r>
             <a:endParaRPr lang="en-US" sz="2800" dirty="0"/>
           </a:p>
@@ -19389,11 +19455,11 @@
             </a:avLst>
           </a:prstGeom>
           <a:solidFill>
-            <a:srgbClr val="DDD6FE"/>
+            <a:srgbClr val="CCFBF1"/>
           </a:solidFill>
           <a:ln w="19050">
             <a:solidFill>
-              <a:srgbClr val="7C3AED"/>
+              <a:srgbClr val="0D9488"/>
             </a:solidFill>
             <a:prstDash val="solid"/>
           </a:ln>
@@ -19433,13 +19499,13 @@
             <a:r>
               <a:rPr lang="en-US" sz="1300" b="1" dirty="0">
                 <a:solidFill>
-                  <a:srgbClr val="4C1D95"/>
+                  <a:srgbClr val="0F766E"/>
                 </a:solidFill>
                 <a:latin typeface="Trebuchet MS" pitchFamily="34" charset="0"/>
                 <a:ea typeface="Trebuchet MS" pitchFamily="34" charset="-122"/>
                 <a:cs typeface="Trebuchet MS" pitchFamily="34" charset="-120"/>
               </a:rPr>
-              <a:t>re</a:t>
+              <a:t>fresh</a:t>
             </a:r>
             <a:endParaRPr lang="en-US" sz="1300" dirty="0"/>
           </a:p>
@@ -19478,7 +19544,7 @@
                 <a:ea typeface="Calibri" pitchFamily="34" charset="-122"/>
                 <a:cs typeface="Calibri" pitchFamily="34" charset="-120"/>
               </a:rPr>
-              <a:t>again</a:t>
+              <a:t>new, clean, not stale</a:t>
             </a:r>
             <a:endParaRPr lang="en-US" sz="850" dirty="0"/>
           </a:p>
@@ -19501,11 +19567,11 @@
             </a:avLst>
           </a:prstGeom>
           <a:solidFill>
-            <a:srgbClr val="CCFBF1"/>
+            <a:srgbClr val="FCE7F3"/>
           </a:solidFill>
           <a:ln w="19050">
             <a:solidFill>
-              <a:srgbClr val="0D9488"/>
+              <a:srgbClr val="DB2777"/>
             </a:solidFill>
             <a:prstDash val="solid"/>
           </a:ln>
@@ -19545,13 +19611,13 @@
             <a:r>
               <a:rPr lang="en-US" sz="1300" b="1" dirty="0">
                 <a:solidFill>
-                  <a:srgbClr val="0F766E"/>
+                  <a:srgbClr val="9D174D"/>
                 </a:solidFill>
                 <a:latin typeface="Trebuchet MS" pitchFamily="34" charset="0"/>
                 <a:ea typeface="Trebuchet MS" pitchFamily="34" charset="-122"/>
                 <a:cs typeface="Trebuchet MS" pitchFamily="34" charset="-120"/>
               </a:rPr>
-              <a:t>fresh</a:t>
+              <a:t>en</a:t>
             </a:r>
             <a:endParaRPr lang="en-US" sz="1300" dirty="0"/>
           </a:p>
@@ -19590,7 +19656,7 @@
                 <a:ea typeface="Calibri" pitchFamily="34" charset="-122"/>
                 <a:cs typeface="Calibri" pitchFamily="34" charset="-120"/>
               </a:rPr>
-              <a:t>new, clean</a:t>
+              <a:t>to make or become</a:t>
             </a:r>
             <a:endParaRPr lang="en-US" sz="850" dirty="0"/>
           </a:p>
@@ -19663,7 +19729,7 @@
                 <a:ea typeface="Trebuchet MS" pitchFamily="34" charset="-122"/>
                 <a:cs typeface="Trebuchet MS" pitchFamily="34" charset="-120"/>
               </a:rPr>
-              <a:t>ed</a:t>
+              <a:t>er</a:t>
             </a:r>
             <a:endParaRPr lang="en-US" sz="1300" dirty="0"/>
           </a:p>
@@ -19702,7 +19768,7 @@
                 <a:ea typeface="Calibri" pitchFamily="34" charset="-122"/>
                 <a:cs typeface="Calibri" pitchFamily="34" charset="-120"/>
               </a:rPr>
-              <a:t>past tense</a:t>
+              <a:t>a person or thing that does something</a:t>
             </a:r>
             <a:endParaRPr lang="en-US" sz="850" dirty="0"/>
           </a:p>
@@ -20397,7 +20463,7 @@
                 <a:ea typeface="Trebuchet MS" pitchFamily="34" charset="-122"/>
                 <a:cs typeface="Trebuchet MS" pitchFamily="34" charset="-120"/>
               </a:rPr>
-              <a:t>refreshed</a:t>
+              <a:t>freshener</a:t>
             </a:r>
             <a:endParaRPr lang="en-US" sz="2800" dirty="0"/>
           </a:p>
@@ -20486,11 +20552,11 @@
             </a:avLst>
           </a:prstGeom>
           <a:solidFill>
-            <a:srgbClr val="DDD6FE"/>
+            <a:srgbClr val="CCFBF1"/>
           </a:solidFill>
           <a:ln w="19050">
             <a:solidFill>
-              <a:srgbClr val="7C3AED"/>
+              <a:srgbClr val="0D9488"/>
             </a:solidFill>
             <a:prstDash val="solid"/>
           </a:ln>
@@ -20530,13 +20596,13 @@
             <a:r>
               <a:rPr lang="en-US" sz="1300" b="1" dirty="0">
                 <a:solidFill>
-                  <a:srgbClr val="4C1D95"/>
+                  <a:srgbClr val="0F766E"/>
                 </a:solidFill>
                 <a:latin typeface="Trebuchet MS" pitchFamily="34" charset="0"/>
                 <a:ea typeface="Trebuchet MS" pitchFamily="34" charset="-122"/>
                 <a:cs typeface="Trebuchet MS" pitchFamily="34" charset="-120"/>
               </a:rPr>
-              <a:t>re</a:t>
+              <a:t>fresh</a:t>
             </a:r>
             <a:endParaRPr lang="en-US" sz="1300" dirty="0"/>
           </a:p>
@@ -20575,7 +20641,7 @@
                 <a:ea typeface="Calibri" pitchFamily="34" charset="-122"/>
                 <a:cs typeface="Calibri" pitchFamily="34" charset="-120"/>
               </a:rPr>
-              <a:t>again</a:t>
+              <a:t>new, clean, not stale</a:t>
             </a:r>
             <a:endParaRPr lang="en-US" sz="850" dirty="0"/>
           </a:p>
@@ -20598,11 +20664,11 @@
             </a:avLst>
           </a:prstGeom>
           <a:solidFill>
-            <a:srgbClr val="CCFBF1"/>
+            <a:srgbClr val="FCE7F3"/>
           </a:solidFill>
           <a:ln w="19050">
             <a:solidFill>
-              <a:srgbClr val="0D9488"/>
+              <a:srgbClr val="DB2777"/>
             </a:solidFill>
             <a:prstDash val="solid"/>
           </a:ln>
@@ -20642,13 +20708,13 @@
             <a:r>
               <a:rPr lang="en-US" sz="1300" b="1" dirty="0">
                 <a:solidFill>
-                  <a:srgbClr val="0F766E"/>
+                  <a:srgbClr val="9D174D"/>
                 </a:solidFill>
                 <a:latin typeface="Trebuchet MS" pitchFamily="34" charset="0"/>
                 <a:ea typeface="Trebuchet MS" pitchFamily="34" charset="-122"/>
                 <a:cs typeface="Trebuchet MS" pitchFamily="34" charset="-120"/>
               </a:rPr>
-              <a:t>fresh</a:t>
+              <a:t>en</a:t>
             </a:r>
             <a:endParaRPr lang="en-US" sz="1300" dirty="0"/>
           </a:p>
@@ -20687,7 +20753,7 @@
                 <a:ea typeface="Calibri" pitchFamily="34" charset="-122"/>
                 <a:cs typeface="Calibri" pitchFamily="34" charset="-120"/>
               </a:rPr>
-              <a:t>new, clean</a:t>
+              <a:t>to make or become</a:t>
             </a:r>
             <a:endParaRPr lang="en-US" sz="850" dirty="0"/>
           </a:p>
@@ -20760,7 +20826,7 @@
                 <a:ea typeface="Trebuchet MS" pitchFamily="34" charset="-122"/>
                 <a:cs typeface="Trebuchet MS" pitchFamily="34" charset="-120"/>
               </a:rPr>
-              <a:t>ed</a:t>
+              <a:t>er</a:t>
             </a:r>
             <a:endParaRPr lang="en-US" sz="1300" dirty="0"/>
           </a:p>
@@ -20799,7 +20865,7 @@
                 <a:ea typeface="Calibri" pitchFamily="34" charset="-122"/>
                 <a:cs typeface="Calibri" pitchFamily="34" charset="-120"/>
               </a:rPr>
-              <a:t>past tense</a:t>
+              <a:t>a person or thing that does something</a:t>
             </a:r>
             <a:endParaRPr lang="en-US" sz="850" dirty="0"/>
           </a:p>
@@ -20906,7 +20972,7 @@
         </p:nvSpPr>
         <p:spPr>
           <a:xfrm>
-            <a:off x="2999232" y="3364992"/>
+            <a:off x="2313432" y="3364992"/>
             <a:ext cx="1645920" cy="475488"/>
           </a:xfrm>
           <a:prstGeom prst="rect">
@@ -20933,7 +20999,7 @@
         </p:nvSpPr>
         <p:spPr>
           <a:xfrm>
-            <a:off x="2999232" y="3364992"/>
+            <a:off x="2313432" y="3364992"/>
             <a:ext cx="1645920" cy="475488"/>
           </a:xfrm>
           <a:prstGeom prst="rect">
@@ -20958,7 +21024,7 @@
                 <a:ea typeface="Trebuchet MS" pitchFamily="34" charset="-122"/>
                 <a:cs typeface="Trebuchet MS" pitchFamily="34" charset="-120"/>
               </a:rPr>
-              <a:t>re</a:t>
+              <a:t>fresh</a:t>
             </a:r>
             <a:endParaRPr lang="en-US" sz="1400" dirty="0"/>
           </a:p>
@@ -20972,8 +21038,8 @@
         </p:nvSpPr>
         <p:spPr>
           <a:xfrm>
-            <a:off x="4645152" y="3364992"/>
-            <a:ext cx="1097280" cy="475488"/>
+            <a:off x="3959352" y="3364992"/>
+            <a:ext cx="411480" cy="475488"/>
           </a:xfrm>
           <a:prstGeom prst="rect">
             <a:avLst/>
@@ -21011,7 +21077,7 @@
         </p:nvSpPr>
         <p:spPr>
           <a:xfrm>
-            <a:off x="5742432" y="3364992"/>
+            <a:off x="4370832" y="3364992"/>
             <a:ext cx="1645920" cy="475488"/>
           </a:xfrm>
           <a:prstGeom prst="rect">
@@ -21038,7 +21104,7 @@
         </p:nvSpPr>
         <p:spPr>
           <a:xfrm>
-            <a:off x="5742432" y="3364992"/>
+            <a:off x="4370832" y="3364992"/>
             <a:ext cx="1645920" cy="475488"/>
           </a:xfrm>
           <a:prstGeom prst="rect">
@@ -21063,7 +21129,7 @@
                 <a:ea typeface="Trebuchet MS" pitchFamily="34" charset="-122"/>
                 <a:cs typeface="Trebuchet MS" pitchFamily="34" charset="-120"/>
               </a:rPr>
-              <a:t>freshed</a:t>
+              <a:t>en</a:t>
             </a:r>
             <a:endParaRPr lang="en-US" sz="1400" dirty="0"/>
           </a:p>
@@ -21071,7 +21137,112 @@
       </p:sp>
       <p:sp>
         <p:nvSpPr>
-          <p:cNvPr id="33" name="Shape 31"/>
+          <p:cNvPr id="33" name="Text 31"/>
+          <p:cNvSpPr/>
+          <p:nvPr/>
+        </p:nvSpPr>
+        <p:spPr>
+          <a:xfrm>
+            <a:off x="6016752" y="3364992"/>
+            <a:ext cx="411480" cy="475488"/>
+          </a:xfrm>
+          <a:prstGeom prst="rect">
+            <a:avLst/>
+          </a:prstGeom>
+          <a:noFill/>
+          <a:ln/>
+        </p:spPr>
+        <p:txBody>
+          <a:bodyPr wrap="square" lIns="0" tIns="0" rIns="0" bIns="0" rtlCol="0" anchor="ctr"/>
+          <a:lstStyle/>
+          <a:p>
+            <a:pPr algn="ctr" indent="0" marL="0">
+              <a:buNone/>
+            </a:pPr>
+            <a:r>
+              <a:rPr lang="en-US" sz="1600" b="1" dirty="0">
+                <a:solidFill>
+                  <a:srgbClr val="0D9488"/>
+                </a:solidFill>
+                <a:latin typeface="Trebuchet MS" pitchFamily="34" charset="0"/>
+                <a:ea typeface="Trebuchet MS" pitchFamily="34" charset="-122"/>
+                <a:cs typeface="Trebuchet MS" pitchFamily="34" charset="-120"/>
+              </a:rPr>
+              <a:t>·</a:t>
+            </a:r>
+            <a:endParaRPr lang="en-US" sz="1600" dirty="0"/>
+          </a:p>
+        </p:txBody>
+      </p:sp>
+      <p:sp>
+        <p:nvSpPr>
+          <p:cNvPr id="34" name="Shape 32"/>
+          <p:cNvSpPr/>
+          <p:nvPr/>
+        </p:nvSpPr>
+        <p:spPr>
+          <a:xfrm>
+            <a:off x="6428232" y="3364992"/>
+            <a:ext cx="1645920" cy="475488"/>
+          </a:xfrm>
+          <a:prstGeom prst="rect">
+            <a:avLst>
+              <a:gd name="adj" fmla="val 9615"/>
+            </a:avLst>
+          </a:prstGeom>
+          <a:solidFill>
+            <a:srgbClr val="FFFFFF"/>
+          </a:solidFill>
+          <a:ln w="12700">
+            <a:solidFill>
+              <a:srgbClr val="0D9488"/>
+            </a:solidFill>
+            <a:prstDash val="solid"/>
+          </a:ln>
+        </p:spPr>
+      </p:sp>
+      <p:sp>
+        <p:nvSpPr>
+          <p:cNvPr id="35" name="Text 33"/>
+          <p:cNvSpPr/>
+          <p:nvPr/>
+        </p:nvSpPr>
+        <p:spPr>
+          <a:xfrm>
+            <a:off x="6428232" y="3364992"/>
+            <a:ext cx="1645920" cy="475488"/>
+          </a:xfrm>
+          <a:prstGeom prst="rect">
+            <a:avLst/>
+          </a:prstGeom>
+          <a:noFill/>
+          <a:ln/>
+        </p:spPr>
+        <p:txBody>
+          <a:bodyPr wrap="square" lIns="0" tIns="0" rIns="0" bIns="0" rtlCol="0" anchor="ctr"/>
+          <a:lstStyle/>
+          <a:p>
+            <a:pPr algn="ctr" indent="0" marL="0">
+              <a:buNone/>
+            </a:pPr>
+            <a:r>
+              <a:rPr lang="en-US" sz="1400" b="1" dirty="0">
+                <a:solidFill>
+                  <a:srgbClr val="0D9488"/>
+                </a:solidFill>
+                <a:latin typeface="Trebuchet MS" pitchFamily="34" charset="0"/>
+                <a:ea typeface="Trebuchet MS" pitchFamily="34" charset="-122"/>
+                <a:cs typeface="Trebuchet MS" pitchFamily="34" charset="-120"/>
+              </a:rPr>
+              <a:t>er</a:t>
+            </a:r>
+            <a:endParaRPr lang="en-US" sz="1400" dirty="0"/>
+          </a:p>
+        </p:txBody>
+      </p:sp>
+      <p:sp>
+        <p:nvSpPr>
+          <p:cNvPr id="36" name="Shape 34"/>
           <p:cNvSpPr/>
           <p:nvPr/>
         </p:nvSpPr>
@@ -21098,7 +21269,7 @@
       </p:sp>
       <p:sp>
         <p:nvSpPr>
-          <p:cNvPr id="34" name="Text 32"/>
+          <p:cNvPr id="37" name="Text 35"/>
           <p:cNvSpPr/>
           <p:nvPr/>
         </p:nvSpPr>
@@ -21137,7 +21308,7 @@
       </p:sp>
       <p:sp>
         <p:nvSpPr>
-          <p:cNvPr id="35" name="Shape 33"/>
+          <p:cNvPr id="38" name="Shape 36"/>
           <p:cNvSpPr/>
           <p:nvPr/>
         </p:nvSpPr>
@@ -21164,7 +21335,7 @@
       </p:sp>
       <p:sp>
         <p:nvSpPr>
-          <p:cNvPr id="36" name="Text 34"/>
+          <p:cNvPr id="39" name="Text 37"/>
           <p:cNvSpPr/>
           <p:nvPr/>
         </p:nvSpPr>
@@ -21626,7 +21797,7 @@
                 <a:ea typeface="Trebuchet MS" pitchFamily="34" charset="-122"/>
                 <a:cs typeface="Trebuchet MS" pitchFamily="34" charset="-120"/>
               </a:rPr>
-              <a:t>refreshed</a:t>
+              <a:t>freshener</a:t>
             </a:r>
             <a:endParaRPr lang="en-US" sz="2800" dirty="0"/>
           </a:p>
@@ -21715,11 +21886,11 @@
             </a:avLst>
           </a:prstGeom>
           <a:solidFill>
-            <a:srgbClr val="DDD6FE"/>
+            <a:srgbClr val="CCFBF1"/>
           </a:solidFill>
           <a:ln w="19050">
             <a:solidFill>
-              <a:srgbClr val="7C3AED"/>
+              <a:srgbClr val="0D9488"/>
             </a:solidFill>
             <a:prstDash val="solid"/>
           </a:ln>
@@ -21759,13 +21930,13 @@
             <a:r>
               <a:rPr lang="en-US" sz="1300" b="1" dirty="0">
                 <a:solidFill>
-                  <a:srgbClr val="4C1D95"/>
+                  <a:srgbClr val="0F766E"/>
                 </a:solidFill>
                 <a:latin typeface="Trebuchet MS" pitchFamily="34" charset="0"/>
                 <a:ea typeface="Trebuchet MS" pitchFamily="34" charset="-122"/>
                 <a:cs typeface="Trebuchet MS" pitchFamily="34" charset="-120"/>
               </a:rPr>
-              <a:t>re</a:t>
+              <a:t>fresh</a:t>
             </a:r>
             <a:endParaRPr lang="en-US" sz="1300" dirty="0"/>
           </a:p>
@@ -21804,7 +21975,7 @@
                 <a:ea typeface="Calibri" pitchFamily="34" charset="-122"/>
                 <a:cs typeface="Calibri" pitchFamily="34" charset="-120"/>
               </a:rPr>
-              <a:t>again</a:t>
+              <a:t>new, clean, not stale</a:t>
             </a:r>
             <a:endParaRPr lang="en-US" sz="850" dirty="0"/>
           </a:p>
@@ -21827,11 +21998,11 @@
             </a:avLst>
           </a:prstGeom>
           <a:solidFill>
-            <a:srgbClr val="CCFBF1"/>
+            <a:srgbClr val="FCE7F3"/>
           </a:solidFill>
           <a:ln w="19050">
             <a:solidFill>
-              <a:srgbClr val="0D9488"/>
+              <a:srgbClr val="DB2777"/>
             </a:solidFill>
             <a:prstDash val="solid"/>
           </a:ln>
@@ -21871,13 +22042,13 @@
             <a:r>
               <a:rPr lang="en-US" sz="1300" b="1" dirty="0">
                 <a:solidFill>
-                  <a:srgbClr val="0F766E"/>
+                  <a:srgbClr val="9D174D"/>
                 </a:solidFill>
                 <a:latin typeface="Trebuchet MS" pitchFamily="34" charset="0"/>
                 <a:ea typeface="Trebuchet MS" pitchFamily="34" charset="-122"/>
                 <a:cs typeface="Trebuchet MS" pitchFamily="34" charset="-120"/>
               </a:rPr>
-              <a:t>fresh</a:t>
+              <a:t>en</a:t>
             </a:r>
             <a:endParaRPr lang="en-US" sz="1300" dirty="0"/>
           </a:p>
@@ -21916,7 +22087,7 @@
                 <a:ea typeface="Calibri" pitchFamily="34" charset="-122"/>
                 <a:cs typeface="Calibri" pitchFamily="34" charset="-120"/>
               </a:rPr>
-              <a:t>new, clean</a:t>
+              <a:t>to make or become</a:t>
             </a:r>
             <a:endParaRPr lang="en-US" sz="850" dirty="0"/>
           </a:p>
@@ -21989,7 +22160,7 @@
                 <a:ea typeface="Trebuchet MS" pitchFamily="34" charset="-122"/>
                 <a:cs typeface="Trebuchet MS" pitchFamily="34" charset="-120"/>
               </a:rPr>
-              <a:t>ed</a:t>
+              <a:t>er</a:t>
             </a:r>
             <a:endParaRPr lang="en-US" sz="1300" dirty="0"/>
           </a:p>
@@ -22028,7 +22199,7 @@
                 <a:ea typeface="Calibri" pitchFamily="34" charset="-122"/>
                 <a:cs typeface="Calibri" pitchFamily="34" charset="-120"/>
               </a:rPr>
-              <a:t>past tense</a:t>
+              <a:t>a person or thing that does something</a:t>
             </a:r>
             <a:endParaRPr lang="en-US" sz="850" dirty="0"/>
           </a:p>
@@ -22135,7 +22306,7 @@
         </p:nvSpPr>
         <p:spPr>
           <a:xfrm>
-            <a:off x="2999232" y="3364992"/>
+            <a:off x="2313432" y="3364992"/>
             <a:ext cx="1645920" cy="475488"/>
           </a:xfrm>
           <a:prstGeom prst="rect">
@@ -22162,7 +22333,7 @@
         </p:nvSpPr>
         <p:spPr>
           <a:xfrm>
-            <a:off x="2999232" y="3364992"/>
+            <a:off x="2313432" y="3364992"/>
             <a:ext cx="1645920" cy="475488"/>
           </a:xfrm>
           <a:prstGeom prst="rect">
@@ -22187,7 +22358,7 @@
                 <a:ea typeface="Trebuchet MS" pitchFamily="34" charset="-122"/>
                 <a:cs typeface="Trebuchet MS" pitchFamily="34" charset="-120"/>
               </a:rPr>
-              <a:t>re</a:t>
+              <a:t>fresh</a:t>
             </a:r>
             <a:endParaRPr lang="en-US" sz="1400" dirty="0"/>
           </a:p>
@@ -22201,8 +22372,8 @@
         </p:nvSpPr>
         <p:spPr>
           <a:xfrm>
-            <a:off x="4645152" y="3364992"/>
-            <a:ext cx="1097280" cy="475488"/>
+            <a:off x="3959352" y="3364992"/>
+            <a:ext cx="411480" cy="475488"/>
           </a:xfrm>
           <a:prstGeom prst="rect">
             <a:avLst/>
@@ -22240,7 +22411,7 @@
         </p:nvSpPr>
         <p:spPr>
           <a:xfrm>
-            <a:off x="5742432" y="3364992"/>
+            <a:off x="4370832" y="3364992"/>
             <a:ext cx="1645920" cy="475488"/>
           </a:xfrm>
           <a:prstGeom prst="rect">
@@ -22267,7 +22438,7 @@
         </p:nvSpPr>
         <p:spPr>
           <a:xfrm>
-            <a:off x="5742432" y="3364992"/>
+            <a:off x="4370832" y="3364992"/>
             <a:ext cx="1645920" cy="475488"/>
           </a:xfrm>
           <a:prstGeom prst="rect">
@@ -22292,7 +22463,7 @@
                 <a:ea typeface="Trebuchet MS" pitchFamily="34" charset="-122"/>
                 <a:cs typeface="Trebuchet MS" pitchFamily="34" charset="-120"/>
               </a:rPr>
-              <a:t>freshed</a:t>
+              <a:t>en</a:t>
             </a:r>
             <a:endParaRPr lang="en-US" sz="1400" dirty="0"/>
           </a:p>
@@ -22300,7 +22471,112 @@
       </p:sp>
       <p:sp>
         <p:nvSpPr>
-          <p:cNvPr id="33" name="Shape 31"/>
+          <p:cNvPr id="33" name="Text 31"/>
+          <p:cNvSpPr/>
+          <p:nvPr/>
+        </p:nvSpPr>
+        <p:spPr>
+          <a:xfrm>
+            <a:off x="6016752" y="3364992"/>
+            <a:ext cx="411480" cy="475488"/>
+          </a:xfrm>
+          <a:prstGeom prst="rect">
+            <a:avLst/>
+          </a:prstGeom>
+          <a:noFill/>
+          <a:ln/>
+        </p:spPr>
+        <p:txBody>
+          <a:bodyPr wrap="square" lIns="0" tIns="0" rIns="0" bIns="0" rtlCol="0" anchor="ctr"/>
+          <a:lstStyle/>
+          <a:p>
+            <a:pPr algn="ctr" indent="0" marL="0">
+              <a:buNone/>
+            </a:pPr>
+            <a:r>
+              <a:rPr lang="en-US" sz="1600" b="1" dirty="0">
+                <a:solidFill>
+                  <a:srgbClr val="0D9488"/>
+                </a:solidFill>
+                <a:latin typeface="Trebuchet MS" pitchFamily="34" charset="0"/>
+                <a:ea typeface="Trebuchet MS" pitchFamily="34" charset="-122"/>
+                <a:cs typeface="Trebuchet MS" pitchFamily="34" charset="-120"/>
+              </a:rPr>
+              <a:t>·</a:t>
+            </a:r>
+            <a:endParaRPr lang="en-US" sz="1600" dirty="0"/>
+          </a:p>
+        </p:txBody>
+      </p:sp>
+      <p:sp>
+        <p:nvSpPr>
+          <p:cNvPr id="34" name="Shape 32"/>
+          <p:cNvSpPr/>
+          <p:nvPr/>
+        </p:nvSpPr>
+        <p:spPr>
+          <a:xfrm>
+            <a:off x="6428232" y="3364992"/>
+            <a:ext cx="1645920" cy="475488"/>
+          </a:xfrm>
+          <a:prstGeom prst="rect">
+            <a:avLst>
+              <a:gd name="adj" fmla="val 9615"/>
+            </a:avLst>
+          </a:prstGeom>
+          <a:solidFill>
+            <a:srgbClr val="FFFFFF"/>
+          </a:solidFill>
+          <a:ln w="12700">
+            <a:solidFill>
+              <a:srgbClr val="0D9488"/>
+            </a:solidFill>
+            <a:prstDash val="solid"/>
+          </a:ln>
+        </p:spPr>
+      </p:sp>
+      <p:sp>
+        <p:nvSpPr>
+          <p:cNvPr id="35" name="Text 33"/>
+          <p:cNvSpPr/>
+          <p:nvPr/>
+        </p:nvSpPr>
+        <p:spPr>
+          <a:xfrm>
+            <a:off x="6428232" y="3364992"/>
+            <a:ext cx="1645920" cy="475488"/>
+          </a:xfrm>
+          <a:prstGeom prst="rect">
+            <a:avLst/>
+          </a:prstGeom>
+          <a:noFill/>
+          <a:ln/>
+        </p:spPr>
+        <p:txBody>
+          <a:bodyPr wrap="square" lIns="0" tIns="0" rIns="0" bIns="0" rtlCol="0" anchor="ctr"/>
+          <a:lstStyle/>
+          <a:p>
+            <a:pPr algn="ctr" indent="0" marL="0">
+              <a:buNone/>
+            </a:pPr>
+            <a:r>
+              <a:rPr lang="en-US" sz="1400" b="1" dirty="0">
+                <a:solidFill>
+                  <a:srgbClr val="0D9488"/>
+                </a:solidFill>
+                <a:latin typeface="Trebuchet MS" pitchFamily="34" charset="0"/>
+                <a:ea typeface="Trebuchet MS" pitchFamily="34" charset="-122"/>
+                <a:cs typeface="Trebuchet MS" pitchFamily="34" charset="-120"/>
+              </a:rPr>
+              <a:t>er</a:t>
+            </a:r>
+            <a:endParaRPr lang="en-US" sz="1400" dirty="0"/>
+          </a:p>
+        </p:txBody>
+      </p:sp>
+      <p:sp>
+        <p:nvSpPr>
+          <p:cNvPr id="36" name="Shape 34"/>
           <p:cNvSpPr/>
           <p:nvPr/>
         </p:nvSpPr>
@@ -22327,7 +22603,7 @@
       </p:sp>
       <p:sp>
         <p:nvSpPr>
-          <p:cNvPr id="34" name="Text 32"/>
+          <p:cNvPr id="37" name="Text 35"/>
           <p:cNvSpPr/>
           <p:nvPr/>
         </p:nvSpPr>
@@ -22366,18 +22642,18 @@
       </p:sp>
       <p:sp>
         <p:nvSpPr>
-          <p:cNvPr id="35" name="Shape 33"/>
+          <p:cNvPr id="38" name="Shape 36"/>
           <p:cNvSpPr/>
           <p:nvPr/>
         </p:nvSpPr>
         <p:spPr>
           <a:xfrm>
             <a:off x="1874520" y="4096512"/>
-            <a:ext cx="6903720" cy="804672"/>
+            <a:ext cx="6903720" cy="658368"/>
           </a:xfrm>
           <a:prstGeom prst="rect">
             <a:avLst>
-              <a:gd name="adj" fmla="val 6818"/>
+              <a:gd name="adj" fmla="val 8333"/>
             </a:avLst>
           </a:prstGeom>
           <a:solidFill>
@@ -22393,18 +22669,18 @@
       </p:sp>
       <p:sp>
         <p:nvSpPr>
-          <p:cNvPr id="36" name="Shape 34"/>
+          <p:cNvPr id="39" name="Shape 37"/>
           <p:cNvSpPr/>
           <p:nvPr/>
         </p:nvSpPr>
         <p:spPr>
           <a:xfrm>
             <a:off x="2124837" y="4169664"/>
-            <a:ext cx="685800" cy="384048"/>
+            <a:ext cx="685800" cy="475488"/>
           </a:xfrm>
           <a:prstGeom prst="rect">
             <a:avLst>
-              <a:gd name="adj" fmla="val 9524"/>
+              <a:gd name="adj" fmla="val 7692"/>
             </a:avLst>
           </a:prstGeom>
           <a:solidFill>
@@ -22420,14 +22696,14 @@
       </p:sp>
       <p:sp>
         <p:nvSpPr>
-          <p:cNvPr id="37" name="Text 35"/>
+          <p:cNvPr id="40" name="Text 38"/>
           <p:cNvSpPr/>
           <p:nvPr/>
         </p:nvSpPr>
         <p:spPr>
           <a:xfrm>
             <a:off x="2124837" y="4169664"/>
-            <a:ext cx="685800" cy="384048"/>
+            <a:ext cx="685800" cy="475488"/>
           </a:xfrm>
           <a:prstGeom prst="rect">
             <a:avLst/>
@@ -22451,7 +22727,7 @@
                 <a:ea typeface="Trebuchet MS" pitchFamily="34" charset="-122"/>
                 <a:cs typeface="Trebuchet MS" pitchFamily="34" charset="-120"/>
               </a:rPr>
-              <a:t>r</a:t>
+              <a:t>f</a:t>
             </a:r>
             <a:endParaRPr lang="en-US" sz="900" dirty="0"/>
           </a:p>
@@ -22459,18 +22735,18 @@
       </p:sp>
       <p:sp>
         <p:nvSpPr>
-          <p:cNvPr id="38" name="Shape 36"/>
+          <p:cNvPr id="41" name="Shape 39"/>
           <p:cNvSpPr/>
           <p:nvPr/>
         </p:nvSpPr>
         <p:spPr>
           <a:xfrm>
             <a:off x="3033522" y="4169664"/>
-            <a:ext cx="685800" cy="384048"/>
+            <a:ext cx="685800" cy="475488"/>
           </a:xfrm>
           <a:prstGeom prst="rect">
             <a:avLst>
-              <a:gd name="adj" fmla="val 9524"/>
+              <a:gd name="adj" fmla="val 7692"/>
             </a:avLst>
           </a:prstGeom>
           <a:solidFill>
@@ -22486,14 +22762,14 @@
       </p:sp>
       <p:sp>
         <p:nvSpPr>
-          <p:cNvPr id="39" name="Text 37"/>
+          <p:cNvPr id="42" name="Text 40"/>
           <p:cNvSpPr/>
           <p:nvPr/>
         </p:nvSpPr>
         <p:spPr>
           <a:xfrm>
             <a:off x="3033522" y="4169664"/>
-            <a:ext cx="685800" cy="384048"/>
+            <a:ext cx="685800" cy="475488"/>
           </a:xfrm>
           <a:prstGeom prst="rect">
             <a:avLst/>
@@ -22517,7 +22793,7 @@
                 <a:ea typeface="Trebuchet MS" pitchFamily="34" charset="-122"/>
                 <a:cs typeface="Trebuchet MS" pitchFamily="34" charset="-120"/>
               </a:rPr>
-              <a:t>e</a:t>
+              <a:t>r</a:t>
             </a:r>
             <a:endParaRPr lang="en-US" sz="900" dirty="0"/>
           </a:p>
@@ -22525,18 +22801,18 @@
       </p:sp>
       <p:sp>
         <p:nvSpPr>
-          <p:cNvPr id="40" name="Shape 38"/>
+          <p:cNvPr id="43" name="Shape 41"/>
           <p:cNvSpPr/>
           <p:nvPr/>
         </p:nvSpPr>
         <p:spPr>
           <a:xfrm>
             <a:off x="3942207" y="4169664"/>
-            <a:ext cx="685800" cy="384048"/>
+            <a:ext cx="685800" cy="475488"/>
           </a:xfrm>
           <a:prstGeom prst="rect">
             <a:avLst>
-              <a:gd name="adj" fmla="val 9524"/>
+              <a:gd name="adj" fmla="val 7692"/>
             </a:avLst>
           </a:prstGeom>
           <a:solidFill>
@@ -22552,14 +22828,14 @@
       </p:sp>
       <p:sp>
         <p:nvSpPr>
-          <p:cNvPr id="41" name="Text 39"/>
+          <p:cNvPr id="44" name="Text 42"/>
           <p:cNvSpPr/>
           <p:nvPr/>
         </p:nvSpPr>
         <p:spPr>
           <a:xfrm>
             <a:off x="3942207" y="4169664"/>
-            <a:ext cx="685800" cy="384048"/>
+            <a:ext cx="685800" cy="475488"/>
           </a:xfrm>
           <a:prstGeom prst="rect">
             <a:avLst/>
@@ -22583,7 +22859,7 @@
                 <a:ea typeface="Trebuchet MS" pitchFamily="34" charset="-122"/>
                 <a:cs typeface="Trebuchet MS" pitchFamily="34" charset="-120"/>
               </a:rPr>
-              <a:t>f</a:t>
+              <a:t>e</a:t>
             </a:r>
             <a:endParaRPr lang="en-US" sz="900" dirty="0"/>
           </a:p>
@@ -22591,18 +22867,18 @@
       </p:sp>
       <p:sp>
         <p:nvSpPr>
-          <p:cNvPr id="42" name="Shape 40"/>
+          <p:cNvPr id="45" name="Shape 43"/>
           <p:cNvSpPr/>
           <p:nvPr/>
         </p:nvSpPr>
         <p:spPr>
           <a:xfrm>
             <a:off x="4850892" y="4169664"/>
-            <a:ext cx="685800" cy="384048"/>
+            <a:ext cx="685800" cy="475488"/>
           </a:xfrm>
           <a:prstGeom prst="rect">
             <a:avLst>
-              <a:gd name="adj" fmla="val 9524"/>
+              <a:gd name="adj" fmla="val 7692"/>
             </a:avLst>
           </a:prstGeom>
           <a:solidFill>
@@ -22618,14 +22894,14 @@
       </p:sp>
       <p:sp>
         <p:nvSpPr>
-          <p:cNvPr id="43" name="Text 41"/>
+          <p:cNvPr id="46" name="Text 44"/>
           <p:cNvSpPr/>
           <p:nvPr/>
         </p:nvSpPr>
         <p:spPr>
           <a:xfrm>
             <a:off x="4850892" y="4169664"/>
-            <a:ext cx="685800" cy="384048"/>
+            <a:ext cx="685800" cy="475488"/>
           </a:xfrm>
           <a:prstGeom prst="rect">
             <a:avLst/>
@@ -22649,7 +22925,7 @@
                 <a:ea typeface="Trebuchet MS" pitchFamily="34" charset="-122"/>
                 <a:cs typeface="Trebuchet MS" pitchFamily="34" charset="-120"/>
               </a:rPr>
-              <a:t>r</a:t>
+              <a:t>sh</a:t>
             </a:r>
             <a:endParaRPr lang="en-US" sz="900" dirty="0"/>
           </a:p>
@@ -22657,18 +22933,18 @@
       </p:sp>
       <p:sp>
         <p:nvSpPr>
-          <p:cNvPr id="44" name="Shape 42"/>
+          <p:cNvPr id="47" name="Shape 45"/>
           <p:cNvSpPr/>
           <p:nvPr/>
         </p:nvSpPr>
         <p:spPr>
           <a:xfrm>
             <a:off x="5759577" y="4169664"/>
-            <a:ext cx="685800" cy="384048"/>
+            <a:ext cx="685800" cy="475488"/>
           </a:xfrm>
           <a:prstGeom prst="rect">
             <a:avLst>
-              <a:gd name="adj" fmla="val 9524"/>
+              <a:gd name="adj" fmla="val 7692"/>
             </a:avLst>
           </a:prstGeom>
           <a:solidFill>
@@ -22684,14 +22960,14 @@
       </p:sp>
       <p:sp>
         <p:nvSpPr>
-          <p:cNvPr id="45" name="Text 43"/>
+          <p:cNvPr id="48" name="Text 46"/>
           <p:cNvSpPr/>
           <p:nvPr/>
         </p:nvSpPr>
         <p:spPr>
           <a:xfrm>
             <a:off x="5759577" y="4169664"/>
-            <a:ext cx="685800" cy="384048"/>
+            <a:ext cx="685800" cy="475488"/>
           </a:xfrm>
           <a:prstGeom prst="rect">
             <a:avLst/>
@@ -22723,18 +22999,18 @@
       </p:sp>
       <p:sp>
         <p:nvSpPr>
-          <p:cNvPr id="46" name="Shape 44"/>
+          <p:cNvPr id="49" name="Shape 47"/>
           <p:cNvSpPr/>
           <p:nvPr/>
         </p:nvSpPr>
         <p:spPr>
           <a:xfrm>
             <a:off x="6668262" y="4169664"/>
-            <a:ext cx="685800" cy="384048"/>
+            <a:ext cx="685800" cy="475488"/>
           </a:xfrm>
           <a:prstGeom prst="rect">
             <a:avLst>
-              <a:gd name="adj" fmla="val 9524"/>
+              <a:gd name="adj" fmla="val 7692"/>
             </a:avLst>
           </a:prstGeom>
           <a:solidFill>
@@ -22750,14 +23026,14 @@
       </p:sp>
       <p:sp>
         <p:nvSpPr>
-          <p:cNvPr id="47" name="Text 45"/>
+          <p:cNvPr id="50" name="Text 48"/>
           <p:cNvSpPr/>
           <p:nvPr/>
         </p:nvSpPr>
         <p:spPr>
           <a:xfrm>
             <a:off x="6668262" y="4169664"/>
-            <a:ext cx="685800" cy="384048"/>
+            <a:ext cx="685800" cy="475488"/>
           </a:xfrm>
           <a:prstGeom prst="rect">
             <a:avLst/>
@@ -22781,7 +23057,7 @@
                 <a:ea typeface="Trebuchet MS" pitchFamily="34" charset="-122"/>
                 <a:cs typeface="Trebuchet MS" pitchFamily="34" charset="-120"/>
               </a:rPr>
-              <a:t>sh</a:t>
+              <a:t>n</a:t>
             </a:r>
             <a:endParaRPr lang="en-US" sz="900" dirty="0"/>
           </a:p>
@@ -22789,18 +23065,18 @@
       </p:sp>
       <p:sp>
         <p:nvSpPr>
-          <p:cNvPr id="48" name="Shape 46"/>
+          <p:cNvPr id="51" name="Shape 49"/>
           <p:cNvSpPr/>
           <p:nvPr/>
         </p:nvSpPr>
         <p:spPr>
           <a:xfrm>
             <a:off x="7576947" y="4169664"/>
-            <a:ext cx="685800" cy="384048"/>
+            <a:ext cx="685800" cy="475488"/>
           </a:xfrm>
           <a:prstGeom prst="rect">
             <a:avLst>
-              <a:gd name="adj" fmla="val 9524"/>
+              <a:gd name="adj" fmla="val 7692"/>
             </a:avLst>
           </a:prstGeom>
           <a:solidFill>
@@ -22816,14 +23092,14 @@
       </p:sp>
       <p:sp>
         <p:nvSpPr>
-          <p:cNvPr id="49" name="Text 47"/>
+          <p:cNvPr id="52" name="Text 50"/>
           <p:cNvSpPr/>
           <p:nvPr/>
         </p:nvSpPr>
         <p:spPr>
           <a:xfrm>
             <a:off x="7576947" y="4169664"/>
-            <a:ext cx="685800" cy="384048"/>
+            <a:ext cx="685800" cy="475488"/>
           </a:xfrm>
           <a:prstGeom prst="rect">
             <a:avLst/>
@@ -22847,48 +23123,9 @@
                 <a:ea typeface="Trebuchet MS" pitchFamily="34" charset="-122"/>
                 <a:cs typeface="Trebuchet MS" pitchFamily="34" charset="-120"/>
               </a:rPr>
-              <a:t>t</a:t>
+              <a:t>er</a:t>
             </a:r>
             <a:endParaRPr lang="en-US" sz="900" dirty="0"/>
-          </a:p>
-        </p:txBody>
-      </p:sp>
-      <p:sp>
-        <p:nvSpPr>
-          <p:cNvPr id="50" name="Text 48"/>
-          <p:cNvSpPr/>
-          <p:nvPr/>
-        </p:nvSpPr>
-        <p:spPr>
-          <a:xfrm>
-            <a:off x="7576947" y="4572000"/>
-            <a:ext cx="685800" cy="219456"/>
-          </a:xfrm>
-          <a:prstGeom prst="rect">
-            <a:avLst/>
-          </a:prstGeom>
-          <a:noFill/>
-          <a:ln/>
-        </p:spPr>
-        <p:txBody>
-          <a:bodyPr wrap="square" lIns="0" tIns="0" rIns="0" bIns="0" rtlCol="0" anchor="t"/>
-          <a:lstStyle/>
-          <a:p>
-            <a:pPr algn="ctr" indent="0" marL="0">
-              <a:buNone/>
-            </a:pPr>
-            <a:r>
-              <a:rPr lang="en-US" sz="750" i="1" dirty="0">
-                <a:solidFill>
-                  <a:srgbClr val="94A3B8"/>
-                </a:solidFill>
-                <a:latin typeface="Calibri" pitchFamily="34" charset="0"/>
-                <a:ea typeface="Calibri" pitchFamily="34" charset="-122"/>
-                <a:cs typeface="Calibri" pitchFamily="34" charset="-120"/>
-              </a:rPr>
-              <a:t>/t/</a:t>
-            </a:r>
-            <a:endParaRPr lang="en-US" sz="750" dirty="0"/>
           </a:p>
         </p:txBody>
       </p:sp>
@@ -23317,7 +23554,7 @@
                 <a:ea typeface="Trebuchet MS" pitchFamily="34" charset="-122"/>
                 <a:cs typeface="Trebuchet MS" pitchFamily="34" charset="-120"/>
               </a:rPr>
-              <a:t>freshness</a:t>
+              <a:t>freshen</a:t>
             </a:r>
             <a:endParaRPr lang="en-US" sz="2800" dirty="0"/>
           </a:p>
@@ -24144,7 +24381,7 @@
                 <a:ea typeface="Trebuchet MS" pitchFamily="34" charset="-122"/>
                 <a:cs typeface="Trebuchet MS" pitchFamily="34" charset="-120"/>
               </a:rPr>
-              <a:t>freshness</a:t>
+              <a:t>freshen</a:t>
             </a:r>
             <a:endParaRPr lang="en-US" sz="2800" dirty="0"/>
           </a:p>
@@ -24322,7 +24559,7 @@
                 <a:ea typeface="Calibri" pitchFamily="34" charset="-122"/>
                 <a:cs typeface="Calibri" pitchFamily="34" charset="-120"/>
               </a:rPr>
-              <a:t>new, clean</a:t>
+              <a:t>new, clean, not stale</a:t>
             </a:r>
             <a:endParaRPr lang="en-US" sz="850" dirty="0"/>
           </a:p>
@@ -24395,7 +24632,7 @@
                 <a:ea typeface="Trebuchet MS" pitchFamily="34" charset="-122"/>
                 <a:cs typeface="Trebuchet MS" pitchFamily="34" charset="-120"/>
               </a:rPr>
-              <a:t>ness</a:t>
+              <a:t>en</a:t>
             </a:r>
             <a:endParaRPr lang="en-US" sz="1300" dirty="0"/>
           </a:p>
@@ -24434,7 +24671,7 @@
                 <a:ea typeface="Calibri" pitchFamily="34" charset="-122"/>
                 <a:cs typeface="Calibri" pitchFamily="34" charset="-120"/>
               </a:rPr>
-              <a:t>state or quality of</a:t>
+              <a:t>to make or become</a:t>
             </a:r>
             <a:endParaRPr lang="en-US" sz="850" dirty="0"/>
           </a:p>
@@ -25848,7 +26085,7 @@
                 <a:ea typeface="Trebuchet MS" pitchFamily="34" charset="-122"/>
                 <a:cs typeface="Trebuchet MS" pitchFamily="34" charset="-120"/>
               </a:rPr>
-              <a:t>freshness</a:t>
+              <a:t>freshen</a:t>
             </a:r>
             <a:endParaRPr lang="en-US" sz="2800" dirty="0"/>
           </a:p>
@@ -26026,7 +26263,7 @@
                 <a:ea typeface="Calibri" pitchFamily="34" charset="-122"/>
                 <a:cs typeface="Calibri" pitchFamily="34" charset="-120"/>
               </a:rPr>
-              <a:t>new, clean</a:t>
+              <a:t>new, clean, not stale</a:t>
             </a:r>
             <a:endParaRPr lang="en-US" sz="850" dirty="0"/>
           </a:p>
@@ -26099,7 +26336,7 @@
                 <a:ea typeface="Trebuchet MS" pitchFamily="34" charset="-122"/>
                 <a:cs typeface="Trebuchet MS" pitchFamily="34" charset="-120"/>
               </a:rPr>
-              <a:t>ness</a:t>
+              <a:t>en</a:t>
             </a:r>
             <a:endParaRPr lang="en-US" sz="1300" dirty="0"/>
           </a:p>
@@ -26138,7 +26375,7 @@
                 <a:ea typeface="Calibri" pitchFamily="34" charset="-122"/>
                 <a:cs typeface="Calibri" pitchFamily="34" charset="-120"/>
               </a:rPr>
-              <a:t>state or quality of</a:t>
+              <a:t>to make or become</a:t>
             </a:r>
             <a:endParaRPr lang="en-US" sz="850" dirty="0"/>
           </a:p>
@@ -26402,7 +26639,7 @@
                 <a:ea typeface="Trebuchet MS" pitchFamily="34" charset="-122"/>
                 <a:cs typeface="Trebuchet MS" pitchFamily="34" charset="-120"/>
               </a:rPr>
-              <a:t>ness</a:t>
+              <a:t>en</a:t>
             </a:r>
             <a:endParaRPr lang="en-US" sz="1400" dirty="0"/>
           </a:p>
@@ -26965,7 +27202,7 @@
                 <a:ea typeface="Trebuchet MS" pitchFamily="34" charset="-122"/>
                 <a:cs typeface="Trebuchet MS" pitchFamily="34" charset="-120"/>
               </a:rPr>
-              <a:t>freshness</a:t>
+              <a:t>freshen</a:t>
             </a:r>
             <a:endParaRPr lang="en-US" sz="2800" dirty="0"/>
           </a:p>
@@ -27143,7 +27380,7 @@
                 <a:ea typeface="Calibri" pitchFamily="34" charset="-122"/>
                 <a:cs typeface="Calibri" pitchFamily="34" charset="-120"/>
               </a:rPr>
-              <a:t>new, clean</a:t>
+              <a:t>new, clean, not stale</a:t>
             </a:r>
             <a:endParaRPr lang="en-US" sz="850" dirty="0"/>
           </a:p>
@@ -27216,7 +27453,7 @@
                 <a:ea typeface="Trebuchet MS" pitchFamily="34" charset="-122"/>
                 <a:cs typeface="Trebuchet MS" pitchFamily="34" charset="-120"/>
               </a:rPr>
-              <a:t>ness</a:t>
+              <a:t>en</a:t>
             </a:r>
             <a:endParaRPr lang="en-US" sz="1300" dirty="0"/>
           </a:p>
@@ -27255,7 +27492,7 @@
                 <a:ea typeface="Calibri" pitchFamily="34" charset="-122"/>
                 <a:cs typeface="Calibri" pitchFamily="34" charset="-120"/>
               </a:rPr>
-              <a:t>state or quality of</a:t>
+              <a:t>to make or become</a:t>
             </a:r>
             <a:endParaRPr lang="en-US" sz="850" dirty="0"/>
           </a:p>
@@ -27519,7 +27756,7 @@
                 <a:ea typeface="Trebuchet MS" pitchFamily="34" charset="-122"/>
                 <a:cs typeface="Trebuchet MS" pitchFamily="34" charset="-120"/>
               </a:rPr>
-              <a:t>ness</a:t>
+              <a:t>en</a:t>
             </a:r>
             <a:endParaRPr lang="en-US" sz="1400" dirty="0"/>
           </a:p>
@@ -27626,7 +27863,7 @@
         </p:nvSpPr>
         <p:spPr>
           <a:xfrm>
-            <a:off x="2124837" y="4169664"/>
+            <a:off x="2254649" y="4169664"/>
             <a:ext cx="685800" cy="475488"/>
           </a:xfrm>
           <a:prstGeom prst="rect">
@@ -27653,7 +27890,7 @@
         </p:nvSpPr>
         <p:spPr>
           <a:xfrm>
-            <a:off x="2124837" y="4169664"/>
+            <a:off x="2254649" y="4169664"/>
             <a:ext cx="685800" cy="475488"/>
           </a:xfrm>
           <a:prstGeom prst="rect">
@@ -27692,7 +27929,7 @@
         </p:nvSpPr>
         <p:spPr>
           <a:xfrm>
-            <a:off x="3033522" y="4169664"/>
+            <a:off x="3293146" y="4169664"/>
             <a:ext cx="685800" cy="475488"/>
           </a:xfrm>
           <a:prstGeom prst="rect">
@@ -27719,7 +27956,7 @@
         </p:nvSpPr>
         <p:spPr>
           <a:xfrm>
-            <a:off x="3033522" y="4169664"/>
+            <a:off x="3293146" y="4169664"/>
             <a:ext cx="685800" cy="475488"/>
           </a:xfrm>
           <a:prstGeom prst="rect">
@@ -27758,7 +27995,7 @@
         </p:nvSpPr>
         <p:spPr>
           <a:xfrm>
-            <a:off x="3942207" y="4169664"/>
+            <a:off x="4331643" y="4169664"/>
             <a:ext cx="685800" cy="475488"/>
           </a:xfrm>
           <a:prstGeom prst="rect">
@@ -27785,7 +28022,7 @@
         </p:nvSpPr>
         <p:spPr>
           <a:xfrm>
-            <a:off x="3942207" y="4169664"/>
+            <a:off x="4331643" y="4169664"/>
             <a:ext cx="685800" cy="475488"/>
           </a:xfrm>
           <a:prstGeom prst="rect">
@@ -27824,7 +28061,7 @@
         </p:nvSpPr>
         <p:spPr>
           <a:xfrm>
-            <a:off x="4850892" y="4169664"/>
+            <a:off x="5370141" y="4169664"/>
             <a:ext cx="685800" cy="475488"/>
           </a:xfrm>
           <a:prstGeom prst="rect">
@@ -27851,7 +28088,7 @@
         </p:nvSpPr>
         <p:spPr>
           <a:xfrm>
-            <a:off x="4850892" y="4169664"/>
+            <a:off x="5370141" y="4169664"/>
             <a:ext cx="685800" cy="475488"/>
           </a:xfrm>
           <a:prstGeom prst="rect">
@@ -27890,7 +28127,7 @@
         </p:nvSpPr>
         <p:spPr>
           <a:xfrm>
-            <a:off x="5759577" y="4169664"/>
+            <a:off x="6408638" y="4169664"/>
             <a:ext cx="685800" cy="475488"/>
           </a:xfrm>
           <a:prstGeom prst="rect">
@@ -27917,7 +28154,7 @@
         </p:nvSpPr>
         <p:spPr>
           <a:xfrm>
-            <a:off x="5759577" y="4169664"/>
+            <a:off x="6408638" y="4169664"/>
             <a:ext cx="685800" cy="475488"/>
           </a:xfrm>
           <a:prstGeom prst="rect">
@@ -27942,7 +28179,7 @@
                 <a:ea typeface="Trebuchet MS" pitchFamily="34" charset="-122"/>
                 <a:cs typeface="Trebuchet MS" pitchFamily="34" charset="-120"/>
               </a:rPr>
-              <a:t>n</a:t>
+              <a:t>e</a:t>
             </a:r>
             <a:endParaRPr lang="en-US" sz="900" dirty="0"/>
           </a:p>
@@ -27956,7 +28193,7 @@
         </p:nvSpPr>
         <p:spPr>
           <a:xfrm>
-            <a:off x="6668262" y="4169664"/>
+            <a:off x="7447135" y="4169664"/>
             <a:ext cx="685800" cy="475488"/>
           </a:xfrm>
           <a:prstGeom prst="rect">
@@ -27983,7 +28220,7 @@
         </p:nvSpPr>
         <p:spPr>
           <a:xfrm>
-            <a:off x="6668262" y="4169664"/>
+            <a:off x="7447135" y="4169664"/>
             <a:ext cx="685800" cy="475488"/>
           </a:xfrm>
           <a:prstGeom prst="rect">
@@ -28008,73 +28245,7 @@
                 <a:ea typeface="Trebuchet MS" pitchFamily="34" charset="-122"/>
                 <a:cs typeface="Trebuchet MS" pitchFamily="34" charset="-120"/>
               </a:rPr>
-              <a:t>e</a:t>
-            </a:r>
-            <a:endParaRPr lang="en-US" sz="900" dirty="0"/>
-          </a:p>
-        </p:txBody>
-      </p:sp>
-      <p:sp>
-        <p:nvSpPr>
-          <p:cNvPr id="45" name="Shape 43"/>
-          <p:cNvSpPr/>
-          <p:nvPr/>
-        </p:nvSpPr>
-        <p:spPr>
-          <a:xfrm>
-            <a:off x="7576947" y="4169664"/>
-            <a:ext cx="685800" cy="475488"/>
-          </a:xfrm>
-          <a:prstGeom prst="rect">
-            <a:avLst>
-              <a:gd name="adj" fmla="val 7692"/>
-            </a:avLst>
-          </a:prstGeom>
-          <a:solidFill>
-            <a:srgbClr val="FFFFFF"/>
-          </a:solidFill>
-          <a:ln w="12700">
-            <a:solidFill>
-              <a:srgbClr val="DB2777"/>
-            </a:solidFill>
-            <a:prstDash val="solid"/>
-          </a:ln>
-        </p:spPr>
-      </p:sp>
-      <p:sp>
-        <p:nvSpPr>
-          <p:cNvPr id="46" name="Text 44"/>
-          <p:cNvSpPr/>
-          <p:nvPr/>
-        </p:nvSpPr>
-        <p:spPr>
-          <a:xfrm>
-            <a:off x="7576947" y="4169664"/>
-            <a:ext cx="685800" cy="475488"/>
-          </a:xfrm>
-          <a:prstGeom prst="rect">
-            <a:avLst/>
-          </a:prstGeom>
-          <a:noFill/>
-          <a:ln/>
-        </p:spPr>
-        <p:txBody>
-          <a:bodyPr wrap="square" lIns="0" tIns="0" rIns="0" bIns="0" rtlCol="0" anchor="ctr"/>
-          <a:lstStyle/>
-          <a:p>
-            <a:pPr algn="ctr" indent="0" marL="0">
-              <a:buNone/>
-            </a:pPr>
-            <a:r>
-              <a:rPr lang="en-US" sz="900" b="1" dirty="0">
-                <a:solidFill>
-                  <a:srgbClr val="9D174D"/>
-                </a:solidFill>
-                <a:latin typeface="Trebuchet MS" pitchFamily="34" charset="0"/>
-                <a:ea typeface="Trebuchet MS" pitchFamily="34" charset="-122"/>
-                <a:cs typeface="Trebuchet MS" pitchFamily="34" charset="-120"/>
-              </a:rPr>
-              <a:t>ss</a:t>
+              <a:t>n</a:t>
             </a:r>
             <a:endParaRPr lang="en-US" sz="900" dirty="0"/>
           </a:p>
@@ -29510,7 +29681,7 @@
                 <a:ea typeface="Calibri" pitchFamily="34" charset="-122"/>
                 <a:cs typeface="Calibri" pitchFamily="34" charset="-120"/>
               </a:rPr>
-              <a:t>new, clean</a:t>
+              <a:t>new, clean, not stale</a:t>
             </a:r>
             <a:endParaRPr lang="en-US" sz="850" dirty="0"/>
           </a:p>
@@ -30495,7 +30666,7 @@
                 <a:ea typeface="Calibri" pitchFamily="34" charset="-122"/>
                 <a:cs typeface="Calibri" pitchFamily="34" charset="-120"/>
               </a:rPr>
-              <a:t>new, clean</a:t>
+              <a:t>new, clean, not stale</a:t>
             </a:r>
             <a:endParaRPr lang="en-US" sz="850" dirty="0"/>
           </a:p>
@@ -31612,7 +31783,7 @@
                 <a:ea typeface="Calibri" pitchFamily="34" charset="-122"/>
                 <a:cs typeface="Calibri" pitchFamily="34" charset="-120"/>
               </a:rPr>
-              <a:t>new, clean</a:t>
+              <a:t>new, clean, not stale</a:t>
             </a:r>
             <a:endParaRPr lang="en-US" sz="850" dirty="0"/>
           </a:p>
@@ -34367,7 +34538,7 @@
                 <a:ea typeface="Trebuchet MS" pitchFamily="34" charset="-122"/>
                 <a:cs typeface="Trebuchet MS" pitchFamily="34" charset="-120"/>
               </a:rPr>
-              <a:t>-ness</a:t>
+              <a:t>-en</a:t>
             </a:r>
             <a:endParaRPr lang="en-US" sz="1300" dirty="0"/>
           </a:p>
@@ -34520,7 +34691,7 @@
                 <a:ea typeface="Trebuchet MS" pitchFamily="34" charset="-122"/>
                 <a:cs typeface="Trebuchet MS" pitchFamily="34" charset="-120"/>
               </a:rPr>
-              <a:t>-ly</a:t>
+              <a:t>-er</a:t>
             </a:r>
             <a:endParaRPr lang="en-US" sz="1300" dirty="0"/>
           </a:p>
@@ -34673,7 +34844,7 @@
                 <a:ea typeface="Trebuchet MS" pitchFamily="34" charset="-122"/>
                 <a:cs typeface="Trebuchet MS" pitchFamily="34" charset="-120"/>
               </a:rPr>
-              <a:t>-er</a:t>
+              <a:t>-ly</a:t>
             </a:r>
             <a:endParaRPr lang="en-US" sz="1300" dirty="0"/>
           </a:p>
@@ -34737,7 +34908,7 @@
                 <a:ea typeface="Trebuchet MS" pitchFamily="34" charset="-122"/>
                 <a:cs typeface="Trebuchet MS" pitchFamily="34" charset="-120"/>
               </a:rPr>
-              <a:t>a-</a:t>
+              <a:t>semi-</a:t>
             </a:r>
             <a:endParaRPr lang="en-US" sz="1300" dirty="0"/>
           </a:p>
@@ -34826,7 +34997,7 @@
                 <a:ea typeface="Trebuchet MS" pitchFamily="34" charset="-122"/>
                 <a:cs typeface="Trebuchet MS" pitchFamily="34" charset="-120"/>
               </a:rPr>
-              <a:t>-en</a:t>
+              <a:t>-ness</a:t>
             </a:r>
             <a:endParaRPr lang="en-US" sz="1300" dirty="0"/>
           </a:p>
@@ -34890,7 +35061,7 @@
                 <a:ea typeface="Trebuchet MS" pitchFamily="34" charset="-122"/>
                 <a:cs typeface="Trebuchet MS" pitchFamily="34" charset="-120"/>
               </a:rPr>
-              <a:t>over-</a:t>
+              <a:t>ultra-</a:t>
             </a:r>
             <a:endParaRPr lang="en-US" sz="1300" dirty="0"/>
           </a:p>
@@ -34979,7 +35150,7 @@
                 <a:ea typeface="Trebuchet MS" pitchFamily="34" charset="-122"/>
                 <a:cs typeface="Trebuchet MS" pitchFamily="34" charset="-120"/>
               </a:rPr>
-              <a:t>-ment</a:t>
+              <a:t>-ing</a:t>
             </a:r>
             <a:endParaRPr lang="en-US" sz="1300" dirty="0"/>
           </a:p>
@@ -35546,7 +35717,7 @@
                 <a:ea typeface="Trebuchet MS" pitchFamily="34" charset="-122"/>
                 <a:cs typeface="Trebuchet MS" pitchFamily="34" charset="-120"/>
               </a:rPr>
-              <a:t>freshwater</a:t>
+              <a:t>freshener</a:t>
             </a:r>
             <a:endParaRPr lang="en-US" sz="1200" dirty="0"/>
           </a:p>
@@ -36734,7 +36905,7 @@
                 <a:ea typeface="Calibri" pitchFamily="34" charset="-122"/>
                 <a:cs typeface="Calibri" pitchFamily="34" charset="-120"/>
               </a:rPr>
-              <a:t>1.  The word 'refresh' contains the root 'fresh'.</a:t>
+              <a:t>1.  'Freshness' means the quality of being new and clean.</a:t>
             </a:r>
             <a:endParaRPr lang="en-US" sz="1300" dirty="0"/>
           </a:p>
@@ -36873,7 +37044,7 @@
                 <a:ea typeface="Calibri" pitchFamily="34" charset="-122"/>
                 <a:cs typeface="Calibri" pitchFamily="34" charset="-120"/>
               </a:rPr>
-              <a:t>2.  The root 'fresh' means old and stale.</a:t>
+              <a:t>2.  The word 'refresh' contains the root 'fresh'.</a:t>
             </a:r>
             <a:endParaRPr lang="en-US" sz="1300" dirty="0"/>
           </a:p>
@@ -36896,11 +37067,11 @@
             </a:avLst>
           </a:prstGeom>
           <a:solidFill>
-            <a:srgbClr val="FEE2E2"/>
-          </a:solidFill>
-          <a:ln w="12700">
-            <a:solidFill>
-              <a:srgbClr val="DC2626"/>
+            <a:srgbClr val="DCFCE7"/>
+          </a:solidFill>
+          <a:ln w="12700">
+            <a:solidFill>
+              <a:srgbClr val="16A34A"/>
             </a:solidFill>
             <a:prstDash val="solid"/>
           </a:ln>
@@ -36933,13 +37104,13 @@
             <a:r>
               <a:rPr lang="en-US" sz="1100" b="1" dirty="0">
                 <a:solidFill>
-                  <a:srgbClr val="DC2626"/>
+                  <a:srgbClr val="16A34A"/>
                 </a:solidFill>
                 <a:latin typeface="Trebuchet MS" pitchFamily="34" charset="0"/>
                 <a:ea typeface="Trebuchet MS" pitchFamily="34" charset="-122"/>
                 <a:cs typeface="Trebuchet MS" pitchFamily="34" charset="-120"/>
               </a:rPr>
-              <a:t>FALSE</a:t>
+              <a:t>TRUE</a:t>
             </a:r>
             <a:endParaRPr lang="en-US" sz="1100" dirty="0"/>
           </a:p>
@@ -37012,7 +37183,7 @@
                 <a:ea typeface="Calibri" pitchFamily="34" charset="-122"/>
                 <a:cs typeface="Calibri" pitchFamily="34" charset="-120"/>
               </a:rPr>
-              <a:t>3.  The word 'freshness' uses the suffix '-ness' to make a noun.</a:t>
+              <a:t>3.  The suffix '-ly' in 'freshly' turns the word into a noun.</a:t>
             </a:r>
             <a:endParaRPr lang="en-US" sz="1300" dirty="0"/>
           </a:p>
@@ -37035,11 +37206,11 @@
             </a:avLst>
           </a:prstGeom>
           <a:solidFill>
-            <a:srgbClr val="DCFCE7"/>
-          </a:solidFill>
-          <a:ln w="12700">
-            <a:solidFill>
-              <a:srgbClr val="16A34A"/>
+            <a:srgbClr val="FEE2E2"/>
+          </a:solidFill>
+          <a:ln w="12700">
+            <a:solidFill>
+              <a:srgbClr val="DC2626"/>
             </a:solidFill>
             <a:prstDash val="solid"/>
           </a:ln>
@@ -37072,13 +37243,13 @@
             <a:r>
               <a:rPr lang="en-US" sz="1100" b="1" dirty="0">
                 <a:solidFill>
-                  <a:srgbClr val="16A34A"/>
+                  <a:srgbClr val="DC2626"/>
                 </a:solidFill>
                 <a:latin typeface="Trebuchet MS" pitchFamily="34" charset="0"/>
                 <a:ea typeface="Trebuchet MS" pitchFamily="34" charset="-122"/>
                 <a:cs typeface="Trebuchet MS" pitchFamily="34" charset="-120"/>
               </a:rPr>
-              <a:t>TRUE</a:t>
+              <a:t>FALSE</a:t>
             </a:r>
             <a:endParaRPr lang="en-US" sz="1100" dirty="0"/>
           </a:p>
@@ -37151,7 +37322,7 @@
                 <a:ea typeface="Calibri" pitchFamily="34" charset="-122"/>
                 <a:cs typeface="Calibri" pitchFamily="34" charset="-120"/>
               </a:rPr>
-              <a:t>4.  The word 'refreshment' can describe a drink or snack that restores energy.</a:t>
+              <a:t>4.  The root 'fresh' comes from the Greek word for water.</a:t>
             </a:r>
             <a:endParaRPr lang="en-US" sz="1300" dirty="0"/>
           </a:p>
@@ -37174,11 +37345,11 @@
             </a:avLst>
           </a:prstGeom>
           <a:solidFill>
-            <a:srgbClr val="DCFCE7"/>
-          </a:solidFill>
-          <a:ln w="12700">
-            <a:solidFill>
-              <a:srgbClr val="16A34A"/>
+            <a:srgbClr val="FEE2E2"/>
+          </a:solidFill>
+          <a:ln w="12700">
+            <a:solidFill>
+              <a:srgbClr val="DC2626"/>
             </a:solidFill>
             <a:prstDash val="solid"/>
           </a:ln>
@@ -37211,13 +37382,13 @@
             <a:r>
               <a:rPr lang="en-US" sz="1100" b="1" dirty="0">
                 <a:solidFill>
-                  <a:srgbClr val="16A34A"/>
+                  <a:srgbClr val="DC2626"/>
                 </a:solidFill>
                 <a:latin typeface="Trebuchet MS" pitchFamily="34" charset="0"/>
                 <a:ea typeface="Trebuchet MS" pitchFamily="34" charset="-122"/>
                 <a:cs typeface="Trebuchet MS" pitchFamily="34" charset="-120"/>
               </a:rPr>
-              <a:t>TRUE</a:t>
+              <a:t>FALSE</a:t>
             </a:r>
             <a:endParaRPr lang="en-US" sz="1100" dirty="0"/>
           </a:p>
@@ -37290,7 +37461,7 @@
                 <a:ea typeface="Calibri" pitchFamily="34" charset="-122"/>
                 <a:cs typeface="Calibri" pitchFamily="34" charset="-120"/>
               </a:rPr>
-              <a:t>5.  The prefix 're-' in 'refresh' means against.</a:t>
+              <a:t>5.  Adding 're-' before 'fresh' means to make something fresh again.</a:t>
             </a:r>
             <a:endParaRPr lang="en-US" sz="1300" dirty="0"/>
           </a:p>
@@ -37313,11 +37484,11 @@
             </a:avLst>
           </a:prstGeom>
           <a:solidFill>
-            <a:srgbClr val="FEE2E2"/>
-          </a:solidFill>
-          <a:ln w="12700">
-            <a:solidFill>
-              <a:srgbClr val="DC2626"/>
+            <a:srgbClr val="DCFCE7"/>
+          </a:solidFill>
+          <a:ln w="12700">
+            <a:solidFill>
+              <a:srgbClr val="16A34A"/>
             </a:solidFill>
             <a:prstDash val="solid"/>
           </a:ln>
@@ -37350,13 +37521,13 @@
             <a:r>
               <a:rPr lang="en-US" sz="1100" b="1" dirty="0">
                 <a:solidFill>
-                  <a:srgbClr val="DC2626"/>
+                  <a:srgbClr val="16A34A"/>
                 </a:solidFill>
                 <a:latin typeface="Trebuchet MS" pitchFamily="34" charset="0"/>
                 <a:ea typeface="Trebuchet MS" pitchFamily="34" charset="-122"/>
                 <a:cs typeface="Trebuchet MS" pitchFamily="34" charset="-120"/>
               </a:rPr>
-              <a:t>FALSE</a:t>
+              <a:t>TRUE</a:t>
             </a:r>
             <a:endParaRPr lang="en-US" sz="1100" dirty="0"/>
           </a:p>
@@ -39046,7 +39217,7 @@
                 <a:ea typeface="Trebuchet MS" pitchFamily="34" charset="-122"/>
                 <a:cs typeface="Trebuchet MS" pitchFamily="34" charset="-120"/>
               </a:rPr>
-              <a:t>-ness</a:t>
+              <a:t>-en</a:t>
             </a:r>
             <a:endParaRPr lang="en-US" sz="1300" dirty="0"/>
           </a:p>
@@ -39199,7 +39370,7 @@
                 <a:ea typeface="Trebuchet MS" pitchFamily="34" charset="-122"/>
                 <a:cs typeface="Trebuchet MS" pitchFamily="34" charset="-120"/>
               </a:rPr>
-              <a:t>-ly</a:t>
+              <a:t>-er</a:t>
             </a:r>
             <a:endParaRPr lang="en-US" sz="1300" dirty="0"/>
           </a:p>
@@ -39352,7 +39523,7 @@
                 <a:ea typeface="Trebuchet MS" pitchFamily="34" charset="-122"/>
                 <a:cs typeface="Trebuchet MS" pitchFamily="34" charset="-120"/>
               </a:rPr>
-              <a:t>-er</a:t>
+              <a:t>-ly</a:t>
             </a:r>
             <a:endParaRPr lang="en-US" sz="1300" dirty="0"/>
           </a:p>
@@ -39416,7 +39587,7 @@
                 <a:ea typeface="Trebuchet MS" pitchFamily="34" charset="-122"/>
                 <a:cs typeface="Trebuchet MS" pitchFamily="34" charset="-120"/>
               </a:rPr>
-              <a:t>a-</a:t>
+              <a:t>semi-</a:t>
             </a:r>
             <a:endParaRPr lang="en-US" sz="1300" dirty="0"/>
           </a:p>
@@ -39505,7 +39676,7 @@
                 <a:ea typeface="Trebuchet MS" pitchFamily="34" charset="-122"/>
                 <a:cs typeface="Trebuchet MS" pitchFamily="34" charset="-120"/>
               </a:rPr>
-              <a:t>-en</a:t>
+              <a:t>-ness</a:t>
             </a:r>
             <a:endParaRPr lang="en-US" sz="1300" dirty="0"/>
           </a:p>
@@ -39569,7 +39740,7 @@
                 <a:ea typeface="Trebuchet MS" pitchFamily="34" charset="-122"/>
                 <a:cs typeface="Trebuchet MS" pitchFamily="34" charset="-120"/>
               </a:rPr>
-              <a:t>over-</a:t>
+              <a:t>ultra-</a:t>
             </a:r>
             <a:endParaRPr lang="en-US" sz="1300" dirty="0"/>
           </a:p>
@@ -39658,7 +39829,7 @@
                 <a:ea typeface="Trebuchet MS" pitchFamily="34" charset="-122"/>
                 <a:cs typeface="Trebuchet MS" pitchFamily="34" charset="-120"/>
               </a:rPr>
-              <a:t>-ment</a:t>
+              <a:t>-ing</a:t>
             </a:r>
             <a:endParaRPr lang="en-US" sz="1300" dirty="0"/>
           </a:p>
@@ -39936,7 +40107,7 @@
         <p:spPr>
           <a:xfrm>
             <a:off x="4471416" y="4178808"/>
-            <a:ext cx="1097280" cy="420624"/>
+            <a:ext cx="822960" cy="420624"/>
           </a:xfrm>
           <a:prstGeom prst="rect">
             <a:avLst>
@@ -39970,7 +40141,7 @@
         <p:spPr>
           <a:xfrm>
             <a:off x="4471416" y="4178808"/>
-            <a:ext cx="1097280" cy="420624"/>
+            <a:ext cx="822960" cy="420624"/>
           </a:xfrm>
           <a:prstGeom prst="rect">
             <a:avLst/>
@@ -39994,7 +40165,7 @@
                 <a:ea typeface="Trebuchet MS" pitchFamily="34" charset="-122"/>
                 <a:cs typeface="Trebuchet MS" pitchFamily="34" charset="-120"/>
               </a:rPr>
-              <a:t>-ness</a:t>
+              <a:t>-en</a:t>
             </a:r>
             <a:endParaRPr lang="en-US" sz="1300" dirty="0"/>
           </a:p>
@@ -40008,7 +40179,7 @@
         </p:nvSpPr>
         <p:spPr>
           <a:xfrm>
-            <a:off x="5641848" y="4178808"/>
+            <a:off x="5367528" y="4178808"/>
             <a:ext cx="365760" cy="420624"/>
           </a:xfrm>
           <a:prstGeom prst="rect">
@@ -40047,7 +40218,7 @@
         </p:nvSpPr>
         <p:spPr>
           <a:xfrm>
-            <a:off x="6053328" y="4178808"/>
+            <a:off x="5779008" y="4178808"/>
             <a:ext cx="2194560" cy="420624"/>
           </a:xfrm>
           <a:prstGeom prst="rect">
@@ -40074,7 +40245,7 @@
         </p:nvSpPr>
         <p:spPr>
           <a:xfrm>
-            <a:off x="6053328" y="4178808"/>
+            <a:off x="5779008" y="4178808"/>
             <a:ext cx="2194560" cy="420624"/>
           </a:xfrm>
           <a:prstGeom prst="rect">
@@ -40569,7 +40740,7 @@
                 <a:ea typeface="Calibri" pitchFamily="34" charset="-122"/>
                 <a:cs typeface="Calibri" pitchFamily="34" charset="-120"/>
               </a:rPr>
-              <a:t>To make something cleaner, newer, or more pleasant.</a:t>
+              <a:t>To make something feel newer, cleaner, or cooler.</a:t>
             </a:r>
             <a:endParaRPr lang="en-US" sz="1200" dirty="0"/>
           </a:p>
@@ -40708,7 +40879,7 @@
                 <a:ea typeface="Calibri" pitchFamily="34" charset="-122"/>
                 <a:cs typeface="Calibri" pitchFamily="34" charset="-120"/>
               </a:rPr>
-              <a:t>To make something feel new or clean again.</a:t>
+              <a:t>To make something feel new and full of energy again.</a:t>
             </a:r>
             <a:endParaRPr lang="en-US" sz="1200" dirty="0"/>
           </a:p>
@@ -40847,7 +41018,7 @@
                 <a:ea typeface="Calibri" pitchFamily="34" charset="-122"/>
                 <a:cs typeface="Calibri" pitchFamily="34" charset="-120"/>
               </a:rPr>
-              <a:t>The quality of being new, clean, or not stale.</a:t>
+              <a:t>The quality of being new, clean, and not stale.</a:t>
             </a:r>
             <a:endParaRPr lang="en-US" sz="1200" dirty="0"/>
           </a:p>
@@ -40986,7 +41157,7 @@
                 <a:ea typeface="Calibri" pitchFamily="34" charset="-122"/>
                 <a:cs typeface="Calibri" pitchFamily="34" charset="-120"/>
               </a:rPr>
-              <a:t>Something that makes you feel cool, awake, or renewed.</a:t>
+              <a:t>Something that makes you feel cool, awake, and full of energy.</a:t>
             </a:r>
             <a:endParaRPr lang="en-US" sz="1200" dirty="0"/>
           </a:p>
@@ -41125,7 +41296,7 @@
                 <a:ea typeface="Calibri" pitchFamily="34" charset="-122"/>
                 <a:cs typeface="Calibri" pitchFamily="34" charset="-120"/>
               </a:rPr>
-              <a:t>Not fresh; stale or no longer new.</a:t>
+              <a:t>Not new or clean; something that has gone stale or old.</a:t>
             </a:r>
             <a:endParaRPr lang="en-US" sz="1200" dirty="0"/>
           </a:p>
@@ -41264,7 +41435,7 @@
                 <a:ea typeface="Calibri" pitchFamily="34" charset="-122"/>
                 <a:cs typeface="Calibri" pitchFamily="34" charset="-120"/>
               </a:rPr>
-              <a:t>A snack or drink that helps restore your energy.</a:t>
+              <a:t>A drink or snack that gives you energy and makes you feel better.</a:t>
             </a:r>
             <a:endParaRPr lang="en-US" sz="1200" dirty="0"/>
           </a:p>
@@ -41403,7 +41574,7 @@
                 <a:ea typeface="Calibri" pitchFamily="34" charset="-122"/>
                 <a:cs typeface="Calibri" pitchFamily="34" charset="-120"/>
               </a:rPr>
-              <a:t>Done very recently, in a new or clean way.</a:t>
+              <a:t>Done very recently, in a new and clean way.</a:t>
             </a:r>
             <a:endParaRPr lang="en-US" sz="1200" dirty="0"/>
           </a:p>
@@ -41898,7 +42069,7 @@
                 <a:ea typeface="Calibri" pitchFamily="34" charset="-122"/>
                 <a:cs typeface="Calibri" pitchFamily="34" charset="-120"/>
               </a:rPr>
-              <a:t>After the long hike, a glass of cold water was the most refreshing thing I had ever tasted.</a:t>
+              <a:t>After the long hike, the freshness of the cool mountain air made everyone feel much better.</a:t>
             </a:r>
             <a:endParaRPr lang="en-US" sz="1500" dirty="0"/>
           </a:p>
@@ -42062,7 +42233,7 @@
                 <a:ea typeface="Calibri" pitchFamily="34" charset="-122"/>
                 <a:cs typeface="Calibri" pitchFamily="34" charset="-120"/>
               </a:rPr>
-              <a:t>The baker put out freshly baked bread every morning so the shop smelled wonderful.</a:t>
+              <a:t>Mia used a lavender freshener to make her bedroom smell clean and pleasant.</a:t>
             </a:r>
             <a:endParaRPr lang="en-US" sz="1500" dirty="0"/>
           </a:p>
@@ -42226,7 +42397,7 @@
                 <a:ea typeface="Calibri" pitchFamily="34" charset="-122"/>
                 <a:cs typeface="Calibri" pitchFamily="34" charset="-120"/>
               </a:rPr>
-              <a:t>We stopped at the service station for some refreshments before continuing our road trip.</a:t>
+              <a:t>The teacher asked the students to refresh their memory by reading over their notes before the test.</a:t>
             </a:r>
             <a:endParaRPr lang="en-US" sz="1500" dirty="0"/>
           </a:p>

--- a/output/wordlabs-fresh-3day.pptx
+++ b/output/wordlabs-fresh-3day.pptx
@@ -4240,7 +4240,7 @@
                 <a:ea typeface="Calibri" pitchFamily="34" charset="-122"/>
                 <a:cs typeface="Calibri" pitchFamily="34" charset="-120"/>
               </a:rPr>
-              <a:t>"new, clean, not stale"</a:t>
+              <a:t>"new; recently made"</a:t>
             </a:r>
             <a:endParaRPr lang="en-US" sz="2200" dirty="0"/>
           </a:p>
@@ -4279,7 +4279,7 @@
                 <a:ea typeface="Calibri" pitchFamily="34" charset="-122"/>
                 <a:cs typeface="Calibri" pitchFamily="34" charset="-120"/>
               </a:rPr>
-              <a:t>Origin: Latin: friscus</a:t>
+              <a:t>Origin: Anglo-Saxon (Old English) root</a:t>
             </a:r>
             <a:endParaRPr lang="en-US" sz="1300" dirty="0"/>
           </a:p>
@@ -5288,7 +5288,7 @@
                 <a:ea typeface="Calibri" pitchFamily="34" charset="-122"/>
                 <a:cs typeface="Calibri" pitchFamily="34" charset="-120"/>
               </a:rPr>
-              <a:t>Word Labs  •  wordlabs.app  •  Root: 'fresh' = new, clean, not stale</a:t>
+              <a:t>Word Labs  •  wordlabs.app  •  Root: 'fresh' = new; recently made</a:t>
             </a:r>
             <a:endParaRPr lang="en-US" sz="800" dirty="0"/>
           </a:p>
@@ -5622,7 +5622,7 @@
                 <a:ea typeface="Trebuchet MS" pitchFamily="34" charset="-122"/>
                 <a:cs typeface="Trebuchet MS" pitchFamily="34" charset="-120"/>
               </a:rPr>
-              <a:t>0</a:t>
+              <a:t>1</a:t>
             </a:r>
             <a:pPr algn="ctr" indent="0" marL="0">
               <a:buNone/>
@@ -5928,7 +5928,7 @@
                 <a:ea typeface="Calibri" pitchFamily="34" charset="-122"/>
                 <a:cs typeface="Calibri" pitchFamily="34" charset="-120"/>
               </a:rPr>
-              <a:t>Word Labs  •  wordlabs.app  •  Root: 'fresh' = new, clean, not stale</a:t>
+              <a:t>Word Labs  •  wordlabs.app  •  Root: 'fresh' = new; recently made</a:t>
             </a:r>
             <a:endParaRPr lang="en-US" sz="800" dirty="0"/>
           </a:p>
@@ -6071,7 +6071,7 @@
                 <a:ea typeface="Calibri" pitchFamily="34" charset="-122"/>
                 <a:cs typeface="Calibri" pitchFamily="34" charset="-120"/>
               </a:rPr>
-              <a:t> of the morning air was </a:t>
+              <a:t> of the morning air made her feel awake. After a good night's sleep, Maya felt </a:t>
             </a:r>
             <a:pPr algn="l" indent="0" marL="0">
               <a:buNone/>
@@ -6088,7 +6088,7 @@
                 <a:ea typeface="Calibri" pitchFamily="34" charset="-122"/>
                 <a:cs typeface="Calibri" pitchFamily="34" charset="-120"/>
               </a:rPr>
-              <a:t>refreshing</a:t>
+              <a:t>refreshed</a:t>
             </a:r>
             <a:pPr algn="l" indent="0" marL="0">
               <a:buNone/>
@@ -6102,7 +6102,7 @@
                 <a:ea typeface="Calibri" pitchFamily="34" charset="-122"/>
                 <a:cs typeface="Calibri" pitchFamily="34" charset="-120"/>
               </a:rPr>
-              <a:t> after such a hot night.</a:t>
+              <a:t> and ready for school.</a:t>
             </a:r>
             <a:endParaRPr lang="en-US" sz="1800" dirty="0"/>
           </a:p>
@@ -6385,7 +6385,7 @@
                 <a:ea typeface="Trebuchet MS" pitchFamily="34" charset="-122"/>
                 <a:cs typeface="Trebuchet MS" pitchFamily="34" charset="-120"/>
               </a:rPr>
-              <a:t>refreshing</a:t>
+              <a:t>refreshed</a:t>
             </a:r>
             <a:endParaRPr lang="en-US" sz="1400" dirty="0"/>
           </a:p>
@@ -6716,7 +6716,7 @@
                 <a:ea typeface="Calibri" pitchFamily="34" charset="-122"/>
                 <a:cs typeface="Calibri" pitchFamily="34" charset="-120"/>
               </a:rPr>
-              <a:t>Word Labs  •  wordlabs.app  •  Root: 'fresh' = new, clean, not stale</a:t>
+              <a:t>Word Labs  •  wordlabs.app  •  Root: 'fresh' = new; recently made</a:t>
             </a:r>
             <a:endParaRPr lang="en-US" sz="800" dirty="0"/>
           </a:p>
@@ -7543,7 +7543,7 @@
                 <a:ea typeface="Calibri" pitchFamily="34" charset="-122"/>
                 <a:cs typeface="Calibri" pitchFamily="34" charset="-120"/>
               </a:rPr>
-              <a:t>Word Labs  •  wordlabs.app  •  Root: 'fresh' = new, clean, not stale</a:t>
+              <a:t>Word Labs  •  wordlabs.app  •  Root: 'fresh' = new; recently made</a:t>
             </a:r>
             <a:endParaRPr lang="en-US" sz="800" dirty="0"/>
           </a:p>
@@ -7860,7 +7860,7 @@
                 <a:ea typeface="Calibri" pitchFamily="34" charset="-122"/>
                 <a:cs typeface="Calibri" pitchFamily="34" charset="-120"/>
               </a:rPr>
-              <a:t>new, clean, not stale</a:t>
+              <a:t>new; recently made</a:t>
             </a:r>
             <a:endParaRPr lang="en-US" sz="850" dirty="0"/>
           </a:p>
@@ -7972,7 +7972,7 @@
                 <a:ea typeface="Calibri" pitchFamily="34" charset="-122"/>
                 <a:cs typeface="Calibri" pitchFamily="34" charset="-120"/>
               </a:rPr>
-              <a:t>quality or state of</a:t>
+              <a:t>state of</a:t>
             </a:r>
             <a:endParaRPr lang="en-US" sz="850" dirty="0"/>
           </a:p>
@@ -8528,7 +8528,7 @@
                 <a:ea typeface="Calibri" pitchFamily="34" charset="-122"/>
                 <a:cs typeface="Calibri" pitchFamily="34" charset="-120"/>
               </a:rPr>
-              <a:t>Word Labs  •  wordlabs.app  •  Root: 'fresh' = new, clean, not stale</a:t>
+              <a:t>Word Labs  •  wordlabs.app  •  Root: 'fresh' = new; recently made</a:t>
             </a:r>
             <a:endParaRPr lang="en-US" sz="800" dirty="0"/>
           </a:p>
@@ -8845,7 +8845,7 @@
                 <a:ea typeface="Calibri" pitchFamily="34" charset="-122"/>
                 <a:cs typeface="Calibri" pitchFamily="34" charset="-120"/>
               </a:rPr>
-              <a:t>new, clean, not stale</a:t>
+              <a:t>new; recently made</a:t>
             </a:r>
             <a:endParaRPr lang="en-US" sz="850" dirty="0"/>
           </a:p>
@@ -8957,7 +8957,7 @@
                 <a:ea typeface="Calibri" pitchFamily="34" charset="-122"/>
                 <a:cs typeface="Calibri" pitchFamily="34" charset="-120"/>
               </a:rPr>
-              <a:t>quality or state of</a:t>
+              <a:t>state of</a:t>
             </a:r>
             <a:endParaRPr lang="en-US" sz="850" dirty="0"/>
           </a:p>
@@ -9645,7 +9645,7 @@
                 <a:ea typeface="Calibri" pitchFamily="34" charset="-122"/>
                 <a:cs typeface="Calibri" pitchFamily="34" charset="-120"/>
               </a:rPr>
-              <a:t>Word Labs  •  wordlabs.app  •  Root: 'fresh' = new, clean, not stale</a:t>
+              <a:t>Word Labs  •  wordlabs.app  •  Root: 'fresh' = new; recently made</a:t>
             </a:r>
             <a:endParaRPr lang="en-US" sz="800" dirty="0"/>
           </a:p>
@@ -9962,7 +9962,7 @@
                 <a:ea typeface="Calibri" pitchFamily="34" charset="-122"/>
                 <a:cs typeface="Calibri" pitchFamily="34" charset="-120"/>
               </a:rPr>
-              <a:t>new, clean, not stale</a:t>
+              <a:t>new; recently made</a:t>
             </a:r>
             <a:endParaRPr lang="en-US" sz="850" dirty="0"/>
           </a:p>
@@ -10074,7 +10074,7 @@
                 <a:ea typeface="Calibri" pitchFamily="34" charset="-122"/>
                 <a:cs typeface="Calibri" pitchFamily="34" charset="-120"/>
               </a:rPr>
-              <a:t>quality or state of</a:t>
+              <a:t>state of</a:t>
             </a:r>
             <a:endParaRPr lang="en-US" sz="850" dirty="0"/>
           </a:p>
@@ -10445,7 +10445,7 @@
         </p:nvSpPr>
         <p:spPr>
           <a:xfrm>
-            <a:off x="2124837" y="4169664"/>
+            <a:off x="2023872" y="4169664"/>
             <a:ext cx="685800" cy="475488"/>
           </a:xfrm>
           <a:prstGeom prst="rect">
@@ -10472,7 +10472,7 @@
         </p:nvSpPr>
         <p:spPr>
           <a:xfrm>
-            <a:off x="2124837" y="4169664"/>
+            <a:off x="2023872" y="4169664"/>
             <a:ext cx="685800" cy="475488"/>
           </a:xfrm>
           <a:prstGeom prst="rect">
@@ -10511,7 +10511,7 @@
         </p:nvSpPr>
         <p:spPr>
           <a:xfrm>
-            <a:off x="3033522" y="4169664"/>
+            <a:off x="2831592" y="4169664"/>
             <a:ext cx="685800" cy="475488"/>
           </a:xfrm>
           <a:prstGeom prst="rect">
@@ -10538,7 +10538,7 @@
         </p:nvSpPr>
         <p:spPr>
           <a:xfrm>
-            <a:off x="3033522" y="4169664"/>
+            <a:off x="2831592" y="4169664"/>
             <a:ext cx="685800" cy="475488"/>
           </a:xfrm>
           <a:prstGeom prst="rect">
@@ -10577,7 +10577,7 @@
         </p:nvSpPr>
         <p:spPr>
           <a:xfrm>
-            <a:off x="3942207" y="4169664"/>
+            <a:off x="3639312" y="4169664"/>
             <a:ext cx="685800" cy="475488"/>
           </a:xfrm>
           <a:prstGeom prst="rect">
@@ -10604,7 +10604,7 @@
         </p:nvSpPr>
         <p:spPr>
           <a:xfrm>
-            <a:off x="3942207" y="4169664"/>
+            <a:off x="3639312" y="4169664"/>
             <a:ext cx="685800" cy="475488"/>
           </a:xfrm>
           <a:prstGeom prst="rect">
@@ -10643,7 +10643,7 @@
         </p:nvSpPr>
         <p:spPr>
           <a:xfrm>
-            <a:off x="4850892" y="4169664"/>
+            <a:off x="4447032" y="4169664"/>
             <a:ext cx="685800" cy="475488"/>
           </a:xfrm>
           <a:prstGeom prst="rect">
@@ -10670,7 +10670,7 @@
         </p:nvSpPr>
         <p:spPr>
           <a:xfrm>
-            <a:off x="4850892" y="4169664"/>
+            <a:off x="4447032" y="4169664"/>
             <a:ext cx="685800" cy="475488"/>
           </a:xfrm>
           <a:prstGeom prst="rect">
@@ -10709,7 +10709,7 @@
         </p:nvSpPr>
         <p:spPr>
           <a:xfrm>
-            <a:off x="5759577" y="4169664"/>
+            <a:off x="5254752" y="4169664"/>
             <a:ext cx="685800" cy="475488"/>
           </a:xfrm>
           <a:prstGeom prst="rect">
@@ -10736,7 +10736,7 @@
         </p:nvSpPr>
         <p:spPr>
           <a:xfrm>
-            <a:off x="5759577" y="4169664"/>
+            <a:off x="5254752" y="4169664"/>
             <a:ext cx="685800" cy="475488"/>
           </a:xfrm>
           <a:prstGeom prst="rect">
@@ -10775,7 +10775,7 @@
         </p:nvSpPr>
         <p:spPr>
           <a:xfrm>
-            <a:off x="6668262" y="4169664"/>
+            <a:off x="6062472" y="4169664"/>
             <a:ext cx="685800" cy="475488"/>
           </a:xfrm>
           <a:prstGeom prst="rect">
@@ -10802,7 +10802,7 @@
         </p:nvSpPr>
         <p:spPr>
           <a:xfrm>
-            <a:off x="6668262" y="4169664"/>
+            <a:off x="6062472" y="4169664"/>
             <a:ext cx="685800" cy="475488"/>
           </a:xfrm>
           <a:prstGeom prst="rect">
@@ -10841,7 +10841,7 @@
         </p:nvSpPr>
         <p:spPr>
           <a:xfrm>
-            <a:off x="7576947" y="4169664"/>
+            <a:off x="6870192" y="4169664"/>
             <a:ext cx="685800" cy="475488"/>
           </a:xfrm>
           <a:prstGeom prst="rect">
@@ -10868,7 +10868,7 @@
         </p:nvSpPr>
         <p:spPr>
           <a:xfrm>
-            <a:off x="7576947" y="4169664"/>
+            <a:off x="6870192" y="4169664"/>
             <a:ext cx="685800" cy="475488"/>
           </a:xfrm>
           <a:prstGeom prst="rect">
@@ -10893,7 +10893,73 @@
                 <a:ea typeface="Trebuchet MS" pitchFamily="34" charset="-122"/>
                 <a:cs typeface="Trebuchet MS" pitchFamily="34" charset="-120"/>
               </a:rPr>
-              <a:t>ss</a:t>
+              <a:t>s</a:t>
+            </a:r>
+            <a:endParaRPr lang="en-US" sz="900" dirty="0"/>
+          </a:p>
+        </p:txBody>
+      </p:sp>
+      <p:sp>
+        <p:nvSpPr>
+          <p:cNvPr id="47" name="Shape 45"/>
+          <p:cNvSpPr/>
+          <p:nvPr/>
+        </p:nvSpPr>
+        <p:spPr>
+          <a:xfrm>
+            <a:off x="7677912" y="4169664"/>
+            <a:ext cx="685800" cy="475488"/>
+          </a:xfrm>
+          <a:prstGeom prst="rect">
+            <a:avLst>
+              <a:gd name="adj" fmla="val 7692"/>
+            </a:avLst>
+          </a:prstGeom>
+          <a:solidFill>
+            <a:srgbClr val="FFFFFF"/>
+          </a:solidFill>
+          <a:ln w="12700">
+            <a:solidFill>
+              <a:srgbClr val="DB2777"/>
+            </a:solidFill>
+            <a:prstDash val="solid"/>
+          </a:ln>
+        </p:spPr>
+      </p:sp>
+      <p:sp>
+        <p:nvSpPr>
+          <p:cNvPr id="48" name="Text 46"/>
+          <p:cNvSpPr/>
+          <p:nvPr/>
+        </p:nvSpPr>
+        <p:spPr>
+          <a:xfrm>
+            <a:off x="7677912" y="4169664"/>
+            <a:ext cx="685800" cy="475488"/>
+          </a:xfrm>
+          <a:prstGeom prst="rect">
+            <a:avLst/>
+          </a:prstGeom>
+          <a:noFill/>
+          <a:ln/>
+        </p:spPr>
+        <p:txBody>
+          <a:bodyPr wrap="square" lIns="0" tIns="0" rIns="0" bIns="0" rtlCol="0" anchor="ctr"/>
+          <a:lstStyle/>
+          <a:p>
+            <a:pPr algn="ctr" indent="0" marL="0">
+              <a:buNone/>
+            </a:pPr>
+            <a:r>
+              <a:rPr lang="en-US" sz="900" b="1" dirty="0">
+                <a:solidFill>
+                  <a:srgbClr val="9D174D"/>
+                </a:solidFill>
+                <a:latin typeface="Trebuchet MS" pitchFamily="34" charset="0"/>
+                <a:ea typeface="Trebuchet MS" pitchFamily="34" charset="-122"/>
+                <a:cs typeface="Trebuchet MS" pitchFamily="34" charset="-120"/>
+              </a:rPr>
+              <a:t>s</a:t>
             </a:r>
             <a:endParaRPr lang="en-US" sz="900" dirty="0"/>
           </a:p>
@@ -11185,7 +11251,7 @@
                 <a:ea typeface="Calibri" pitchFamily="34" charset="-122"/>
                 <a:cs typeface="Calibri" pitchFamily="34" charset="-120"/>
               </a:rPr>
-              <a:t>Word Labs  •  wordlabs.app  •  Root: 'fresh' = new, clean, not stale</a:t>
+              <a:t>Word Labs  •  wordlabs.app  •  Root: 'fresh' = new; recently made</a:t>
             </a:r>
             <a:endParaRPr lang="en-US" sz="800" dirty="0"/>
           </a:p>
@@ -11324,7 +11390,7 @@
                 <a:ea typeface="Trebuchet MS" pitchFamily="34" charset="-122"/>
                 <a:cs typeface="Trebuchet MS" pitchFamily="34" charset="-120"/>
               </a:rPr>
-              <a:t>refreshing</a:t>
+              <a:t>refreshed</a:t>
             </a:r>
             <a:endParaRPr lang="en-US" sz="2800" dirty="0"/>
           </a:p>
@@ -12012,7 +12078,7 @@
                 <a:ea typeface="Calibri" pitchFamily="34" charset="-122"/>
                 <a:cs typeface="Calibri" pitchFamily="34" charset="-120"/>
               </a:rPr>
-              <a:t>Word Labs  •  wordlabs.app  •  Root: 'fresh' = new, clean, not stale</a:t>
+              <a:t>Word Labs  •  wordlabs.app  •  Root: 'fresh' = new; recently made</a:t>
             </a:r>
             <a:endParaRPr lang="en-US" sz="800" dirty="0"/>
           </a:p>
@@ -12151,7 +12217,7 @@
                 <a:ea typeface="Trebuchet MS" pitchFamily="34" charset="-122"/>
                 <a:cs typeface="Trebuchet MS" pitchFamily="34" charset="-120"/>
               </a:rPr>
-              <a:t>refreshing</a:t>
+              <a:t>refreshed</a:t>
             </a:r>
             <a:endParaRPr lang="en-US" sz="2800" dirty="0"/>
           </a:p>
@@ -12441,7 +12507,7 @@
                 <a:ea typeface="Calibri" pitchFamily="34" charset="-122"/>
                 <a:cs typeface="Calibri" pitchFamily="34" charset="-120"/>
               </a:rPr>
-              <a:t>new, clean, not stale</a:t>
+              <a:t>new; recently made</a:t>
             </a:r>
             <a:endParaRPr lang="en-US" sz="850" dirty="0"/>
           </a:p>
@@ -12514,7 +12580,7 @@
                 <a:ea typeface="Trebuchet MS" pitchFamily="34" charset="-122"/>
                 <a:cs typeface="Trebuchet MS" pitchFamily="34" charset="-120"/>
               </a:rPr>
-              <a:t>ing</a:t>
+              <a:t>ed</a:t>
             </a:r>
             <a:endParaRPr lang="en-US" sz="1300" dirty="0"/>
           </a:p>
@@ -12553,7 +12619,7 @@
                 <a:ea typeface="Calibri" pitchFamily="34" charset="-122"/>
                 <a:cs typeface="Calibri" pitchFamily="34" charset="-120"/>
               </a:rPr>
-              <a:t>action in progress</a:t>
+              <a:t>past tense</a:t>
             </a:r>
             <a:endParaRPr lang="en-US" sz="850" dirty="0"/>
           </a:p>
@@ -13109,7 +13175,7 @@
                 <a:ea typeface="Calibri" pitchFamily="34" charset="-122"/>
                 <a:cs typeface="Calibri" pitchFamily="34" charset="-120"/>
               </a:rPr>
-              <a:t>Word Labs  •  wordlabs.app  •  Root: 'fresh' = new, clean, not stale</a:t>
+              <a:t>Word Labs  •  wordlabs.app  •  Root: 'fresh' = new; recently made</a:t>
             </a:r>
             <a:endParaRPr lang="en-US" sz="800" dirty="0"/>
           </a:p>
@@ -13248,7 +13314,7 @@
                 <a:ea typeface="Trebuchet MS" pitchFamily="34" charset="-122"/>
                 <a:cs typeface="Trebuchet MS" pitchFamily="34" charset="-120"/>
               </a:rPr>
-              <a:t>refreshing</a:t>
+              <a:t>refreshed</a:t>
             </a:r>
             <a:endParaRPr lang="en-US" sz="2800" dirty="0"/>
           </a:p>
@@ -13538,7 +13604,7 @@
                 <a:ea typeface="Calibri" pitchFamily="34" charset="-122"/>
                 <a:cs typeface="Calibri" pitchFamily="34" charset="-120"/>
               </a:rPr>
-              <a:t>new, clean, not stale</a:t>
+              <a:t>new; recently made</a:t>
             </a:r>
             <a:endParaRPr lang="en-US" sz="850" dirty="0"/>
           </a:p>
@@ -13611,7 +13677,7 @@
                 <a:ea typeface="Trebuchet MS" pitchFamily="34" charset="-122"/>
                 <a:cs typeface="Trebuchet MS" pitchFamily="34" charset="-120"/>
               </a:rPr>
-              <a:t>ing</a:t>
+              <a:t>ed</a:t>
             </a:r>
             <a:endParaRPr lang="en-US" sz="1300" dirty="0"/>
           </a:p>
@@ -13650,7 +13716,7 @@
                 <a:ea typeface="Calibri" pitchFamily="34" charset="-122"/>
                 <a:cs typeface="Calibri" pitchFamily="34" charset="-120"/>
               </a:rPr>
-              <a:t>action in progress</a:t>
+              <a:t>past tense</a:t>
             </a:r>
             <a:endParaRPr lang="en-US" sz="850" dirty="0"/>
           </a:p>
@@ -13757,7 +13823,7 @@
         </p:nvSpPr>
         <p:spPr>
           <a:xfrm>
-            <a:off x="2313432" y="3364992"/>
+            <a:off x="2999232" y="3364992"/>
             <a:ext cx="1645920" cy="475488"/>
           </a:xfrm>
           <a:prstGeom prst="rect">
@@ -13784,7 +13850,7 @@
         </p:nvSpPr>
         <p:spPr>
           <a:xfrm>
-            <a:off x="2313432" y="3364992"/>
+            <a:off x="2999232" y="3364992"/>
             <a:ext cx="1645920" cy="475488"/>
           </a:xfrm>
           <a:prstGeom prst="rect">
@@ -13823,8 +13889,8 @@
         </p:nvSpPr>
         <p:spPr>
           <a:xfrm>
-            <a:off x="3959352" y="3364992"/>
-            <a:ext cx="411480" cy="475488"/>
+            <a:off x="4645152" y="3364992"/>
+            <a:ext cx="1097280" cy="475488"/>
           </a:xfrm>
           <a:prstGeom prst="rect">
             <a:avLst/>
@@ -13862,7 +13928,7 @@
         </p:nvSpPr>
         <p:spPr>
           <a:xfrm>
-            <a:off x="4370832" y="3364992"/>
+            <a:off x="5742432" y="3364992"/>
             <a:ext cx="1645920" cy="475488"/>
           </a:xfrm>
           <a:prstGeom prst="rect">
@@ -13889,7 +13955,7 @@
         </p:nvSpPr>
         <p:spPr>
           <a:xfrm>
-            <a:off x="4370832" y="3364992"/>
+            <a:off x="5742432" y="3364992"/>
             <a:ext cx="1645920" cy="475488"/>
           </a:xfrm>
           <a:prstGeom prst="rect">
@@ -13914,7 +13980,7 @@
                 <a:ea typeface="Trebuchet MS" pitchFamily="34" charset="-122"/>
                 <a:cs typeface="Trebuchet MS" pitchFamily="34" charset="-120"/>
               </a:rPr>
-              <a:t>fresh</a:t>
+              <a:t>freshed</a:t>
             </a:r>
             <a:endParaRPr lang="en-US" sz="1400" dirty="0"/>
           </a:p>
@@ -13922,14 +13988,41 @@
       </p:sp>
       <p:sp>
         <p:nvSpPr>
-          <p:cNvPr id="33" name="Text 31"/>
-          <p:cNvSpPr/>
-          <p:nvPr/>
-        </p:nvSpPr>
-        <p:spPr>
-          <a:xfrm>
-            <a:off x="6016752" y="3364992"/>
-            <a:ext cx="411480" cy="475488"/>
+          <p:cNvPr id="33" name="Shape 31"/>
+          <p:cNvSpPr/>
+          <p:nvPr/>
+        </p:nvSpPr>
+        <p:spPr>
+          <a:xfrm>
+            <a:off x="365760" y="4096512"/>
+            <a:ext cx="1371600" cy="804672"/>
+          </a:xfrm>
+          <a:prstGeom prst="rect">
+            <a:avLst>
+              <a:gd name="adj" fmla="val 6818"/>
+            </a:avLst>
+          </a:prstGeom>
+          <a:solidFill>
+            <a:srgbClr val="E2E8F0"/>
+          </a:solidFill>
+          <a:ln w="12700">
+            <a:solidFill>
+              <a:srgbClr val="E2E8F0"/>
+            </a:solidFill>
+            <a:prstDash val="solid"/>
+          </a:ln>
+        </p:spPr>
+      </p:sp>
+      <p:sp>
+        <p:nvSpPr>
+          <p:cNvPr id="34" name="Text 32"/>
+          <p:cNvSpPr/>
+          <p:nvPr/>
+        </p:nvSpPr>
+        <p:spPr>
+          <a:xfrm>
+            <a:off x="365760" y="4096512"/>
+            <a:ext cx="1371600" cy="804672"/>
           </a:xfrm>
           <a:prstGeom prst="rect">
             <a:avLst/>
@@ -13945,96 +14038,30 @@
               <a:buNone/>
             </a:pPr>
             <a:r>
-              <a:rPr lang="en-US" sz="1600" b="1" dirty="0">
-                <a:solidFill>
-                  <a:srgbClr val="0D9488"/>
+              <a:rPr lang="en-US" sz="1100" b="1" dirty="0">
+                <a:solidFill>
+                  <a:srgbClr val="475569"/>
                 </a:solidFill>
                 <a:latin typeface="Trebuchet MS" pitchFamily="34" charset="0"/>
                 <a:ea typeface="Trebuchet MS" pitchFamily="34" charset="-122"/>
                 <a:cs typeface="Trebuchet MS" pitchFamily="34" charset="-120"/>
               </a:rPr>
-              <a:t>·</a:t>
-            </a:r>
-            <a:endParaRPr lang="en-US" sz="1600" dirty="0"/>
-          </a:p>
-        </p:txBody>
-      </p:sp>
-      <p:sp>
-        <p:nvSpPr>
-          <p:cNvPr id="34" name="Shape 32"/>
-          <p:cNvSpPr/>
-          <p:nvPr/>
-        </p:nvSpPr>
-        <p:spPr>
-          <a:xfrm>
-            <a:off x="6428232" y="3364992"/>
-            <a:ext cx="1645920" cy="475488"/>
-          </a:xfrm>
-          <a:prstGeom prst="rect">
-            <a:avLst>
-              <a:gd name="adj" fmla="val 9615"/>
-            </a:avLst>
-          </a:prstGeom>
-          <a:solidFill>
-            <a:srgbClr val="FFFFFF"/>
-          </a:solidFill>
-          <a:ln w="12700">
-            <a:solidFill>
-              <a:srgbClr val="0D9488"/>
-            </a:solidFill>
-            <a:prstDash val="solid"/>
-          </a:ln>
-        </p:spPr>
-      </p:sp>
-      <p:sp>
-        <p:nvSpPr>
-          <p:cNvPr id="35" name="Text 33"/>
-          <p:cNvSpPr/>
-          <p:nvPr/>
-        </p:nvSpPr>
-        <p:spPr>
-          <a:xfrm>
-            <a:off x="6428232" y="3364992"/>
-            <a:ext cx="1645920" cy="475488"/>
-          </a:xfrm>
-          <a:prstGeom prst="rect">
-            <a:avLst/>
-          </a:prstGeom>
-          <a:noFill/>
-          <a:ln/>
-        </p:spPr>
-        <p:txBody>
-          <a:bodyPr wrap="square" lIns="0" tIns="0" rIns="0" bIns="0" rtlCol="0" anchor="ctr"/>
-          <a:lstStyle/>
-          <a:p>
-            <a:pPr algn="ctr" indent="0" marL="0">
-              <a:buNone/>
-            </a:pPr>
-            <a:r>
-              <a:rPr lang="en-US" sz="1400" b="1" dirty="0">
-                <a:solidFill>
-                  <a:srgbClr val="0D9488"/>
-                </a:solidFill>
-                <a:latin typeface="Trebuchet MS" pitchFamily="34" charset="0"/>
-                <a:ea typeface="Trebuchet MS" pitchFamily="34" charset="-122"/>
-                <a:cs typeface="Trebuchet MS" pitchFamily="34" charset="-120"/>
-              </a:rPr>
-              <a:t>ing</a:t>
-            </a:r>
-            <a:endParaRPr lang="en-US" sz="1400" dirty="0"/>
-          </a:p>
-        </p:txBody>
-      </p:sp>
-      <p:sp>
-        <p:nvSpPr>
-          <p:cNvPr id="36" name="Shape 34"/>
-          <p:cNvSpPr/>
-          <p:nvPr/>
-        </p:nvSpPr>
-        <p:spPr>
-          <a:xfrm>
-            <a:off x="365760" y="4096512"/>
-            <a:ext cx="1371600" cy="804672"/>
+              <a:t>Phonemes</a:t>
+            </a:r>
+            <a:endParaRPr lang="en-US" sz="1100" dirty="0"/>
+          </a:p>
+        </p:txBody>
+      </p:sp>
+      <p:sp>
+        <p:nvSpPr>
+          <p:cNvPr id="35" name="Shape 33"/>
+          <p:cNvSpPr/>
+          <p:nvPr/>
+        </p:nvSpPr>
+        <p:spPr>
+          <a:xfrm>
+            <a:off x="1874520" y="4096512"/>
+            <a:ext cx="6903720" cy="804672"/>
           </a:xfrm>
           <a:prstGeom prst="rect">
             <a:avLst>
@@ -14042,85 +14069,19 @@
             </a:avLst>
           </a:prstGeom>
           <a:solidFill>
-            <a:srgbClr val="E2E8F0"/>
+            <a:srgbClr val="F8FAFC"/>
           </a:solidFill>
           <a:ln w="12700">
             <a:solidFill>
               <a:srgbClr val="E2E8F0"/>
             </a:solidFill>
-            <a:prstDash val="solid"/>
-          </a:ln>
-        </p:spPr>
-      </p:sp>
-      <p:sp>
-        <p:nvSpPr>
-          <p:cNvPr id="37" name="Text 35"/>
-          <p:cNvSpPr/>
-          <p:nvPr/>
-        </p:nvSpPr>
-        <p:spPr>
-          <a:xfrm>
-            <a:off x="365760" y="4096512"/>
-            <a:ext cx="1371600" cy="804672"/>
-          </a:xfrm>
-          <a:prstGeom prst="rect">
-            <a:avLst/>
-          </a:prstGeom>
-          <a:noFill/>
-          <a:ln/>
-        </p:spPr>
-        <p:txBody>
-          <a:bodyPr wrap="square" lIns="0" tIns="0" rIns="0" bIns="0" rtlCol="0" anchor="ctr"/>
-          <a:lstStyle/>
-          <a:p>
-            <a:pPr algn="ctr" indent="0" marL="0">
-              <a:buNone/>
-            </a:pPr>
-            <a:r>
-              <a:rPr lang="en-US" sz="1100" b="1" dirty="0">
-                <a:solidFill>
-                  <a:srgbClr val="475569"/>
-                </a:solidFill>
-                <a:latin typeface="Trebuchet MS" pitchFamily="34" charset="0"/>
-                <a:ea typeface="Trebuchet MS" pitchFamily="34" charset="-122"/>
-                <a:cs typeface="Trebuchet MS" pitchFamily="34" charset="-120"/>
-              </a:rPr>
-              <a:t>Phonemes</a:t>
-            </a:r>
-            <a:endParaRPr lang="en-US" sz="1100" dirty="0"/>
-          </a:p>
-        </p:txBody>
-      </p:sp>
-      <p:sp>
-        <p:nvSpPr>
-          <p:cNvPr id="38" name="Shape 36"/>
-          <p:cNvSpPr/>
-          <p:nvPr/>
-        </p:nvSpPr>
-        <p:spPr>
-          <a:xfrm>
-            <a:off x="1874520" y="4096512"/>
-            <a:ext cx="6903720" cy="804672"/>
-          </a:xfrm>
-          <a:prstGeom prst="rect">
-            <a:avLst>
-              <a:gd name="adj" fmla="val 6818"/>
-            </a:avLst>
-          </a:prstGeom>
-          <a:solidFill>
-            <a:srgbClr val="F8FAFC"/>
-          </a:solidFill>
-          <a:ln w="12700">
-            <a:solidFill>
-              <a:srgbClr val="E2E8F0"/>
-            </a:solidFill>
             <a:prstDash val="dash"/>
           </a:ln>
         </p:spPr>
       </p:sp>
       <p:sp>
         <p:nvSpPr>
-          <p:cNvPr id="39" name="Text 37"/>
+          <p:cNvPr id="36" name="Text 34"/>
           <p:cNvSpPr/>
           <p:nvPr/>
         </p:nvSpPr>
@@ -14352,7 +14313,7 @@
                 <a:ea typeface="Calibri" pitchFamily="34" charset="-122"/>
                 <a:cs typeface="Calibri" pitchFamily="34" charset="-120"/>
               </a:rPr>
-              <a:t>Root 'fresh' — new, clean, not stale</a:t>
+              <a:t>Root 'fresh' — new; recently made</a:t>
             </a:r>
             <a:endParaRPr lang="en-US" sz="1600" dirty="0"/>
           </a:p>
@@ -14708,7 +14669,7 @@
                 <a:ea typeface="Calibri" pitchFamily="34" charset="-122"/>
                 <a:cs typeface="Calibri" pitchFamily="34" charset="-120"/>
               </a:rPr>
-              <a:t>Word Labs  •  wordlabs.app  •  Root: 'fresh' = new, clean, not stale</a:t>
+              <a:t>Word Labs  •  wordlabs.app  •  Root: 'fresh' = new; recently made</a:t>
             </a:r>
             <a:endParaRPr lang="en-US" sz="800" dirty="0"/>
           </a:p>
@@ -14847,7 +14808,7 @@
                 <a:ea typeface="Trebuchet MS" pitchFamily="34" charset="-122"/>
                 <a:cs typeface="Trebuchet MS" pitchFamily="34" charset="-120"/>
               </a:rPr>
-              <a:t>refreshing</a:t>
+              <a:t>refreshed</a:t>
             </a:r>
             <a:endParaRPr lang="en-US" sz="2800" dirty="0"/>
           </a:p>
@@ -15137,7 +15098,7 @@
                 <a:ea typeface="Calibri" pitchFamily="34" charset="-122"/>
                 <a:cs typeface="Calibri" pitchFamily="34" charset="-120"/>
               </a:rPr>
-              <a:t>new, clean, not stale</a:t>
+              <a:t>new; recently made</a:t>
             </a:r>
             <a:endParaRPr lang="en-US" sz="850" dirty="0"/>
           </a:p>
@@ -15210,7 +15171,7 @@
                 <a:ea typeface="Trebuchet MS" pitchFamily="34" charset="-122"/>
                 <a:cs typeface="Trebuchet MS" pitchFamily="34" charset="-120"/>
               </a:rPr>
-              <a:t>ing</a:t>
+              <a:t>ed</a:t>
             </a:r>
             <a:endParaRPr lang="en-US" sz="1300" dirty="0"/>
           </a:p>
@@ -15249,7 +15210,7 @@
                 <a:ea typeface="Calibri" pitchFamily="34" charset="-122"/>
                 <a:cs typeface="Calibri" pitchFamily="34" charset="-120"/>
               </a:rPr>
-              <a:t>action in progress</a:t>
+              <a:t>past tense</a:t>
             </a:r>
             <a:endParaRPr lang="en-US" sz="850" dirty="0"/>
           </a:p>
@@ -15356,7 +15317,7 @@
         </p:nvSpPr>
         <p:spPr>
           <a:xfrm>
-            <a:off x="2313432" y="3364992"/>
+            <a:off x="2999232" y="3364992"/>
             <a:ext cx="1645920" cy="475488"/>
           </a:xfrm>
           <a:prstGeom prst="rect">
@@ -15383,7 +15344,7 @@
         </p:nvSpPr>
         <p:spPr>
           <a:xfrm>
-            <a:off x="2313432" y="3364992"/>
+            <a:off x="2999232" y="3364992"/>
             <a:ext cx="1645920" cy="475488"/>
           </a:xfrm>
           <a:prstGeom prst="rect">
@@ -15422,8 +15383,8 @@
         </p:nvSpPr>
         <p:spPr>
           <a:xfrm>
-            <a:off x="3959352" y="3364992"/>
-            <a:ext cx="411480" cy="475488"/>
+            <a:off x="4645152" y="3364992"/>
+            <a:ext cx="1097280" cy="475488"/>
           </a:xfrm>
           <a:prstGeom prst="rect">
             <a:avLst/>
@@ -15461,7 +15422,7 @@
         </p:nvSpPr>
         <p:spPr>
           <a:xfrm>
-            <a:off x="4370832" y="3364992"/>
+            <a:off x="5742432" y="3364992"/>
             <a:ext cx="1645920" cy="475488"/>
           </a:xfrm>
           <a:prstGeom prst="rect">
@@ -15488,7 +15449,7 @@
         </p:nvSpPr>
         <p:spPr>
           <a:xfrm>
-            <a:off x="4370832" y="3364992"/>
+            <a:off x="5742432" y="3364992"/>
             <a:ext cx="1645920" cy="475488"/>
           </a:xfrm>
           <a:prstGeom prst="rect">
@@ -15513,7 +15474,7 @@
                 <a:ea typeface="Trebuchet MS" pitchFamily="34" charset="-122"/>
                 <a:cs typeface="Trebuchet MS" pitchFamily="34" charset="-120"/>
               </a:rPr>
-              <a:t>fresh</a:t>
+              <a:t>freshed</a:t>
             </a:r>
             <a:endParaRPr lang="en-US" sz="1400" dirty="0"/>
           </a:p>
@@ -15521,14 +15482,41 @@
       </p:sp>
       <p:sp>
         <p:nvSpPr>
-          <p:cNvPr id="33" name="Text 31"/>
-          <p:cNvSpPr/>
-          <p:nvPr/>
-        </p:nvSpPr>
-        <p:spPr>
-          <a:xfrm>
-            <a:off x="6016752" y="3364992"/>
-            <a:ext cx="411480" cy="475488"/>
+          <p:cNvPr id="33" name="Shape 31"/>
+          <p:cNvSpPr/>
+          <p:nvPr/>
+        </p:nvSpPr>
+        <p:spPr>
+          <a:xfrm>
+            <a:off x="365760" y="4096512"/>
+            <a:ext cx="1371600" cy="804672"/>
+          </a:xfrm>
+          <a:prstGeom prst="rect">
+            <a:avLst>
+              <a:gd name="adj" fmla="val 6818"/>
+            </a:avLst>
+          </a:prstGeom>
+          <a:solidFill>
+            <a:srgbClr val="E2E8F0"/>
+          </a:solidFill>
+          <a:ln w="12700">
+            <a:solidFill>
+              <a:srgbClr val="E2E8F0"/>
+            </a:solidFill>
+            <a:prstDash val="solid"/>
+          </a:ln>
+        </p:spPr>
+      </p:sp>
+      <p:sp>
+        <p:nvSpPr>
+          <p:cNvPr id="34" name="Text 32"/>
+          <p:cNvSpPr/>
+          <p:nvPr/>
+        </p:nvSpPr>
+        <p:spPr>
+          <a:xfrm>
+            <a:off x="365760" y="4096512"/>
+            <a:ext cx="1371600" cy="804672"/>
           </a:xfrm>
           <a:prstGeom prst="rect">
             <a:avLst/>
@@ -15544,57 +15532,84 @@
               <a:buNone/>
             </a:pPr>
             <a:r>
-              <a:rPr lang="en-US" sz="1600" b="1" dirty="0">
-                <a:solidFill>
-                  <a:srgbClr val="0D9488"/>
+              <a:rPr lang="en-US" sz="1100" b="1" dirty="0">
+                <a:solidFill>
+                  <a:srgbClr val="475569"/>
                 </a:solidFill>
                 <a:latin typeface="Trebuchet MS" pitchFamily="34" charset="0"/>
                 <a:ea typeface="Trebuchet MS" pitchFamily="34" charset="-122"/>
                 <a:cs typeface="Trebuchet MS" pitchFamily="34" charset="-120"/>
               </a:rPr>
-              <a:t>·</a:t>
-            </a:r>
-            <a:endParaRPr lang="en-US" sz="1600" dirty="0"/>
-          </a:p>
-        </p:txBody>
-      </p:sp>
-      <p:sp>
-        <p:nvSpPr>
-          <p:cNvPr id="34" name="Shape 32"/>
-          <p:cNvSpPr/>
-          <p:nvPr/>
-        </p:nvSpPr>
-        <p:spPr>
-          <a:xfrm>
-            <a:off x="6428232" y="3364992"/>
-            <a:ext cx="1645920" cy="475488"/>
+              <a:t>Phonemes</a:t>
+            </a:r>
+            <a:endParaRPr lang="en-US" sz="1100" dirty="0"/>
+          </a:p>
+        </p:txBody>
+      </p:sp>
+      <p:sp>
+        <p:nvSpPr>
+          <p:cNvPr id="35" name="Shape 33"/>
+          <p:cNvSpPr/>
+          <p:nvPr/>
+        </p:nvSpPr>
+        <p:spPr>
+          <a:xfrm>
+            <a:off x="1874520" y="4096512"/>
+            <a:ext cx="6903720" cy="658368"/>
           </a:xfrm>
           <a:prstGeom prst="rect">
             <a:avLst>
-              <a:gd name="adj" fmla="val 9615"/>
+              <a:gd name="adj" fmla="val 8333"/>
             </a:avLst>
           </a:prstGeom>
           <a:solidFill>
+            <a:srgbClr val="FCE7F3"/>
+          </a:solidFill>
+          <a:ln w="12700">
+            <a:solidFill>
+              <a:srgbClr val="DB2777"/>
+            </a:solidFill>
+            <a:prstDash val="solid"/>
+          </a:ln>
+        </p:spPr>
+      </p:sp>
+      <p:sp>
+        <p:nvSpPr>
+          <p:cNvPr id="36" name="Shape 34"/>
+          <p:cNvSpPr/>
+          <p:nvPr/>
+        </p:nvSpPr>
+        <p:spPr>
+          <a:xfrm>
+            <a:off x="2023872" y="4169664"/>
+            <a:ext cx="685800" cy="475488"/>
+          </a:xfrm>
+          <a:prstGeom prst="rect">
+            <a:avLst>
+              <a:gd name="adj" fmla="val 7692"/>
+            </a:avLst>
+          </a:prstGeom>
+          <a:solidFill>
             <a:srgbClr val="FFFFFF"/>
           </a:solidFill>
           <a:ln w="12700">
             <a:solidFill>
-              <a:srgbClr val="0D9488"/>
-            </a:solidFill>
-            <a:prstDash val="solid"/>
-          </a:ln>
-        </p:spPr>
-      </p:sp>
-      <p:sp>
-        <p:nvSpPr>
-          <p:cNvPr id="35" name="Text 33"/>
-          <p:cNvSpPr/>
-          <p:nvPr/>
-        </p:nvSpPr>
-        <p:spPr>
-          <a:xfrm>
-            <a:off x="6428232" y="3364992"/>
-            <a:ext cx="1645920" cy="475488"/>
+              <a:srgbClr val="DB2777"/>
+            </a:solidFill>
+            <a:prstDash val="solid"/>
+          </a:ln>
+        </p:spPr>
+      </p:sp>
+      <p:sp>
+        <p:nvSpPr>
+          <p:cNvPr id="37" name="Text 35"/>
+          <p:cNvSpPr/>
+          <p:nvPr/>
+        </p:nvSpPr>
+        <p:spPr>
+          <a:xfrm>
+            <a:off x="2023872" y="4169664"/>
+            <a:ext cx="685800" cy="475488"/>
           </a:xfrm>
           <a:prstGeom prst="rect">
             <a:avLst/>
@@ -15610,57 +15625,57 @@
               <a:buNone/>
             </a:pPr>
             <a:r>
-              <a:rPr lang="en-US" sz="1400" b="1" dirty="0">
-                <a:solidFill>
-                  <a:srgbClr val="0D9488"/>
+              <a:rPr lang="en-US" sz="900" b="1" dirty="0">
+                <a:solidFill>
+                  <a:srgbClr val="9D174D"/>
                 </a:solidFill>
                 <a:latin typeface="Trebuchet MS" pitchFamily="34" charset="0"/>
                 <a:ea typeface="Trebuchet MS" pitchFamily="34" charset="-122"/>
                 <a:cs typeface="Trebuchet MS" pitchFamily="34" charset="-120"/>
               </a:rPr>
-              <a:t>ing</a:t>
-            </a:r>
-            <a:endParaRPr lang="en-US" sz="1400" dirty="0"/>
-          </a:p>
-        </p:txBody>
-      </p:sp>
-      <p:sp>
-        <p:nvSpPr>
-          <p:cNvPr id="36" name="Shape 34"/>
-          <p:cNvSpPr/>
-          <p:nvPr/>
-        </p:nvSpPr>
-        <p:spPr>
-          <a:xfrm>
-            <a:off x="365760" y="4096512"/>
-            <a:ext cx="1371600" cy="804672"/>
+              <a:t>r</a:t>
+            </a:r>
+            <a:endParaRPr lang="en-US" sz="900" dirty="0"/>
+          </a:p>
+        </p:txBody>
+      </p:sp>
+      <p:sp>
+        <p:nvSpPr>
+          <p:cNvPr id="38" name="Shape 36"/>
+          <p:cNvSpPr/>
+          <p:nvPr/>
+        </p:nvSpPr>
+        <p:spPr>
+          <a:xfrm>
+            <a:off x="2831592" y="4169664"/>
+            <a:ext cx="685800" cy="475488"/>
           </a:xfrm>
           <a:prstGeom prst="rect">
             <a:avLst>
-              <a:gd name="adj" fmla="val 6818"/>
+              <a:gd name="adj" fmla="val 7692"/>
             </a:avLst>
           </a:prstGeom>
           <a:solidFill>
-            <a:srgbClr val="E2E8F0"/>
-          </a:solidFill>
-          <a:ln w="12700">
-            <a:solidFill>
-              <a:srgbClr val="E2E8F0"/>
-            </a:solidFill>
-            <a:prstDash val="solid"/>
-          </a:ln>
-        </p:spPr>
-      </p:sp>
-      <p:sp>
-        <p:nvSpPr>
-          <p:cNvPr id="37" name="Text 35"/>
-          <p:cNvSpPr/>
-          <p:nvPr/>
-        </p:nvSpPr>
-        <p:spPr>
-          <a:xfrm>
-            <a:off x="365760" y="4096512"/>
-            <a:ext cx="1371600" cy="804672"/>
+            <a:srgbClr val="FFFFFF"/>
+          </a:solidFill>
+          <a:ln w="12700">
+            <a:solidFill>
+              <a:srgbClr val="DB2777"/>
+            </a:solidFill>
+            <a:prstDash val="solid"/>
+          </a:ln>
+        </p:spPr>
+      </p:sp>
+      <p:sp>
+        <p:nvSpPr>
+          <p:cNvPr id="39" name="Text 37"/>
+          <p:cNvSpPr/>
+          <p:nvPr/>
+        </p:nvSpPr>
+        <p:spPr>
+          <a:xfrm>
+            <a:off x="2831592" y="4169664"/>
+            <a:ext cx="685800" cy="475488"/>
           </a:xfrm>
           <a:prstGeom prst="rect">
             <a:avLst/>
@@ -15676,56 +15691,29 @@
               <a:buNone/>
             </a:pPr>
             <a:r>
-              <a:rPr lang="en-US" sz="1100" b="1" dirty="0">
-                <a:solidFill>
-                  <a:srgbClr val="475569"/>
+              <a:rPr lang="en-US" sz="900" b="1" dirty="0">
+                <a:solidFill>
+                  <a:srgbClr val="9D174D"/>
                 </a:solidFill>
                 <a:latin typeface="Trebuchet MS" pitchFamily="34" charset="0"/>
                 <a:ea typeface="Trebuchet MS" pitchFamily="34" charset="-122"/>
                 <a:cs typeface="Trebuchet MS" pitchFamily="34" charset="-120"/>
               </a:rPr>
-              <a:t>Phonemes</a:t>
-            </a:r>
-            <a:endParaRPr lang="en-US" sz="1100" dirty="0"/>
-          </a:p>
-        </p:txBody>
-      </p:sp>
-      <p:sp>
-        <p:nvSpPr>
-          <p:cNvPr id="38" name="Shape 36"/>
-          <p:cNvSpPr/>
-          <p:nvPr/>
-        </p:nvSpPr>
-        <p:spPr>
-          <a:xfrm>
-            <a:off x="1874520" y="4096512"/>
-            <a:ext cx="6903720" cy="658368"/>
-          </a:xfrm>
-          <a:prstGeom prst="rect">
-            <a:avLst>
-              <a:gd name="adj" fmla="val 8333"/>
-            </a:avLst>
-          </a:prstGeom>
-          <a:solidFill>
-            <a:srgbClr val="FCE7F3"/>
-          </a:solidFill>
-          <a:ln w="12700">
-            <a:solidFill>
-              <a:srgbClr val="DB2777"/>
-            </a:solidFill>
-            <a:prstDash val="solid"/>
-          </a:ln>
-        </p:spPr>
-      </p:sp>
-      <p:sp>
-        <p:nvSpPr>
-          <p:cNvPr id="39" name="Shape 37"/>
-          <p:cNvSpPr/>
-          <p:nvPr/>
-        </p:nvSpPr>
-        <p:spPr>
-          <a:xfrm>
-            <a:off x="2023872" y="4169664"/>
+              <a:t>e</a:t>
+            </a:r>
+            <a:endParaRPr lang="en-US" sz="900" dirty="0"/>
+          </a:p>
+        </p:txBody>
+      </p:sp>
+      <p:sp>
+        <p:nvSpPr>
+          <p:cNvPr id="40" name="Shape 38"/>
+          <p:cNvSpPr/>
+          <p:nvPr/>
+        </p:nvSpPr>
+        <p:spPr>
+          <a:xfrm>
+            <a:off x="3639312" y="4169664"/>
             <a:ext cx="685800" cy="475488"/>
           </a:xfrm>
           <a:prstGeom prst="rect">
@@ -15746,13 +15734,13 @@
       </p:sp>
       <p:sp>
         <p:nvSpPr>
-          <p:cNvPr id="40" name="Text 38"/>
-          <p:cNvSpPr/>
-          <p:nvPr/>
-        </p:nvSpPr>
-        <p:spPr>
-          <a:xfrm>
-            <a:off x="2023872" y="4169664"/>
+          <p:cNvPr id="41" name="Text 39"/>
+          <p:cNvSpPr/>
+          <p:nvPr/>
+        </p:nvSpPr>
+        <p:spPr>
+          <a:xfrm>
+            <a:off x="3639312" y="4169664"/>
             <a:ext cx="685800" cy="475488"/>
           </a:xfrm>
           <a:prstGeom prst="rect">
@@ -15777,7 +15765,7 @@
                 <a:ea typeface="Trebuchet MS" pitchFamily="34" charset="-122"/>
                 <a:cs typeface="Trebuchet MS" pitchFamily="34" charset="-120"/>
               </a:rPr>
-              <a:t>r</a:t>
+              <a:t>f</a:t>
             </a:r>
             <a:endParaRPr lang="en-US" sz="900" dirty="0"/>
           </a:p>
@@ -15785,13 +15773,13 @@
       </p:sp>
       <p:sp>
         <p:nvSpPr>
-          <p:cNvPr id="41" name="Shape 39"/>
-          <p:cNvSpPr/>
-          <p:nvPr/>
-        </p:nvSpPr>
-        <p:spPr>
-          <a:xfrm>
-            <a:off x="2831592" y="4169664"/>
+          <p:cNvPr id="42" name="Shape 40"/>
+          <p:cNvSpPr/>
+          <p:nvPr/>
+        </p:nvSpPr>
+        <p:spPr>
+          <a:xfrm>
+            <a:off x="4447032" y="4169664"/>
             <a:ext cx="685800" cy="475488"/>
           </a:xfrm>
           <a:prstGeom prst="rect">
@@ -15812,13 +15800,13 @@
       </p:sp>
       <p:sp>
         <p:nvSpPr>
-          <p:cNvPr id="42" name="Text 40"/>
-          <p:cNvSpPr/>
-          <p:nvPr/>
-        </p:nvSpPr>
-        <p:spPr>
-          <a:xfrm>
-            <a:off x="2831592" y="4169664"/>
+          <p:cNvPr id="43" name="Text 41"/>
+          <p:cNvSpPr/>
+          <p:nvPr/>
+        </p:nvSpPr>
+        <p:spPr>
+          <a:xfrm>
+            <a:off x="4447032" y="4169664"/>
             <a:ext cx="685800" cy="475488"/>
           </a:xfrm>
           <a:prstGeom prst="rect">
@@ -15843,7 +15831,7 @@
                 <a:ea typeface="Trebuchet MS" pitchFamily="34" charset="-122"/>
                 <a:cs typeface="Trebuchet MS" pitchFamily="34" charset="-120"/>
               </a:rPr>
-              <a:t>e</a:t>
+              <a:t>r</a:t>
             </a:r>
             <a:endParaRPr lang="en-US" sz="900" dirty="0"/>
           </a:p>
@@ -15851,13 +15839,13 @@
       </p:sp>
       <p:sp>
         <p:nvSpPr>
-          <p:cNvPr id="43" name="Shape 41"/>
-          <p:cNvSpPr/>
-          <p:nvPr/>
-        </p:nvSpPr>
-        <p:spPr>
-          <a:xfrm>
-            <a:off x="3639312" y="4169664"/>
+          <p:cNvPr id="44" name="Shape 42"/>
+          <p:cNvSpPr/>
+          <p:nvPr/>
+        </p:nvSpPr>
+        <p:spPr>
+          <a:xfrm>
+            <a:off x="5254752" y="4169664"/>
             <a:ext cx="685800" cy="475488"/>
           </a:xfrm>
           <a:prstGeom prst="rect">
@@ -15878,13 +15866,13 @@
       </p:sp>
       <p:sp>
         <p:nvSpPr>
-          <p:cNvPr id="44" name="Text 42"/>
-          <p:cNvSpPr/>
-          <p:nvPr/>
-        </p:nvSpPr>
-        <p:spPr>
-          <a:xfrm>
-            <a:off x="3639312" y="4169664"/>
+          <p:cNvPr id="45" name="Text 43"/>
+          <p:cNvSpPr/>
+          <p:nvPr/>
+        </p:nvSpPr>
+        <p:spPr>
+          <a:xfrm>
+            <a:off x="5254752" y="4169664"/>
             <a:ext cx="685800" cy="475488"/>
           </a:xfrm>
           <a:prstGeom prst="rect">
@@ -15909,7 +15897,7 @@
                 <a:ea typeface="Trebuchet MS" pitchFamily="34" charset="-122"/>
                 <a:cs typeface="Trebuchet MS" pitchFamily="34" charset="-120"/>
               </a:rPr>
-              <a:t>f</a:t>
+              <a:t>e</a:t>
             </a:r>
             <a:endParaRPr lang="en-US" sz="900" dirty="0"/>
           </a:p>
@@ -15917,13 +15905,13 @@
       </p:sp>
       <p:sp>
         <p:nvSpPr>
-          <p:cNvPr id="45" name="Shape 43"/>
-          <p:cNvSpPr/>
-          <p:nvPr/>
-        </p:nvSpPr>
-        <p:spPr>
-          <a:xfrm>
-            <a:off x="4447032" y="4169664"/>
+          <p:cNvPr id="46" name="Shape 44"/>
+          <p:cNvSpPr/>
+          <p:nvPr/>
+        </p:nvSpPr>
+        <p:spPr>
+          <a:xfrm>
+            <a:off x="6062472" y="4169664"/>
             <a:ext cx="685800" cy="475488"/>
           </a:xfrm>
           <a:prstGeom prst="rect">
@@ -15944,13 +15932,13 @@
       </p:sp>
       <p:sp>
         <p:nvSpPr>
-          <p:cNvPr id="46" name="Text 44"/>
-          <p:cNvSpPr/>
-          <p:nvPr/>
-        </p:nvSpPr>
-        <p:spPr>
-          <a:xfrm>
-            <a:off x="4447032" y="4169664"/>
+          <p:cNvPr id="47" name="Text 45"/>
+          <p:cNvSpPr/>
+          <p:nvPr/>
+        </p:nvSpPr>
+        <p:spPr>
+          <a:xfrm>
+            <a:off x="6062472" y="4169664"/>
             <a:ext cx="685800" cy="475488"/>
           </a:xfrm>
           <a:prstGeom prst="rect">
@@ -15975,7 +15963,7 @@
                 <a:ea typeface="Trebuchet MS" pitchFamily="34" charset="-122"/>
                 <a:cs typeface="Trebuchet MS" pitchFamily="34" charset="-120"/>
               </a:rPr>
-              <a:t>r</a:t>
+              <a:t>sh</a:t>
             </a:r>
             <a:endParaRPr lang="en-US" sz="900" dirty="0"/>
           </a:p>
@@ -15983,13 +15971,13 @@
       </p:sp>
       <p:sp>
         <p:nvSpPr>
-          <p:cNvPr id="47" name="Shape 45"/>
-          <p:cNvSpPr/>
-          <p:nvPr/>
-        </p:nvSpPr>
-        <p:spPr>
-          <a:xfrm>
-            <a:off x="5254752" y="4169664"/>
+          <p:cNvPr id="48" name="Shape 46"/>
+          <p:cNvSpPr/>
+          <p:nvPr/>
+        </p:nvSpPr>
+        <p:spPr>
+          <a:xfrm>
+            <a:off x="6870192" y="4169664"/>
             <a:ext cx="685800" cy="475488"/>
           </a:xfrm>
           <a:prstGeom prst="rect">
@@ -16010,13 +15998,13 @@
       </p:sp>
       <p:sp>
         <p:nvSpPr>
-          <p:cNvPr id="48" name="Text 46"/>
-          <p:cNvSpPr/>
-          <p:nvPr/>
-        </p:nvSpPr>
-        <p:spPr>
-          <a:xfrm>
-            <a:off x="5254752" y="4169664"/>
+          <p:cNvPr id="49" name="Text 47"/>
+          <p:cNvSpPr/>
+          <p:nvPr/>
+        </p:nvSpPr>
+        <p:spPr>
+          <a:xfrm>
+            <a:off x="6870192" y="4169664"/>
             <a:ext cx="685800" cy="475488"/>
           </a:xfrm>
           <a:prstGeom prst="rect">
@@ -16049,13 +16037,13 @@
       </p:sp>
       <p:sp>
         <p:nvSpPr>
-          <p:cNvPr id="49" name="Shape 47"/>
-          <p:cNvSpPr/>
-          <p:nvPr/>
-        </p:nvSpPr>
-        <p:spPr>
-          <a:xfrm>
-            <a:off x="6062472" y="4169664"/>
+          <p:cNvPr id="50" name="Shape 48"/>
+          <p:cNvSpPr/>
+          <p:nvPr/>
+        </p:nvSpPr>
+        <p:spPr>
+          <a:xfrm>
+            <a:off x="7677912" y="4169664"/>
             <a:ext cx="685800" cy="475488"/>
           </a:xfrm>
           <a:prstGeom prst="rect">
@@ -16076,13 +16064,13 @@
       </p:sp>
       <p:sp>
         <p:nvSpPr>
-          <p:cNvPr id="50" name="Text 48"/>
-          <p:cNvSpPr/>
-          <p:nvPr/>
-        </p:nvSpPr>
-        <p:spPr>
-          <a:xfrm>
-            <a:off x="6062472" y="4169664"/>
+          <p:cNvPr id="51" name="Text 49"/>
+          <p:cNvSpPr/>
+          <p:nvPr/>
+        </p:nvSpPr>
+        <p:spPr>
+          <a:xfrm>
+            <a:off x="7677912" y="4169664"/>
             <a:ext cx="685800" cy="475488"/>
           </a:xfrm>
           <a:prstGeom prst="rect">
@@ -16107,139 +16095,7 @@
                 <a:ea typeface="Trebuchet MS" pitchFamily="34" charset="-122"/>
                 <a:cs typeface="Trebuchet MS" pitchFamily="34" charset="-120"/>
               </a:rPr>
-              <a:t>sh</a:t>
-            </a:r>
-            <a:endParaRPr lang="en-US" sz="900" dirty="0"/>
-          </a:p>
-        </p:txBody>
-      </p:sp>
-      <p:sp>
-        <p:nvSpPr>
-          <p:cNvPr id="51" name="Shape 49"/>
-          <p:cNvSpPr/>
-          <p:nvPr/>
-        </p:nvSpPr>
-        <p:spPr>
-          <a:xfrm>
-            <a:off x="6870192" y="4169664"/>
-            <a:ext cx="685800" cy="475488"/>
-          </a:xfrm>
-          <a:prstGeom prst="rect">
-            <a:avLst>
-              <a:gd name="adj" fmla="val 7692"/>
-            </a:avLst>
-          </a:prstGeom>
-          <a:solidFill>
-            <a:srgbClr val="FFFFFF"/>
-          </a:solidFill>
-          <a:ln w="12700">
-            <a:solidFill>
-              <a:srgbClr val="DB2777"/>
-            </a:solidFill>
-            <a:prstDash val="solid"/>
-          </a:ln>
-        </p:spPr>
-      </p:sp>
-      <p:sp>
-        <p:nvSpPr>
-          <p:cNvPr id="52" name="Text 50"/>
-          <p:cNvSpPr/>
-          <p:nvPr/>
-        </p:nvSpPr>
-        <p:spPr>
-          <a:xfrm>
-            <a:off x="6870192" y="4169664"/>
-            <a:ext cx="685800" cy="475488"/>
-          </a:xfrm>
-          <a:prstGeom prst="rect">
-            <a:avLst/>
-          </a:prstGeom>
-          <a:noFill/>
-          <a:ln/>
-        </p:spPr>
-        <p:txBody>
-          <a:bodyPr wrap="square" lIns="0" tIns="0" rIns="0" bIns="0" rtlCol="0" anchor="ctr"/>
-          <a:lstStyle/>
-          <a:p>
-            <a:pPr algn="ctr" indent="0" marL="0">
-              <a:buNone/>
-            </a:pPr>
-            <a:r>
-              <a:rPr lang="en-US" sz="900" b="1" dirty="0">
-                <a:solidFill>
-                  <a:srgbClr val="9D174D"/>
-                </a:solidFill>
-                <a:latin typeface="Trebuchet MS" pitchFamily="34" charset="0"/>
-                <a:ea typeface="Trebuchet MS" pitchFamily="34" charset="-122"/>
-                <a:cs typeface="Trebuchet MS" pitchFamily="34" charset="-120"/>
-              </a:rPr>
-              <a:t>i</a:t>
-            </a:r>
-            <a:endParaRPr lang="en-US" sz="900" dirty="0"/>
-          </a:p>
-        </p:txBody>
-      </p:sp>
-      <p:sp>
-        <p:nvSpPr>
-          <p:cNvPr id="53" name="Shape 51"/>
-          <p:cNvSpPr/>
-          <p:nvPr/>
-        </p:nvSpPr>
-        <p:spPr>
-          <a:xfrm>
-            <a:off x="7677912" y="4169664"/>
-            <a:ext cx="685800" cy="475488"/>
-          </a:xfrm>
-          <a:prstGeom prst="rect">
-            <a:avLst>
-              <a:gd name="adj" fmla="val 7692"/>
-            </a:avLst>
-          </a:prstGeom>
-          <a:solidFill>
-            <a:srgbClr val="FFFFFF"/>
-          </a:solidFill>
-          <a:ln w="12700">
-            <a:solidFill>
-              <a:srgbClr val="DB2777"/>
-            </a:solidFill>
-            <a:prstDash val="solid"/>
-          </a:ln>
-        </p:spPr>
-      </p:sp>
-      <p:sp>
-        <p:nvSpPr>
-          <p:cNvPr id="54" name="Text 52"/>
-          <p:cNvSpPr/>
-          <p:nvPr/>
-        </p:nvSpPr>
-        <p:spPr>
-          <a:xfrm>
-            <a:off x="7677912" y="4169664"/>
-            <a:ext cx="685800" cy="475488"/>
-          </a:xfrm>
-          <a:prstGeom prst="rect">
-            <a:avLst/>
-          </a:prstGeom>
-          <a:noFill/>
-          <a:ln/>
-        </p:spPr>
-        <p:txBody>
-          <a:bodyPr wrap="square" lIns="0" tIns="0" rIns="0" bIns="0" rtlCol="0" anchor="ctr"/>
-          <a:lstStyle/>
-          <a:p>
-            <a:pPr algn="ctr" indent="0" marL="0">
-              <a:buNone/>
-            </a:pPr>
-            <a:r>
-              <a:rPr lang="en-US" sz="900" b="1" dirty="0">
-                <a:solidFill>
-                  <a:srgbClr val="9D174D"/>
-                </a:solidFill>
-                <a:latin typeface="Trebuchet MS" pitchFamily="34" charset="0"/>
-                <a:ea typeface="Trebuchet MS" pitchFamily="34" charset="-122"/>
-                <a:cs typeface="Trebuchet MS" pitchFamily="34" charset="-120"/>
-              </a:rPr>
-              <a:t>ng</a:t>
+              <a:t>d</a:t>
             </a:r>
             <a:endParaRPr lang="en-US" sz="900" dirty="0"/>
           </a:p>
@@ -16813,7 +16669,7 @@
                 <a:ea typeface="Calibri" pitchFamily="34" charset="-122"/>
                 <a:cs typeface="Calibri" pitchFamily="34" charset="-120"/>
               </a:rPr>
-              <a:t>Word Labs  •  wordlabs.app  •  Root: 'fresh' = new, clean, not stale</a:t>
+              <a:t>Word Labs  •  wordlabs.app  •  Root: 'fresh' = new; recently made</a:t>
             </a:r>
             <a:endParaRPr lang="en-US" sz="800" dirty="0"/>
           </a:p>
@@ -17147,7 +17003,7 @@
                 <a:ea typeface="Trebuchet MS" pitchFamily="34" charset="-122"/>
                 <a:cs typeface="Trebuchet MS" pitchFamily="34" charset="-120"/>
               </a:rPr>
-              <a:t>1</a:t>
+              <a:t>0</a:t>
             </a:r>
             <a:pPr algn="ctr" indent="0" marL="0">
               <a:buNone/>
@@ -17453,7 +17309,7 @@
                 <a:ea typeface="Calibri" pitchFamily="34" charset="-122"/>
                 <a:cs typeface="Calibri" pitchFamily="34" charset="-120"/>
               </a:rPr>
-              <a:t>Word Labs  •  wordlabs.app  •  Root: 'fresh' = new, clean, not stale</a:t>
+              <a:t>Word Labs  •  wordlabs.app  •  Root: 'fresh' = new; recently made</a:t>
             </a:r>
             <a:endParaRPr lang="en-US" sz="800" dirty="0"/>
           </a:p>
@@ -17565,7 +17421,7 @@
                 <a:ea typeface="Calibri" pitchFamily="34" charset="-122"/>
                 <a:cs typeface="Calibri" pitchFamily="34" charset="-120"/>
               </a:rPr>
-              <a:t>She used a </a:t>
+              <a:t>A light breeze was </a:t>
             </a:r>
             <a:pPr algn="l" indent="0" marL="0">
               <a:buNone/>
@@ -17582,7 +17438,7 @@
                 <a:ea typeface="Calibri" pitchFamily="34" charset="-122"/>
                 <a:cs typeface="Calibri" pitchFamily="34" charset="-120"/>
               </a:rPr>
-              <a:t>freshener</a:t>
+              <a:t>freshening</a:t>
             </a:r>
             <a:pPr algn="l" indent="0" marL="0">
               <a:buNone/>
@@ -17596,7 +17452,7 @@
                 <a:ea typeface="Calibri" pitchFamily="34" charset="-122"/>
                 <a:cs typeface="Calibri" pitchFamily="34" charset="-120"/>
               </a:rPr>
-              <a:t> to </a:t>
+              <a:t> the warm afternoon air. A </a:t>
             </a:r>
             <a:pPr algn="l" indent="0" marL="0">
               <a:buNone/>
@@ -17613,7 +17469,7 @@
                 <a:ea typeface="Calibri" pitchFamily="34" charset="-122"/>
                 <a:cs typeface="Calibri" pitchFamily="34" charset="-120"/>
               </a:rPr>
-              <a:t>freshen</a:t>
+              <a:t>refreshing</a:t>
             </a:r>
             <a:pPr algn="l" indent="0" marL="0">
               <a:buNone/>
@@ -17627,7 +17483,7 @@
                 <a:ea typeface="Calibri" pitchFamily="34" charset="-122"/>
                 <a:cs typeface="Calibri" pitchFamily="34" charset="-120"/>
               </a:rPr>
-              <a:t> the room, and everyone found the smell </a:t>
+              <a:t> swim in the lake cooled us down on the hot day. The tired hikers stopped for some </a:t>
             </a:r>
             <a:pPr algn="l" indent="0" marL="0">
               <a:buNone/>
@@ -17644,7 +17500,7 @@
                 <a:ea typeface="Calibri" pitchFamily="34" charset="-122"/>
                 <a:cs typeface="Calibri" pitchFamily="34" charset="-120"/>
               </a:rPr>
-              <a:t>freshly</a:t>
+              <a:t>refreshment</a:t>
             </a:r>
             <a:pPr algn="l" indent="0" marL="0">
               <a:buNone/>
@@ -17658,7 +17514,7 @@
                 <a:ea typeface="Calibri" pitchFamily="34" charset="-122"/>
                 <a:cs typeface="Calibri" pitchFamily="34" charset="-120"/>
               </a:rPr>
-              <a:t> pleasant.</a:t>
+              <a:t> at the cafe.</a:t>
             </a:r>
             <a:endParaRPr lang="en-US" sz="1800" dirty="0"/>
           </a:p>
@@ -17813,7 +17669,7 @@
                 <a:ea typeface="Trebuchet MS" pitchFamily="34" charset="-122"/>
                 <a:cs typeface="Trebuchet MS" pitchFamily="34" charset="-120"/>
               </a:rPr>
-              <a:t>freshener</a:t>
+              <a:t>freshening</a:t>
             </a:r>
             <a:endParaRPr lang="en-US" sz="1400" dirty="0"/>
           </a:p>
@@ -17941,7 +17797,7 @@
                 <a:ea typeface="Trebuchet MS" pitchFamily="34" charset="-122"/>
                 <a:cs typeface="Trebuchet MS" pitchFamily="34" charset="-120"/>
               </a:rPr>
-              <a:t>freshen</a:t>
+              <a:t>refreshing</a:t>
             </a:r>
             <a:endParaRPr lang="en-US" sz="1400" dirty="0"/>
           </a:p>
@@ -18069,7 +17925,7 @@
                 <a:ea typeface="Trebuchet MS" pitchFamily="34" charset="-122"/>
                 <a:cs typeface="Trebuchet MS" pitchFamily="34" charset="-120"/>
               </a:rPr>
-              <a:t>freshly</a:t>
+              <a:t>refreshment</a:t>
             </a:r>
             <a:endParaRPr lang="en-US" sz="1400" dirty="0"/>
           </a:p>
@@ -18400,7 +18256,7 @@
                 <a:ea typeface="Calibri" pitchFamily="34" charset="-122"/>
                 <a:cs typeface="Calibri" pitchFamily="34" charset="-120"/>
               </a:rPr>
-              <a:t>Word Labs  •  wordlabs.app  •  Root: 'fresh' = new, clean, not stale</a:t>
+              <a:t>Word Labs  •  wordlabs.app  •  Root: 'fresh' = new; recently made</a:t>
             </a:r>
             <a:endParaRPr lang="en-US" sz="800" dirty="0"/>
           </a:p>
@@ -18539,7 +18395,7 @@
                 <a:ea typeface="Trebuchet MS" pitchFamily="34" charset="-122"/>
                 <a:cs typeface="Trebuchet MS" pitchFamily="34" charset="-120"/>
               </a:rPr>
-              <a:t>freshener</a:t>
+              <a:t>freshening</a:t>
             </a:r>
             <a:endParaRPr lang="en-US" sz="2800" dirty="0"/>
           </a:p>
@@ -19227,7 +19083,7 @@
                 <a:ea typeface="Calibri" pitchFamily="34" charset="-122"/>
                 <a:cs typeface="Calibri" pitchFamily="34" charset="-120"/>
               </a:rPr>
-              <a:t>Word Labs  •  wordlabs.app  •  Root: 'fresh' = new, clean, not stale</a:t>
+              <a:t>Word Labs  •  wordlabs.app  •  Root: 'fresh' = new; recently made</a:t>
             </a:r>
             <a:endParaRPr lang="en-US" sz="800" dirty="0"/>
           </a:p>
@@ -19366,7 +19222,7 @@
                 <a:ea typeface="Trebuchet MS" pitchFamily="34" charset="-122"/>
                 <a:cs typeface="Trebuchet MS" pitchFamily="34" charset="-120"/>
               </a:rPr>
-              <a:t>freshener</a:t>
+              <a:t>freshening</a:t>
             </a:r>
             <a:endParaRPr lang="en-US" sz="2800" dirty="0"/>
           </a:p>
@@ -19544,7 +19400,7 @@
                 <a:ea typeface="Calibri" pitchFamily="34" charset="-122"/>
                 <a:cs typeface="Calibri" pitchFamily="34" charset="-120"/>
               </a:rPr>
-              <a:t>new, clean, not stale</a:t>
+              <a:t>new; recently made</a:t>
             </a:r>
             <a:endParaRPr lang="en-US" sz="850" dirty="0"/>
           </a:p>
@@ -19656,7 +19512,7 @@
                 <a:ea typeface="Calibri" pitchFamily="34" charset="-122"/>
                 <a:cs typeface="Calibri" pitchFamily="34" charset="-120"/>
               </a:rPr>
-              <a:t>to make or become</a:t>
+              <a:t>made of; to make</a:t>
             </a:r>
             <a:endParaRPr lang="en-US" sz="850" dirty="0"/>
           </a:p>
@@ -19729,7 +19585,7 @@
                 <a:ea typeface="Trebuchet MS" pitchFamily="34" charset="-122"/>
                 <a:cs typeface="Trebuchet MS" pitchFamily="34" charset="-120"/>
               </a:rPr>
-              <a:t>er</a:t>
+              <a:t>ing</a:t>
             </a:r>
             <a:endParaRPr lang="en-US" sz="1300" dirty="0"/>
           </a:p>
@@ -19768,7 +19624,7 @@
                 <a:ea typeface="Calibri" pitchFamily="34" charset="-122"/>
                 <a:cs typeface="Calibri" pitchFamily="34" charset="-120"/>
               </a:rPr>
-              <a:t>a person or thing that does something</a:t>
+              <a:t>happening now</a:t>
             </a:r>
             <a:endParaRPr lang="en-US" sz="850" dirty="0"/>
           </a:p>
@@ -20324,7 +20180,7 @@
                 <a:ea typeface="Calibri" pitchFamily="34" charset="-122"/>
                 <a:cs typeface="Calibri" pitchFamily="34" charset="-120"/>
               </a:rPr>
-              <a:t>Word Labs  •  wordlabs.app  •  Root: 'fresh' = new, clean, not stale</a:t>
+              <a:t>Word Labs  •  wordlabs.app  •  Root: 'fresh' = new; recently made</a:t>
             </a:r>
             <a:endParaRPr lang="en-US" sz="800" dirty="0"/>
           </a:p>
@@ -20463,7 +20319,7 @@
                 <a:ea typeface="Trebuchet MS" pitchFamily="34" charset="-122"/>
                 <a:cs typeface="Trebuchet MS" pitchFamily="34" charset="-120"/>
               </a:rPr>
-              <a:t>freshener</a:t>
+              <a:t>freshening</a:t>
             </a:r>
             <a:endParaRPr lang="en-US" sz="2800" dirty="0"/>
           </a:p>
@@ -20641,7 +20497,7 @@
                 <a:ea typeface="Calibri" pitchFamily="34" charset="-122"/>
                 <a:cs typeface="Calibri" pitchFamily="34" charset="-120"/>
               </a:rPr>
-              <a:t>new, clean, not stale</a:t>
+              <a:t>new; recently made</a:t>
             </a:r>
             <a:endParaRPr lang="en-US" sz="850" dirty="0"/>
           </a:p>
@@ -20753,7 +20609,7 @@
                 <a:ea typeface="Calibri" pitchFamily="34" charset="-122"/>
                 <a:cs typeface="Calibri" pitchFamily="34" charset="-120"/>
               </a:rPr>
-              <a:t>to make or become</a:t>
+              <a:t>made of; to make</a:t>
             </a:r>
             <a:endParaRPr lang="en-US" sz="850" dirty="0"/>
           </a:p>
@@ -20826,7 +20682,7 @@
                 <a:ea typeface="Trebuchet MS" pitchFamily="34" charset="-122"/>
                 <a:cs typeface="Trebuchet MS" pitchFamily="34" charset="-120"/>
               </a:rPr>
-              <a:t>er</a:t>
+              <a:t>ing</a:t>
             </a:r>
             <a:endParaRPr lang="en-US" sz="1300" dirty="0"/>
           </a:p>
@@ -20865,7 +20721,7 @@
                 <a:ea typeface="Calibri" pitchFamily="34" charset="-122"/>
                 <a:cs typeface="Calibri" pitchFamily="34" charset="-120"/>
               </a:rPr>
-              <a:t>a person or thing that does something</a:t>
+              <a:t>happening now</a:t>
             </a:r>
             <a:endParaRPr lang="en-US" sz="850" dirty="0"/>
           </a:p>
@@ -21234,7 +21090,7 @@
                 <a:ea typeface="Trebuchet MS" pitchFamily="34" charset="-122"/>
                 <a:cs typeface="Trebuchet MS" pitchFamily="34" charset="-120"/>
               </a:rPr>
-              <a:t>er</a:t>
+              <a:t>ing</a:t>
             </a:r>
             <a:endParaRPr lang="en-US" sz="1400" dirty="0"/>
           </a:p>
@@ -21658,7 +21514,7 @@
                 <a:ea typeface="Calibri" pitchFamily="34" charset="-122"/>
                 <a:cs typeface="Calibri" pitchFamily="34" charset="-120"/>
               </a:rPr>
-              <a:t>Word Labs  •  wordlabs.app  •  Root: 'fresh' = new, clean, not stale</a:t>
+              <a:t>Word Labs  •  wordlabs.app  •  Root: 'fresh' = new; recently made</a:t>
             </a:r>
             <a:endParaRPr lang="en-US" sz="800" dirty="0"/>
           </a:p>
@@ -21797,7 +21653,7 @@
                 <a:ea typeface="Trebuchet MS" pitchFamily="34" charset="-122"/>
                 <a:cs typeface="Trebuchet MS" pitchFamily="34" charset="-120"/>
               </a:rPr>
-              <a:t>freshener</a:t>
+              <a:t>freshening</a:t>
             </a:r>
             <a:endParaRPr lang="en-US" sz="2800" dirty="0"/>
           </a:p>
@@ -21975,7 +21831,7 @@
                 <a:ea typeface="Calibri" pitchFamily="34" charset="-122"/>
                 <a:cs typeface="Calibri" pitchFamily="34" charset="-120"/>
               </a:rPr>
-              <a:t>new, clean, not stale</a:t>
+              <a:t>new; recently made</a:t>
             </a:r>
             <a:endParaRPr lang="en-US" sz="850" dirty="0"/>
           </a:p>
@@ -22087,7 +21943,7 @@
                 <a:ea typeface="Calibri" pitchFamily="34" charset="-122"/>
                 <a:cs typeface="Calibri" pitchFamily="34" charset="-120"/>
               </a:rPr>
-              <a:t>to make or become</a:t>
+              <a:t>made of; to make</a:t>
             </a:r>
             <a:endParaRPr lang="en-US" sz="850" dirty="0"/>
           </a:p>
@@ -22160,7 +22016,7 @@
                 <a:ea typeface="Trebuchet MS" pitchFamily="34" charset="-122"/>
                 <a:cs typeface="Trebuchet MS" pitchFamily="34" charset="-120"/>
               </a:rPr>
-              <a:t>er</a:t>
+              <a:t>ing</a:t>
             </a:r>
             <a:endParaRPr lang="en-US" sz="1300" dirty="0"/>
           </a:p>
@@ -22199,7 +22055,7 @@
                 <a:ea typeface="Calibri" pitchFamily="34" charset="-122"/>
                 <a:cs typeface="Calibri" pitchFamily="34" charset="-120"/>
               </a:rPr>
-              <a:t>a person or thing that does something</a:t>
+              <a:t>happening now</a:t>
             </a:r>
             <a:endParaRPr lang="en-US" sz="850" dirty="0"/>
           </a:p>
@@ -22568,7 +22424,7 @@
                 <a:ea typeface="Trebuchet MS" pitchFamily="34" charset="-122"/>
                 <a:cs typeface="Trebuchet MS" pitchFamily="34" charset="-120"/>
               </a:rPr>
-              <a:t>er</a:t>
+              <a:t>ing</a:t>
             </a:r>
             <a:endParaRPr lang="en-US" sz="1400" dirty="0"/>
           </a:p>
@@ -22675,7 +22531,7 @@
         </p:nvSpPr>
         <p:spPr>
           <a:xfrm>
-            <a:off x="2124837" y="4169664"/>
+            <a:off x="2023872" y="4169664"/>
             <a:ext cx="685800" cy="475488"/>
           </a:xfrm>
           <a:prstGeom prst="rect">
@@ -22702,7 +22558,7 @@
         </p:nvSpPr>
         <p:spPr>
           <a:xfrm>
-            <a:off x="2124837" y="4169664"/>
+            <a:off x="2023872" y="4169664"/>
             <a:ext cx="685800" cy="475488"/>
           </a:xfrm>
           <a:prstGeom prst="rect">
@@ -22741,7 +22597,7 @@
         </p:nvSpPr>
         <p:spPr>
           <a:xfrm>
-            <a:off x="3033522" y="4169664"/>
+            <a:off x="2831592" y="4169664"/>
             <a:ext cx="685800" cy="475488"/>
           </a:xfrm>
           <a:prstGeom prst="rect">
@@ -22768,7 +22624,7 @@
         </p:nvSpPr>
         <p:spPr>
           <a:xfrm>
-            <a:off x="3033522" y="4169664"/>
+            <a:off x="2831592" y="4169664"/>
             <a:ext cx="685800" cy="475488"/>
           </a:xfrm>
           <a:prstGeom prst="rect">
@@ -22807,7 +22663,7 @@
         </p:nvSpPr>
         <p:spPr>
           <a:xfrm>
-            <a:off x="3942207" y="4169664"/>
+            <a:off x="3639312" y="4169664"/>
             <a:ext cx="685800" cy="475488"/>
           </a:xfrm>
           <a:prstGeom prst="rect">
@@ -22834,7 +22690,7 @@
         </p:nvSpPr>
         <p:spPr>
           <a:xfrm>
-            <a:off x="3942207" y="4169664"/>
+            <a:off x="3639312" y="4169664"/>
             <a:ext cx="685800" cy="475488"/>
           </a:xfrm>
           <a:prstGeom prst="rect">
@@ -22873,7 +22729,7 @@
         </p:nvSpPr>
         <p:spPr>
           <a:xfrm>
-            <a:off x="4850892" y="4169664"/>
+            <a:off x="4447032" y="4169664"/>
             <a:ext cx="685800" cy="475488"/>
           </a:xfrm>
           <a:prstGeom prst="rect">
@@ -22900,7 +22756,7 @@
         </p:nvSpPr>
         <p:spPr>
           <a:xfrm>
-            <a:off x="4850892" y="4169664"/>
+            <a:off x="4447032" y="4169664"/>
             <a:ext cx="685800" cy="475488"/>
           </a:xfrm>
           <a:prstGeom prst="rect">
@@ -22939,7 +22795,7 @@
         </p:nvSpPr>
         <p:spPr>
           <a:xfrm>
-            <a:off x="5759577" y="4169664"/>
+            <a:off x="5254752" y="4169664"/>
             <a:ext cx="685800" cy="475488"/>
           </a:xfrm>
           <a:prstGeom prst="rect">
@@ -22966,7 +22822,7 @@
         </p:nvSpPr>
         <p:spPr>
           <a:xfrm>
-            <a:off x="5759577" y="4169664"/>
+            <a:off x="5254752" y="4169664"/>
             <a:ext cx="685800" cy="475488"/>
           </a:xfrm>
           <a:prstGeom prst="rect">
@@ -23005,7 +22861,7 @@
         </p:nvSpPr>
         <p:spPr>
           <a:xfrm>
-            <a:off x="6668262" y="4169664"/>
+            <a:off x="6062472" y="4169664"/>
             <a:ext cx="685800" cy="475488"/>
           </a:xfrm>
           <a:prstGeom prst="rect">
@@ -23032,7 +22888,7 @@
         </p:nvSpPr>
         <p:spPr>
           <a:xfrm>
-            <a:off x="6668262" y="4169664"/>
+            <a:off x="6062472" y="4169664"/>
             <a:ext cx="685800" cy="475488"/>
           </a:xfrm>
           <a:prstGeom prst="rect">
@@ -23071,7 +22927,7 @@
         </p:nvSpPr>
         <p:spPr>
           <a:xfrm>
-            <a:off x="7576947" y="4169664"/>
+            <a:off x="6870192" y="4169664"/>
             <a:ext cx="685800" cy="475488"/>
           </a:xfrm>
           <a:prstGeom prst="rect">
@@ -23098,7 +22954,7 @@
         </p:nvSpPr>
         <p:spPr>
           <a:xfrm>
-            <a:off x="7576947" y="4169664"/>
+            <a:off x="6870192" y="4169664"/>
             <a:ext cx="685800" cy="475488"/>
           </a:xfrm>
           <a:prstGeom prst="rect">
@@ -23123,7 +22979,73 @@
                 <a:ea typeface="Trebuchet MS" pitchFamily="34" charset="-122"/>
                 <a:cs typeface="Trebuchet MS" pitchFamily="34" charset="-120"/>
               </a:rPr>
-              <a:t>er</a:t>
+              <a:t>i</a:t>
+            </a:r>
+            <a:endParaRPr lang="en-US" sz="900" dirty="0"/>
+          </a:p>
+        </p:txBody>
+      </p:sp>
+      <p:sp>
+        <p:nvSpPr>
+          <p:cNvPr id="53" name="Shape 51"/>
+          <p:cNvSpPr/>
+          <p:nvPr/>
+        </p:nvSpPr>
+        <p:spPr>
+          <a:xfrm>
+            <a:off x="7677912" y="4169664"/>
+            <a:ext cx="685800" cy="475488"/>
+          </a:xfrm>
+          <a:prstGeom prst="rect">
+            <a:avLst>
+              <a:gd name="adj" fmla="val 7692"/>
+            </a:avLst>
+          </a:prstGeom>
+          <a:solidFill>
+            <a:srgbClr val="FFFFFF"/>
+          </a:solidFill>
+          <a:ln w="12700">
+            <a:solidFill>
+              <a:srgbClr val="DB2777"/>
+            </a:solidFill>
+            <a:prstDash val="solid"/>
+          </a:ln>
+        </p:spPr>
+      </p:sp>
+      <p:sp>
+        <p:nvSpPr>
+          <p:cNvPr id="54" name="Text 52"/>
+          <p:cNvSpPr/>
+          <p:nvPr/>
+        </p:nvSpPr>
+        <p:spPr>
+          <a:xfrm>
+            <a:off x="7677912" y="4169664"/>
+            <a:ext cx="685800" cy="475488"/>
+          </a:xfrm>
+          <a:prstGeom prst="rect">
+            <a:avLst/>
+          </a:prstGeom>
+          <a:noFill/>
+          <a:ln/>
+        </p:spPr>
+        <p:txBody>
+          <a:bodyPr wrap="square" lIns="0" tIns="0" rIns="0" bIns="0" rtlCol="0" anchor="ctr"/>
+          <a:lstStyle/>
+          <a:p>
+            <a:pPr algn="ctr" indent="0" marL="0">
+              <a:buNone/>
+            </a:pPr>
+            <a:r>
+              <a:rPr lang="en-US" sz="900" b="1" dirty="0">
+                <a:solidFill>
+                  <a:srgbClr val="9D174D"/>
+                </a:solidFill>
+                <a:latin typeface="Trebuchet MS" pitchFamily="34" charset="0"/>
+                <a:ea typeface="Trebuchet MS" pitchFamily="34" charset="-122"/>
+                <a:cs typeface="Trebuchet MS" pitchFamily="34" charset="-120"/>
+              </a:rPr>
+              <a:t>ng</a:t>
             </a:r>
             <a:endParaRPr lang="en-US" sz="900" dirty="0"/>
           </a:p>
@@ -23415,7 +23337,7 @@
                 <a:ea typeface="Calibri" pitchFamily="34" charset="-122"/>
                 <a:cs typeface="Calibri" pitchFamily="34" charset="-120"/>
               </a:rPr>
-              <a:t>Word Labs  •  wordlabs.app  •  Root: 'fresh' = new, clean, not stale</a:t>
+              <a:t>Word Labs  •  wordlabs.app  •  Root: 'fresh' = new; recently made</a:t>
             </a:r>
             <a:endParaRPr lang="en-US" sz="800" dirty="0"/>
           </a:p>
@@ -23554,7 +23476,7 @@
                 <a:ea typeface="Trebuchet MS" pitchFamily="34" charset="-122"/>
                 <a:cs typeface="Trebuchet MS" pitchFamily="34" charset="-120"/>
               </a:rPr>
-              <a:t>freshen</a:t>
+              <a:t>refreshing</a:t>
             </a:r>
             <a:endParaRPr lang="en-US" sz="2800" dirty="0"/>
           </a:p>
@@ -24242,7 +24164,7 @@
                 <a:ea typeface="Calibri" pitchFamily="34" charset="-122"/>
                 <a:cs typeface="Calibri" pitchFamily="34" charset="-120"/>
               </a:rPr>
-              <a:t>Word Labs  •  wordlabs.app  •  Root: 'fresh' = new, clean, not stale</a:t>
+              <a:t>Word Labs  •  wordlabs.app  •  Root: 'fresh' = new; recently made</a:t>
             </a:r>
             <a:endParaRPr lang="en-US" sz="800" dirty="0"/>
           </a:p>
@@ -24381,7 +24303,7 @@
                 <a:ea typeface="Trebuchet MS" pitchFamily="34" charset="-122"/>
                 <a:cs typeface="Trebuchet MS" pitchFamily="34" charset="-120"/>
               </a:rPr>
-              <a:t>freshen</a:t>
+              <a:t>refreshing</a:t>
             </a:r>
             <a:endParaRPr lang="en-US" sz="2800" dirty="0"/>
           </a:p>
@@ -24461,7 +24383,7 @@
         </p:nvSpPr>
         <p:spPr>
           <a:xfrm>
-            <a:off x="2938272" y="2258568"/>
+            <a:off x="2221992" y="2258568"/>
             <a:ext cx="1828800" cy="292608"/>
           </a:xfrm>
           <a:prstGeom prst="rect">
@@ -24470,11 +24392,11 @@
             </a:avLst>
           </a:prstGeom>
           <a:solidFill>
-            <a:srgbClr val="CCFBF1"/>
+            <a:srgbClr val="DDD6FE"/>
           </a:solidFill>
           <a:ln w="19050">
             <a:solidFill>
-              <a:srgbClr val="0D9488"/>
+              <a:srgbClr val="7C3AED"/>
             </a:solidFill>
             <a:prstDash val="solid"/>
           </a:ln>
@@ -24495,7 +24417,7 @@
         </p:nvSpPr>
         <p:spPr>
           <a:xfrm>
-            <a:off x="2938272" y="2258568"/>
+            <a:off x="2221992" y="2258568"/>
             <a:ext cx="1828800" cy="292608"/>
           </a:xfrm>
           <a:prstGeom prst="rect">
@@ -24514,13 +24436,13 @@
             <a:r>
               <a:rPr lang="en-US" sz="1300" b="1" dirty="0">
                 <a:solidFill>
-                  <a:srgbClr val="0F766E"/>
+                  <a:srgbClr val="4C1D95"/>
                 </a:solidFill>
                 <a:latin typeface="Trebuchet MS" pitchFamily="34" charset="0"/>
                 <a:ea typeface="Trebuchet MS" pitchFamily="34" charset="-122"/>
                 <a:cs typeface="Trebuchet MS" pitchFamily="34" charset="-120"/>
               </a:rPr>
-              <a:t>fresh</a:t>
+              <a:t>re</a:t>
             </a:r>
             <a:endParaRPr lang="en-US" sz="1300" dirty="0"/>
           </a:p>
@@ -24534,7 +24456,7 @@
         </p:nvSpPr>
         <p:spPr>
           <a:xfrm>
-            <a:off x="2938272" y="2569464"/>
+            <a:off x="2221992" y="2569464"/>
             <a:ext cx="1828800" cy="201168"/>
           </a:xfrm>
           <a:prstGeom prst="rect">
@@ -24559,7 +24481,7 @@
                 <a:ea typeface="Calibri" pitchFamily="34" charset="-122"/>
                 <a:cs typeface="Calibri" pitchFamily="34" charset="-120"/>
               </a:rPr>
-              <a:t>new, clean, not stale</a:t>
+              <a:t>again</a:t>
             </a:r>
             <a:endParaRPr lang="en-US" sz="850" dirty="0"/>
           </a:p>
@@ -24573,7 +24495,7 @@
         </p:nvSpPr>
         <p:spPr>
           <a:xfrm>
-            <a:off x="5803392" y="2258568"/>
+            <a:off x="4370832" y="2258568"/>
             <a:ext cx="1828800" cy="292608"/>
           </a:xfrm>
           <a:prstGeom prst="rect">
@@ -24582,11 +24504,11 @@
             </a:avLst>
           </a:prstGeom>
           <a:solidFill>
-            <a:srgbClr val="FCE7F3"/>
+            <a:srgbClr val="CCFBF1"/>
           </a:solidFill>
           <a:ln w="19050">
             <a:solidFill>
-              <a:srgbClr val="DB2777"/>
+              <a:srgbClr val="0D9488"/>
             </a:solidFill>
             <a:prstDash val="solid"/>
           </a:ln>
@@ -24607,7 +24529,7 @@
         </p:nvSpPr>
         <p:spPr>
           <a:xfrm>
-            <a:off x="5803392" y="2258568"/>
+            <a:off x="4370832" y="2258568"/>
             <a:ext cx="1828800" cy="292608"/>
           </a:xfrm>
           <a:prstGeom prst="rect">
@@ -24626,13 +24548,13 @@
             <a:r>
               <a:rPr lang="en-US" sz="1300" b="1" dirty="0">
                 <a:solidFill>
-                  <a:srgbClr val="9D174D"/>
+                  <a:srgbClr val="0F766E"/>
                 </a:solidFill>
                 <a:latin typeface="Trebuchet MS" pitchFamily="34" charset="0"/>
                 <a:ea typeface="Trebuchet MS" pitchFamily="34" charset="-122"/>
                 <a:cs typeface="Trebuchet MS" pitchFamily="34" charset="-120"/>
               </a:rPr>
-              <a:t>en</a:t>
+              <a:t>fresh</a:t>
             </a:r>
             <a:endParaRPr lang="en-US" sz="1300" dirty="0"/>
           </a:p>
@@ -24646,7 +24568,7 @@
         </p:nvSpPr>
         <p:spPr>
           <a:xfrm>
-            <a:off x="5803392" y="2569464"/>
+            <a:off x="4370832" y="2569464"/>
             <a:ext cx="1828800" cy="201168"/>
           </a:xfrm>
           <a:prstGeom prst="rect">
@@ -24671,7 +24593,7 @@
                 <a:ea typeface="Calibri" pitchFamily="34" charset="-122"/>
                 <a:cs typeface="Calibri" pitchFamily="34" charset="-120"/>
               </a:rPr>
-              <a:t>to make or become</a:t>
+              <a:t>new; recently made</a:t>
             </a:r>
             <a:endParaRPr lang="en-US" sz="850" dirty="0"/>
           </a:p>
@@ -24680,6 +24602,118 @@
       <p:sp>
         <p:nvSpPr>
           <p:cNvPr id="22" name="Shape 20"/>
+          <p:cNvSpPr/>
+          <p:nvPr/>
+        </p:nvSpPr>
+        <p:spPr>
+          <a:xfrm>
+            <a:off x="6519672" y="2258568"/>
+            <a:ext cx="1828800" cy="292608"/>
+          </a:xfrm>
+          <a:prstGeom prst="rect">
+            <a:avLst>
+              <a:gd name="adj" fmla="val 25000"/>
+            </a:avLst>
+          </a:prstGeom>
+          <a:solidFill>
+            <a:srgbClr val="FCE7F3"/>
+          </a:solidFill>
+          <a:ln w="19050">
+            <a:solidFill>
+              <a:srgbClr val="DB2777"/>
+            </a:solidFill>
+            <a:prstDash val="solid"/>
+          </a:ln>
+          <a:effectLst>
+            <a:outerShdw sx="100000" sy="100000" kx="0" ky="0" algn="bl" rotWithShape="0" blurRad="101600" dist="38100" dir="8100000">
+              <a:srgbClr val="000000">
+                <a:alpha val="12000"/>
+              </a:srgbClr>
+            </a:outerShdw>
+          </a:effectLst>
+        </p:spPr>
+      </p:sp>
+      <p:sp>
+        <p:nvSpPr>
+          <p:cNvPr id="23" name="Text 21"/>
+          <p:cNvSpPr/>
+          <p:nvPr/>
+        </p:nvSpPr>
+        <p:spPr>
+          <a:xfrm>
+            <a:off x="6519672" y="2258568"/>
+            <a:ext cx="1828800" cy="292608"/>
+          </a:xfrm>
+          <a:prstGeom prst="rect">
+            <a:avLst/>
+          </a:prstGeom>
+          <a:noFill/>
+          <a:ln/>
+        </p:spPr>
+        <p:txBody>
+          <a:bodyPr wrap="square" lIns="0" tIns="0" rIns="0" bIns="0" rtlCol="0" anchor="ctr"/>
+          <a:lstStyle/>
+          <a:p>
+            <a:pPr algn="ctr" indent="0" marL="0">
+              <a:buNone/>
+            </a:pPr>
+            <a:r>
+              <a:rPr lang="en-US" sz="1300" b="1" dirty="0">
+                <a:solidFill>
+                  <a:srgbClr val="9D174D"/>
+                </a:solidFill>
+                <a:latin typeface="Trebuchet MS" pitchFamily="34" charset="0"/>
+                <a:ea typeface="Trebuchet MS" pitchFamily="34" charset="-122"/>
+                <a:cs typeface="Trebuchet MS" pitchFamily="34" charset="-120"/>
+              </a:rPr>
+              <a:t>ing</a:t>
+            </a:r>
+            <a:endParaRPr lang="en-US" sz="1300" dirty="0"/>
+          </a:p>
+        </p:txBody>
+      </p:sp>
+      <p:sp>
+        <p:nvSpPr>
+          <p:cNvPr id="24" name="Text 22"/>
+          <p:cNvSpPr/>
+          <p:nvPr/>
+        </p:nvSpPr>
+        <p:spPr>
+          <a:xfrm>
+            <a:off x="6519672" y="2569464"/>
+            <a:ext cx="1828800" cy="201168"/>
+          </a:xfrm>
+          <a:prstGeom prst="rect">
+            <a:avLst/>
+          </a:prstGeom>
+          <a:noFill/>
+          <a:ln/>
+        </p:spPr>
+        <p:txBody>
+          <a:bodyPr wrap="square" lIns="0" tIns="0" rIns="0" bIns="0" rtlCol="0" anchor="t"/>
+          <a:lstStyle/>
+          <a:p>
+            <a:pPr algn="ctr" indent="0" marL="0">
+              <a:buNone/>
+            </a:pPr>
+            <a:r>
+              <a:rPr lang="en-US" sz="850" dirty="0">
+                <a:solidFill>
+                  <a:srgbClr val="475569"/>
+                </a:solidFill>
+                <a:latin typeface="Calibri" pitchFamily="34" charset="0"/>
+                <a:ea typeface="Calibri" pitchFamily="34" charset="-122"/>
+                <a:cs typeface="Calibri" pitchFamily="34" charset="-120"/>
+              </a:rPr>
+              <a:t>happening now</a:t>
+            </a:r>
+            <a:endParaRPr lang="en-US" sz="850" dirty="0"/>
+          </a:p>
+        </p:txBody>
+      </p:sp>
+      <p:sp>
+        <p:nvSpPr>
+          <p:cNvPr id="25" name="Shape 23"/>
           <p:cNvSpPr/>
           <p:nvPr/>
         </p:nvSpPr>
@@ -24706,7 +24740,7 @@
       </p:sp>
       <p:sp>
         <p:nvSpPr>
-          <p:cNvPr id="23" name="Text 21"/>
+          <p:cNvPr id="26" name="Text 24"/>
           <p:cNvSpPr/>
           <p:nvPr/>
         </p:nvSpPr>
@@ -24745,7 +24779,7 @@
       </p:sp>
       <p:sp>
         <p:nvSpPr>
-          <p:cNvPr id="24" name="Shape 22"/>
+          <p:cNvPr id="27" name="Shape 25"/>
           <p:cNvSpPr/>
           <p:nvPr/>
         </p:nvSpPr>
@@ -24772,7 +24806,7 @@
       </p:sp>
       <p:sp>
         <p:nvSpPr>
-          <p:cNvPr id="25" name="Text 23"/>
+          <p:cNvPr id="28" name="Text 26"/>
           <p:cNvSpPr/>
           <p:nvPr/>
         </p:nvSpPr>
@@ -24811,7 +24845,7 @@
       </p:sp>
       <p:sp>
         <p:nvSpPr>
-          <p:cNvPr id="26" name="Shape 24"/>
+          <p:cNvPr id="29" name="Shape 27"/>
           <p:cNvSpPr/>
           <p:nvPr/>
         </p:nvSpPr>
@@ -24838,7 +24872,7 @@
       </p:sp>
       <p:sp>
         <p:nvSpPr>
-          <p:cNvPr id="27" name="Text 25"/>
+          <p:cNvPr id="30" name="Text 28"/>
           <p:cNvSpPr/>
           <p:nvPr/>
         </p:nvSpPr>
@@ -24877,7 +24911,7 @@
       </p:sp>
       <p:sp>
         <p:nvSpPr>
-          <p:cNvPr id="28" name="Shape 26"/>
+          <p:cNvPr id="31" name="Shape 29"/>
           <p:cNvSpPr/>
           <p:nvPr/>
         </p:nvSpPr>
@@ -24904,7 +24938,7 @@
       </p:sp>
       <p:sp>
         <p:nvSpPr>
-          <p:cNvPr id="29" name="Text 27"/>
+          <p:cNvPr id="32" name="Text 30"/>
           <p:cNvSpPr/>
           <p:nvPr/>
         </p:nvSpPr>
@@ -25227,7 +25261,7 @@
                 <a:ea typeface="Calibri" pitchFamily="34" charset="-122"/>
                 <a:cs typeface="Calibri" pitchFamily="34" charset="-120"/>
               </a:rPr>
-              <a:t>Word Labs  •  wordlabs.app  •  Root: 'fresh' = new, clean, not stale</a:t>
+              <a:t>Word Labs  •  wordlabs.app  •  Root: 'fresh' = new; recently made</a:t>
             </a:r>
             <a:endParaRPr lang="en-US" sz="800" dirty="0"/>
           </a:p>
@@ -25300,7 +25334,7 @@
                 <a:ea typeface="Trebuchet MS" pitchFamily="34" charset="-122"/>
                 <a:cs typeface="Trebuchet MS" pitchFamily="34" charset="-120"/>
               </a:rPr>
-              <a:t>We are learning that the root 'fresh' means 'new, clean, not stale'.</a:t>
+              <a:t>We are learning that the root 'fresh' means 'new; recently made'.</a:t>
             </a:r>
             <a:endParaRPr lang="en-US" sz="2000" dirty="0"/>
           </a:p>
@@ -25946,7 +25980,7 @@
                 <a:ea typeface="Calibri" pitchFamily="34" charset="-122"/>
                 <a:cs typeface="Calibri" pitchFamily="34" charset="-120"/>
               </a:rPr>
-              <a:t>Word Labs  •  wordlabs.app  •  Root: 'fresh' = new, clean, not stale</a:t>
+              <a:t>Word Labs  •  wordlabs.app  •  Root: 'fresh' = new; recently made</a:t>
             </a:r>
             <a:endParaRPr lang="en-US" sz="800" dirty="0"/>
           </a:p>
@@ -26085,7 +26119,7 @@
                 <a:ea typeface="Trebuchet MS" pitchFamily="34" charset="-122"/>
                 <a:cs typeface="Trebuchet MS" pitchFamily="34" charset="-120"/>
               </a:rPr>
-              <a:t>freshen</a:t>
+              <a:t>refreshing</a:t>
             </a:r>
             <a:endParaRPr lang="en-US" sz="2800" dirty="0"/>
           </a:p>
@@ -26165,7 +26199,7 @@
         </p:nvSpPr>
         <p:spPr>
           <a:xfrm>
-            <a:off x="2938272" y="2258568"/>
+            <a:off x="2221992" y="2258568"/>
             <a:ext cx="1828800" cy="292608"/>
           </a:xfrm>
           <a:prstGeom prst="rect">
@@ -26174,11 +26208,11 @@
             </a:avLst>
           </a:prstGeom>
           <a:solidFill>
-            <a:srgbClr val="CCFBF1"/>
+            <a:srgbClr val="DDD6FE"/>
           </a:solidFill>
           <a:ln w="19050">
             <a:solidFill>
-              <a:srgbClr val="0D9488"/>
+              <a:srgbClr val="7C3AED"/>
             </a:solidFill>
             <a:prstDash val="solid"/>
           </a:ln>
@@ -26199,7 +26233,7 @@
         </p:nvSpPr>
         <p:spPr>
           <a:xfrm>
-            <a:off x="2938272" y="2258568"/>
+            <a:off x="2221992" y="2258568"/>
             <a:ext cx="1828800" cy="292608"/>
           </a:xfrm>
           <a:prstGeom prst="rect">
@@ -26218,13 +26252,13 @@
             <a:r>
               <a:rPr lang="en-US" sz="1300" b="1" dirty="0">
                 <a:solidFill>
-                  <a:srgbClr val="0F766E"/>
+                  <a:srgbClr val="4C1D95"/>
                 </a:solidFill>
                 <a:latin typeface="Trebuchet MS" pitchFamily="34" charset="0"/>
                 <a:ea typeface="Trebuchet MS" pitchFamily="34" charset="-122"/>
                 <a:cs typeface="Trebuchet MS" pitchFamily="34" charset="-120"/>
               </a:rPr>
-              <a:t>fresh</a:t>
+              <a:t>re</a:t>
             </a:r>
             <a:endParaRPr lang="en-US" sz="1300" dirty="0"/>
           </a:p>
@@ -26238,7 +26272,7 @@
         </p:nvSpPr>
         <p:spPr>
           <a:xfrm>
-            <a:off x="2938272" y="2569464"/>
+            <a:off x="2221992" y="2569464"/>
             <a:ext cx="1828800" cy="201168"/>
           </a:xfrm>
           <a:prstGeom prst="rect">
@@ -26263,7 +26297,7 @@
                 <a:ea typeface="Calibri" pitchFamily="34" charset="-122"/>
                 <a:cs typeface="Calibri" pitchFamily="34" charset="-120"/>
               </a:rPr>
-              <a:t>new, clean, not stale</a:t>
+              <a:t>again</a:t>
             </a:r>
             <a:endParaRPr lang="en-US" sz="850" dirty="0"/>
           </a:p>
@@ -26277,7 +26311,7 @@
         </p:nvSpPr>
         <p:spPr>
           <a:xfrm>
-            <a:off x="5803392" y="2258568"/>
+            <a:off x="4370832" y="2258568"/>
             <a:ext cx="1828800" cy="292608"/>
           </a:xfrm>
           <a:prstGeom prst="rect">
@@ -26286,11 +26320,11 @@
             </a:avLst>
           </a:prstGeom>
           <a:solidFill>
-            <a:srgbClr val="FCE7F3"/>
+            <a:srgbClr val="CCFBF1"/>
           </a:solidFill>
           <a:ln w="19050">
             <a:solidFill>
-              <a:srgbClr val="DB2777"/>
+              <a:srgbClr val="0D9488"/>
             </a:solidFill>
             <a:prstDash val="solid"/>
           </a:ln>
@@ -26311,7 +26345,7 @@
         </p:nvSpPr>
         <p:spPr>
           <a:xfrm>
-            <a:off x="5803392" y="2258568"/>
+            <a:off x="4370832" y="2258568"/>
             <a:ext cx="1828800" cy="292608"/>
           </a:xfrm>
           <a:prstGeom prst="rect">
@@ -26330,13 +26364,13 @@
             <a:r>
               <a:rPr lang="en-US" sz="1300" b="1" dirty="0">
                 <a:solidFill>
-                  <a:srgbClr val="9D174D"/>
+                  <a:srgbClr val="0F766E"/>
                 </a:solidFill>
                 <a:latin typeface="Trebuchet MS" pitchFamily="34" charset="0"/>
                 <a:ea typeface="Trebuchet MS" pitchFamily="34" charset="-122"/>
                 <a:cs typeface="Trebuchet MS" pitchFamily="34" charset="-120"/>
               </a:rPr>
-              <a:t>en</a:t>
+              <a:t>fresh</a:t>
             </a:r>
             <a:endParaRPr lang="en-US" sz="1300" dirty="0"/>
           </a:p>
@@ -26350,7 +26384,7 @@
         </p:nvSpPr>
         <p:spPr>
           <a:xfrm>
-            <a:off x="5803392" y="2569464"/>
+            <a:off x="4370832" y="2569464"/>
             <a:ext cx="1828800" cy="201168"/>
           </a:xfrm>
           <a:prstGeom prst="rect">
@@ -26375,7 +26409,7 @@
                 <a:ea typeface="Calibri" pitchFamily="34" charset="-122"/>
                 <a:cs typeface="Calibri" pitchFamily="34" charset="-120"/>
               </a:rPr>
-              <a:t>to make or become</a:t>
+              <a:t>new; recently made</a:t>
             </a:r>
             <a:endParaRPr lang="en-US" sz="850" dirty="0"/>
           </a:p>
@@ -26384,6 +26418,118 @@
       <p:sp>
         <p:nvSpPr>
           <p:cNvPr id="22" name="Shape 20"/>
+          <p:cNvSpPr/>
+          <p:nvPr/>
+        </p:nvSpPr>
+        <p:spPr>
+          <a:xfrm>
+            <a:off x="6519672" y="2258568"/>
+            <a:ext cx="1828800" cy="292608"/>
+          </a:xfrm>
+          <a:prstGeom prst="rect">
+            <a:avLst>
+              <a:gd name="adj" fmla="val 25000"/>
+            </a:avLst>
+          </a:prstGeom>
+          <a:solidFill>
+            <a:srgbClr val="FCE7F3"/>
+          </a:solidFill>
+          <a:ln w="19050">
+            <a:solidFill>
+              <a:srgbClr val="DB2777"/>
+            </a:solidFill>
+            <a:prstDash val="solid"/>
+          </a:ln>
+          <a:effectLst>
+            <a:outerShdw sx="100000" sy="100000" kx="0" ky="0" algn="bl" rotWithShape="0" blurRad="101600" dist="38100" dir="8100000">
+              <a:srgbClr val="000000">
+                <a:alpha val="12000"/>
+              </a:srgbClr>
+            </a:outerShdw>
+          </a:effectLst>
+        </p:spPr>
+      </p:sp>
+      <p:sp>
+        <p:nvSpPr>
+          <p:cNvPr id="23" name="Text 21"/>
+          <p:cNvSpPr/>
+          <p:nvPr/>
+        </p:nvSpPr>
+        <p:spPr>
+          <a:xfrm>
+            <a:off x="6519672" y="2258568"/>
+            <a:ext cx="1828800" cy="292608"/>
+          </a:xfrm>
+          <a:prstGeom prst="rect">
+            <a:avLst/>
+          </a:prstGeom>
+          <a:noFill/>
+          <a:ln/>
+        </p:spPr>
+        <p:txBody>
+          <a:bodyPr wrap="square" lIns="0" tIns="0" rIns="0" bIns="0" rtlCol="0" anchor="ctr"/>
+          <a:lstStyle/>
+          <a:p>
+            <a:pPr algn="ctr" indent="0" marL="0">
+              <a:buNone/>
+            </a:pPr>
+            <a:r>
+              <a:rPr lang="en-US" sz="1300" b="1" dirty="0">
+                <a:solidFill>
+                  <a:srgbClr val="9D174D"/>
+                </a:solidFill>
+                <a:latin typeface="Trebuchet MS" pitchFamily="34" charset="0"/>
+                <a:ea typeface="Trebuchet MS" pitchFamily="34" charset="-122"/>
+                <a:cs typeface="Trebuchet MS" pitchFamily="34" charset="-120"/>
+              </a:rPr>
+              <a:t>ing</a:t>
+            </a:r>
+            <a:endParaRPr lang="en-US" sz="1300" dirty="0"/>
+          </a:p>
+        </p:txBody>
+      </p:sp>
+      <p:sp>
+        <p:nvSpPr>
+          <p:cNvPr id="24" name="Text 22"/>
+          <p:cNvSpPr/>
+          <p:nvPr/>
+        </p:nvSpPr>
+        <p:spPr>
+          <a:xfrm>
+            <a:off x="6519672" y="2569464"/>
+            <a:ext cx="1828800" cy="201168"/>
+          </a:xfrm>
+          <a:prstGeom prst="rect">
+            <a:avLst/>
+          </a:prstGeom>
+          <a:noFill/>
+          <a:ln/>
+        </p:spPr>
+        <p:txBody>
+          <a:bodyPr wrap="square" lIns="0" tIns="0" rIns="0" bIns="0" rtlCol="0" anchor="t"/>
+          <a:lstStyle/>
+          <a:p>
+            <a:pPr algn="ctr" indent="0" marL="0">
+              <a:buNone/>
+            </a:pPr>
+            <a:r>
+              <a:rPr lang="en-US" sz="850" dirty="0">
+                <a:solidFill>
+                  <a:srgbClr val="475569"/>
+                </a:solidFill>
+                <a:latin typeface="Calibri" pitchFamily="34" charset="0"/>
+                <a:ea typeface="Calibri" pitchFamily="34" charset="-122"/>
+                <a:cs typeface="Calibri" pitchFamily="34" charset="-120"/>
+              </a:rPr>
+              <a:t>happening now</a:t>
+            </a:r>
+            <a:endParaRPr lang="en-US" sz="850" dirty="0"/>
+          </a:p>
+        </p:txBody>
+      </p:sp>
+      <p:sp>
+        <p:nvSpPr>
+          <p:cNvPr id="25" name="Shape 23"/>
           <p:cNvSpPr/>
           <p:nvPr/>
         </p:nvSpPr>
@@ -26410,7 +26556,7 @@
       </p:sp>
       <p:sp>
         <p:nvSpPr>
-          <p:cNvPr id="23" name="Text 21"/>
+          <p:cNvPr id="26" name="Text 24"/>
           <p:cNvSpPr/>
           <p:nvPr/>
         </p:nvSpPr>
@@ -26449,7 +26595,7 @@
       </p:sp>
       <p:sp>
         <p:nvSpPr>
-          <p:cNvPr id="24" name="Shape 22"/>
+          <p:cNvPr id="27" name="Shape 25"/>
           <p:cNvSpPr/>
           <p:nvPr/>
         </p:nvSpPr>
@@ -26476,13 +26622,13 @@
       </p:sp>
       <p:sp>
         <p:nvSpPr>
-          <p:cNvPr id="25" name="Shape 23"/>
-          <p:cNvSpPr/>
-          <p:nvPr/>
-        </p:nvSpPr>
-        <p:spPr>
-          <a:xfrm>
-            <a:off x="2999232" y="3364992"/>
+          <p:cNvPr id="28" name="Shape 26"/>
+          <p:cNvSpPr/>
+          <p:nvPr/>
+        </p:nvSpPr>
+        <p:spPr>
+          <a:xfrm>
+            <a:off x="2313432" y="3364992"/>
             <a:ext cx="1645920" cy="475488"/>
           </a:xfrm>
           <a:prstGeom prst="rect">
@@ -26503,13 +26649,13 @@
       </p:sp>
       <p:sp>
         <p:nvSpPr>
-          <p:cNvPr id="26" name="Text 24"/>
-          <p:cNvSpPr/>
-          <p:nvPr/>
-        </p:nvSpPr>
-        <p:spPr>
-          <a:xfrm>
-            <a:off x="2999232" y="3364992"/>
+          <p:cNvPr id="29" name="Text 27"/>
+          <p:cNvSpPr/>
+          <p:nvPr/>
+        </p:nvSpPr>
+        <p:spPr>
+          <a:xfrm>
+            <a:off x="2313432" y="3364992"/>
             <a:ext cx="1645920" cy="475488"/>
           </a:xfrm>
           <a:prstGeom prst="rect">
@@ -26534,7 +26680,7 @@
                 <a:ea typeface="Trebuchet MS" pitchFamily="34" charset="-122"/>
                 <a:cs typeface="Trebuchet MS" pitchFamily="34" charset="-120"/>
               </a:rPr>
-              <a:t>fresh</a:t>
+              <a:t>re</a:t>
             </a:r>
             <a:endParaRPr lang="en-US" sz="1400" dirty="0"/>
           </a:p>
@@ -26542,14 +26688,14 @@
       </p:sp>
       <p:sp>
         <p:nvSpPr>
-          <p:cNvPr id="27" name="Text 25"/>
-          <p:cNvSpPr/>
-          <p:nvPr/>
-        </p:nvSpPr>
-        <p:spPr>
-          <a:xfrm>
-            <a:off x="4645152" y="3364992"/>
-            <a:ext cx="1097280" cy="475488"/>
+          <p:cNvPr id="30" name="Text 28"/>
+          <p:cNvSpPr/>
+          <p:nvPr/>
+        </p:nvSpPr>
+        <p:spPr>
+          <a:xfrm>
+            <a:off x="3959352" y="3364992"/>
+            <a:ext cx="411480" cy="475488"/>
           </a:xfrm>
           <a:prstGeom prst="rect">
             <a:avLst/>
@@ -26581,13 +26727,13 @@
       </p:sp>
       <p:sp>
         <p:nvSpPr>
-          <p:cNvPr id="28" name="Shape 26"/>
-          <p:cNvSpPr/>
-          <p:nvPr/>
-        </p:nvSpPr>
-        <p:spPr>
-          <a:xfrm>
-            <a:off x="5742432" y="3364992"/>
+          <p:cNvPr id="31" name="Shape 29"/>
+          <p:cNvSpPr/>
+          <p:nvPr/>
+        </p:nvSpPr>
+        <p:spPr>
+          <a:xfrm>
+            <a:off x="4370832" y="3364992"/>
             <a:ext cx="1645920" cy="475488"/>
           </a:xfrm>
           <a:prstGeom prst="rect">
@@ -26608,13 +26754,13 @@
       </p:sp>
       <p:sp>
         <p:nvSpPr>
-          <p:cNvPr id="29" name="Text 27"/>
-          <p:cNvSpPr/>
-          <p:nvPr/>
-        </p:nvSpPr>
-        <p:spPr>
-          <a:xfrm>
-            <a:off x="5742432" y="3364992"/>
+          <p:cNvPr id="32" name="Text 30"/>
+          <p:cNvSpPr/>
+          <p:nvPr/>
+        </p:nvSpPr>
+        <p:spPr>
+          <a:xfrm>
+            <a:off x="4370832" y="3364992"/>
             <a:ext cx="1645920" cy="475488"/>
           </a:xfrm>
           <a:prstGeom prst="rect">
@@ -26639,7 +26785,7 @@
                 <a:ea typeface="Trebuchet MS" pitchFamily="34" charset="-122"/>
                 <a:cs typeface="Trebuchet MS" pitchFamily="34" charset="-120"/>
               </a:rPr>
-              <a:t>en</a:t>
+              <a:t>fresh</a:t>
             </a:r>
             <a:endParaRPr lang="en-US" sz="1400" dirty="0"/>
           </a:p>
@@ -26647,7 +26793,112 @@
       </p:sp>
       <p:sp>
         <p:nvSpPr>
-          <p:cNvPr id="30" name="Shape 28"/>
+          <p:cNvPr id="33" name="Text 31"/>
+          <p:cNvSpPr/>
+          <p:nvPr/>
+        </p:nvSpPr>
+        <p:spPr>
+          <a:xfrm>
+            <a:off x="6016752" y="3364992"/>
+            <a:ext cx="411480" cy="475488"/>
+          </a:xfrm>
+          <a:prstGeom prst="rect">
+            <a:avLst/>
+          </a:prstGeom>
+          <a:noFill/>
+          <a:ln/>
+        </p:spPr>
+        <p:txBody>
+          <a:bodyPr wrap="square" lIns="0" tIns="0" rIns="0" bIns="0" rtlCol="0" anchor="ctr"/>
+          <a:lstStyle/>
+          <a:p>
+            <a:pPr algn="ctr" indent="0" marL="0">
+              <a:buNone/>
+            </a:pPr>
+            <a:r>
+              <a:rPr lang="en-US" sz="1600" b="1" dirty="0">
+                <a:solidFill>
+                  <a:srgbClr val="0D9488"/>
+                </a:solidFill>
+                <a:latin typeface="Trebuchet MS" pitchFamily="34" charset="0"/>
+                <a:ea typeface="Trebuchet MS" pitchFamily="34" charset="-122"/>
+                <a:cs typeface="Trebuchet MS" pitchFamily="34" charset="-120"/>
+              </a:rPr>
+              <a:t>·</a:t>
+            </a:r>
+            <a:endParaRPr lang="en-US" sz="1600" dirty="0"/>
+          </a:p>
+        </p:txBody>
+      </p:sp>
+      <p:sp>
+        <p:nvSpPr>
+          <p:cNvPr id="34" name="Shape 32"/>
+          <p:cNvSpPr/>
+          <p:nvPr/>
+        </p:nvSpPr>
+        <p:spPr>
+          <a:xfrm>
+            <a:off x="6428232" y="3364992"/>
+            <a:ext cx="1645920" cy="475488"/>
+          </a:xfrm>
+          <a:prstGeom prst="rect">
+            <a:avLst>
+              <a:gd name="adj" fmla="val 9615"/>
+            </a:avLst>
+          </a:prstGeom>
+          <a:solidFill>
+            <a:srgbClr val="FFFFFF"/>
+          </a:solidFill>
+          <a:ln w="12700">
+            <a:solidFill>
+              <a:srgbClr val="0D9488"/>
+            </a:solidFill>
+            <a:prstDash val="solid"/>
+          </a:ln>
+        </p:spPr>
+      </p:sp>
+      <p:sp>
+        <p:nvSpPr>
+          <p:cNvPr id="35" name="Text 33"/>
+          <p:cNvSpPr/>
+          <p:nvPr/>
+        </p:nvSpPr>
+        <p:spPr>
+          <a:xfrm>
+            <a:off x="6428232" y="3364992"/>
+            <a:ext cx="1645920" cy="475488"/>
+          </a:xfrm>
+          <a:prstGeom prst="rect">
+            <a:avLst/>
+          </a:prstGeom>
+          <a:noFill/>
+          <a:ln/>
+        </p:spPr>
+        <p:txBody>
+          <a:bodyPr wrap="square" lIns="0" tIns="0" rIns="0" bIns="0" rtlCol="0" anchor="ctr"/>
+          <a:lstStyle/>
+          <a:p>
+            <a:pPr algn="ctr" indent="0" marL="0">
+              <a:buNone/>
+            </a:pPr>
+            <a:r>
+              <a:rPr lang="en-US" sz="1400" b="1" dirty="0">
+                <a:solidFill>
+                  <a:srgbClr val="0D9488"/>
+                </a:solidFill>
+                <a:latin typeface="Trebuchet MS" pitchFamily="34" charset="0"/>
+                <a:ea typeface="Trebuchet MS" pitchFamily="34" charset="-122"/>
+                <a:cs typeface="Trebuchet MS" pitchFamily="34" charset="-120"/>
+              </a:rPr>
+              <a:t>ing</a:t>
+            </a:r>
+            <a:endParaRPr lang="en-US" sz="1400" dirty="0"/>
+          </a:p>
+        </p:txBody>
+      </p:sp>
+      <p:sp>
+        <p:nvSpPr>
+          <p:cNvPr id="36" name="Shape 34"/>
           <p:cNvSpPr/>
           <p:nvPr/>
         </p:nvSpPr>
@@ -26674,7 +26925,7 @@
       </p:sp>
       <p:sp>
         <p:nvSpPr>
-          <p:cNvPr id="31" name="Text 29"/>
+          <p:cNvPr id="37" name="Text 35"/>
           <p:cNvSpPr/>
           <p:nvPr/>
         </p:nvSpPr>
@@ -26713,7 +26964,7 @@
       </p:sp>
       <p:sp>
         <p:nvSpPr>
-          <p:cNvPr id="32" name="Shape 30"/>
+          <p:cNvPr id="38" name="Shape 36"/>
           <p:cNvSpPr/>
           <p:nvPr/>
         </p:nvSpPr>
@@ -26740,7 +26991,7 @@
       </p:sp>
       <p:sp>
         <p:nvSpPr>
-          <p:cNvPr id="33" name="Text 31"/>
+          <p:cNvPr id="39" name="Text 37"/>
           <p:cNvSpPr/>
           <p:nvPr/>
         </p:nvSpPr>
@@ -27063,7 +27314,7 @@
                 <a:ea typeface="Calibri" pitchFamily="34" charset="-122"/>
                 <a:cs typeface="Calibri" pitchFamily="34" charset="-120"/>
               </a:rPr>
-              <a:t>Word Labs  •  wordlabs.app  •  Root: 'fresh' = new, clean, not stale</a:t>
+              <a:t>Word Labs  •  wordlabs.app  •  Root: 'fresh' = new; recently made</a:t>
             </a:r>
             <a:endParaRPr lang="en-US" sz="800" dirty="0"/>
           </a:p>
@@ -27202,7 +27453,7 @@
                 <a:ea typeface="Trebuchet MS" pitchFamily="34" charset="-122"/>
                 <a:cs typeface="Trebuchet MS" pitchFamily="34" charset="-120"/>
               </a:rPr>
-              <a:t>freshen</a:t>
+              <a:t>refreshing</a:t>
             </a:r>
             <a:endParaRPr lang="en-US" sz="2800" dirty="0"/>
           </a:p>
@@ -27282,7 +27533,7 @@
         </p:nvSpPr>
         <p:spPr>
           <a:xfrm>
-            <a:off x="2938272" y="2258568"/>
+            <a:off x="2221992" y="2258568"/>
             <a:ext cx="1828800" cy="292608"/>
           </a:xfrm>
           <a:prstGeom prst="rect">
@@ -27291,11 +27542,11 @@
             </a:avLst>
           </a:prstGeom>
           <a:solidFill>
-            <a:srgbClr val="CCFBF1"/>
+            <a:srgbClr val="DDD6FE"/>
           </a:solidFill>
           <a:ln w="19050">
             <a:solidFill>
-              <a:srgbClr val="0D9488"/>
+              <a:srgbClr val="7C3AED"/>
             </a:solidFill>
             <a:prstDash val="solid"/>
           </a:ln>
@@ -27316,7 +27567,7 @@
         </p:nvSpPr>
         <p:spPr>
           <a:xfrm>
-            <a:off x="2938272" y="2258568"/>
+            <a:off x="2221992" y="2258568"/>
             <a:ext cx="1828800" cy="292608"/>
           </a:xfrm>
           <a:prstGeom prst="rect">
@@ -27335,13 +27586,13 @@
             <a:r>
               <a:rPr lang="en-US" sz="1300" b="1" dirty="0">
                 <a:solidFill>
-                  <a:srgbClr val="0F766E"/>
+                  <a:srgbClr val="4C1D95"/>
                 </a:solidFill>
                 <a:latin typeface="Trebuchet MS" pitchFamily="34" charset="0"/>
                 <a:ea typeface="Trebuchet MS" pitchFamily="34" charset="-122"/>
                 <a:cs typeface="Trebuchet MS" pitchFamily="34" charset="-120"/>
               </a:rPr>
-              <a:t>fresh</a:t>
+              <a:t>re</a:t>
             </a:r>
             <a:endParaRPr lang="en-US" sz="1300" dirty="0"/>
           </a:p>
@@ -27355,7 +27606,7 @@
         </p:nvSpPr>
         <p:spPr>
           <a:xfrm>
-            <a:off x="2938272" y="2569464"/>
+            <a:off x="2221992" y="2569464"/>
             <a:ext cx="1828800" cy="201168"/>
           </a:xfrm>
           <a:prstGeom prst="rect">
@@ -27380,7 +27631,7 @@
                 <a:ea typeface="Calibri" pitchFamily="34" charset="-122"/>
                 <a:cs typeface="Calibri" pitchFamily="34" charset="-120"/>
               </a:rPr>
-              <a:t>new, clean, not stale</a:t>
+              <a:t>again</a:t>
             </a:r>
             <a:endParaRPr lang="en-US" sz="850" dirty="0"/>
           </a:p>
@@ -27394,7 +27645,7 @@
         </p:nvSpPr>
         <p:spPr>
           <a:xfrm>
-            <a:off x="5803392" y="2258568"/>
+            <a:off x="4370832" y="2258568"/>
             <a:ext cx="1828800" cy="292608"/>
           </a:xfrm>
           <a:prstGeom prst="rect">
@@ -27403,11 +27654,11 @@
             </a:avLst>
           </a:prstGeom>
           <a:solidFill>
-            <a:srgbClr val="FCE7F3"/>
+            <a:srgbClr val="CCFBF1"/>
           </a:solidFill>
           <a:ln w="19050">
             <a:solidFill>
-              <a:srgbClr val="DB2777"/>
+              <a:srgbClr val="0D9488"/>
             </a:solidFill>
             <a:prstDash val="solid"/>
           </a:ln>
@@ -27428,7 +27679,7 @@
         </p:nvSpPr>
         <p:spPr>
           <a:xfrm>
-            <a:off x="5803392" y="2258568"/>
+            <a:off x="4370832" y="2258568"/>
             <a:ext cx="1828800" cy="292608"/>
           </a:xfrm>
           <a:prstGeom prst="rect">
@@ -27447,13 +27698,13 @@
             <a:r>
               <a:rPr lang="en-US" sz="1300" b="1" dirty="0">
                 <a:solidFill>
-                  <a:srgbClr val="9D174D"/>
+                  <a:srgbClr val="0F766E"/>
                 </a:solidFill>
                 <a:latin typeface="Trebuchet MS" pitchFamily="34" charset="0"/>
                 <a:ea typeface="Trebuchet MS" pitchFamily="34" charset="-122"/>
                 <a:cs typeface="Trebuchet MS" pitchFamily="34" charset="-120"/>
               </a:rPr>
-              <a:t>en</a:t>
+              <a:t>fresh</a:t>
             </a:r>
             <a:endParaRPr lang="en-US" sz="1300" dirty="0"/>
           </a:p>
@@ -27467,7 +27718,7 @@
         </p:nvSpPr>
         <p:spPr>
           <a:xfrm>
-            <a:off x="5803392" y="2569464"/>
+            <a:off x="4370832" y="2569464"/>
             <a:ext cx="1828800" cy="201168"/>
           </a:xfrm>
           <a:prstGeom prst="rect">
@@ -27492,7 +27743,7 @@
                 <a:ea typeface="Calibri" pitchFamily="34" charset="-122"/>
                 <a:cs typeface="Calibri" pitchFamily="34" charset="-120"/>
               </a:rPr>
-              <a:t>to make or become</a:t>
+              <a:t>new; recently made</a:t>
             </a:r>
             <a:endParaRPr lang="en-US" sz="850" dirty="0"/>
           </a:p>
@@ -27501,6 +27752,118 @@
       <p:sp>
         <p:nvSpPr>
           <p:cNvPr id="22" name="Shape 20"/>
+          <p:cNvSpPr/>
+          <p:nvPr/>
+        </p:nvSpPr>
+        <p:spPr>
+          <a:xfrm>
+            <a:off x="6519672" y="2258568"/>
+            <a:ext cx="1828800" cy="292608"/>
+          </a:xfrm>
+          <a:prstGeom prst="rect">
+            <a:avLst>
+              <a:gd name="adj" fmla="val 25000"/>
+            </a:avLst>
+          </a:prstGeom>
+          <a:solidFill>
+            <a:srgbClr val="FCE7F3"/>
+          </a:solidFill>
+          <a:ln w="19050">
+            <a:solidFill>
+              <a:srgbClr val="DB2777"/>
+            </a:solidFill>
+            <a:prstDash val="solid"/>
+          </a:ln>
+          <a:effectLst>
+            <a:outerShdw sx="100000" sy="100000" kx="0" ky="0" algn="bl" rotWithShape="0" blurRad="101600" dist="38100" dir="8100000">
+              <a:srgbClr val="000000">
+                <a:alpha val="12000"/>
+              </a:srgbClr>
+            </a:outerShdw>
+          </a:effectLst>
+        </p:spPr>
+      </p:sp>
+      <p:sp>
+        <p:nvSpPr>
+          <p:cNvPr id="23" name="Text 21"/>
+          <p:cNvSpPr/>
+          <p:nvPr/>
+        </p:nvSpPr>
+        <p:spPr>
+          <a:xfrm>
+            <a:off x="6519672" y="2258568"/>
+            <a:ext cx="1828800" cy="292608"/>
+          </a:xfrm>
+          <a:prstGeom prst="rect">
+            <a:avLst/>
+          </a:prstGeom>
+          <a:noFill/>
+          <a:ln/>
+        </p:spPr>
+        <p:txBody>
+          <a:bodyPr wrap="square" lIns="0" tIns="0" rIns="0" bIns="0" rtlCol="0" anchor="ctr"/>
+          <a:lstStyle/>
+          <a:p>
+            <a:pPr algn="ctr" indent="0" marL="0">
+              <a:buNone/>
+            </a:pPr>
+            <a:r>
+              <a:rPr lang="en-US" sz="1300" b="1" dirty="0">
+                <a:solidFill>
+                  <a:srgbClr val="9D174D"/>
+                </a:solidFill>
+                <a:latin typeface="Trebuchet MS" pitchFamily="34" charset="0"/>
+                <a:ea typeface="Trebuchet MS" pitchFamily="34" charset="-122"/>
+                <a:cs typeface="Trebuchet MS" pitchFamily="34" charset="-120"/>
+              </a:rPr>
+              <a:t>ing</a:t>
+            </a:r>
+            <a:endParaRPr lang="en-US" sz="1300" dirty="0"/>
+          </a:p>
+        </p:txBody>
+      </p:sp>
+      <p:sp>
+        <p:nvSpPr>
+          <p:cNvPr id="24" name="Text 22"/>
+          <p:cNvSpPr/>
+          <p:nvPr/>
+        </p:nvSpPr>
+        <p:spPr>
+          <a:xfrm>
+            <a:off x="6519672" y="2569464"/>
+            <a:ext cx="1828800" cy="201168"/>
+          </a:xfrm>
+          <a:prstGeom prst="rect">
+            <a:avLst/>
+          </a:prstGeom>
+          <a:noFill/>
+          <a:ln/>
+        </p:spPr>
+        <p:txBody>
+          <a:bodyPr wrap="square" lIns="0" tIns="0" rIns="0" bIns="0" rtlCol="0" anchor="t"/>
+          <a:lstStyle/>
+          <a:p>
+            <a:pPr algn="ctr" indent="0" marL="0">
+              <a:buNone/>
+            </a:pPr>
+            <a:r>
+              <a:rPr lang="en-US" sz="850" dirty="0">
+                <a:solidFill>
+                  <a:srgbClr val="475569"/>
+                </a:solidFill>
+                <a:latin typeface="Calibri" pitchFamily="34" charset="0"/>
+                <a:ea typeface="Calibri" pitchFamily="34" charset="-122"/>
+                <a:cs typeface="Calibri" pitchFamily="34" charset="-120"/>
+              </a:rPr>
+              <a:t>happening now</a:t>
+            </a:r>
+            <a:endParaRPr lang="en-US" sz="850" dirty="0"/>
+          </a:p>
+        </p:txBody>
+      </p:sp>
+      <p:sp>
+        <p:nvSpPr>
+          <p:cNvPr id="25" name="Shape 23"/>
           <p:cNvSpPr/>
           <p:nvPr/>
         </p:nvSpPr>
@@ -27527,7 +27890,7 @@
       </p:sp>
       <p:sp>
         <p:nvSpPr>
-          <p:cNvPr id="23" name="Text 21"/>
+          <p:cNvPr id="26" name="Text 24"/>
           <p:cNvSpPr/>
           <p:nvPr/>
         </p:nvSpPr>
@@ -27566,7 +27929,7 @@
       </p:sp>
       <p:sp>
         <p:nvSpPr>
-          <p:cNvPr id="24" name="Shape 22"/>
+          <p:cNvPr id="27" name="Shape 25"/>
           <p:cNvSpPr/>
           <p:nvPr/>
         </p:nvSpPr>
@@ -27593,13 +27956,13 @@
       </p:sp>
       <p:sp>
         <p:nvSpPr>
-          <p:cNvPr id="25" name="Shape 23"/>
-          <p:cNvSpPr/>
-          <p:nvPr/>
-        </p:nvSpPr>
-        <p:spPr>
-          <a:xfrm>
-            <a:off x="2999232" y="3364992"/>
+          <p:cNvPr id="28" name="Shape 26"/>
+          <p:cNvSpPr/>
+          <p:nvPr/>
+        </p:nvSpPr>
+        <p:spPr>
+          <a:xfrm>
+            <a:off x="2313432" y="3364992"/>
             <a:ext cx="1645920" cy="475488"/>
           </a:xfrm>
           <a:prstGeom prst="rect">
@@ -27620,13 +27983,13 @@
       </p:sp>
       <p:sp>
         <p:nvSpPr>
-          <p:cNvPr id="26" name="Text 24"/>
-          <p:cNvSpPr/>
-          <p:nvPr/>
-        </p:nvSpPr>
-        <p:spPr>
-          <a:xfrm>
-            <a:off x="2999232" y="3364992"/>
+          <p:cNvPr id="29" name="Text 27"/>
+          <p:cNvSpPr/>
+          <p:nvPr/>
+        </p:nvSpPr>
+        <p:spPr>
+          <a:xfrm>
+            <a:off x="2313432" y="3364992"/>
             <a:ext cx="1645920" cy="475488"/>
           </a:xfrm>
           <a:prstGeom prst="rect">
@@ -27651,7 +28014,7 @@
                 <a:ea typeface="Trebuchet MS" pitchFamily="34" charset="-122"/>
                 <a:cs typeface="Trebuchet MS" pitchFamily="34" charset="-120"/>
               </a:rPr>
-              <a:t>fresh</a:t>
+              <a:t>re</a:t>
             </a:r>
             <a:endParaRPr lang="en-US" sz="1400" dirty="0"/>
           </a:p>
@@ -27659,14 +28022,14 @@
       </p:sp>
       <p:sp>
         <p:nvSpPr>
-          <p:cNvPr id="27" name="Text 25"/>
-          <p:cNvSpPr/>
-          <p:nvPr/>
-        </p:nvSpPr>
-        <p:spPr>
-          <a:xfrm>
-            <a:off x="4645152" y="3364992"/>
-            <a:ext cx="1097280" cy="475488"/>
+          <p:cNvPr id="30" name="Text 28"/>
+          <p:cNvSpPr/>
+          <p:nvPr/>
+        </p:nvSpPr>
+        <p:spPr>
+          <a:xfrm>
+            <a:off x="3959352" y="3364992"/>
+            <a:ext cx="411480" cy="475488"/>
           </a:xfrm>
           <a:prstGeom prst="rect">
             <a:avLst/>
@@ -27698,13 +28061,13 @@
       </p:sp>
       <p:sp>
         <p:nvSpPr>
-          <p:cNvPr id="28" name="Shape 26"/>
-          <p:cNvSpPr/>
-          <p:nvPr/>
-        </p:nvSpPr>
-        <p:spPr>
-          <a:xfrm>
-            <a:off x="5742432" y="3364992"/>
+          <p:cNvPr id="31" name="Shape 29"/>
+          <p:cNvSpPr/>
+          <p:nvPr/>
+        </p:nvSpPr>
+        <p:spPr>
+          <a:xfrm>
+            <a:off x="4370832" y="3364992"/>
             <a:ext cx="1645920" cy="475488"/>
           </a:xfrm>
           <a:prstGeom prst="rect">
@@ -27725,13 +28088,13 @@
       </p:sp>
       <p:sp>
         <p:nvSpPr>
-          <p:cNvPr id="29" name="Text 27"/>
-          <p:cNvSpPr/>
-          <p:nvPr/>
-        </p:nvSpPr>
-        <p:spPr>
-          <a:xfrm>
-            <a:off x="5742432" y="3364992"/>
+          <p:cNvPr id="32" name="Text 30"/>
+          <p:cNvSpPr/>
+          <p:nvPr/>
+        </p:nvSpPr>
+        <p:spPr>
+          <a:xfrm>
+            <a:off x="4370832" y="3364992"/>
             <a:ext cx="1645920" cy="475488"/>
           </a:xfrm>
           <a:prstGeom prst="rect">
@@ -27756,7 +28119,7 @@
                 <a:ea typeface="Trebuchet MS" pitchFamily="34" charset="-122"/>
                 <a:cs typeface="Trebuchet MS" pitchFamily="34" charset="-120"/>
               </a:rPr>
-              <a:t>en</a:t>
+              <a:t>fresh</a:t>
             </a:r>
             <a:endParaRPr lang="en-US" sz="1400" dirty="0"/>
           </a:p>
@@ -27764,7 +28127,112 @@
       </p:sp>
       <p:sp>
         <p:nvSpPr>
-          <p:cNvPr id="30" name="Shape 28"/>
+          <p:cNvPr id="33" name="Text 31"/>
+          <p:cNvSpPr/>
+          <p:nvPr/>
+        </p:nvSpPr>
+        <p:spPr>
+          <a:xfrm>
+            <a:off x="6016752" y="3364992"/>
+            <a:ext cx="411480" cy="475488"/>
+          </a:xfrm>
+          <a:prstGeom prst="rect">
+            <a:avLst/>
+          </a:prstGeom>
+          <a:noFill/>
+          <a:ln/>
+        </p:spPr>
+        <p:txBody>
+          <a:bodyPr wrap="square" lIns="0" tIns="0" rIns="0" bIns="0" rtlCol="0" anchor="ctr"/>
+          <a:lstStyle/>
+          <a:p>
+            <a:pPr algn="ctr" indent="0" marL="0">
+              <a:buNone/>
+            </a:pPr>
+            <a:r>
+              <a:rPr lang="en-US" sz="1600" b="1" dirty="0">
+                <a:solidFill>
+                  <a:srgbClr val="0D9488"/>
+                </a:solidFill>
+                <a:latin typeface="Trebuchet MS" pitchFamily="34" charset="0"/>
+                <a:ea typeface="Trebuchet MS" pitchFamily="34" charset="-122"/>
+                <a:cs typeface="Trebuchet MS" pitchFamily="34" charset="-120"/>
+              </a:rPr>
+              <a:t>·</a:t>
+            </a:r>
+            <a:endParaRPr lang="en-US" sz="1600" dirty="0"/>
+          </a:p>
+        </p:txBody>
+      </p:sp>
+      <p:sp>
+        <p:nvSpPr>
+          <p:cNvPr id="34" name="Shape 32"/>
+          <p:cNvSpPr/>
+          <p:nvPr/>
+        </p:nvSpPr>
+        <p:spPr>
+          <a:xfrm>
+            <a:off x="6428232" y="3364992"/>
+            <a:ext cx="1645920" cy="475488"/>
+          </a:xfrm>
+          <a:prstGeom prst="rect">
+            <a:avLst>
+              <a:gd name="adj" fmla="val 9615"/>
+            </a:avLst>
+          </a:prstGeom>
+          <a:solidFill>
+            <a:srgbClr val="FFFFFF"/>
+          </a:solidFill>
+          <a:ln w="12700">
+            <a:solidFill>
+              <a:srgbClr val="0D9488"/>
+            </a:solidFill>
+            <a:prstDash val="solid"/>
+          </a:ln>
+        </p:spPr>
+      </p:sp>
+      <p:sp>
+        <p:nvSpPr>
+          <p:cNvPr id="35" name="Text 33"/>
+          <p:cNvSpPr/>
+          <p:nvPr/>
+        </p:nvSpPr>
+        <p:spPr>
+          <a:xfrm>
+            <a:off x="6428232" y="3364992"/>
+            <a:ext cx="1645920" cy="475488"/>
+          </a:xfrm>
+          <a:prstGeom prst="rect">
+            <a:avLst/>
+          </a:prstGeom>
+          <a:noFill/>
+          <a:ln/>
+        </p:spPr>
+        <p:txBody>
+          <a:bodyPr wrap="square" lIns="0" tIns="0" rIns="0" bIns="0" rtlCol="0" anchor="ctr"/>
+          <a:lstStyle/>
+          <a:p>
+            <a:pPr algn="ctr" indent="0" marL="0">
+              <a:buNone/>
+            </a:pPr>
+            <a:r>
+              <a:rPr lang="en-US" sz="1400" b="1" dirty="0">
+                <a:solidFill>
+                  <a:srgbClr val="0D9488"/>
+                </a:solidFill>
+                <a:latin typeface="Trebuchet MS" pitchFamily="34" charset="0"/>
+                <a:ea typeface="Trebuchet MS" pitchFamily="34" charset="-122"/>
+                <a:cs typeface="Trebuchet MS" pitchFamily="34" charset="-120"/>
+              </a:rPr>
+              <a:t>ing</a:t>
+            </a:r>
+            <a:endParaRPr lang="en-US" sz="1400" dirty="0"/>
+          </a:p>
+        </p:txBody>
+      </p:sp>
+      <p:sp>
+        <p:nvSpPr>
+          <p:cNvPr id="36" name="Shape 34"/>
           <p:cNvSpPr/>
           <p:nvPr/>
         </p:nvSpPr>
@@ -27791,7 +28259,7 @@
       </p:sp>
       <p:sp>
         <p:nvSpPr>
-          <p:cNvPr id="31" name="Text 29"/>
+          <p:cNvPr id="37" name="Text 35"/>
           <p:cNvSpPr/>
           <p:nvPr/>
         </p:nvSpPr>
@@ -27830,7 +28298,7 @@
       </p:sp>
       <p:sp>
         <p:nvSpPr>
-          <p:cNvPr id="32" name="Shape 30"/>
+          <p:cNvPr id="38" name="Shape 36"/>
           <p:cNvSpPr/>
           <p:nvPr/>
         </p:nvSpPr>
@@ -27857,13 +28325,13 @@
       </p:sp>
       <p:sp>
         <p:nvSpPr>
-          <p:cNvPr id="33" name="Shape 31"/>
-          <p:cNvSpPr/>
-          <p:nvPr/>
-        </p:nvSpPr>
-        <p:spPr>
-          <a:xfrm>
-            <a:off x="2254649" y="4169664"/>
+          <p:cNvPr id="39" name="Shape 37"/>
+          <p:cNvSpPr/>
+          <p:nvPr/>
+        </p:nvSpPr>
+        <p:spPr>
+          <a:xfrm>
+            <a:off x="2023872" y="4169664"/>
             <a:ext cx="685800" cy="475488"/>
           </a:xfrm>
           <a:prstGeom prst="rect">
@@ -27884,13 +28352,13 @@
       </p:sp>
       <p:sp>
         <p:nvSpPr>
-          <p:cNvPr id="34" name="Text 32"/>
-          <p:cNvSpPr/>
-          <p:nvPr/>
-        </p:nvSpPr>
-        <p:spPr>
-          <a:xfrm>
-            <a:off x="2254649" y="4169664"/>
+          <p:cNvPr id="40" name="Text 38"/>
+          <p:cNvSpPr/>
+          <p:nvPr/>
+        </p:nvSpPr>
+        <p:spPr>
+          <a:xfrm>
+            <a:off x="2023872" y="4169664"/>
             <a:ext cx="685800" cy="475488"/>
           </a:xfrm>
           <a:prstGeom prst="rect">
@@ -27915,7 +28383,7 @@
                 <a:ea typeface="Trebuchet MS" pitchFamily="34" charset="-122"/>
                 <a:cs typeface="Trebuchet MS" pitchFamily="34" charset="-120"/>
               </a:rPr>
-              <a:t>f</a:t>
+              <a:t>r</a:t>
             </a:r>
             <a:endParaRPr lang="en-US" sz="900" dirty="0"/>
           </a:p>
@@ -27923,13 +28391,13 @@
       </p:sp>
       <p:sp>
         <p:nvSpPr>
-          <p:cNvPr id="35" name="Shape 33"/>
-          <p:cNvSpPr/>
-          <p:nvPr/>
-        </p:nvSpPr>
-        <p:spPr>
-          <a:xfrm>
-            <a:off x="3293146" y="4169664"/>
+          <p:cNvPr id="41" name="Shape 39"/>
+          <p:cNvSpPr/>
+          <p:nvPr/>
+        </p:nvSpPr>
+        <p:spPr>
+          <a:xfrm>
+            <a:off x="2831592" y="4169664"/>
             <a:ext cx="685800" cy="475488"/>
           </a:xfrm>
           <a:prstGeom prst="rect">
@@ -27950,13 +28418,13 @@
       </p:sp>
       <p:sp>
         <p:nvSpPr>
-          <p:cNvPr id="36" name="Text 34"/>
-          <p:cNvSpPr/>
-          <p:nvPr/>
-        </p:nvSpPr>
-        <p:spPr>
-          <a:xfrm>
-            <a:off x="3293146" y="4169664"/>
+          <p:cNvPr id="42" name="Text 40"/>
+          <p:cNvSpPr/>
+          <p:nvPr/>
+        </p:nvSpPr>
+        <p:spPr>
+          <a:xfrm>
+            <a:off x="2831592" y="4169664"/>
             <a:ext cx="685800" cy="475488"/>
           </a:xfrm>
           <a:prstGeom prst="rect">
@@ -27981,7 +28449,7 @@
                 <a:ea typeface="Trebuchet MS" pitchFamily="34" charset="-122"/>
                 <a:cs typeface="Trebuchet MS" pitchFamily="34" charset="-120"/>
               </a:rPr>
-              <a:t>r</a:t>
+              <a:t>e</a:t>
             </a:r>
             <a:endParaRPr lang="en-US" sz="900" dirty="0"/>
           </a:p>
@@ -27989,13 +28457,13 @@
       </p:sp>
       <p:sp>
         <p:nvSpPr>
-          <p:cNvPr id="37" name="Shape 35"/>
-          <p:cNvSpPr/>
-          <p:nvPr/>
-        </p:nvSpPr>
-        <p:spPr>
-          <a:xfrm>
-            <a:off x="4331643" y="4169664"/>
+          <p:cNvPr id="43" name="Shape 41"/>
+          <p:cNvSpPr/>
+          <p:nvPr/>
+        </p:nvSpPr>
+        <p:spPr>
+          <a:xfrm>
+            <a:off x="3639312" y="4169664"/>
             <a:ext cx="685800" cy="475488"/>
           </a:xfrm>
           <a:prstGeom prst="rect">
@@ -28016,13 +28484,13 @@
       </p:sp>
       <p:sp>
         <p:nvSpPr>
-          <p:cNvPr id="38" name="Text 36"/>
-          <p:cNvSpPr/>
-          <p:nvPr/>
-        </p:nvSpPr>
-        <p:spPr>
-          <a:xfrm>
-            <a:off x="4331643" y="4169664"/>
+          <p:cNvPr id="44" name="Text 42"/>
+          <p:cNvSpPr/>
+          <p:nvPr/>
+        </p:nvSpPr>
+        <p:spPr>
+          <a:xfrm>
+            <a:off x="3639312" y="4169664"/>
             <a:ext cx="685800" cy="475488"/>
           </a:xfrm>
           <a:prstGeom prst="rect">
@@ -28047,7 +28515,7 @@
                 <a:ea typeface="Trebuchet MS" pitchFamily="34" charset="-122"/>
                 <a:cs typeface="Trebuchet MS" pitchFamily="34" charset="-120"/>
               </a:rPr>
-              <a:t>e</a:t>
+              <a:t>f</a:t>
             </a:r>
             <a:endParaRPr lang="en-US" sz="900" dirty="0"/>
           </a:p>
@@ -28055,13 +28523,13 @@
       </p:sp>
       <p:sp>
         <p:nvSpPr>
-          <p:cNvPr id="39" name="Shape 37"/>
-          <p:cNvSpPr/>
-          <p:nvPr/>
-        </p:nvSpPr>
-        <p:spPr>
-          <a:xfrm>
-            <a:off x="5370141" y="4169664"/>
+          <p:cNvPr id="45" name="Shape 43"/>
+          <p:cNvSpPr/>
+          <p:nvPr/>
+        </p:nvSpPr>
+        <p:spPr>
+          <a:xfrm>
+            <a:off x="4447032" y="4169664"/>
             <a:ext cx="685800" cy="475488"/>
           </a:xfrm>
           <a:prstGeom prst="rect">
@@ -28082,13 +28550,13 @@
       </p:sp>
       <p:sp>
         <p:nvSpPr>
-          <p:cNvPr id="40" name="Text 38"/>
-          <p:cNvSpPr/>
-          <p:nvPr/>
-        </p:nvSpPr>
-        <p:spPr>
-          <a:xfrm>
-            <a:off x="5370141" y="4169664"/>
+          <p:cNvPr id="46" name="Text 44"/>
+          <p:cNvSpPr/>
+          <p:nvPr/>
+        </p:nvSpPr>
+        <p:spPr>
+          <a:xfrm>
+            <a:off x="4447032" y="4169664"/>
             <a:ext cx="685800" cy="475488"/>
           </a:xfrm>
           <a:prstGeom prst="rect">
@@ -28113,7 +28581,7 @@
                 <a:ea typeface="Trebuchet MS" pitchFamily="34" charset="-122"/>
                 <a:cs typeface="Trebuchet MS" pitchFamily="34" charset="-120"/>
               </a:rPr>
-              <a:t>sh</a:t>
+              <a:t>r</a:t>
             </a:r>
             <a:endParaRPr lang="en-US" sz="900" dirty="0"/>
           </a:p>
@@ -28121,13 +28589,13 @@
       </p:sp>
       <p:sp>
         <p:nvSpPr>
-          <p:cNvPr id="41" name="Shape 39"/>
-          <p:cNvSpPr/>
-          <p:nvPr/>
-        </p:nvSpPr>
-        <p:spPr>
-          <a:xfrm>
-            <a:off x="6408638" y="4169664"/>
+          <p:cNvPr id="47" name="Shape 45"/>
+          <p:cNvSpPr/>
+          <p:nvPr/>
+        </p:nvSpPr>
+        <p:spPr>
+          <a:xfrm>
+            <a:off x="5254752" y="4169664"/>
             <a:ext cx="685800" cy="475488"/>
           </a:xfrm>
           <a:prstGeom prst="rect">
@@ -28148,13 +28616,13 @@
       </p:sp>
       <p:sp>
         <p:nvSpPr>
-          <p:cNvPr id="42" name="Text 40"/>
-          <p:cNvSpPr/>
-          <p:nvPr/>
-        </p:nvSpPr>
-        <p:spPr>
-          <a:xfrm>
-            <a:off x="6408638" y="4169664"/>
+          <p:cNvPr id="48" name="Text 46"/>
+          <p:cNvSpPr/>
+          <p:nvPr/>
+        </p:nvSpPr>
+        <p:spPr>
+          <a:xfrm>
+            <a:off x="5254752" y="4169664"/>
             <a:ext cx="685800" cy="475488"/>
           </a:xfrm>
           <a:prstGeom prst="rect">
@@ -28187,13 +28655,13 @@
       </p:sp>
       <p:sp>
         <p:nvSpPr>
-          <p:cNvPr id="43" name="Shape 41"/>
-          <p:cNvSpPr/>
-          <p:nvPr/>
-        </p:nvSpPr>
-        <p:spPr>
-          <a:xfrm>
-            <a:off x="7447135" y="4169664"/>
+          <p:cNvPr id="49" name="Shape 47"/>
+          <p:cNvSpPr/>
+          <p:nvPr/>
+        </p:nvSpPr>
+        <p:spPr>
+          <a:xfrm>
+            <a:off x="6062472" y="4169664"/>
             <a:ext cx="685800" cy="475488"/>
           </a:xfrm>
           <a:prstGeom prst="rect">
@@ -28214,13 +28682,13 @@
       </p:sp>
       <p:sp>
         <p:nvSpPr>
-          <p:cNvPr id="44" name="Text 42"/>
-          <p:cNvSpPr/>
-          <p:nvPr/>
-        </p:nvSpPr>
-        <p:spPr>
-          <a:xfrm>
-            <a:off x="7447135" y="4169664"/>
+          <p:cNvPr id="50" name="Text 48"/>
+          <p:cNvSpPr/>
+          <p:nvPr/>
+        </p:nvSpPr>
+        <p:spPr>
+          <a:xfrm>
+            <a:off x="6062472" y="4169664"/>
             <a:ext cx="685800" cy="475488"/>
           </a:xfrm>
           <a:prstGeom prst="rect">
@@ -28245,7 +28713,139 @@
                 <a:ea typeface="Trebuchet MS" pitchFamily="34" charset="-122"/>
                 <a:cs typeface="Trebuchet MS" pitchFamily="34" charset="-120"/>
               </a:rPr>
-              <a:t>n</a:t>
+              <a:t>sh</a:t>
+            </a:r>
+            <a:endParaRPr lang="en-US" sz="900" dirty="0"/>
+          </a:p>
+        </p:txBody>
+      </p:sp>
+      <p:sp>
+        <p:nvSpPr>
+          <p:cNvPr id="51" name="Shape 49"/>
+          <p:cNvSpPr/>
+          <p:nvPr/>
+        </p:nvSpPr>
+        <p:spPr>
+          <a:xfrm>
+            <a:off x="6870192" y="4169664"/>
+            <a:ext cx="685800" cy="475488"/>
+          </a:xfrm>
+          <a:prstGeom prst="rect">
+            <a:avLst>
+              <a:gd name="adj" fmla="val 7692"/>
+            </a:avLst>
+          </a:prstGeom>
+          <a:solidFill>
+            <a:srgbClr val="FFFFFF"/>
+          </a:solidFill>
+          <a:ln w="12700">
+            <a:solidFill>
+              <a:srgbClr val="DB2777"/>
+            </a:solidFill>
+            <a:prstDash val="solid"/>
+          </a:ln>
+        </p:spPr>
+      </p:sp>
+      <p:sp>
+        <p:nvSpPr>
+          <p:cNvPr id="52" name="Text 50"/>
+          <p:cNvSpPr/>
+          <p:nvPr/>
+        </p:nvSpPr>
+        <p:spPr>
+          <a:xfrm>
+            <a:off x="6870192" y="4169664"/>
+            <a:ext cx="685800" cy="475488"/>
+          </a:xfrm>
+          <a:prstGeom prst="rect">
+            <a:avLst/>
+          </a:prstGeom>
+          <a:noFill/>
+          <a:ln/>
+        </p:spPr>
+        <p:txBody>
+          <a:bodyPr wrap="square" lIns="0" tIns="0" rIns="0" bIns="0" rtlCol="0" anchor="ctr"/>
+          <a:lstStyle/>
+          <a:p>
+            <a:pPr algn="ctr" indent="0" marL="0">
+              <a:buNone/>
+            </a:pPr>
+            <a:r>
+              <a:rPr lang="en-US" sz="900" b="1" dirty="0">
+                <a:solidFill>
+                  <a:srgbClr val="9D174D"/>
+                </a:solidFill>
+                <a:latin typeface="Trebuchet MS" pitchFamily="34" charset="0"/>
+                <a:ea typeface="Trebuchet MS" pitchFamily="34" charset="-122"/>
+                <a:cs typeface="Trebuchet MS" pitchFamily="34" charset="-120"/>
+              </a:rPr>
+              <a:t>i</a:t>
+            </a:r>
+            <a:endParaRPr lang="en-US" sz="900" dirty="0"/>
+          </a:p>
+        </p:txBody>
+      </p:sp>
+      <p:sp>
+        <p:nvSpPr>
+          <p:cNvPr id="53" name="Shape 51"/>
+          <p:cNvSpPr/>
+          <p:nvPr/>
+        </p:nvSpPr>
+        <p:spPr>
+          <a:xfrm>
+            <a:off x="7677912" y="4169664"/>
+            <a:ext cx="685800" cy="475488"/>
+          </a:xfrm>
+          <a:prstGeom prst="rect">
+            <a:avLst>
+              <a:gd name="adj" fmla="val 7692"/>
+            </a:avLst>
+          </a:prstGeom>
+          <a:solidFill>
+            <a:srgbClr val="FFFFFF"/>
+          </a:solidFill>
+          <a:ln w="12700">
+            <a:solidFill>
+              <a:srgbClr val="DB2777"/>
+            </a:solidFill>
+            <a:prstDash val="solid"/>
+          </a:ln>
+        </p:spPr>
+      </p:sp>
+      <p:sp>
+        <p:nvSpPr>
+          <p:cNvPr id="54" name="Text 52"/>
+          <p:cNvSpPr/>
+          <p:nvPr/>
+        </p:nvSpPr>
+        <p:spPr>
+          <a:xfrm>
+            <a:off x="7677912" y="4169664"/>
+            <a:ext cx="685800" cy="475488"/>
+          </a:xfrm>
+          <a:prstGeom prst="rect">
+            <a:avLst/>
+          </a:prstGeom>
+          <a:noFill/>
+          <a:ln/>
+        </p:spPr>
+        <p:txBody>
+          <a:bodyPr wrap="square" lIns="0" tIns="0" rIns="0" bIns="0" rtlCol="0" anchor="ctr"/>
+          <a:lstStyle/>
+          <a:p>
+            <a:pPr algn="ctr" indent="0" marL="0">
+              <a:buNone/>
+            </a:pPr>
+            <a:r>
+              <a:rPr lang="en-US" sz="900" b="1" dirty="0">
+                <a:solidFill>
+                  <a:srgbClr val="9D174D"/>
+                </a:solidFill>
+                <a:latin typeface="Trebuchet MS" pitchFamily="34" charset="0"/>
+                <a:ea typeface="Trebuchet MS" pitchFamily="34" charset="-122"/>
+                <a:cs typeface="Trebuchet MS" pitchFamily="34" charset="-120"/>
+              </a:rPr>
+              <a:t>ng</a:t>
             </a:r>
             <a:endParaRPr lang="en-US" sz="900" dirty="0"/>
           </a:p>
@@ -28537,7 +29137,7 @@
                 <a:ea typeface="Calibri" pitchFamily="34" charset="-122"/>
                 <a:cs typeface="Calibri" pitchFamily="34" charset="-120"/>
               </a:rPr>
-              <a:t>Word Labs  •  wordlabs.app  •  Root: 'fresh' = new, clean, not stale</a:t>
+              <a:t>Word Labs  •  wordlabs.app  •  Root: 'fresh' = new; recently made</a:t>
             </a:r>
             <a:endParaRPr lang="en-US" sz="800" dirty="0"/>
           </a:p>
@@ -28676,7 +29276,7 @@
                 <a:ea typeface="Trebuchet MS" pitchFamily="34" charset="-122"/>
                 <a:cs typeface="Trebuchet MS" pitchFamily="34" charset="-120"/>
               </a:rPr>
-              <a:t>freshly</a:t>
+              <a:t>refreshment</a:t>
             </a:r>
             <a:endParaRPr lang="en-US" sz="2800" dirty="0"/>
           </a:p>
@@ -29364,7 +29964,7 @@
                 <a:ea typeface="Calibri" pitchFamily="34" charset="-122"/>
                 <a:cs typeface="Calibri" pitchFamily="34" charset="-120"/>
               </a:rPr>
-              <a:t>Word Labs  •  wordlabs.app  •  Root: 'fresh' = new, clean, not stale</a:t>
+              <a:t>Word Labs  •  wordlabs.app  •  Root: 'fresh' = new; recently made</a:t>
             </a:r>
             <a:endParaRPr lang="en-US" sz="800" dirty="0"/>
           </a:p>
@@ -29503,7 +30103,7 @@
                 <a:ea typeface="Trebuchet MS" pitchFamily="34" charset="-122"/>
                 <a:cs typeface="Trebuchet MS" pitchFamily="34" charset="-120"/>
               </a:rPr>
-              <a:t>freshly</a:t>
+              <a:t>refreshment</a:t>
             </a:r>
             <a:endParaRPr lang="en-US" sz="2800" dirty="0"/>
           </a:p>
@@ -29583,7 +30183,7 @@
         </p:nvSpPr>
         <p:spPr>
           <a:xfrm>
-            <a:off x="2938272" y="2258568"/>
+            <a:off x="2221992" y="2258568"/>
             <a:ext cx="1828800" cy="292608"/>
           </a:xfrm>
           <a:prstGeom prst="rect">
@@ -29592,11 +30192,11 @@
             </a:avLst>
           </a:prstGeom>
           <a:solidFill>
-            <a:srgbClr val="CCFBF1"/>
+            <a:srgbClr val="DDD6FE"/>
           </a:solidFill>
           <a:ln w="19050">
             <a:solidFill>
-              <a:srgbClr val="0D9488"/>
+              <a:srgbClr val="7C3AED"/>
             </a:solidFill>
             <a:prstDash val="solid"/>
           </a:ln>
@@ -29617,7 +30217,7 @@
         </p:nvSpPr>
         <p:spPr>
           <a:xfrm>
-            <a:off x="2938272" y="2258568"/>
+            <a:off x="2221992" y="2258568"/>
             <a:ext cx="1828800" cy="292608"/>
           </a:xfrm>
           <a:prstGeom prst="rect">
@@ -29636,13 +30236,13 @@
             <a:r>
               <a:rPr lang="en-US" sz="1300" b="1" dirty="0">
                 <a:solidFill>
-                  <a:srgbClr val="0F766E"/>
+                  <a:srgbClr val="4C1D95"/>
                 </a:solidFill>
                 <a:latin typeface="Trebuchet MS" pitchFamily="34" charset="0"/>
                 <a:ea typeface="Trebuchet MS" pitchFamily="34" charset="-122"/>
                 <a:cs typeface="Trebuchet MS" pitchFamily="34" charset="-120"/>
               </a:rPr>
-              <a:t>fresh</a:t>
+              <a:t>re</a:t>
             </a:r>
             <a:endParaRPr lang="en-US" sz="1300" dirty="0"/>
           </a:p>
@@ -29656,7 +30256,7 @@
         </p:nvSpPr>
         <p:spPr>
           <a:xfrm>
-            <a:off x="2938272" y="2569464"/>
+            <a:off x="2221992" y="2569464"/>
             <a:ext cx="1828800" cy="201168"/>
           </a:xfrm>
           <a:prstGeom prst="rect">
@@ -29681,7 +30281,7 @@
                 <a:ea typeface="Calibri" pitchFamily="34" charset="-122"/>
                 <a:cs typeface="Calibri" pitchFamily="34" charset="-120"/>
               </a:rPr>
-              <a:t>new, clean, not stale</a:t>
+              <a:t>again</a:t>
             </a:r>
             <a:endParaRPr lang="en-US" sz="850" dirty="0"/>
           </a:p>
@@ -29695,7 +30295,7 @@
         </p:nvSpPr>
         <p:spPr>
           <a:xfrm>
-            <a:off x="5803392" y="2258568"/>
+            <a:off x="4370832" y="2258568"/>
             <a:ext cx="1828800" cy="292608"/>
           </a:xfrm>
           <a:prstGeom prst="rect">
@@ -29704,11 +30304,11 @@
             </a:avLst>
           </a:prstGeom>
           <a:solidFill>
-            <a:srgbClr val="FCE7F3"/>
+            <a:srgbClr val="CCFBF1"/>
           </a:solidFill>
           <a:ln w="19050">
             <a:solidFill>
-              <a:srgbClr val="DB2777"/>
+              <a:srgbClr val="0D9488"/>
             </a:solidFill>
             <a:prstDash val="solid"/>
           </a:ln>
@@ -29729,7 +30329,7 @@
         </p:nvSpPr>
         <p:spPr>
           <a:xfrm>
-            <a:off x="5803392" y="2258568"/>
+            <a:off x="4370832" y="2258568"/>
             <a:ext cx="1828800" cy="292608"/>
           </a:xfrm>
           <a:prstGeom prst="rect">
@@ -29748,13 +30348,13 @@
             <a:r>
               <a:rPr lang="en-US" sz="1300" b="1" dirty="0">
                 <a:solidFill>
-                  <a:srgbClr val="9D174D"/>
+                  <a:srgbClr val="0F766E"/>
                 </a:solidFill>
                 <a:latin typeface="Trebuchet MS" pitchFamily="34" charset="0"/>
                 <a:ea typeface="Trebuchet MS" pitchFamily="34" charset="-122"/>
                 <a:cs typeface="Trebuchet MS" pitchFamily="34" charset="-120"/>
               </a:rPr>
-              <a:t>ly</a:t>
+              <a:t>fresh</a:t>
             </a:r>
             <a:endParaRPr lang="en-US" sz="1300" dirty="0"/>
           </a:p>
@@ -29768,7 +30368,7 @@
         </p:nvSpPr>
         <p:spPr>
           <a:xfrm>
-            <a:off x="5803392" y="2569464"/>
+            <a:off x="4370832" y="2569464"/>
             <a:ext cx="1828800" cy="201168"/>
           </a:xfrm>
           <a:prstGeom prst="rect">
@@ -29793,7 +30393,7 @@
                 <a:ea typeface="Calibri" pitchFamily="34" charset="-122"/>
                 <a:cs typeface="Calibri" pitchFamily="34" charset="-120"/>
               </a:rPr>
-              <a:t>in a certain way</a:t>
+              <a:t>new; recently made</a:t>
             </a:r>
             <a:endParaRPr lang="en-US" sz="850" dirty="0"/>
           </a:p>
@@ -29802,6 +30402,118 @@
       <p:sp>
         <p:nvSpPr>
           <p:cNvPr id="22" name="Shape 20"/>
+          <p:cNvSpPr/>
+          <p:nvPr/>
+        </p:nvSpPr>
+        <p:spPr>
+          <a:xfrm>
+            <a:off x="6519672" y="2258568"/>
+            <a:ext cx="1828800" cy="292608"/>
+          </a:xfrm>
+          <a:prstGeom prst="rect">
+            <a:avLst>
+              <a:gd name="adj" fmla="val 25000"/>
+            </a:avLst>
+          </a:prstGeom>
+          <a:solidFill>
+            <a:srgbClr val="FCE7F3"/>
+          </a:solidFill>
+          <a:ln w="19050">
+            <a:solidFill>
+              <a:srgbClr val="DB2777"/>
+            </a:solidFill>
+            <a:prstDash val="solid"/>
+          </a:ln>
+          <a:effectLst>
+            <a:outerShdw sx="100000" sy="100000" kx="0" ky="0" algn="bl" rotWithShape="0" blurRad="101600" dist="38100" dir="8100000">
+              <a:srgbClr val="000000">
+                <a:alpha val="12000"/>
+              </a:srgbClr>
+            </a:outerShdw>
+          </a:effectLst>
+        </p:spPr>
+      </p:sp>
+      <p:sp>
+        <p:nvSpPr>
+          <p:cNvPr id="23" name="Text 21"/>
+          <p:cNvSpPr/>
+          <p:nvPr/>
+        </p:nvSpPr>
+        <p:spPr>
+          <a:xfrm>
+            <a:off x="6519672" y="2258568"/>
+            <a:ext cx="1828800" cy="292608"/>
+          </a:xfrm>
+          <a:prstGeom prst="rect">
+            <a:avLst/>
+          </a:prstGeom>
+          <a:noFill/>
+          <a:ln/>
+        </p:spPr>
+        <p:txBody>
+          <a:bodyPr wrap="square" lIns="0" tIns="0" rIns="0" bIns="0" rtlCol="0" anchor="ctr"/>
+          <a:lstStyle/>
+          <a:p>
+            <a:pPr algn="ctr" indent="0" marL="0">
+              <a:buNone/>
+            </a:pPr>
+            <a:r>
+              <a:rPr lang="en-US" sz="1300" b="1" dirty="0">
+                <a:solidFill>
+                  <a:srgbClr val="9D174D"/>
+                </a:solidFill>
+                <a:latin typeface="Trebuchet MS" pitchFamily="34" charset="0"/>
+                <a:ea typeface="Trebuchet MS" pitchFamily="34" charset="-122"/>
+                <a:cs typeface="Trebuchet MS" pitchFamily="34" charset="-120"/>
+              </a:rPr>
+              <a:t>ment</a:t>
+            </a:r>
+            <a:endParaRPr lang="en-US" sz="1300" dirty="0"/>
+          </a:p>
+        </p:txBody>
+      </p:sp>
+      <p:sp>
+        <p:nvSpPr>
+          <p:cNvPr id="24" name="Text 22"/>
+          <p:cNvSpPr/>
+          <p:nvPr/>
+        </p:nvSpPr>
+        <p:spPr>
+          <a:xfrm>
+            <a:off x="6519672" y="2569464"/>
+            <a:ext cx="1828800" cy="201168"/>
+          </a:xfrm>
+          <a:prstGeom prst="rect">
+            <a:avLst/>
+          </a:prstGeom>
+          <a:noFill/>
+          <a:ln/>
+        </p:spPr>
+        <p:txBody>
+          <a:bodyPr wrap="square" lIns="0" tIns="0" rIns="0" bIns="0" rtlCol="0" anchor="t"/>
+          <a:lstStyle/>
+          <a:p>
+            <a:pPr algn="ctr" indent="0" marL="0">
+              <a:buNone/>
+            </a:pPr>
+            <a:r>
+              <a:rPr lang="en-US" sz="850" dirty="0">
+                <a:solidFill>
+                  <a:srgbClr val="475569"/>
+                </a:solidFill>
+                <a:latin typeface="Calibri" pitchFamily="34" charset="0"/>
+                <a:ea typeface="Calibri" pitchFamily="34" charset="-122"/>
+                <a:cs typeface="Calibri" pitchFamily="34" charset="-120"/>
+              </a:rPr>
+              <a:t>result of action</a:t>
+            </a:r>
+            <a:endParaRPr lang="en-US" sz="850" dirty="0"/>
+          </a:p>
+        </p:txBody>
+      </p:sp>
+      <p:sp>
+        <p:nvSpPr>
+          <p:cNvPr id="25" name="Shape 23"/>
           <p:cNvSpPr/>
           <p:nvPr/>
         </p:nvSpPr>
@@ -29828,7 +30540,7 @@
       </p:sp>
       <p:sp>
         <p:nvSpPr>
-          <p:cNvPr id="23" name="Text 21"/>
+          <p:cNvPr id="26" name="Text 24"/>
           <p:cNvSpPr/>
           <p:nvPr/>
         </p:nvSpPr>
@@ -29867,7 +30579,7 @@
       </p:sp>
       <p:sp>
         <p:nvSpPr>
-          <p:cNvPr id="24" name="Shape 22"/>
+          <p:cNvPr id="27" name="Shape 25"/>
           <p:cNvSpPr/>
           <p:nvPr/>
         </p:nvSpPr>
@@ -29894,7 +30606,7 @@
       </p:sp>
       <p:sp>
         <p:nvSpPr>
-          <p:cNvPr id="25" name="Text 23"/>
+          <p:cNvPr id="28" name="Text 26"/>
           <p:cNvSpPr/>
           <p:nvPr/>
         </p:nvSpPr>
@@ -29933,7 +30645,7 @@
       </p:sp>
       <p:sp>
         <p:nvSpPr>
-          <p:cNvPr id="26" name="Shape 24"/>
+          <p:cNvPr id="29" name="Shape 27"/>
           <p:cNvSpPr/>
           <p:nvPr/>
         </p:nvSpPr>
@@ -29960,7 +30672,7 @@
       </p:sp>
       <p:sp>
         <p:nvSpPr>
-          <p:cNvPr id="27" name="Text 25"/>
+          <p:cNvPr id="30" name="Text 28"/>
           <p:cNvSpPr/>
           <p:nvPr/>
         </p:nvSpPr>
@@ -29999,7 +30711,7 @@
       </p:sp>
       <p:sp>
         <p:nvSpPr>
-          <p:cNvPr id="28" name="Shape 26"/>
+          <p:cNvPr id="31" name="Shape 29"/>
           <p:cNvSpPr/>
           <p:nvPr/>
         </p:nvSpPr>
@@ -30026,7 +30738,7 @@
       </p:sp>
       <p:sp>
         <p:nvSpPr>
-          <p:cNvPr id="29" name="Text 27"/>
+          <p:cNvPr id="32" name="Text 30"/>
           <p:cNvSpPr/>
           <p:nvPr/>
         </p:nvSpPr>
@@ -30349,7 +31061,7 @@
                 <a:ea typeface="Calibri" pitchFamily="34" charset="-122"/>
                 <a:cs typeface="Calibri" pitchFamily="34" charset="-120"/>
               </a:rPr>
-              <a:t>Word Labs  •  wordlabs.app  •  Root: 'fresh' = new, clean, not stale</a:t>
+              <a:t>Word Labs  •  wordlabs.app  •  Root: 'fresh' = new; recently made</a:t>
             </a:r>
             <a:endParaRPr lang="en-US" sz="800" dirty="0"/>
           </a:p>
@@ -30488,7 +31200,7 @@
                 <a:ea typeface="Trebuchet MS" pitchFamily="34" charset="-122"/>
                 <a:cs typeface="Trebuchet MS" pitchFamily="34" charset="-120"/>
               </a:rPr>
-              <a:t>freshly</a:t>
+              <a:t>refreshment</a:t>
             </a:r>
             <a:endParaRPr lang="en-US" sz="2800" dirty="0"/>
           </a:p>
@@ -30568,7 +31280,7 @@
         </p:nvSpPr>
         <p:spPr>
           <a:xfrm>
-            <a:off x="2938272" y="2258568"/>
+            <a:off x="2221992" y="2258568"/>
             <a:ext cx="1828800" cy="292608"/>
           </a:xfrm>
           <a:prstGeom prst="rect">
@@ -30577,11 +31289,11 @@
             </a:avLst>
           </a:prstGeom>
           <a:solidFill>
-            <a:srgbClr val="CCFBF1"/>
+            <a:srgbClr val="DDD6FE"/>
           </a:solidFill>
           <a:ln w="19050">
             <a:solidFill>
-              <a:srgbClr val="0D9488"/>
+              <a:srgbClr val="7C3AED"/>
             </a:solidFill>
             <a:prstDash val="solid"/>
           </a:ln>
@@ -30602,7 +31314,7 @@
         </p:nvSpPr>
         <p:spPr>
           <a:xfrm>
-            <a:off x="2938272" y="2258568"/>
+            <a:off x="2221992" y="2258568"/>
             <a:ext cx="1828800" cy="292608"/>
           </a:xfrm>
           <a:prstGeom prst="rect">
@@ -30621,13 +31333,13 @@
             <a:r>
               <a:rPr lang="en-US" sz="1300" b="1" dirty="0">
                 <a:solidFill>
-                  <a:srgbClr val="0F766E"/>
+                  <a:srgbClr val="4C1D95"/>
                 </a:solidFill>
                 <a:latin typeface="Trebuchet MS" pitchFamily="34" charset="0"/>
                 <a:ea typeface="Trebuchet MS" pitchFamily="34" charset="-122"/>
                 <a:cs typeface="Trebuchet MS" pitchFamily="34" charset="-120"/>
               </a:rPr>
-              <a:t>fresh</a:t>
+              <a:t>re</a:t>
             </a:r>
             <a:endParaRPr lang="en-US" sz="1300" dirty="0"/>
           </a:p>
@@ -30641,7 +31353,7 @@
         </p:nvSpPr>
         <p:spPr>
           <a:xfrm>
-            <a:off x="2938272" y="2569464"/>
+            <a:off x="2221992" y="2569464"/>
             <a:ext cx="1828800" cy="201168"/>
           </a:xfrm>
           <a:prstGeom prst="rect">
@@ -30666,7 +31378,7 @@
                 <a:ea typeface="Calibri" pitchFamily="34" charset="-122"/>
                 <a:cs typeface="Calibri" pitchFamily="34" charset="-120"/>
               </a:rPr>
-              <a:t>new, clean, not stale</a:t>
+              <a:t>again</a:t>
             </a:r>
             <a:endParaRPr lang="en-US" sz="850" dirty="0"/>
           </a:p>
@@ -30680,7 +31392,7 @@
         </p:nvSpPr>
         <p:spPr>
           <a:xfrm>
-            <a:off x="5803392" y="2258568"/>
+            <a:off x="4370832" y="2258568"/>
             <a:ext cx="1828800" cy="292608"/>
           </a:xfrm>
           <a:prstGeom prst="rect">
@@ -30689,11 +31401,11 @@
             </a:avLst>
           </a:prstGeom>
           <a:solidFill>
-            <a:srgbClr val="FCE7F3"/>
+            <a:srgbClr val="CCFBF1"/>
           </a:solidFill>
           <a:ln w="19050">
             <a:solidFill>
-              <a:srgbClr val="DB2777"/>
+              <a:srgbClr val="0D9488"/>
             </a:solidFill>
             <a:prstDash val="solid"/>
           </a:ln>
@@ -30714,7 +31426,7 @@
         </p:nvSpPr>
         <p:spPr>
           <a:xfrm>
-            <a:off x="5803392" y="2258568"/>
+            <a:off x="4370832" y="2258568"/>
             <a:ext cx="1828800" cy="292608"/>
           </a:xfrm>
           <a:prstGeom prst="rect">
@@ -30733,13 +31445,13 @@
             <a:r>
               <a:rPr lang="en-US" sz="1300" b="1" dirty="0">
                 <a:solidFill>
-                  <a:srgbClr val="9D174D"/>
+                  <a:srgbClr val="0F766E"/>
                 </a:solidFill>
                 <a:latin typeface="Trebuchet MS" pitchFamily="34" charset="0"/>
                 <a:ea typeface="Trebuchet MS" pitchFamily="34" charset="-122"/>
                 <a:cs typeface="Trebuchet MS" pitchFamily="34" charset="-120"/>
               </a:rPr>
-              <a:t>ly</a:t>
+              <a:t>fresh</a:t>
             </a:r>
             <a:endParaRPr lang="en-US" sz="1300" dirty="0"/>
           </a:p>
@@ -30753,7 +31465,7 @@
         </p:nvSpPr>
         <p:spPr>
           <a:xfrm>
-            <a:off x="5803392" y="2569464"/>
+            <a:off x="4370832" y="2569464"/>
             <a:ext cx="1828800" cy="201168"/>
           </a:xfrm>
           <a:prstGeom prst="rect">
@@ -30778,7 +31490,7 @@
                 <a:ea typeface="Calibri" pitchFamily="34" charset="-122"/>
                 <a:cs typeface="Calibri" pitchFamily="34" charset="-120"/>
               </a:rPr>
-              <a:t>in a certain way</a:t>
+              <a:t>new; recently made</a:t>
             </a:r>
             <a:endParaRPr lang="en-US" sz="850" dirty="0"/>
           </a:p>
@@ -30787,6 +31499,118 @@
       <p:sp>
         <p:nvSpPr>
           <p:cNvPr id="22" name="Shape 20"/>
+          <p:cNvSpPr/>
+          <p:nvPr/>
+        </p:nvSpPr>
+        <p:spPr>
+          <a:xfrm>
+            <a:off x="6519672" y="2258568"/>
+            <a:ext cx="1828800" cy="292608"/>
+          </a:xfrm>
+          <a:prstGeom prst="rect">
+            <a:avLst>
+              <a:gd name="adj" fmla="val 25000"/>
+            </a:avLst>
+          </a:prstGeom>
+          <a:solidFill>
+            <a:srgbClr val="FCE7F3"/>
+          </a:solidFill>
+          <a:ln w="19050">
+            <a:solidFill>
+              <a:srgbClr val="DB2777"/>
+            </a:solidFill>
+            <a:prstDash val="solid"/>
+          </a:ln>
+          <a:effectLst>
+            <a:outerShdw sx="100000" sy="100000" kx="0" ky="0" algn="bl" rotWithShape="0" blurRad="101600" dist="38100" dir="8100000">
+              <a:srgbClr val="000000">
+                <a:alpha val="12000"/>
+              </a:srgbClr>
+            </a:outerShdw>
+          </a:effectLst>
+        </p:spPr>
+      </p:sp>
+      <p:sp>
+        <p:nvSpPr>
+          <p:cNvPr id="23" name="Text 21"/>
+          <p:cNvSpPr/>
+          <p:nvPr/>
+        </p:nvSpPr>
+        <p:spPr>
+          <a:xfrm>
+            <a:off x="6519672" y="2258568"/>
+            <a:ext cx="1828800" cy="292608"/>
+          </a:xfrm>
+          <a:prstGeom prst="rect">
+            <a:avLst/>
+          </a:prstGeom>
+          <a:noFill/>
+          <a:ln/>
+        </p:spPr>
+        <p:txBody>
+          <a:bodyPr wrap="square" lIns="0" tIns="0" rIns="0" bIns="0" rtlCol="0" anchor="ctr"/>
+          <a:lstStyle/>
+          <a:p>
+            <a:pPr algn="ctr" indent="0" marL="0">
+              <a:buNone/>
+            </a:pPr>
+            <a:r>
+              <a:rPr lang="en-US" sz="1300" b="1" dirty="0">
+                <a:solidFill>
+                  <a:srgbClr val="9D174D"/>
+                </a:solidFill>
+                <a:latin typeface="Trebuchet MS" pitchFamily="34" charset="0"/>
+                <a:ea typeface="Trebuchet MS" pitchFamily="34" charset="-122"/>
+                <a:cs typeface="Trebuchet MS" pitchFamily="34" charset="-120"/>
+              </a:rPr>
+              <a:t>ment</a:t>
+            </a:r>
+            <a:endParaRPr lang="en-US" sz="1300" dirty="0"/>
+          </a:p>
+        </p:txBody>
+      </p:sp>
+      <p:sp>
+        <p:nvSpPr>
+          <p:cNvPr id="24" name="Text 22"/>
+          <p:cNvSpPr/>
+          <p:nvPr/>
+        </p:nvSpPr>
+        <p:spPr>
+          <a:xfrm>
+            <a:off x="6519672" y="2569464"/>
+            <a:ext cx="1828800" cy="201168"/>
+          </a:xfrm>
+          <a:prstGeom prst="rect">
+            <a:avLst/>
+          </a:prstGeom>
+          <a:noFill/>
+          <a:ln/>
+        </p:spPr>
+        <p:txBody>
+          <a:bodyPr wrap="square" lIns="0" tIns="0" rIns="0" bIns="0" rtlCol="0" anchor="t"/>
+          <a:lstStyle/>
+          <a:p>
+            <a:pPr algn="ctr" indent="0" marL="0">
+              <a:buNone/>
+            </a:pPr>
+            <a:r>
+              <a:rPr lang="en-US" sz="850" dirty="0">
+                <a:solidFill>
+                  <a:srgbClr val="475569"/>
+                </a:solidFill>
+                <a:latin typeface="Calibri" pitchFamily="34" charset="0"/>
+                <a:ea typeface="Calibri" pitchFamily="34" charset="-122"/>
+                <a:cs typeface="Calibri" pitchFamily="34" charset="-120"/>
+              </a:rPr>
+              <a:t>result of action</a:t>
+            </a:r>
+            <a:endParaRPr lang="en-US" sz="850" dirty="0"/>
+          </a:p>
+        </p:txBody>
+      </p:sp>
+      <p:sp>
+        <p:nvSpPr>
+          <p:cNvPr id="25" name="Shape 23"/>
           <p:cNvSpPr/>
           <p:nvPr/>
         </p:nvSpPr>
@@ -30813,7 +31637,7 @@
       </p:sp>
       <p:sp>
         <p:nvSpPr>
-          <p:cNvPr id="23" name="Text 21"/>
+          <p:cNvPr id="26" name="Text 24"/>
           <p:cNvSpPr/>
           <p:nvPr/>
         </p:nvSpPr>
@@ -30852,7 +31676,7 @@
       </p:sp>
       <p:sp>
         <p:nvSpPr>
-          <p:cNvPr id="24" name="Shape 22"/>
+          <p:cNvPr id="27" name="Shape 25"/>
           <p:cNvSpPr/>
           <p:nvPr/>
         </p:nvSpPr>
@@ -30879,13 +31703,13 @@
       </p:sp>
       <p:sp>
         <p:nvSpPr>
-          <p:cNvPr id="25" name="Shape 23"/>
-          <p:cNvSpPr/>
-          <p:nvPr/>
-        </p:nvSpPr>
-        <p:spPr>
-          <a:xfrm>
-            <a:off x="2999232" y="3364992"/>
+          <p:cNvPr id="28" name="Shape 26"/>
+          <p:cNvSpPr/>
+          <p:nvPr/>
+        </p:nvSpPr>
+        <p:spPr>
+          <a:xfrm>
+            <a:off x="2313432" y="3364992"/>
             <a:ext cx="1645920" cy="475488"/>
           </a:xfrm>
           <a:prstGeom prst="rect">
@@ -30906,13 +31730,13 @@
       </p:sp>
       <p:sp>
         <p:nvSpPr>
-          <p:cNvPr id="26" name="Text 24"/>
-          <p:cNvSpPr/>
-          <p:nvPr/>
-        </p:nvSpPr>
-        <p:spPr>
-          <a:xfrm>
-            <a:off x="2999232" y="3364992"/>
+          <p:cNvPr id="29" name="Text 27"/>
+          <p:cNvSpPr/>
+          <p:nvPr/>
+        </p:nvSpPr>
+        <p:spPr>
+          <a:xfrm>
+            <a:off x="2313432" y="3364992"/>
             <a:ext cx="1645920" cy="475488"/>
           </a:xfrm>
           <a:prstGeom prst="rect">
@@ -30937,7 +31761,7 @@
                 <a:ea typeface="Trebuchet MS" pitchFamily="34" charset="-122"/>
                 <a:cs typeface="Trebuchet MS" pitchFamily="34" charset="-120"/>
               </a:rPr>
-              <a:t>fresh</a:t>
+              <a:t>re</a:t>
             </a:r>
             <a:endParaRPr lang="en-US" sz="1400" dirty="0"/>
           </a:p>
@@ -30945,14 +31769,14 @@
       </p:sp>
       <p:sp>
         <p:nvSpPr>
-          <p:cNvPr id="27" name="Text 25"/>
-          <p:cNvSpPr/>
-          <p:nvPr/>
-        </p:nvSpPr>
-        <p:spPr>
-          <a:xfrm>
-            <a:off x="4645152" y="3364992"/>
-            <a:ext cx="1097280" cy="475488"/>
+          <p:cNvPr id="30" name="Text 28"/>
+          <p:cNvSpPr/>
+          <p:nvPr/>
+        </p:nvSpPr>
+        <p:spPr>
+          <a:xfrm>
+            <a:off x="3959352" y="3364992"/>
+            <a:ext cx="411480" cy="475488"/>
           </a:xfrm>
           <a:prstGeom prst="rect">
             <a:avLst/>
@@ -30984,13 +31808,13 @@
       </p:sp>
       <p:sp>
         <p:nvSpPr>
-          <p:cNvPr id="28" name="Shape 26"/>
-          <p:cNvSpPr/>
-          <p:nvPr/>
-        </p:nvSpPr>
-        <p:spPr>
-          <a:xfrm>
-            <a:off x="5742432" y="3364992"/>
+          <p:cNvPr id="31" name="Shape 29"/>
+          <p:cNvSpPr/>
+          <p:nvPr/>
+        </p:nvSpPr>
+        <p:spPr>
+          <a:xfrm>
+            <a:off x="4370832" y="3364992"/>
             <a:ext cx="1645920" cy="475488"/>
           </a:xfrm>
           <a:prstGeom prst="rect">
@@ -31011,13 +31835,13 @@
       </p:sp>
       <p:sp>
         <p:nvSpPr>
-          <p:cNvPr id="29" name="Text 27"/>
-          <p:cNvSpPr/>
-          <p:nvPr/>
-        </p:nvSpPr>
-        <p:spPr>
-          <a:xfrm>
-            <a:off x="5742432" y="3364992"/>
+          <p:cNvPr id="32" name="Text 30"/>
+          <p:cNvSpPr/>
+          <p:nvPr/>
+        </p:nvSpPr>
+        <p:spPr>
+          <a:xfrm>
+            <a:off x="4370832" y="3364992"/>
             <a:ext cx="1645920" cy="475488"/>
           </a:xfrm>
           <a:prstGeom prst="rect">
@@ -31042,7 +31866,7 @@
                 <a:ea typeface="Trebuchet MS" pitchFamily="34" charset="-122"/>
                 <a:cs typeface="Trebuchet MS" pitchFamily="34" charset="-120"/>
               </a:rPr>
-              <a:t>ly</a:t>
+              <a:t>fresh</a:t>
             </a:r>
             <a:endParaRPr lang="en-US" sz="1400" dirty="0"/>
           </a:p>
@@ -31050,7 +31874,112 @@
       </p:sp>
       <p:sp>
         <p:nvSpPr>
-          <p:cNvPr id="30" name="Shape 28"/>
+          <p:cNvPr id="33" name="Text 31"/>
+          <p:cNvSpPr/>
+          <p:nvPr/>
+        </p:nvSpPr>
+        <p:spPr>
+          <a:xfrm>
+            <a:off x="6016752" y="3364992"/>
+            <a:ext cx="411480" cy="475488"/>
+          </a:xfrm>
+          <a:prstGeom prst="rect">
+            <a:avLst/>
+          </a:prstGeom>
+          <a:noFill/>
+          <a:ln/>
+        </p:spPr>
+        <p:txBody>
+          <a:bodyPr wrap="square" lIns="0" tIns="0" rIns="0" bIns="0" rtlCol="0" anchor="ctr"/>
+          <a:lstStyle/>
+          <a:p>
+            <a:pPr algn="ctr" indent="0" marL="0">
+              <a:buNone/>
+            </a:pPr>
+            <a:r>
+              <a:rPr lang="en-US" sz="1600" b="1" dirty="0">
+                <a:solidFill>
+                  <a:srgbClr val="0D9488"/>
+                </a:solidFill>
+                <a:latin typeface="Trebuchet MS" pitchFamily="34" charset="0"/>
+                <a:ea typeface="Trebuchet MS" pitchFamily="34" charset="-122"/>
+                <a:cs typeface="Trebuchet MS" pitchFamily="34" charset="-120"/>
+              </a:rPr>
+              <a:t>·</a:t>
+            </a:r>
+            <a:endParaRPr lang="en-US" sz="1600" dirty="0"/>
+          </a:p>
+        </p:txBody>
+      </p:sp>
+      <p:sp>
+        <p:nvSpPr>
+          <p:cNvPr id="34" name="Shape 32"/>
+          <p:cNvSpPr/>
+          <p:nvPr/>
+        </p:nvSpPr>
+        <p:spPr>
+          <a:xfrm>
+            <a:off x="6428232" y="3364992"/>
+            <a:ext cx="1645920" cy="475488"/>
+          </a:xfrm>
+          <a:prstGeom prst="rect">
+            <a:avLst>
+              <a:gd name="adj" fmla="val 9615"/>
+            </a:avLst>
+          </a:prstGeom>
+          <a:solidFill>
+            <a:srgbClr val="FFFFFF"/>
+          </a:solidFill>
+          <a:ln w="12700">
+            <a:solidFill>
+              <a:srgbClr val="0D9488"/>
+            </a:solidFill>
+            <a:prstDash val="solid"/>
+          </a:ln>
+        </p:spPr>
+      </p:sp>
+      <p:sp>
+        <p:nvSpPr>
+          <p:cNvPr id="35" name="Text 33"/>
+          <p:cNvSpPr/>
+          <p:nvPr/>
+        </p:nvSpPr>
+        <p:spPr>
+          <a:xfrm>
+            <a:off x="6428232" y="3364992"/>
+            <a:ext cx="1645920" cy="475488"/>
+          </a:xfrm>
+          <a:prstGeom prst="rect">
+            <a:avLst/>
+          </a:prstGeom>
+          <a:noFill/>
+          <a:ln/>
+        </p:spPr>
+        <p:txBody>
+          <a:bodyPr wrap="square" lIns="0" tIns="0" rIns="0" bIns="0" rtlCol="0" anchor="ctr"/>
+          <a:lstStyle/>
+          <a:p>
+            <a:pPr algn="ctr" indent="0" marL="0">
+              <a:buNone/>
+            </a:pPr>
+            <a:r>
+              <a:rPr lang="en-US" sz="1400" b="1" dirty="0">
+                <a:solidFill>
+                  <a:srgbClr val="0D9488"/>
+                </a:solidFill>
+                <a:latin typeface="Trebuchet MS" pitchFamily="34" charset="0"/>
+                <a:ea typeface="Trebuchet MS" pitchFamily="34" charset="-122"/>
+                <a:cs typeface="Trebuchet MS" pitchFamily="34" charset="-120"/>
+              </a:rPr>
+              <a:t>ment</a:t>
+            </a:r>
+            <a:endParaRPr lang="en-US" sz="1400" dirty="0"/>
+          </a:p>
+        </p:txBody>
+      </p:sp>
+      <p:sp>
+        <p:nvSpPr>
+          <p:cNvPr id="36" name="Shape 34"/>
           <p:cNvSpPr/>
           <p:nvPr/>
         </p:nvSpPr>
@@ -31077,7 +32006,7 @@
       </p:sp>
       <p:sp>
         <p:nvSpPr>
-          <p:cNvPr id="31" name="Text 29"/>
+          <p:cNvPr id="37" name="Text 35"/>
           <p:cNvSpPr/>
           <p:nvPr/>
         </p:nvSpPr>
@@ -31116,7 +32045,7 @@
       </p:sp>
       <p:sp>
         <p:nvSpPr>
-          <p:cNvPr id="32" name="Shape 30"/>
+          <p:cNvPr id="38" name="Shape 36"/>
           <p:cNvSpPr/>
           <p:nvPr/>
         </p:nvSpPr>
@@ -31143,7 +32072,7 @@
       </p:sp>
       <p:sp>
         <p:nvSpPr>
-          <p:cNvPr id="33" name="Text 31"/>
+          <p:cNvPr id="39" name="Text 37"/>
           <p:cNvSpPr/>
           <p:nvPr/>
         </p:nvSpPr>
@@ -31466,7 +32395,7 @@
                 <a:ea typeface="Calibri" pitchFamily="34" charset="-122"/>
                 <a:cs typeface="Calibri" pitchFamily="34" charset="-120"/>
               </a:rPr>
-              <a:t>Word Labs  •  wordlabs.app  •  Root: 'fresh' = new, clean, not stale</a:t>
+              <a:t>Word Labs  •  wordlabs.app  •  Root: 'fresh' = new; recently made</a:t>
             </a:r>
             <a:endParaRPr lang="en-US" sz="800" dirty="0"/>
           </a:p>
@@ -31605,7 +32534,7 @@
                 <a:ea typeface="Trebuchet MS" pitchFamily="34" charset="-122"/>
                 <a:cs typeface="Trebuchet MS" pitchFamily="34" charset="-120"/>
               </a:rPr>
-              <a:t>freshly</a:t>
+              <a:t>refreshment</a:t>
             </a:r>
             <a:endParaRPr lang="en-US" sz="2800" dirty="0"/>
           </a:p>
@@ -31685,7 +32614,7 @@
         </p:nvSpPr>
         <p:spPr>
           <a:xfrm>
-            <a:off x="2938272" y="2258568"/>
+            <a:off x="2221992" y="2258568"/>
             <a:ext cx="1828800" cy="292608"/>
           </a:xfrm>
           <a:prstGeom prst="rect">
@@ -31694,11 +32623,11 @@
             </a:avLst>
           </a:prstGeom>
           <a:solidFill>
-            <a:srgbClr val="CCFBF1"/>
+            <a:srgbClr val="DDD6FE"/>
           </a:solidFill>
           <a:ln w="19050">
             <a:solidFill>
-              <a:srgbClr val="0D9488"/>
+              <a:srgbClr val="7C3AED"/>
             </a:solidFill>
             <a:prstDash val="solid"/>
           </a:ln>
@@ -31719,7 +32648,7 @@
         </p:nvSpPr>
         <p:spPr>
           <a:xfrm>
-            <a:off x="2938272" y="2258568"/>
+            <a:off x="2221992" y="2258568"/>
             <a:ext cx="1828800" cy="292608"/>
           </a:xfrm>
           <a:prstGeom prst="rect">
@@ -31738,13 +32667,13 @@
             <a:r>
               <a:rPr lang="en-US" sz="1300" b="1" dirty="0">
                 <a:solidFill>
-                  <a:srgbClr val="0F766E"/>
+                  <a:srgbClr val="4C1D95"/>
                 </a:solidFill>
                 <a:latin typeface="Trebuchet MS" pitchFamily="34" charset="0"/>
                 <a:ea typeface="Trebuchet MS" pitchFamily="34" charset="-122"/>
                 <a:cs typeface="Trebuchet MS" pitchFamily="34" charset="-120"/>
               </a:rPr>
-              <a:t>fresh</a:t>
+              <a:t>re</a:t>
             </a:r>
             <a:endParaRPr lang="en-US" sz="1300" dirty="0"/>
           </a:p>
@@ -31758,7 +32687,7 @@
         </p:nvSpPr>
         <p:spPr>
           <a:xfrm>
-            <a:off x="2938272" y="2569464"/>
+            <a:off x="2221992" y="2569464"/>
             <a:ext cx="1828800" cy="201168"/>
           </a:xfrm>
           <a:prstGeom prst="rect">
@@ -31783,7 +32712,7 @@
                 <a:ea typeface="Calibri" pitchFamily="34" charset="-122"/>
                 <a:cs typeface="Calibri" pitchFamily="34" charset="-120"/>
               </a:rPr>
-              <a:t>new, clean, not stale</a:t>
+              <a:t>again</a:t>
             </a:r>
             <a:endParaRPr lang="en-US" sz="850" dirty="0"/>
           </a:p>
@@ -31797,7 +32726,7 @@
         </p:nvSpPr>
         <p:spPr>
           <a:xfrm>
-            <a:off x="5803392" y="2258568"/>
+            <a:off x="4370832" y="2258568"/>
             <a:ext cx="1828800" cy="292608"/>
           </a:xfrm>
           <a:prstGeom prst="rect">
@@ -31806,11 +32735,11 @@
             </a:avLst>
           </a:prstGeom>
           <a:solidFill>
-            <a:srgbClr val="FCE7F3"/>
+            <a:srgbClr val="CCFBF1"/>
           </a:solidFill>
           <a:ln w="19050">
             <a:solidFill>
-              <a:srgbClr val="DB2777"/>
+              <a:srgbClr val="0D9488"/>
             </a:solidFill>
             <a:prstDash val="solid"/>
           </a:ln>
@@ -31831,7 +32760,7 @@
         </p:nvSpPr>
         <p:spPr>
           <a:xfrm>
-            <a:off x="5803392" y="2258568"/>
+            <a:off x="4370832" y="2258568"/>
             <a:ext cx="1828800" cy="292608"/>
           </a:xfrm>
           <a:prstGeom prst="rect">
@@ -31850,13 +32779,13 @@
             <a:r>
               <a:rPr lang="en-US" sz="1300" b="1" dirty="0">
                 <a:solidFill>
-                  <a:srgbClr val="9D174D"/>
+                  <a:srgbClr val="0F766E"/>
                 </a:solidFill>
                 <a:latin typeface="Trebuchet MS" pitchFamily="34" charset="0"/>
                 <a:ea typeface="Trebuchet MS" pitchFamily="34" charset="-122"/>
                 <a:cs typeface="Trebuchet MS" pitchFamily="34" charset="-120"/>
               </a:rPr>
-              <a:t>ly</a:t>
+              <a:t>fresh</a:t>
             </a:r>
             <a:endParaRPr lang="en-US" sz="1300" dirty="0"/>
           </a:p>
@@ -31870,7 +32799,7 @@
         </p:nvSpPr>
         <p:spPr>
           <a:xfrm>
-            <a:off x="5803392" y="2569464"/>
+            <a:off x="4370832" y="2569464"/>
             <a:ext cx="1828800" cy="201168"/>
           </a:xfrm>
           <a:prstGeom prst="rect">
@@ -31895,7 +32824,7 @@
                 <a:ea typeface="Calibri" pitchFamily="34" charset="-122"/>
                 <a:cs typeface="Calibri" pitchFamily="34" charset="-120"/>
               </a:rPr>
-              <a:t>in a certain way</a:t>
+              <a:t>new; recently made</a:t>
             </a:r>
             <a:endParaRPr lang="en-US" sz="850" dirty="0"/>
           </a:p>
@@ -31904,6 +32833,118 @@
       <p:sp>
         <p:nvSpPr>
           <p:cNvPr id="22" name="Shape 20"/>
+          <p:cNvSpPr/>
+          <p:nvPr/>
+        </p:nvSpPr>
+        <p:spPr>
+          <a:xfrm>
+            <a:off x="6519672" y="2258568"/>
+            <a:ext cx="1828800" cy="292608"/>
+          </a:xfrm>
+          <a:prstGeom prst="rect">
+            <a:avLst>
+              <a:gd name="adj" fmla="val 25000"/>
+            </a:avLst>
+          </a:prstGeom>
+          <a:solidFill>
+            <a:srgbClr val="FCE7F3"/>
+          </a:solidFill>
+          <a:ln w="19050">
+            <a:solidFill>
+              <a:srgbClr val="DB2777"/>
+            </a:solidFill>
+            <a:prstDash val="solid"/>
+          </a:ln>
+          <a:effectLst>
+            <a:outerShdw sx="100000" sy="100000" kx="0" ky="0" algn="bl" rotWithShape="0" blurRad="101600" dist="38100" dir="8100000">
+              <a:srgbClr val="000000">
+                <a:alpha val="12000"/>
+              </a:srgbClr>
+            </a:outerShdw>
+          </a:effectLst>
+        </p:spPr>
+      </p:sp>
+      <p:sp>
+        <p:nvSpPr>
+          <p:cNvPr id="23" name="Text 21"/>
+          <p:cNvSpPr/>
+          <p:nvPr/>
+        </p:nvSpPr>
+        <p:spPr>
+          <a:xfrm>
+            <a:off x="6519672" y="2258568"/>
+            <a:ext cx="1828800" cy="292608"/>
+          </a:xfrm>
+          <a:prstGeom prst="rect">
+            <a:avLst/>
+          </a:prstGeom>
+          <a:noFill/>
+          <a:ln/>
+        </p:spPr>
+        <p:txBody>
+          <a:bodyPr wrap="square" lIns="0" tIns="0" rIns="0" bIns="0" rtlCol="0" anchor="ctr"/>
+          <a:lstStyle/>
+          <a:p>
+            <a:pPr algn="ctr" indent="0" marL="0">
+              <a:buNone/>
+            </a:pPr>
+            <a:r>
+              <a:rPr lang="en-US" sz="1300" b="1" dirty="0">
+                <a:solidFill>
+                  <a:srgbClr val="9D174D"/>
+                </a:solidFill>
+                <a:latin typeface="Trebuchet MS" pitchFamily="34" charset="0"/>
+                <a:ea typeface="Trebuchet MS" pitchFamily="34" charset="-122"/>
+                <a:cs typeface="Trebuchet MS" pitchFamily="34" charset="-120"/>
+              </a:rPr>
+              <a:t>ment</a:t>
+            </a:r>
+            <a:endParaRPr lang="en-US" sz="1300" dirty="0"/>
+          </a:p>
+        </p:txBody>
+      </p:sp>
+      <p:sp>
+        <p:nvSpPr>
+          <p:cNvPr id="24" name="Text 22"/>
+          <p:cNvSpPr/>
+          <p:nvPr/>
+        </p:nvSpPr>
+        <p:spPr>
+          <a:xfrm>
+            <a:off x="6519672" y="2569464"/>
+            <a:ext cx="1828800" cy="201168"/>
+          </a:xfrm>
+          <a:prstGeom prst="rect">
+            <a:avLst/>
+          </a:prstGeom>
+          <a:noFill/>
+          <a:ln/>
+        </p:spPr>
+        <p:txBody>
+          <a:bodyPr wrap="square" lIns="0" tIns="0" rIns="0" bIns="0" rtlCol="0" anchor="t"/>
+          <a:lstStyle/>
+          <a:p>
+            <a:pPr algn="ctr" indent="0" marL="0">
+              <a:buNone/>
+            </a:pPr>
+            <a:r>
+              <a:rPr lang="en-US" sz="850" dirty="0">
+                <a:solidFill>
+                  <a:srgbClr val="475569"/>
+                </a:solidFill>
+                <a:latin typeface="Calibri" pitchFamily="34" charset="0"/>
+                <a:ea typeface="Calibri" pitchFamily="34" charset="-122"/>
+                <a:cs typeface="Calibri" pitchFamily="34" charset="-120"/>
+              </a:rPr>
+              <a:t>result of action</a:t>
+            </a:r>
+            <a:endParaRPr lang="en-US" sz="850" dirty="0"/>
+          </a:p>
+        </p:txBody>
+      </p:sp>
+      <p:sp>
+        <p:nvSpPr>
+          <p:cNvPr id="25" name="Shape 23"/>
           <p:cNvSpPr/>
           <p:nvPr/>
         </p:nvSpPr>
@@ -31930,7 +32971,7 @@
       </p:sp>
       <p:sp>
         <p:nvSpPr>
-          <p:cNvPr id="23" name="Text 21"/>
+          <p:cNvPr id="26" name="Text 24"/>
           <p:cNvSpPr/>
           <p:nvPr/>
         </p:nvSpPr>
@@ -31969,7 +33010,7 @@
       </p:sp>
       <p:sp>
         <p:nvSpPr>
-          <p:cNvPr id="24" name="Shape 22"/>
+          <p:cNvPr id="27" name="Shape 25"/>
           <p:cNvSpPr/>
           <p:nvPr/>
         </p:nvSpPr>
@@ -31996,13 +33037,13 @@
       </p:sp>
       <p:sp>
         <p:nvSpPr>
-          <p:cNvPr id="25" name="Shape 23"/>
-          <p:cNvSpPr/>
-          <p:nvPr/>
-        </p:nvSpPr>
-        <p:spPr>
-          <a:xfrm>
-            <a:off x="2999232" y="3364992"/>
+          <p:cNvPr id="28" name="Shape 26"/>
+          <p:cNvSpPr/>
+          <p:nvPr/>
+        </p:nvSpPr>
+        <p:spPr>
+          <a:xfrm>
+            <a:off x="2313432" y="3364992"/>
             <a:ext cx="1645920" cy="475488"/>
           </a:xfrm>
           <a:prstGeom prst="rect">
@@ -32023,13 +33064,13 @@
       </p:sp>
       <p:sp>
         <p:nvSpPr>
-          <p:cNvPr id="26" name="Text 24"/>
-          <p:cNvSpPr/>
-          <p:nvPr/>
-        </p:nvSpPr>
-        <p:spPr>
-          <a:xfrm>
-            <a:off x="2999232" y="3364992"/>
+          <p:cNvPr id="29" name="Text 27"/>
+          <p:cNvSpPr/>
+          <p:nvPr/>
+        </p:nvSpPr>
+        <p:spPr>
+          <a:xfrm>
+            <a:off x="2313432" y="3364992"/>
             <a:ext cx="1645920" cy="475488"/>
           </a:xfrm>
           <a:prstGeom prst="rect">
@@ -32054,7 +33095,7 @@
                 <a:ea typeface="Trebuchet MS" pitchFamily="34" charset="-122"/>
                 <a:cs typeface="Trebuchet MS" pitchFamily="34" charset="-120"/>
               </a:rPr>
-              <a:t>fresh</a:t>
+              <a:t>re</a:t>
             </a:r>
             <a:endParaRPr lang="en-US" sz="1400" dirty="0"/>
           </a:p>
@@ -32062,14 +33103,14 @@
       </p:sp>
       <p:sp>
         <p:nvSpPr>
-          <p:cNvPr id="27" name="Text 25"/>
-          <p:cNvSpPr/>
-          <p:nvPr/>
-        </p:nvSpPr>
-        <p:spPr>
-          <a:xfrm>
-            <a:off x="4645152" y="3364992"/>
-            <a:ext cx="1097280" cy="475488"/>
+          <p:cNvPr id="30" name="Text 28"/>
+          <p:cNvSpPr/>
+          <p:nvPr/>
+        </p:nvSpPr>
+        <p:spPr>
+          <a:xfrm>
+            <a:off x="3959352" y="3364992"/>
+            <a:ext cx="411480" cy="475488"/>
           </a:xfrm>
           <a:prstGeom prst="rect">
             <a:avLst/>
@@ -32101,13 +33142,13 @@
       </p:sp>
       <p:sp>
         <p:nvSpPr>
-          <p:cNvPr id="28" name="Shape 26"/>
-          <p:cNvSpPr/>
-          <p:nvPr/>
-        </p:nvSpPr>
-        <p:spPr>
-          <a:xfrm>
-            <a:off x="5742432" y="3364992"/>
+          <p:cNvPr id="31" name="Shape 29"/>
+          <p:cNvSpPr/>
+          <p:nvPr/>
+        </p:nvSpPr>
+        <p:spPr>
+          <a:xfrm>
+            <a:off x="4370832" y="3364992"/>
             <a:ext cx="1645920" cy="475488"/>
           </a:xfrm>
           <a:prstGeom prst="rect">
@@ -32128,13 +33169,13 @@
       </p:sp>
       <p:sp>
         <p:nvSpPr>
-          <p:cNvPr id="29" name="Text 27"/>
-          <p:cNvSpPr/>
-          <p:nvPr/>
-        </p:nvSpPr>
-        <p:spPr>
-          <a:xfrm>
-            <a:off x="5742432" y="3364992"/>
+          <p:cNvPr id="32" name="Text 30"/>
+          <p:cNvSpPr/>
+          <p:nvPr/>
+        </p:nvSpPr>
+        <p:spPr>
+          <a:xfrm>
+            <a:off x="4370832" y="3364992"/>
             <a:ext cx="1645920" cy="475488"/>
           </a:xfrm>
           <a:prstGeom prst="rect">
@@ -32159,7 +33200,7 @@
                 <a:ea typeface="Trebuchet MS" pitchFamily="34" charset="-122"/>
                 <a:cs typeface="Trebuchet MS" pitchFamily="34" charset="-120"/>
               </a:rPr>
-              <a:t>ly</a:t>
+              <a:t>fresh</a:t>
             </a:r>
             <a:endParaRPr lang="en-US" sz="1400" dirty="0"/>
           </a:p>
@@ -32167,7 +33208,112 @@
       </p:sp>
       <p:sp>
         <p:nvSpPr>
-          <p:cNvPr id="30" name="Shape 28"/>
+          <p:cNvPr id="33" name="Text 31"/>
+          <p:cNvSpPr/>
+          <p:nvPr/>
+        </p:nvSpPr>
+        <p:spPr>
+          <a:xfrm>
+            <a:off x="6016752" y="3364992"/>
+            <a:ext cx="411480" cy="475488"/>
+          </a:xfrm>
+          <a:prstGeom prst="rect">
+            <a:avLst/>
+          </a:prstGeom>
+          <a:noFill/>
+          <a:ln/>
+        </p:spPr>
+        <p:txBody>
+          <a:bodyPr wrap="square" lIns="0" tIns="0" rIns="0" bIns="0" rtlCol="0" anchor="ctr"/>
+          <a:lstStyle/>
+          <a:p>
+            <a:pPr algn="ctr" indent="0" marL="0">
+              <a:buNone/>
+            </a:pPr>
+            <a:r>
+              <a:rPr lang="en-US" sz="1600" b="1" dirty="0">
+                <a:solidFill>
+                  <a:srgbClr val="0D9488"/>
+                </a:solidFill>
+                <a:latin typeface="Trebuchet MS" pitchFamily="34" charset="0"/>
+                <a:ea typeface="Trebuchet MS" pitchFamily="34" charset="-122"/>
+                <a:cs typeface="Trebuchet MS" pitchFamily="34" charset="-120"/>
+              </a:rPr>
+              <a:t>·</a:t>
+            </a:r>
+            <a:endParaRPr lang="en-US" sz="1600" dirty="0"/>
+          </a:p>
+        </p:txBody>
+      </p:sp>
+      <p:sp>
+        <p:nvSpPr>
+          <p:cNvPr id="34" name="Shape 32"/>
+          <p:cNvSpPr/>
+          <p:nvPr/>
+        </p:nvSpPr>
+        <p:spPr>
+          <a:xfrm>
+            <a:off x="6428232" y="3364992"/>
+            <a:ext cx="1645920" cy="475488"/>
+          </a:xfrm>
+          <a:prstGeom prst="rect">
+            <a:avLst>
+              <a:gd name="adj" fmla="val 9615"/>
+            </a:avLst>
+          </a:prstGeom>
+          <a:solidFill>
+            <a:srgbClr val="FFFFFF"/>
+          </a:solidFill>
+          <a:ln w="12700">
+            <a:solidFill>
+              <a:srgbClr val="0D9488"/>
+            </a:solidFill>
+            <a:prstDash val="solid"/>
+          </a:ln>
+        </p:spPr>
+      </p:sp>
+      <p:sp>
+        <p:nvSpPr>
+          <p:cNvPr id="35" name="Text 33"/>
+          <p:cNvSpPr/>
+          <p:nvPr/>
+        </p:nvSpPr>
+        <p:spPr>
+          <a:xfrm>
+            <a:off x="6428232" y="3364992"/>
+            <a:ext cx="1645920" cy="475488"/>
+          </a:xfrm>
+          <a:prstGeom prst="rect">
+            <a:avLst/>
+          </a:prstGeom>
+          <a:noFill/>
+          <a:ln/>
+        </p:spPr>
+        <p:txBody>
+          <a:bodyPr wrap="square" lIns="0" tIns="0" rIns="0" bIns="0" rtlCol="0" anchor="ctr"/>
+          <a:lstStyle/>
+          <a:p>
+            <a:pPr algn="ctr" indent="0" marL="0">
+              <a:buNone/>
+            </a:pPr>
+            <a:r>
+              <a:rPr lang="en-US" sz="1400" b="1" dirty="0">
+                <a:solidFill>
+                  <a:srgbClr val="0D9488"/>
+                </a:solidFill>
+                <a:latin typeface="Trebuchet MS" pitchFamily="34" charset="0"/>
+                <a:ea typeface="Trebuchet MS" pitchFamily="34" charset="-122"/>
+                <a:cs typeface="Trebuchet MS" pitchFamily="34" charset="-120"/>
+              </a:rPr>
+              <a:t>ment</a:t>
+            </a:r>
+            <a:endParaRPr lang="en-US" sz="1400" dirty="0"/>
+          </a:p>
+        </p:txBody>
+      </p:sp>
+      <p:sp>
+        <p:nvSpPr>
+          <p:cNvPr id="36" name="Shape 34"/>
           <p:cNvSpPr/>
           <p:nvPr/>
         </p:nvSpPr>
@@ -32194,7 +33340,7 @@
       </p:sp>
       <p:sp>
         <p:nvSpPr>
-          <p:cNvPr id="31" name="Text 29"/>
+          <p:cNvPr id="37" name="Text 35"/>
           <p:cNvSpPr/>
           <p:nvPr/>
         </p:nvSpPr>
@@ -32233,7 +33379,7 @@
       </p:sp>
       <p:sp>
         <p:nvSpPr>
-          <p:cNvPr id="32" name="Shape 30"/>
+          <p:cNvPr id="38" name="Shape 36"/>
           <p:cNvSpPr/>
           <p:nvPr/>
         </p:nvSpPr>
@@ -32260,14 +33406,14 @@
       </p:sp>
       <p:sp>
         <p:nvSpPr>
-          <p:cNvPr id="33" name="Shape 31"/>
-          <p:cNvSpPr/>
-          <p:nvPr/>
-        </p:nvSpPr>
-        <p:spPr>
-          <a:xfrm>
-            <a:off x="2254649" y="4169664"/>
-            <a:ext cx="685800" cy="475488"/>
+          <p:cNvPr id="39" name="Shape 37"/>
+          <p:cNvSpPr/>
+          <p:nvPr/>
+        </p:nvSpPr>
+        <p:spPr>
+          <a:xfrm>
+            <a:off x="1951828" y="4169664"/>
+            <a:ext cx="603504" cy="475488"/>
           </a:xfrm>
           <a:prstGeom prst="rect">
             <a:avLst>
@@ -32287,14 +33433,14 @@
       </p:sp>
       <p:sp>
         <p:nvSpPr>
-          <p:cNvPr id="34" name="Text 32"/>
-          <p:cNvSpPr/>
-          <p:nvPr/>
-        </p:nvSpPr>
-        <p:spPr>
-          <a:xfrm>
-            <a:off x="2254649" y="4169664"/>
-            <a:ext cx="685800" cy="475488"/>
+          <p:cNvPr id="40" name="Text 38"/>
+          <p:cNvSpPr/>
+          <p:nvPr/>
+        </p:nvSpPr>
+        <p:spPr>
+          <a:xfrm>
+            <a:off x="1951828" y="4169664"/>
+            <a:ext cx="603504" cy="475488"/>
           </a:xfrm>
           <a:prstGeom prst="rect">
             <a:avLst/>
@@ -32318,7 +33464,7 @@
                 <a:ea typeface="Trebuchet MS" pitchFamily="34" charset="-122"/>
                 <a:cs typeface="Trebuchet MS" pitchFamily="34" charset="-120"/>
               </a:rPr>
-              <a:t>f</a:t>
+              <a:t>r</a:t>
             </a:r>
             <a:endParaRPr lang="en-US" sz="900" dirty="0"/>
           </a:p>
@@ -32326,14 +33472,14 @@
       </p:sp>
       <p:sp>
         <p:nvSpPr>
-          <p:cNvPr id="35" name="Shape 33"/>
-          <p:cNvSpPr/>
-          <p:nvPr/>
-        </p:nvSpPr>
-        <p:spPr>
-          <a:xfrm>
-            <a:off x="3293146" y="4169664"/>
-            <a:ext cx="685800" cy="475488"/>
+          <p:cNvPr id="41" name="Shape 39"/>
+          <p:cNvSpPr/>
+          <p:nvPr/>
+        </p:nvSpPr>
+        <p:spPr>
+          <a:xfrm>
+            <a:off x="2605209" y="4169664"/>
+            <a:ext cx="603504" cy="475488"/>
           </a:xfrm>
           <a:prstGeom prst="rect">
             <a:avLst>
@@ -32353,14 +33499,14 @@
       </p:sp>
       <p:sp>
         <p:nvSpPr>
-          <p:cNvPr id="36" name="Text 34"/>
-          <p:cNvSpPr/>
-          <p:nvPr/>
-        </p:nvSpPr>
-        <p:spPr>
-          <a:xfrm>
-            <a:off x="3293146" y="4169664"/>
-            <a:ext cx="685800" cy="475488"/>
+          <p:cNvPr id="42" name="Text 40"/>
+          <p:cNvSpPr/>
+          <p:nvPr/>
+        </p:nvSpPr>
+        <p:spPr>
+          <a:xfrm>
+            <a:off x="2605209" y="4169664"/>
+            <a:ext cx="603504" cy="475488"/>
           </a:xfrm>
           <a:prstGeom prst="rect">
             <a:avLst/>
@@ -32384,7 +33530,7 @@
                 <a:ea typeface="Trebuchet MS" pitchFamily="34" charset="-122"/>
                 <a:cs typeface="Trebuchet MS" pitchFamily="34" charset="-120"/>
               </a:rPr>
-              <a:t>r</a:t>
+              <a:t>e</a:t>
             </a:r>
             <a:endParaRPr lang="en-US" sz="900" dirty="0"/>
           </a:p>
@@ -32392,14 +33538,14 @@
       </p:sp>
       <p:sp>
         <p:nvSpPr>
-          <p:cNvPr id="37" name="Shape 35"/>
-          <p:cNvSpPr/>
-          <p:nvPr/>
-        </p:nvSpPr>
-        <p:spPr>
-          <a:xfrm>
-            <a:off x="4331643" y="4169664"/>
-            <a:ext cx="685800" cy="475488"/>
+          <p:cNvPr id="43" name="Shape 41"/>
+          <p:cNvSpPr/>
+          <p:nvPr/>
+        </p:nvSpPr>
+        <p:spPr>
+          <a:xfrm>
+            <a:off x="3258589" y="4169664"/>
+            <a:ext cx="603504" cy="475488"/>
           </a:xfrm>
           <a:prstGeom prst="rect">
             <a:avLst>
@@ -32419,14 +33565,14 @@
       </p:sp>
       <p:sp>
         <p:nvSpPr>
-          <p:cNvPr id="38" name="Text 36"/>
-          <p:cNvSpPr/>
-          <p:nvPr/>
-        </p:nvSpPr>
-        <p:spPr>
-          <a:xfrm>
-            <a:off x="4331643" y="4169664"/>
-            <a:ext cx="685800" cy="475488"/>
+          <p:cNvPr id="44" name="Text 42"/>
+          <p:cNvSpPr/>
+          <p:nvPr/>
+        </p:nvSpPr>
+        <p:spPr>
+          <a:xfrm>
+            <a:off x="3258589" y="4169664"/>
+            <a:ext cx="603504" cy="475488"/>
           </a:xfrm>
           <a:prstGeom prst="rect">
             <a:avLst/>
@@ -32450,7 +33596,7 @@
                 <a:ea typeface="Trebuchet MS" pitchFamily="34" charset="-122"/>
                 <a:cs typeface="Trebuchet MS" pitchFamily="34" charset="-120"/>
               </a:rPr>
-              <a:t>e</a:t>
+              <a:t>f</a:t>
             </a:r>
             <a:endParaRPr lang="en-US" sz="900" dirty="0"/>
           </a:p>
@@ -32458,14 +33604,14 @@
       </p:sp>
       <p:sp>
         <p:nvSpPr>
-          <p:cNvPr id="39" name="Shape 37"/>
-          <p:cNvSpPr/>
-          <p:nvPr/>
-        </p:nvSpPr>
-        <p:spPr>
-          <a:xfrm>
-            <a:off x="5370141" y="4169664"/>
-            <a:ext cx="685800" cy="475488"/>
+          <p:cNvPr id="45" name="Shape 43"/>
+          <p:cNvSpPr/>
+          <p:nvPr/>
+        </p:nvSpPr>
+        <p:spPr>
+          <a:xfrm>
+            <a:off x="3911969" y="4169664"/>
+            <a:ext cx="603504" cy="475488"/>
           </a:xfrm>
           <a:prstGeom prst="rect">
             <a:avLst>
@@ -32485,14 +33631,14 @@
       </p:sp>
       <p:sp>
         <p:nvSpPr>
-          <p:cNvPr id="40" name="Text 38"/>
-          <p:cNvSpPr/>
-          <p:nvPr/>
-        </p:nvSpPr>
-        <p:spPr>
-          <a:xfrm>
-            <a:off x="5370141" y="4169664"/>
-            <a:ext cx="685800" cy="475488"/>
+          <p:cNvPr id="46" name="Text 44"/>
+          <p:cNvSpPr/>
+          <p:nvPr/>
+        </p:nvSpPr>
+        <p:spPr>
+          <a:xfrm>
+            <a:off x="3911969" y="4169664"/>
+            <a:ext cx="603504" cy="475488"/>
           </a:xfrm>
           <a:prstGeom prst="rect">
             <a:avLst/>
@@ -32516,7 +33662,7 @@
                 <a:ea typeface="Trebuchet MS" pitchFamily="34" charset="-122"/>
                 <a:cs typeface="Trebuchet MS" pitchFamily="34" charset="-120"/>
               </a:rPr>
-              <a:t>sh</a:t>
+              <a:t>r</a:t>
             </a:r>
             <a:endParaRPr lang="en-US" sz="900" dirty="0"/>
           </a:p>
@@ -32524,14 +33670,14 @@
       </p:sp>
       <p:sp>
         <p:nvSpPr>
-          <p:cNvPr id="41" name="Shape 39"/>
-          <p:cNvSpPr/>
-          <p:nvPr/>
-        </p:nvSpPr>
-        <p:spPr>
-          <a:xfrm>
-            <a:off x="6408638" y="4169664"/>
-            <a:ext cx="685800" cy="475488"/>
+          <p:cNvPr id="47" name="Shape 45"/>
+          <p:cNvSpPr/>
+          <p:nvPr/>
+        </p:nvSpPr>
+        <p:spPr>
+          <a:xfrm>
+            <a:off x="4565350" y="4169664"/>
+            <a:ext cx="603504" cy="475488"/>
           </a:xfrm>
           <a:prstGeom prst="rect">
             <a:avLst>
@@ -32551,14 +33697,14 @@
       </p:sp>
       <p:sp>
         <p:nvSpPr>
-          <p:cNvPr id="42" name="Text 40"/>
-          <p:cNvSpPr/>
-          <p:nvPr/>
-        </p:nvSpPr>
-        <p:spPr>
-          <a:xfrm>
-            <a:off x="6408638" y="4169664"/>
-            <a:ext cx="685800" cy="475488"/>
+          <p:cNvPr id="48" name="Text 46"/>
+          <p:cNvSpPr/>
+          <p:nvPr/>
+        </p:nvSpPr>
+        <p:spPr>
+          <a:xfrm>
+            <a:off x="4565350" y="4169664"/>
+            <a:ext cx="603504" cy="475488"/>
           </a:xfrm>
           <a:prstGeom prst="rect">
             <a:avLst/>
@@ -32582,7 +33728,7 @@
                 <a:ea typeface="Trebuchet MS" pitchFamily="34" charset="-122"/>
                 <a:cs typeface="Trebuchet MS" pitchFamily="34" charset="-120"/>
               </a:rPr>
-              <a:t>l</a:t>
+              <a:t>e</a:t>
             </a:r>
             <a:endParaRPr lang="en-US" sz="900" dirty="0"/>
           </a:p>
@@ -32590,14 +33736,14 @@
       </p:sp>
       <p:sp>
         <p:nvSpPr>
-          <p:cNvPr id="43" name="Shape 41"/>
-          <p:cNvSpPr/>
-          <p:nvPr/>
-        </p:nvSpPr>
-        <p:spPr>
-          <a:xfrm>
-            <a:off x="7447135" y="4169664"/>
-            <a:ext cx="685800" cy="475488"/>
+          <p:cNvPr id="49" name="Shape 47"/>
+          <p:cNvSpPr/>
+          <p:nvPr/>
+        </p:nvSpPr>
+        <p:spPr>
+          <a:xfrm>
+            <a:off x="5218730" y="4169664"/>
+            <a:ext cx="603504" cy="475488"/>
           </a:xfrm>
           <a:prstGeom prst="rect">
             <a:avLst>
@@ -32617,14 +33763,14 @@
       </p:sp>
       <p:sp>
         <p:nvSpPr>
-          <p:cNvPr id="44" name="Text 42"/>
-          <p:cNvSpPr/>
-          <p:nvPr/>
-        </p:nvSpPr>
-        <p:spPr>
-          <a:xfrm>
-            <a:off x="7447135" y="4169664"/>
-            <a:ext cx="685800" cy="475488"/>
+          <p:cNvPr id="50" name="Text 48"/>
+          <p:cNvSpPr/>
+          <p:nvPr/>
+        </p:nvSpPr>
+        <p:spPr>
+          <a:xfrm>
+            <a:off x="5218730" y="4169664"/>
+            <a:ext cx="603504" cy="475488"/>
           </a:xfrm>
           <a:prstGeom prst="rect">
             <a:avLst/>
@@ -32648,7 +33794,271 @@
                 <a:ea typeface="Trebuchet MS" pitchFamily="34" charset="-122"/>
                 <a:cs typeface="Trebuchet MS" pitchFamily="34" charset="-120"/>
               </a:rPr>
-              <a:t>y</a:t>
+              <a:t>sh</a:t>
+            </a:r>
+            <a:endParaRPr lang="en-US" sz="900" dirty="0"/>
+          </a:p>
+        </p:txBody>
+      </p:sp>
+      <p:sp>
+        <p:nvSpPr>
+          <p:cNvPr id="51" name="Shape 49"/>
+          <p:cNvSpPr/>
+          <p:nvPr/>
+        </p:nvSpPr>
+        <p:spPr>
+          <a:xfrm>
+            <a:off x="5872111" y="4169664"/>
+            <a:ext cx="603504" cy="475488"/>
+          </a:xfrm>
+          <a:prstGeom prst="rect">
+            <a:avLst>
+              <a:gd name="adj" fmla="val 7692"/>
+            </a:avLst>
+          </a:prstGeom>
+          <a:solidFill>
+            <a:srgbClr val="FFFFFF"/>
+          </a:solidFill>
+          <a:ln w="12700">
+            <a:solidFill>
+              <a:srgbClr val="DB2777"/>
+            </a:solidFill>
+            <a:prstDash val="solid"/>
+          </a:ln>
+        </p:spPr>
+      </p:sp>
+      <p:sp>
+        <p:nvSpPr>
+          <p:cNvPr id="52" name="Text 50"/>
+          <p:cNvSpPr/>
+          <p:nvPr/>
+        </p:nvSpPr>
+        <p:spPr>
+          <a:xfrm>
+            <a:off x="5872111" y="4169664"/>
+            <a:ext cx="603504" cy="475488"/>
+          </a:xfrm>
+          <a:prstGeom prst="rect">
+            <a:avLst/>
+          </a:prstGeom>
+          <a:noFill/>
+          <a:ln/>
+        </p:spPr>
+        <p:txBody>
+          <a:bodyPr wrap="square" lIns="0" tIns="0" rIns="0" bIns="0" rtlCol="0" anchor="ctr"/>
+          <a:lstStyle/>
+          <a:p>
+            <a:pPr algn="ctr" indent="0" marL="0">
+              <a:buNone/>
+            </a:pPr>
+            <a:r>
+              <a:rPr lang="en-US" sz="900" b="1" dirty="0">
+                <a:solidFill>
+                  <a:srgbClr val="9D174D"/>
+                </a:solidFill>
+                <a:latin typeface="Trebuchet MS" pitchFamily="34" charset="0"/>
+                <a:ea typeface="Trebuchet MS" pitchFamily="34" charset="-122"/>
+                <a:cs typeface="Trebuchet MS" pitchFamily="34" charset="-120"/>
+              </a:rPr>
+              <a:t>m</a:t>
+            </a:r>
+            <a:endParaRPr lang="en-US" sz="900" dirty="0"/>
+          </a:p>
+        </p:txBody>
+      </p:sp>
+      <p:sp>
+        <p:nvSpPr>
+          <p:cNvPr id="53" name="Shape 51"/>
+          <p:cNvSpPr/>
+          <p:nvPr/>
+        </p:nvSpPr>
+        <p:spPr>
+          <a:xfrm>
+            <a:off x="6525491" y="4169664"/>
+            <a:ext cx="603504" cy="475488"/>
+          </a:xfrm>
+          <a:prstGeom prst="rect">
+            <a:avLst>
+              <a:gd name="adj" fmla="val 7692"/>
+            </a:avLst>
+          </a:prstGeom>
+          <a:solidFill>
+            <a:srgbClr val="FFFFFF"/>
+          </a:solidFill>
+          <a:ln w="12700">
+            <a:solidFill>
+              <a:srgbClr val="DB2777"/>
+            </a:solidFill>
+            <a:prstDash val="solid"/>
+          </a:ln>
+        </p:spPr>
+      </p:sp>
+      <p:sp>
+        <p:nvSpPr>
+          <p:cNvPr id="54" name="Text 52"/>
+          <p:cNvSpPr/>
+          <p:nvPr/>
+        </p:nvSpPr>
+        <p:spPr>
+          <a:xfrm>
+            <a:off x="6525491" y="4169664"/>
+            <a:ext cx="603504" cy="475488"/>
+          </a:xfrm>
+          <a:prstGeom prst="rect">
+            <a:avLst/>
+          </a:prstGeom>
+          <a:noFill/>
+          <a:ln/>
+        </p:spPr>
+        <p:txBody>
+          <a:bodyPr wrap="square" lIns="0" tIns="0" rIns="0" bIns="0" rtlCol="0" anchor="ctr"/>
+          <a:lstStyle/>
+          <a:p>
+            <a:pPr algn="ctr" indent="0" marL="0">
+              <a:buNone/>
+            </a:pPr>
+            <a:r>
+              <a:rPr lang="en-US" sz="900" b="1" dirty="0">
+                <a:solidFill>
+                  <a:srgbClr val="9D174D"/>
+                </a:solidFill>
+                <a:latin typeface="Trebuchet MS" pitchFamily="34" charset="0"/>
+                <a:ea typeface="Trebuchet MS" pitchFamily="34" charset="-122"/>
+                <a:cs typeface="Trebuchet MS" pitchFamily="34" charset="-120"/>
+              </a:rPr>
+              <a:t>e</a:t>
+            </a:r>
+            <a:endParaRPr lang="en-US" sz="900" dirty="0"/>
+          </a:p>
+        </p:txBody>
+      </p:sp>
+      <p:sp>
+        <p:nvSpPr>
+          <p:cNvPr id="55" name="Shape 53"/>
+          <p:cNvSpPr/>
+          <p:nvPr/>
+        </p:nvSpPr>
+        <p:spPr>
+          <a:xfrm>
+            <a:off x="7178871" y="4169664"/>
+            <a:ext cx="603504" cy="475488"/>
+          </a:xfrm>
+          <a:prstGeom prst="rect">
+            <a:avLst>
+              <a:gd name="adj" fmla="val 7692"/>
+            </a:avLst>
+          </a:prstGeom>
+          <a:solidFill>
+            <a:srgbClr val="FFFFFF"/>
+          </a:solidFill>
+          <a:ln w="12700">
+            <a:solidFill>
+              <a:srgbClr val="DB2777"/>
+            </a:solidFill>
+            <a:prstDash val="solid"/>
+          </a:ln>
+        </p:spPr>
+      </p:sp>
+      <p:sp>
+        <p:nvSpPr>
+          <p:cNvPr id="56" name="Text 54"/>
+          <p:cNvSpPr/>
+          <p:nvPr/>
+        </p:nvSpPr>
+        <p:spPr>
+          <a:xfrm>
+            <a:off x="7178871" y="4169664"/>
+            <a:ext cx="603504" cy="475488"/>
+          </a:xfrm>
+          <a:prstGeom prst="rect">
+            <a:avLst/>
+          </a:prstGeom>
+          <a:noFill/>
+          <a:ln/>
+        </p:spPr>
+        <p:txBody>
+          <a:bodyPr wrap="square" lIns="0" tIns="0" rIns="0" bIns="0" rtlCol="0" anchor="ctr"/>
+          <a:lstStyle/>
+          <a:p>
+            <a:pPr algn="ctr" indent="0" marL="0">
+              <a:buNone/>
+            </a:pPr>
+            <a:r>
+              <a:rPr lang="en-US" sz="900" b="1" dirty="0">
+                <a:solidFill>
+                  <a:srgbClr val="9D174D"/>
+                </a:solidFill>
+                <a:latin typeface="Trebuchet MS" pitchFamily="34" charset="0"/>
+                <a:ea typeface="Trebuchet MS" pitchFamily="34" charset="-122"/>
+                <a:cs typeface="Trebuchet MS" pitchFamily="34" charset="-120"/>
+              </a:rPr>
+              <a:t>n</a:t>
+            </a:r>
+            <a:endParaRPr lang="en-US" sz="900" dirty="0"/>
+          </a:p>
+        </p:txBody>
+      </p:sp>
+      <p:sp>
+        <p:nvSpPr>
+          <p:cNvPr id="57" name="Shape 55"/>
+          <p:cNvSpPr/>
+          <p:nvPr/>
+        </p:nvSpPr>
+        <p:spPr>
+          <a:xfrm>
+            <a:off x="7832252" y="4169664"/>
+            <a:ext cx="603504" cy="475488"/>
+          </a:xfrm>
+          <a:prstGeom prst="rect">
+            <a:avLst>
+              <a:gd name="adj" fmla="val 7692"/>
+            </a:avLst>
+          </a:prstGeom>
+          <a:solidFill>
+            <a:srgbClr val="FFFFFF"/>
+          </a:solidFill>
+          <a:ln w="12700">
+            <a:solidFill>
+              <a:srgbClr val="DB2777"/>
+            </a:solidFill>
+            <a:prstDash val="solid"/>
+          </a:ln>
+        </p:spPr>
+      </p:sp>
+      <p:sp>
+        <p:nvSpPr>
+          <p:cNvPr id="58" name="Text 56"/>
+          <p:cNvSpPr/>
+          <p:nvPr/>
+        </p:nvSpPr>
+        <p:spPr>
+          <a:xfrm>
+            <a:off x="7832252" y="4169664"/>
+            <a:ext cx="603504" cy="475488"/>
+          </a:xfrm>
+          <a:prstGeom prst="rect">
+            <a:avLst/>
+          </a:prstGeom>
+          <a:noFill/>
+          <a:ln/>
+        </p:spPr>
+        <p:txBody>
+          <a:bodyPr wrap="square" lIns="0" tIns="0" rIns="0" bIns="0" rtlCol="0" anchor="ctr"/>
+          <a:lstStyle/>
+          <a:p>
+            <a:pPr algn="ctr" indent="0" marL="0">
+              <a:buNone/>
+            </a:pPr>
+            <a:r>
+              <a:rPr lang="en-US" sz="900" b="1" dirty="0">
+                <a:solidFill>
+                  <a:srgbClr val="9D174D"/>
+                </a:solidFill>
+                <a:latin typeface="Trebuchet MS" pitchFamily="34" charset="0"/>
+                <a:ea typeface="Trebuchet MS" pitchFamily="34" charset="-122"/>
+                <a:cs typeface="Trebuchet MS" pitchFamily="34" charset="-120"/>
+              </a:rPr>
+              <a:t>t</a:t>
             </a:r>
             <a:endParaRPr lang="en-US" sz="900" dirty="0"/>
           </a:p>
@@ -32940,7 +34350,7 @@
                 <a:ea typeface="Calibri" pitchFamily="34" charset="-122"/>
                 <a:cs typeface="Calibri" pitchFamily="34" charset="-120"/>
               </a:rPr>
-              <a:t>Word Labs  •  wordlabs.app  •  Root: 'fresh' = new, clean, not stale</a:t>
+              <a:t>Word Labs  •  wordlabs.app  •  Root: 'fresh' = new; recently made</a:t>
             </a:r>
             <a:endParaRPr lang="en-US" sz="800" dirty="0"/>
           </a:p>
@@ -34109,7 +35519,7 @@
                 <a:ea typeface="Calibri" pitchFamily="34" charset="-122"/>
                 <a:cs typeface="Calibri" pitchFamily="34" charset="-120"/>
               </a:rPr>
-              <a:t>Word Labs  •  wordlabs.app  •  Root: 'fresh' = new, clean, not stale</a:t>
+              <a:t>Word Labs  •  wordlabs.app  •  Root: 'fresh' = new; recently made</a:t>
             </a:r>
             <a:endParaRPr lang="en-US" sz="800" dirty="0"/>
           </a:p>
@@ -34559,7 +35969,7 @@
             <a:avLst/>
           </a:prstGeom>
           <a:solidFill>
-            <a:srgbClr val="DDD6FE"/>
+            <a:srgbClr val="F1F5F9"/>
           </a:solidFill>
           <a:ln w="12700">
             <a:solidFill>
@@ -34571,14 +35981,64 @@
       </p:sp>
       <p:sp>
         <p:nvSpPr>
-          <p:cNvPr id="24" name="Text 22"/>
-          <p:cNvSpPr/>
-          <p:nvPr/>
-        </p:nvSpPr>
-        <p:spPr>
-          <a:xfrm>
-            <a:off x="365760" y="1984248"/>
-            <a:ext cx="2468880" cy="402336"/>
+          <p:cNvPr id="24" name="Shape 22"/>
+          <p:cNvSpPr/>
+          <p:nvPr/>
+        </p:nvSpPr>
+        <p:spPr>
+          <a:xfrm>
+            <a:off x="2971800" y="1984248"/>
+            <a:ext cx="2834640" cy="402336"/>
+          </a:xfrm>
+          <a:prstGeom prst="rect">
+            <a:avLst/>
+          </a:prstGeom>
+          <a:solidFill>
+            <a:srgbClr val="F1F5F9"/>
+          </a:solidFill>
+          <a:ln w="12700">
+            <a:solidFill>
+              <a:srgbClr val="E2E8F0"/>
+            </a:solidFill>
+            <a:prstDash val="solid"/>
+          </a:ln>
+        </p:spPr>
+      </p:sp>
+      <p:sp>
+        <p:nvSpPr>
+          <p:cNvPr id="25" name="Shape 23"/>
+          <p:cNvSpPr/>
+          <p:nvPr/>
+        </p:nvSpPr>
+        <p:spPr>
+          <a:xfrm>
+            <a:off x="5943600" y="1984248"/>
+            <a:ext cx="2834640" cy="402336"/>
+          </a:xfrm>
+          <a:prstGeom prst="rect">
+            <a:avLst/>
+          </a:prstGeom>
+          <a:solidFill>
+            <a:srgbClr val="FCE7F3"/>
+          </a:solidFill>
+          <a:ln w="12700">
+            <a:solidFill>
+              <a:srgbClr val="E2E8F0"/>
+            </a:solidFill>
+            <a:prstDash val="solid"/>
+          </a:ln>
+        </p:spPr>
+      </p:sp>
+      <p:sp>
+        <p:nvSpPr>
+          <p:cNvPr id="26" name="Text 24"/>
+          <p:cNvSpPr/>
+          <p:nvPr/>
+        </p:nvSpPr>
+        <p:spPr>
+          <a:xfrm>
+            <a:off x="5943600" y="1984248"/>
+            <a:ext cx="2834640" cy="402336"/>
           </a:xfrm>
           <a:prstGeom prst="rect">
             <a:avLst/>
@@ -34596,13 +36056,13 @@
             <a:r>
               <a:rPr lang="en-US" sz="1300" b="1" dirty="0">
                 <a:solidFill>
-                  <a:srgbClr val="4C1D95"/>
+                  <a:srgbClr val="9D174D"/>
                 </a:solidFill>
                 <a:latin typeface="Trebuchet MS" pitchFamily="34" charset="0"/>
                 <a:ea typeface="Trebuchet MS" pitchFamily="34" charset="-122"/>
                 <a:cs typeface="Trebuchet MS" pitchFamily="34" charset="-120"/>
               </a:rPr>
-              <a:t>un-</a:t>
+              <a:t>-er</a:t>
             </a:r>
             <a:endParaRPr lang="en-US" sz="1300" dirty="0"/>
           </a:p>
@@ -34610,20 +36070,45 @@
       </p:sp>
       <p:sp>
         <p:nvSpPr>
-          <p:cNvPr id="25" name="Shape 23"/>
-          <p:cNvSpPr/>
-          <p:nvPr/>
-        </p:nvSpPr>
-        <p:spPr>
-          <a:xfrm>
-            <a:off x="2971800" y="1984248"/>
+          <p:cNvPr id="27" name="Shape 25"/>
+          <p:cNvSpPr/>
+          <p:nvPr/>
+        </p:nvSpPr>
+        <p:spPr>
+          <a:xfrm>
+            <a:off x="365760" y="2404872"/>
+            <a:ext cx="2468880" cy="402336"/>
+          </a:xfrm>
+          <a:prstGeom prst="rect">
+            <a:avLst/>
+          </a:prstGeom>
+          <a:solidFill>
+            <a:srgbClr val="F8FAFC"/>
+          </a:solidFill>
+          <a:ln w="12700">
+            <a:solidFill>
+              <a:srgbClr val="E2E8F0"/>
+            </a:solidFill>
+            <a:prstDash val="solid"/>
+          </a:ln>
+        </p:spPr>
+      </p:sp>
+      <p:sp>
+        <p:nvSpPr>
+          <p:cNvPr id="28" name="Shape 26"/>
+          <p:cNvSpPr/>
+          <p:nvPr/>
+        </p:nvSpPr>
+        <p:spPr>
+          <a:xfrm>
+            <a:off x="2971800" y="2404872"/>
             <a:ext cx="2834640" cy="402336"/>
           </a:xfrm>
           <a:prstGeom prst="rect">
             <a:avLst/>
           </a:prstGeom>
           <a:solidFill>
-            <a:srgbClr val="F1F5F9"/>
+            <a:srgbClr val="F8FAFC"/>
           </a:solidFill>
           <a:ln w="12700">
             <a:solidFill>
@@ -34635,13 +36120,13 @@
       </p:sp>
       <p:sp>
         <p:nvSpPr>
-          <p:cNvPr id="26" name="Shape 24"/>
-          <p:cNvSpPr/>
-          <p:nvPr/>
-        </p:nvSpPr>
-        <p:spPr>
-          <a:xfrm>
-            <a:off x="5943600" y="1984248"/>
+          <p:cNvPr id="29" name="Shape 27"/>
+          <p:cNvSpPr/>
+          <p:nvPr/>
+        </p:nvSpPr>
+        <p:spPr>
+          <a:xfrm>
+            <a:off x="5943600" y="2404872"/>
             <a:ext cx="2834640" cy="402336"/>
           </a:xfrm>
           <a:prstGeom prst="rect">
@@ -34660,13 +36145,13 @@
       </p:sp>
       <p:sp>
         <p:nvSpPr>
-          <p:cNvPr id="27" name="Text 25"/>
-          <p:cNvSpPr/>
-          <p:nvPr/>
-        </p:nvSpPr>
-        <p:spPr>
-          <a:xfrm>
-            <a:off x="5943600" y="1984248"/>
+          <p:cNvPr id="30" name="Text 28"/>
+          <p:cNvSpPr/>
+          <p:nvPr/>
+        </p:nvSpPr>
+        <p:spPr>
+          <a:xfrm>
+            <a:off x="5943600" y="2404872"/>
             <a:ext cx="2834640" cy="402336"/>
           </a:xfrm>
           <a:prstGeom prst="rect">
@@ -34691,7 +36176,7 @@
                 <a:ea typeface="Trebuchet MS" pitchFamily="34" charset="-122"/>
                 <a:cs typeface="Trebuchet MS" pitchFamily="34" charset="-120"/>
               </a:rPr>
-              <a:t>-er</a:t>
+              <a:t>-est</a:t>
             </a:r>
             <a:endParaRPr lang="en-US" sz="1300" dirty="0"/>
           </a:p>
@@ -34699,20 +36184,20 @@
       </p:sp>
       <p:sp>
         <p:nvSpPr>
-          <p:cNvPr id="28" name="Shape 26"/>
-          <p:cNvSpPr/>
-          <p:nvPr/>
-        </p:nvSpPr>
-        <p:spPr>
-          <a:xfrm>
-            <a:off x="365760" y="2404872"/>
+          <p:cNvPr id="31" name="Shape 29"/>
+          <p:cNvSpPr/>
+          <p:nvPr/>
+        </p:nvSpPr>
+        <p:spPr>
+          <a:xfrm>
+            <a:off x="365760" y="2825496"/>
             <a:ext cx="2468880" cy="402336"/>
           </a:xfrm>
           <a:prstGeom prst="rect">
             <a:avLst/>
           </a:prstGeom>
           <a:solidFill>
-            <a:srgbClr val="DDD6FE"/>
+            <a:srgbClr val="F1F5F9"/>
           </a:solidFill>
           <a:ln w="12700">
             <a:solidFill>
@@ -34724,14 +36209,64 @@
       </p:sp>
       <p:sp>
         <p:nvSpPr>
-          <p:cNvPr id="29" name="Text 27"/>
-          <p:cNvSpPr/>
-          <p:nvPr/>
-        </p:nvSpPr>
-        <p:spPr>
-          <a:xfrm>
-            <a:off x="365760" y="2404872"/>
-            <a:ext cx="2468880" cy="402336"/>
+          <p:cNvPr id="32" name="Shape 30"/>
+          <p:cNvSpPr/>
+          <p:nvPr/>
+        </p:nvSpPr>
+        <p:spPr>
+          <a:xfrm>
+            <a:off x="2971800" y="2825496"/>
+            <a:ext cx="2834640" cy="402336"/>
+          </a:xfrm>
+          <a:prstGeom prst="rect">
+            <a:avLst/>
+          </a:prstGeom>
+          <a:solidFill>
+            <a:srgbClr val="F1F5F9"/>
+          </a:solidFill>
+          <a:ln w="12700">
+            <a:solidFill>
+              <a:srgbClr val="E2E8F0"/>
+            </a:solidFill>
+            <a:prstDash val="solid"/>
+          </a:ln>
+        </p:spPr>
+      </p:sp>
+      <p:sp>
+        <p:nvSpPr>
+          <p:cNvPr id="33" name="Shape 31"/>
+          <p:cNvSpPr/>
+          <p:nvPr/>
+        </p:nvSpPr>
+        <p:spPr>
+          <a:xfrm>
+            <a:off x="5943600" y="2825496"/>
+            <a:ext cx="2834640" cy="402336"/>
+          </a:xfrm>
+          <a:prstGeom prst="rect">
+            <a:avLst/>
+          </a:prstGeom>
+          <a:solidFill>
+            <a:srgbClr val="FCE7F3"/>
+          </a:solidFill>
+          <a:ln w="12700">
+            <a:solidFill>
+              <a:srgbClr val="E2E8F0"/>
+            </a:solidFill>
+            <a:prstDash val="solid"/>
+          </a:ln>
+        </p:spPr>
+      </p:sp>
+      <p:sp>
+        <p:nvSpPr>
+          <p:cNvPr id="34" name="Text 32"/>
+          <p:cNvSpPr/>
+          <p:nvPr/>
+        </p:nvSpPr>
+        <p:spPr>
+          <a:xfrm>
+            <a:off x="5943600" y="2825496"/>
+            <a:ext cx="2834640" cy="402336"/>
           </a:xfrm>
           <a:prstGeom prst="rect">
             <a:avLst/>
@@ -34749,13 +36284,13 @@
             <a:r>
               <a:rPr lang="en-US" sz="1300" b="1" dirty="0">
                 <a:solidFill>
-                  <a:srgbClr val="4C1D95"/>
+                  <a:srgbClr val="9D174D"/>
                 </a:solidFill>
                 <a:latin typeface="Trebuchet MS" pitchFamily="34" charset="0"/>
                 <a:ea typeface="Trebuchet MS" pitchFamily="34" charset="-122"/>
                 <a:cs typeface="Trebuchet MS" pitchFamily="34" charset="-120"/>
               </a:rPr>
-              <a:t>ever-</a:t>
+              <a:t>-ly</a:t>
             </a:r>
             <a:endParaRPr lang="en-US" sz="1300" dirty="0"/>
           </a:p>
@@ -34763,13 +36298,38 @@
       </p:sp>
       <p:sp>
         <p:nvSpPr>
-          <p:cNvPr id="30" name="Shape 28"/>
-          <p:cNvSpPr/>
-          <p:nvPr/>
-        </p:nvSpPr>
-        <p:spPr>
-          <a:xfrm>
-            <a:off x="2971800" y="2404872"/>
+          <p:cNvPr id="35" name="Shape 33"/>
+          <p:cNvSpPr/>
+          <p:nvPr/>
+        </p:nvSpPr>
+        <p:spPr>
+          <a:xfrm>
+            <a:off x="365760" y="3246120"/>
+            <a:ext cx="2468880" cy="402336"/>
+          </a:xfrm>
+          <a:prstGeom prst="rect">
+            <a:avLst/>
+          </a:prstGeom>
+          <a:solidFill>
+            <a:srgbClr val="F8FAFC"/>
+          </a:solidFill>
+          <a:ln w="12700">
+            <a:solidFill>
+              <a:srgbClr val="E2E8F0"/>
+            </a:solidFill>
+            <a:prstDash val="solid"/>
+          </a:ln>
+        </p:spPr>
+      </p:sp>
+      <p:sp>
+        <p:nvSpPr>
+          <p:cNvPr id="36" name="Shape 34"/>
+          <p:cNvSpPr/>
+          <p:nvPr/>
+        </p:nvSpPr>
+        <p:spPr>
+          <a:xfrm>
+            <a:off x="2971800" y="3246120"/>
             <a:ext cx="2834640" cy="402336"/>
           </a:xfrm>
           <a:prstGeom prst="rect">
@@ -34788,13 +36348,13 @@
       </p:sp>
       <p:sp>
         <p:nvSpPr>
-          <p:cNvPr id="31" name="Shape 29"/>
-          <p:cNvSpPr/>
-          <p:nvPr/>
-        </p:nvSpPr>
-        <p:spPr>
-          <a:xfrm>
-            <a:off x="5943600" y="2404872"/>
+          <p:cNvPr id="37" name="Shape 35"/>
+          <p:cNvSpPr/>
+          <p:nvPr/>
+        </p:nvSpPr>
+        <p:spPr>
+          <a:xfrm>
+            <a:off x="5943600" y="3246120"/>
             <a:ext cx="2834640" cy="402336"/>
           </a:xfrm>
           <a:prstGeom prst="rect">
@@ -34813,13 +36373,13 @@
       </p:sp>
       <p:sp>
         <p:nvSpPr>
-          <p:cNvPr id="32" name="Text 30"/>
-          <p:cNvSpPr/>
-          <p:nvPr/>
-        </p:nvSpPr>
-        <p:spPr>
-          <a:xfrm>
-            <a:off x="5943600" y="2404872"/>
+          <p:cNvPr id="38" name="Text 36"/>
+          <p:cNvSpPr/>
+          <p:nvPr/>
+        </p:nvSpPr>
+        <p:spPr>
+          <a:xfrm>
+            <a:off x="5943600" y="3246120"/>
             <a:ext cx="2834640" cy="402336"/>
           </a:xfrm>
           <a:prstGeom prst="rect">
@@ -34844,7 +36404,7 @@
                 <a:ea typeface="Trebuchet MS" pitchFamily="34" charset="-122"/>
                 <a:cs typeface="Trebuchet MS" pitchFamily="34" charset="-120"/>
               </a:rPr>
-              <a:t>-ly</a:t>
+              <a:t>-ness</a:t>
             </a:r>
             <a:endParaRPr lang="en-US" sz="1300" dirty="0"/>
           </a:p>
@@ -34852,20 +36412,20 @@
       </p:sp>
       <p:sp>
         <p:nvSpPr>
-          <p:cNvPr id="33" name="Shape 31"/>
-          <p:cNvSpPr/>
-          <p:nvPr/>
-        </p:nvSpPr>
-        <p:spPr>
-          <a:xfrm>
-            <a:off x="365760" y="2825496"/>
+          <p:cNvPr id="39" name="Shape 37"/>
+          <p:cNvSpPr/>
+          <p:nvPr/>
+        </p:nvSpPr>
+        <p:spPr>
+          <a:xfrm>
+            <a:off x="365760" y="3666744"/>
             <a:ext cx="2468880" cy="402336"/>
           </a:xfrm>
           <a:prstGeom prst="rect">
             <a:avLst/>
           </a:prstGeom>
           <a:solidFill>
-            <a:srgbClr val="DDD6FE"/>
+            <a:srgbClr val="F1F5F9"/>
           </a:solidFill>
           <a:ln w="12700">
             <a:solidFill>
@@ -34877,14 +36437,64 @@
       </p:sp>
       <p:sp>
         <p:nvSpPr>
-          <p:cNvPr id="34" name="Text 32"/>
-          <p:cNvSpPr/>
-          <p:nvPr/>
-        </p:nvSpPr>
-        <p:spPr>
-          <a:xfrm>
-            <a:off x="365760" y="2825496"/>
-            <a:ext cx="2468880" cy="402336"/>
+          <p:cNvPr id="40" name="Shape 38"/>
+          <p:cNvSpPr/>
+          <p:nvPr/>
+        </p:nvSpPr>
+        <p:spPr>
+          <a:xfrm>
+            <a:off x="2971800" y="3666744"/>
+            <a:ext cx="2834640" cy="402336"/>
+          </a:xfrm>
+          <a:prstGeom prst="rect">
+            <a:avLst/>
+          </a:prstGeom>
+          <a:solidFill>
+            <a:srgbClr val="F1F5F9"/>
+          </a:solidFill>
+          <a:ln w="12700">
+            <a:solidFill>
+              <a:srgbClr val="E2E8F0"/>
+            </a:solidFill>
+            <a:prstDash val="solid"/>
+          </a:ln>
+        </p:spPr>
+      </p:sp>
+      <p:sp>
+        <p:nvSpPr>
+          <p:cNvPr id="41" name="Shape 39"/>
+          <p:cNvSpPr/>
+          <p:nvPr/>
+        </p:nvSpPr>
+        <p:spPr>
+          <a:xfrm>
+            <a:off x="5943600" y="3666744"/>
+            <a:ext cx="2834640" cy="402336"/>
+          </a:xfrm>
+          <a:prstGeom prst="rect">
+            <a:avLst/>
+          </a:prstGeom>
+          <a:solidFill>
+            <a:srgbClr val="FCE7F3"/>
+          </a:solidFill>
+          <a:ln w="12700">
+            <a:solidFill>
+              <a:srgbClr val="E2E8F0"/>
+            </a:solidFill>
+            <a:prstDash val="solid"/>
+          </a:ln>
+        </p:spPr>
+      </p:sp>
+      <p:sp>
+        <p:nvSpPr>
+          <p:cNvPr id="42" name="Text 40"/>
+          <p:cNvSpPr/>
+          <p:nvPr/>
+        </p:nvSpPr>
+        <p:spPr>
+          <a:xfrm>
+            <a:off x="5943600" y="3666744"/>
+            <a:ext cx="2834640" cy="402336"/>
           </a:xfrm>
           <a:prstGeom prst="rect">
             <a:avLst/>
@@ -34902,13 +36512,13 @@
             <a:r>
               <a:rPr lang="en-US" sz="1300" b="1" dirty="0">
                 <a:solidFill>
-                  <a:srgbClr val="4C1D95"/>
+                  <a:srgbClr val="9D174D"/>
                 </a:solidFill>
                 <a:latin typeface="Trebuchet MS" pitchFamily="34" charset="0"/>
                 <a:ea typeface="Trebuchet MS" pitchFamily="34" charset="-122"/>
                 <a:cs typeface="Trebuchet MS" pitchFamily="34" charset="-120"/>
               </a:rPr>
-              <a:t>semi-</a:t>
+              <a:t>-ed</a:t>
             </a:r>
             <a:endParaRPr lang="en-US" sz="1300" dirty="0"/>
           </a:p>
@@ -34916,64 +36526,14 @@
       </p:sp>
       <p:sp>
         <p:nvSpPr>
-          <p:cNvPr id="35" name="Shape 33"/>
-          <p:cNvSpPr/>
-          <p:nvPr/>
-        </p:nvSpPr>
-        <p:spPr>
-          <a:xfrm>
-            <a:off x="2971800" y="2825496"/>
-            <a:ext cx="2834640" cy="402336"/>
-          </a:xfrm>
-          <a:prstGeom prst="rect">
-            <a:avLst/>
-          </a:prstGeom>
-          <a:solidFill>
-            <a:srgbClr val="F1F5F9"/>
-          </a:solidFill>
-          <a:ln w="12700">
-            <a:solidFill>
-              <a:srgbClr val="E2E8F0"/>
-            </a:solidFill>
-            <a:prstDash val="solid"/>
-          </a:ln>
-        </p:spPr>
-      </p:sp>
-      <p:sp>
-        <p:nvSpPr>
-          <p:cNvPr id="36" name="Shape 34"/>
-          <p:cNvSpPr/>
-          <p:nvPr/>
-        </p:nvSpPr>
-        <p:spPr>
-          <a:xfrm>
-            <a:off x="5943600" y="2825496"/>
-            <a:ext cx="2834640" cy="402336"/>
-          </a:xfrm>
-          <a:prstGeom prst="rect">
-            <a:avLst/>
-          </a:prstGeom>
-          <a:solidFill>
-            <a:srgbClr val="FCE7F3"/>
-          </a:solidFill>
-          <a:ln w="12700">
-            <a:solidFill>
-              <a:srgbClr val="E2E8F0"/>
-            </a:solidFill>
-            <a:prstDash val="solid"/>
-          </a:ln>
-        </p:spPr>
-      </p:sp>
-      <p:sp>
-        <p:nvSpPr>
-          <p:cNvPr id="37" name="Text 35"/>
-          <p:cNvSpPr/>
-          <p:nvPr/>
-        </p:nvSpPr>
-        <p:spPr>
-          <a:xfrm>
-            <a:off x="5943600" y="2825496"/>
-            <a:ext cx="2834640" cy="402336"/>
+          <p:cNvPr id="43" name="Text 41"/>
+          <p:cNvSpPr/>
+          <p:nvPr/>
+        </p:nvSpPr>
+        <p:spPr>
+          <a:xfrm>
+            <a:off x="365760" y="3611880"/>
+            <a:ext cx="1828800" cy="347472"/>
           </a:xfrm>
           <a:prstGeom prst="rect">
             <a:avLst/>
@@ -34985,59 +36545,61 @@
           <a:bodyPr wrap="square" lIns="0" tIns="0" rIns="0" bIns="0" rtlCol="0" anchor="ctr"/>
           <a:lstStyle/>
           <a:p>
-            <a:pPr algn="ctr" indent="0" marL="0">
-              <a:buNone/>
-            </a:pPr>
-            <a:r>
-              <a:rPr lang="en-US" sz="1300" b="1" dirty="0">
-                <a:solidFill>
-                  <a:srgbClr val="9D174D"/>
+            <a:pPr algn="l" indent="0" marL="0">
+              <a:buNone/>
+            </a:pPr>
+            <a:r>
+              <a:rPr lang="en-US" sz="1200" b="1" dirty="0">
+                <a:solidFill>
+                  <a:srgbClr val="0F172A"/>
                 </a:solidFill>
                 <a:latin typeface="Trebuchet MS" pitchFamily="34" charset="0"/>
                 <a:ea typeface="Trebuchet MS" pitchFamily="34" charset="-122"/>
                 <a:cs typeface="Trebuchet MS" pitchFamily="34" charset="-120"/>
               </a:rPr>
-              <a:t>-ness</a:t>
-            </a:r>
-            <a:endParaRPr lang="en-US" sz="1300" dirty="0"/>
-          </a:p>
-        </p:txBody>
-      </p:sp>
-      <p:sp>
-        <p:nvSpPr>
-          <p:cNvPr id="38" name="Shape 36"/>
-          <p:cNvSpPr/>
-          <p:nvPr/>
-        </p:nvSpPr>
-        <p:spPr>
-          <a:xfrm>
-            <a:off x="365760" y="3246120"/>
-            <a:ext cx="2468880" cy="402336"/>
-          </a:xfrm>
-          <a:prstGeom prst="rect">
-            <a:avLst/>
-          </a:prstGeom>
-          <a:solidFill>
-            <a:srgbClr val="DDD6FE"/>
-          </a:solidFill>
-          <a:ln w="12700">
-            <a:solidFill>
-              <a:srgbClr val="E2E8F0"/>
-            </a:solidFill>
-            <a:prstDash val="solid"/>
-          </a:ln>
-        </p:spPr>
-      </p:sp>
-      <p:sp>
-        <p:nvSpPr>
-          <p:cNvPr id="39" name="Text 37"/>
-          <p:cNvSpPr/>
-          <p:nvPr/>
-        </p:nvSpPr>
-        <p:spPr>
-          <a:xfrm>
-            <a:off x="365760" y="3246120"/>
-            <a:ext cx="2468880" cy="402336"/>
+              <a:t>Sample words:</a:t>
+            </a:r>
+            <a:endParaRPr lang="en-US" sz="1200" dirty="0"/>
+          </a:p>
+        </p:txBody>
+      </p:sp>
+      <p:sp>
+        <p:nvSpPr>
+          <p:cNvPr id="44" name="Shape 42"/>
+          <p:cNvSpPr/>
+          <p:nvPr/>
+        </p:nvSpPr>
+        <p:spPr>
+          <a:xfrm>
+            <a:off x="365760" y="4023360"/>
+            <a:ext cx="2011680" cy="402336"/>
+          </a:xfrm>
+          <a:prstGeom prst="rect">
+            <a:avLst>
+              <a:gd name="adj" fmla="val 13636"/>
+            </a:avLst>
+          </a:prstGeom>
+          <a:solidFill>
+            <a:srgbClr val="EEF2FF"/>
+          </a:solidFill>
+          <a:ln w="12700">
+            <a:solidFill>
+              <a:srgbClr val="6366F1"/>
+            </a:solidFill>
+            <a:prstDash val="solid"/>
+          </a:ln>
+        </p:spPr>
+      </p:sp>
+      <p:sp>
+        <p:nvSpPr>
+          <p:cNvPr id="45" name="Text 43"/>
+          <p:cNvSpPr/>
+          <p:nvPr/>
+        </p:nvSpPr>
+        <p:spPr>
+          <a:xfrm>
+            <a:off x="365760" y="4023360"/>
+            <a:ext cx="2011680" cy="402336"/>
           </a:xfrm>
           <a:prstGeom prst="rect">
             <a:avLst/>
@@ -35053,80 +36615,57 @@
               <a:buNone/>
             </a:pPr>
             <a:r>
-              <a:rPr lang="en-US" sz="1300" b="1" dirty="0">
-                <a:solidFill>
-                  <a:srgbClr val="4C1D95"/>
+              <a:rPr lang="en-US" sz="1200" b="1" dirty="0">
+                <a:solidFill>
+                  <a:srgbClr val="4338CA"/>
                 </a:solidFill>
                 <a:latin typeface="Trebuchet MS" pitchFamily="34" charset="0"/>
                 <a:ea typeface="Trebuchet MS" pitchFamily="34" charset="-122"/>
                 <a:cs typeface="Trebuchet MS" pitchFamily="34" charset="-120"/>
               </a:rPr>
-              <a:t>ultra-</a:t>
-            </a:r>
-            <a:endParaRPr lang="en-US" sz="1300" dirty="0"/>
-          </a:p>
-        </p:txBody>
-      </p:sp>
-      <p:sp>
-        <p:nvSpPr>
-          <p:cNvPr id="40" name="Shape 38"/>
-          <p:cNvSpPr/>
-          <p:nvPr/>
-        </p:nvSpPr>
-        <p:spPr>
-          <a:xfrm>
-            <a:off x="2971800" y="3246120"/>
-            <a:ext cx="2834640" cy="402336"/>
-          </a:xfrm>
-          <a:prstGeom prst="rect">
-            <a:avLst/>
-          </a:prstGeom>
-          <a:solidFill>
-            <a:srgbClr val="F8FAFC"/>
-          </a:solidFill>
-          <a:ln w="12700">
-            <a:solidFill>
-              <a:srgbClr val="E2E8F0"/>
-            </a:solidFill>
-            <a:prstDash val="solid"/>
-          </a:ln>
-        </p:spPr>
-      </p:sp>
-      <p:sp>
-        <p:nvSpPr>
-          <p:cNvPr id="41" name="Shape 39"/>
-          <p:cNvSpPr/>
-          <p:nvPr/>
-        </p:nvSpPr>
-        <p:spPr>
-          <a:xfrm>
-            <a:off x="5943600" y="3246120"/>
-            <a:ext cx="2834640" cy="402336"/>
-          </a:xfrm>
-          <a:prstGeom prst="rect">
-            <a:avLst/>
-          </a:prstGeom>
-          <a:solidFill>
-            <a:srgbClr val="FCE7F3"/>
-          </a:solidFill>
-          <a:ln w="12700">
-            <a:solidFill>
-              <a:srgbClr val="E2E8F0"/>
-            </a:solidFill>
-            <a:prstDash val="solid"/>
-          </a:ln>
-        </p:spPr>
-      </p:sp>
-      <p:sp>
-        <p:nvSpPr>
-          <p:cNvPr id="42" name="Text 40"/>
-          <p:cNvSpPr/>
-          <p:nvPr/>
-        </p:nvSpPr>
-        <p:spPr>
-          <a:xfrm>
-            <a:off x="5943600" y="3246120"/>
-            <a:ext cx="2834640" cy="402336"/>
+              <a:t>fresh</a:t>
+            </a:r>
+            <a:endParaRPr lang="en-US" sz="1200" dirty="0"/>
+          </a:p>
+        </p:txBody>
+      </p:sp>
+      <p:sp>
+        <p:nvSpPr>
+          <p:cNvPr id="46" name="Shape 44"/>
+          <p:cNvSpPr/>
+          <p:nvPr/>
+        </p:nvSpPr>
+        <p:spPr>
+          <a:xfrm>
+            <a:off x="2542032" y="4023360"/>
+            <a:ext cx="2011680" cy="402336"/>
+          </a:xfrm>
+          <a:prstGeom prst="rect">
+            <a:avLst>
+              <a:gd name="adj" fmla="val 13636"/>
+            </a:avLst>
+          </a:prstGeom>
+          <a:solidFill>
+            <a:srgbClr val="EEF2FF"/>
+          </a:solidFill>
+          <a:ln w="12700">
+            <a:solidFill>
+              <a:srgbClr val="6366F1"/>
+            </a:solidFill>
+            <a:prstDash val="solid"/>
+          </a:ln>
+        </p:spPr>
+      </p:sp>
+      <p:sp>
+        <p:nvSpPr>
+          <p:cNvPr id="47" name="Text 45"/>
+          <p:cNvSpPr/>
+          <p:nvPr/>
+        </p:nvSpPr>
+        <p:spPr>
+          <a:xfrm>
+            <a:off x="2542032" y="4023360"/>
+            <a:ext cx="2011680" cy="402336"/>
           </a:xfrm>
           <a:prstGeom prst="rect">
             <a:avLst/>
@@ -35142,30 +36681,57 @@
               <a:buNone/>
             </a:pPr>
             <a:r>
-              <a:rPr lang="en-US" sz="1300" b="1" dirty="0">
-                <a:solidFill>
-                  <a:srgbClr val="9D174D"/>
+              <a:rPr lang="en-US" sz="1200" b="1" dirty="0">
+                <a:solidFill>
+                  <a:srgbClr val="4338CA"/>
                 </a:solidFill>
                 <a:latin typeface="Trebuchet MS" pitchFamily="34" charset="0"/>
                 <a:ea typeface="Trebuchet MS" pitchFamily="34" charset="-122"/>
                 <a:cs typeface="Trebuchet MS" pitchFamily="34" charset="-120"/>
               </a:rPr>
-              <a:t>-ing</a:t>
-            </a:r>
-            <a:endParaRPr lang="en-US" sz="1300" dirty="0"/>
-          </a:p>
-        </p:txBody>
-      </p:sp>
-      <p:sp>
-        <p:nvSpPr>
-          <p:cNvPr id="43" name="Text 41"/>
-          <p:cNvSpPr/>
-          <p:nvPr/>
-        </p:nvSpPr>
-        <p:spPr>
-          <a:xfrm>
-            <a:off x="365760" y="3611880"/>
-            <a:ext cx="1828800" cy="347472"/>
+              <a:t>freshen</a:t>
+            </a:r>
+            <a:endParaRPr lang="en-US" sz="1200" dirty="0"/>
+          </a:p>
+        </p:txBody>
+      </p:sp>
+      <p:sp>
+        <p:nvSpPr>
+          <p:cNvPr id="48" name="Shape 46"/>
+          <p:cNvSpPr/>
+          <p:nvPr/>
+        </p:nvSpPr>
+        <p:spPr>
+          <a:xfrm>
+            <a:off x="4718304" y="4023360"/>
+            <a:ext cx="2011680" cy="402336"/>
+          </a:xfrm>
+          <a:prstGeom prst="rect">
+            <a:avLst>
+              <a:gd name="adj" fmla="val 13636"/>
+            </a:avLst>
+          </a:prstGeom>
+          <a:solidFill>
+            <a:srgbClr val="EEF2FF"/>
+          </a:solidFill>
+          <a:ln w="12700">
+            <a:solidFill>
+              <a:srgbClr val="6366F1"/>
+            </a:solidFill>
+            <a:prstDash val="solid"/>
+          </a:ln>
+        </p:spPr>
+      </p:sp>
+      <p:sp>
+        <p:nvSpPr>
+          <p:cNvPr id="49" name="Text 47"/>
+          <p:cNvSpPr/>
+          <p:nvPr/>
+        </p:nvSpPr>
+        <p:spPr>
+          <a:xfrm>
+            <a:off x="4718304" y="4023360"/>
+            <a:ext cx="2011680" cy="402336"/>
           </a:xfrm>
           <a:prstGeom prst="rect">
             <a:avLst/>
@@ -35177,19 +36743,19 @@
           <a:bodyPr wrap="square" lIns="0" tIns="0" rIns="0" bIns="0" rtlCol="0" anchor="ctr"/>
           <a:lstStyle/>
           <a:p>
-            <a:pPr algn="l" indent="0" marL="0">
+            <a:pPr algn="ctr" indent="0" marL="0">
               <a:buNone/>
             </a:pPr>
             <a:r>
               <a:rPr lang="en-US" sz="1200" b="1" dirty="0">
                 <a:solidFill>
-                  <a:srgbClr val="0F172A"/>
+                  <a:srgbClr val="4338CA"/>
                 </a:solidFill>
                 <a:latin typeface="Trebuchet MS" pitchFamily="34" charset="0"/>
                 <a:ea typeface="Trebuchet MS" pitchFamily="34" charset="-122"/>
                 <a:cs typeface="Trebuchet MS" pitchFamily="34" charset="-120"/>
               </a:rPr>
-              <a:t>Sample words:</a:t>
+              <a:t>fresher</a:t>
             </a:r>
             <a:endParaRPr lang="en-US" sz="1200" dirty="0"/>
           </a:p>
@@ -35197,13 +36763,13 @@
       </p:sp>
       <p:sp>
         <p:nvSpPr>
-          <p:cNvPr id="44" name="Shape 42"/>
-          <p:cNvSpPr/>
-          <p:nvPr/>
-        </p:nvSpPr>
-        <p:spPr>
-          <a:xfrm>
-            <a:off x="365760" y="4023360"/>
+          <p:cNvPr id="50" name="Shape 48"/>
+          <p:cNvSpPr/>
+          <p:nvPr/>
+        </p:nvSpPr>
+        <p:spPr>
+          <a:xfrm>
+            <a:off x="6894576" y="4023360"/>
             <a:ext cx="2011680" cy="402336"/>
           </a:xfrm>
           <a:prstGeom prst="rect">
@@ -35224,13 +36790,13 @@
       </p:sp>
       <p:sp>
         <p:nvSpPr>
-          <p:cNvPr id="45" name="Text 43"/>
-          <p:cNvSpPr/>
-          <p:nvPr/>
-        </p:nvSpPr>
-        <p:spPr>
-          <a:xfrm>
-            <a:off x="365760" y="4023360"/>
+          <p:cNvPr id="51" name="Text 49"/>
+          <p:cNvSpPr/>
+          <p:nvPr/>
+        </p:nvSpPr>
+        <p:spPr>
+          <a:xfrm>
+            <a:off x="6894576" y="4023360"/>
             <a:ext cx="2011680" cy="402336"/>
           </a:xfrm>
           <a:prstGeom prst="rect">
@@ -35255,7 +36821,7 @@
                 <a:ea typeface="Trebuchet MS" pitchFamily="34" charset="-122"/>
                 <a:cs typeface="Trebuchet MS" pitchFamily="34" charset="-120"/>
               </a:rPr>
-              <a:t>freshen</a:t>
+              <a:t>freshly</a:t>
             </a:r>
             <a:endParaRPr lang="en-US" sz="1200" dirty="0"/>
           </a:p>
@@ -35263,13 +36829,13 @@
       </p:sp>
       <p:sp>
         <p:nvSpPr>
-          <p:cNvPr id="46" name="Shape 44"/>
-          <p:cNvSpPr/>
-          <p:nvPr/>
-        </p:nvSpPr>
-        <p:spPr>
-          <a:xfrm>
-            <a:off x="2542032" y="4023360"/>
+          <p:cNvPr id="52" name="Shape 50"/>
+          <p:cNvSpPr/>
+          <p:nvPr/>
+        </p:nvSpPr>
+        <p:spPr>
+          <a:xfrm>
+            <a:off x="365760" y="4498848"/>
             <a:ext cx="2011680" cy="402336"/>
           </a:xfrm>
           <a:prstGeom prst="rect">
@@ -35290,13 +36856,13 @@
       </p:sp>
       <p:sp>
         <p:nvSpPr>
-          <p:cNvPr id="47" name="Text 45"/>
-          <p:cNvSpPr/>
-          <p:nvPr/>
-        </p:nvSpPr>
-        <p:spPr>
-          <a:xfrm>
-            <a:off x="2542032" y="4023360"/>
+          <p:cNvPr id="53" name="Text 51"/>
+          <p:cNvSpPr/>
+          <p:nvPr/>
+        </p:nvSpPr>
+        <p:spPr>
+          <a:xfrm>
+            <a:off x="365760" y="4498848"/>
             <a:ext cx="2011680" cy="402336"/>
           </a:xfrm>
           <a:prstGeom prst="rect">
@@ -35321,7 +36887,7 @@
                 <a:ea typeface="Trebuchet MS" pitchFamily="34" charset="-122"/>
                 <a:cs typeface="Trebuchet MS" pitchFamily="34" charset="-120"/>
               </a:rPr>
-              <a:t>freshly</a:t>
+              <a:t>refresh</a:t>
             </a:r>
             <a:endParaRPr lang="en-US" sz="1200" dirty="0"/>
           </a:p>
@@ -35329,13 +36895,13 @@
       </p:sp>
       <p:sp>
         <p:nvSpPr>
-          <p:cNvPr id="48" name="Shape 46"/>
-          <p:cNvSpPr/>
-          <p:nvPr/>
-        </p:nvSpPr>
-        <p:spPr>
-          <a:xfrm>
-            <a:off x="4718304" y="4023360"/>
+          <p:cNvPr id="54" name="Shape 52"/>
+          <p:cNvSpPr/>
+          <p:nvPr/>
+        </p:nvSpPr>
+        <p:spPr>
+          <a:xfrm>
+            <a:off x="2542032" y="4498848"/>
             <a:ext cx="2011680" cy="402336"/>
           </a:xfrm>
           <a:prstGeom prst="rect">
@@ -35356,13 +36922,13 @@
       </p:sp>
       <p:sp>
         <p:nvSpPr>
-          <p:cNvPr id="49" name="Text 47"/>
-          <p:cNvSpPr/>
-          <p:nvPr/>
-        </p:nvSpPr>
-        <p:spPr>
-          <a:xfrm>
-            <a:off x="4718304" y="4023360"/>
+          <p:cNvPr id="55" name="Text 53"/>
+          <p:cNvSpPr/>
+          <p:nvPr/>
+        </p:nvSpPr>
+        <p:spPr>
+          <a:xfrm>
+            <a:off x="2542032" y="4498848"/>
             <a:ext cx="2011680" cy="402336"/>
           </a:xfrm>
           <a:prstGeom prst="rect">
@@ -35387,7 +36953,7 @@
                 <a:ea typeface="Trebuchet MS" pitchFamily="34" charset="-122"/>
                 <a:cs typeface="Trebuchet MS" pitchFamily="34" charset="-120"/>
               </a:rPr>
-              <a:t>freshness</a:t>
+              <a:t>freshest</a:t>
             </a:r>
             <a:endParaRPr lang="en-US" sz="1200" dirty="0"/>
           </a:p>
@@ -35395,13 +36961,13 @@
       </p:sp>
       <p:sp>
         <p:nvSpPr>
-          <p:cNvPr id="50" name="Shape 48"/>
-          <p:cNvSpPr/>
-          <p:nvPr/>
-        </p:nvSpPr>
-        <p:spPr>
-          <a:xfrm>
-            <a:off x="6894576" y="4023360"/>
+          <p:cNvPr id="56" name="Shape 54"/>
+          <p:cNvSpPr/>
+          <p:nvPr/>
+        </p:nvSpPr>
+        <p:spPr>
+          <a:xfrm>
+            <a:off x="4718304" y="4498848"/>
             <a:ext cx="2011680" cy="402336"/>
           </a:xfrm>
           <a:prstGeom prst="rect">
@@ -35422,13 +36988,13 @@
       </p:sp>
       <p:sp>
         <p:nvSpPr>
-          <p:cNvPr id="51" name="Text 49"/>
-          <p:cNvSpPr/>
-          <p:nvPr/>
-        </p:nvSpPr>
-        <p:spPr>
-          <a:xfrm>
-            <a:off x="6894576" y="4023360"/>
+          <p:cNvPr id="57" name="Text 55"/>
+          <p:cNvSpPr/>
+          <p:nvPr/>
+        </p:nvSpPr>
+        <p:spPr>
+          <a:xfrm>
+            <a:off x="4718304" y="4498848"/>
             <a:ext cx="2011680" cy="402336"/>
           </a:xfrm>
           <a:prstGeom prst="rect">
@@ -35453,271 +37019,7 @@
                 <a:ea typeface="Trebuchet MS" pitchFamily="34" charset="-122"/>
                 <a:cs typeface="Trebuchet MS" pitchFamily="34" charset="-120"/>
               </a:rPr>
-              <a:t>refresh</a:t>
-            </a:r>
-            <a:endParaRPr lang="en-US" sz="1200" dirty="0"/>
-          </a:p>
-        </p:txBody>
-      </p:sp>
-      <p:sp>
-        <p:nvSpPr>
-          <p:cNvPr id="52" name="Shape 50"/>
-          <p:cNvSpPr/>
-          <p:nvPr/>
-        </p:nvSpPr>
-        <p:spPr>
-          <a:xfrm>
-            <a:off x="365760" y="4498848"/>
-            <a:ext cx="2011680" cy="402336"/>
-          </a:xfrm>
-          <a:prstGeom prst="rect">
-            <a:avLst>
-              <a:gd name="adj" fmla="val 13636"/>
-            </a:avLst>
-          </a:prstGeom>
-          <a:solidFill>
-            <a:srgbClr val="EEF2FF"/>
-          </a:solidFill>
-          <a:ln w="12700">
-            <a:solidFill>
-              <a:srgbClr val="6366F1"/>
-            </a:solidFill>
-            <a:prstDash val="solid"/>
-          </a:ln>
-        </p:spPr>
-      </p:sp>
-      <p:sp>
-        <p:nvSpPr>
-          <p:cNvPr id="53" name="Text 51"/>
-          <p:cNvSpPr/>
-          <p:nvPr/>
-        </p:nvSpPr>
-        <p:spPr>
-          <a:xfrm>
-            <a:off x="365760" y="4498848"/>
-            <a:ext cx="2011680" cy="402336"/>
-          </a:xfrm>
-          <a:prstGeom prst="rect">
-            <a:avLst/>
-          </a:prstGeom>
-          <a:noFill/>
-          <a:ln/>
-        </p:spPr>
-        <p:txBody>
-          <a:bodyPr wrap="square" lIns="0" tIns="0" rIns="0" bIns="0" rtlCol="0" anchor="ctr"/>
-          <a:lstStyle/>
-          <a:p>
-            <a:pPr algn="ctr" indent="0" marL="0">
-              <a:buNone/>
-            </a:pPr>
-            <a:r>
-              <a:rPr lang="en-US" sz="1200" b="1" dirty="0">
-                <a:solidFill>
-                  <a:srgbClr val="4338CA"/>
-                </a:solidFill>
-                <a:latin typeface="Trebuchet MS" pitchFamily="34" charset="0"/>
-                <a:ea typeface="Trebuchet MS" pitchFamily="34" charset="-122"/>
-                <a:cs typeface="Trebuchet MS" pitchFamily="34" charset="-120"/>
-              </a:rPr>
-              <a:t>refreshing</a:t>
-            </a:r>
-            <a:endParaRPr lang="en-US" sz="1200" dirty="0"/>
-          </a:p>
-        </p:txBody>
-      </p:sp>
-      <p:sp>
-        <p:nvSpPr>
-          <p:cNvPr id="54" name="Shape 52"/>
-          <p:cNvSpPr/>
-          <p:nvPr/>
-        </p:nvSpPr>
-        <p:spPr>
-          <a:xfrm>
-            <a:off x="2542032" y="4498848"/>
-            <a:ext cx="2011680" cy="402336"/>
-          </a:xfrm>
-          <a:prstGeom prst="rect">
-            <a:avLst>
-              <a:gd name="adj" fmla="val 13636"/>
-            </a:avLst>
-          </a:prstGeom>
-          <a:solidFill>
-            <a:srgbClr val="EEF2FF"/>
-          </a:solidFill>
-          <a:ln w="12700">
-            <a:solidFill>
-              <a:srgbClr val="6366F1"/>
-            </a:solidFill>
-            <a:prstDash val="solid"/>
-          </a:ln>
-        </p:spPr>
-      </p:sp>
-      <p:sp>
-        <p:nvSpPr>
-          <p:cNvPr id="55" name="Text 53"/>
-          <p:cNvSpPr/>
-          <p:nvPr/>
-        </p:nvSpPr>
-        <p:spPr>
-          <a:xfrm>
-            <a:off x="2542032" y="4498848"/>
-            <a:ext cx="2011680" cy="402336"/>
-          </a:xfrm>
-          <a:prstGeom prst="rect">
-            <a:avLst/>
-          </a:prstGeom>
-          <a:noFill/>
-          <a:ln/>
-        </p:spPr>
-        <p:txBody>
-          <a:bodyPr wrap="square" lIns="0" tIns="0" rIns="0" bIns="0" rtlCol="0" anchor="ctr"/>
-          <a:lstStyle/>
-          <a:p>
-            <a:pPr algn="ctr" indent="0" marL="0">
-              <a:buNone/>
-            </a:pPr>
-            <a:r>
-              <a:rPr lang="en-US" sz="1200" b="1" dirty="0">
-                <a:solidFill>
-                  <a:srgbClr val="4338CA"/>
-                </a:solidFill>
-                <a:latin typeface="Trebuchet MS" pitchFamily="34" charset="0"/>
-                <a:ea typeface="Trebuchet MS" pitchFamily="34" charset="-122"/>
-                <a:cs typeface="Trebuchet MS" pitchFamily="34" charset="-120"/>
-              </a:rPr>
-              <a:t>refreshment</a:t>
-            </a:r>
-            <a:endParaRPr lang="en-US" sz="1200" dirty="0"/>
-          </a:p>
-        </p:txBody>
-      </p:sp>
-      <p:sp>
-        <p:nvSpPr>
-          <p:cNvPr id="56" name="Shape 54"/>
-          <p:cNvSpPr/>
-          <p:nvPr/>
-        </p:nvSpPr>
-        <p:spPr>
-          <a:xfrm>
-            <a:off x="4718304" y="4498848"/>
-            <a:ext cx="2011680" cy="402336"/>
-          </a:xfrm>
-          <a:prstGeom prst="rect">
-            <a:avLst>
-              <a:gd name="adj" fmla="val 13636"/>
-            </a:avLst>
-          </a:prstGeom>
-          <a:solidFill>
-            <a:srgbClr val="EEF2FF"/>
-          </a:solidFill>
-          <a:ln w="12700">
-            <a:solidFill>
-              <a:srgbClr val="6366F1"/>
-            </a:solidFill>
-            <a:prstDash val="solid"/>
-          </a:ln>
-        </p:spPr>
-      </p:sp>
-      <p:sp>
-        <p:nvSpPr>
-          <p:cNvPr id="57" name="Text 55"/>
-          <p:cNvSpPr/>
-          <p:nvPr/>
-        </p:nvSpPr>
-        <p:spPr>
-          <a:xfrm>
-            <a:off x="4718304" y="4498848"/>
-            <a:ext cx="2011680" cy="402336"/>
-          </a:xfrm>
-          <a:prstGeom prst="rect">
-            <a:avLst/>
-          </a:prstGeom>
-          <a:noFill/>
-          <a:ln/>
-        </p:spPr>
-        <p:txBody>
-          <a:bodyPr wrap="square" lIns="0" tIns="0" rIns="0" bIns="0" rtlCol="0" anchor="ctr"/>
-          <a:lstStyle/>
-          <a:p>
-            <a:pPr algn="ctr" indent="0" marL="0">
-              <a:buNone/>
-            </a:pPr>
-            <a:r>
-              <a:rPr lang="en-US" sz="1200" b="1" dirty="0">
-                <a:solidFill>
-                  <a:srgbClr val="4338CA"/>
-                </a:solidFill>
-                <a:latin typeface="Trebuchet MS" pitchFamily="34" charset="0"/>
-                <a:ea typeface="Trebuchet MS" pitchFamily="34" charset="-122"/>
-                <a:cs typeface="Trebuchet MS" pitchFamily="34" charset="-120"/>
-              </a:rPr>
-              <a:t>unfresh</a:t>
-            </a:r>
-            <a:endParaRPr lang="en-US" sz="1200" dirty="0"/>
-          </a:p>
-        </p:txBody>
-      </p:sp>
-      <p:sp>
-        <p:nvSpPr>
-          <p:cNvPr id="58" name="Shape 56"/>
-          <p:cNvSpPr/>
-          <p:nvPr/>
-        </p:nvSpPr>
-        <p:spPr>
-          <a:xfrm>
-            <a:off x="6894576" y="4498848"/>
-            <a:ext cx="2011680" cy="402336"/>
-          </a:xfrm>
-          <a:prstGeom prst="rect">
-            <a:avLst>
-              <a:gd name="adj" fmla="val 13636"/>
-            </a:avLst>
-          </a:prstGeom>
-          <a:solidFill>
-            <a:srgbClr val="EEF2FF"/>
-          </a:solidFill>
-          <a:ln w="12700">
-            <a:solidFill>
-              <a:srgbClr val="6366F1"/>
-            </a:solidFill>
-            <a:prstDash val="solid"/>
-          </a:ln>
-        </p:spPr>
-      </p:sp>
-      <p:sp>
-        <p:nvSpPr>
-          <p:cNvPr id="59" name="Text 57"/>
-          <p:cNvSpPr/>
-          <p:nvPr/>
-        </p:nvSpPr>
-        <p:spPr>
-          <a:xfrm>
-            <a:off x="6894576" y="4498848"/>
-            <a:ext cx="2011680" cy="402336"/>
-          </a:xfrm>
-          <a:prstGeom prst="rect">
-            <a:avLst/>
-          </a:prstGeom>
-          <a:noFill/>
-          <a:ln/>
-        </p:spPr>
-        <p:txBody>
-          <a:bodyPr wrap="square" lIns="0" tIns="0" rIns="0" bIns="0" rtlCol="0" anchor="ctr"/>
-          <a:lstStyle/>
-          <a:p>
-            <a:pPr algn="ctr" indent="0" marL="0">
-              <a:buNone/>
-            </a:pPr>
-            <a:r>
-              <a:rPr lang="en-US" sz="1200" b="1" dirty="0">
-                <a:solidFill>
-                  <a:srgbClr val="4338CA"/>
-                </a:solidFill>
-                <a:latin typeface="Trebuchet MS" pitchFamily="34" charset="0"/>
-                <a:ea typeface="Trebuchet MS" pitchFamily="34" charset="-122"/>
-                <a:cs typeface="Trebuchet MS" pitchFamily="34" charset="-120"/>
-              </a:rPr>
-              <a:t>freshener</a:t>
+              <a:t>freshened</a:t>
             </a:r>
             <a:endParaRPr lang="en-US" sz="1200" dirty="0"/>
           </a:p>
@@ -36009,7 +37311,7 @@
                 <a:ea typeface="Calibri" pitchFamily="34" charset="-122"/>
                 <a:cs typeface="Calibri" pitchFamily="34" charset="-120"/>
               </a:rPr>
-              <a:t>Word Labs  •  wordlabs.app  •  Root: 'fresh' = new, clean, not stale</a:t>
+              <a:t>Word Labs  •  wordlabs.app  •  Root: 'fresh' = new; recently made</a:t>
             </a:r>
             <a:endParaRPr lang="en-US" sz="800" dirty="0"/>
           </a:p>
@@ -36173,7 +37475,7 @@
                 <a:ea typeface="Calibri" pitchFamily="34" charset="-122"/>
                 <a:cs typeface="Calibri" pitchFamily="34" charset="-120"/>
               </a:rPr>
-              <a:t>The core part of a word carrying its basic meaning. For example, 'fresh' means 'new, clean, not stale'.</a:t>
+              <a:t>The core part of a word carrying its basic meaning. For example, 'fresh' means 'new; recently made'.</a:t>
             </a:r>
             <a:endParaRPr lang="en-US" sz="1350" dirty="0"/>
           </a:p>
@@ -36793,7 +38095,7 @@
                 <a:ea typeface="Calibri" pitchFamily="34" charset="-122"/>
                 <a:cs typeface="Calibri" pitchFamily="34" charset="-120"/>
               </a:rPr>
-              <a:t>Word Labs  •  wordlabs.app  •  Root: 'fresh' = new, clean, not stale</a:t>
+              <a:t>Word Labs  •  wordlabs.app  •  Root: 'fresh' = new; recently made</a:t>
             </a:r>
             <a:endParaRPr lang="en-US" sz="800" dirty="0"/>
           </a:p>
@@ -36905,7 +38207,7 @@
                 <a:ea typeface="Calibri" pitchFamily="34" charset="-122"/>
                 <a:cs typeface="Calibri" pitchFamily="34" charset="-120"/>
               </a:rPr>
-              <a:t>1.  'Freshness' means the quality of being new and clean.</a:t>
+              <a:t>1.  'freshen' means 'to break something into tiny pieces'.</a:t>
             </a:r>
             <a:endParaRPr lang="en-US" sz="1300" dirty="0"/>
           </a:p>
@@ -36928,11 +38230,11 @@
             </a:avLst>
           </a:prstGeom>
           <a:solidFill>
-            <a:srgbClr val="DCFCE7"/>
-          </a:solidFill>
-          <a:ln w="12700">
-            <a:solidFill>
-              <a:srgbClr val="16A34A"/>
+            <a:srgbClr val="FEE2E2"/>
+          </a:solidFill>
+          <a:ln w="12700">
+            <a:solidFill>
+              <a:srgbClr val="DC2626"/>
             </a:solidFill>
             <a:prstDash val="solid"/>
           </a:ln>
@@ -36965,13 +38267,13 @@
             <a:r>
               <a:rPr lang="en-US" sz="1100" b="1" dirty="0">
                 <a:solidFill>
-                  <a:srgbClr val="16A34A"/>
+                  <a:srgbClr val="DC2626"/>
                 </a:solidFill>
                 <a:latin typeface="Trebuchet MS" pitchFamily="34" charset="0"/>
                 <a:ea typeface="Trebuchet MS" pitchFamily="34" charset="-122"/>
                 <a:cs typeface="Trebuchet MS" pitchFamily="34" charset="-120"/>
               </a:rPr>
-              <a:t>TRUE</a:t>
+              <a:t>FALSE</a:t>
             </a:r>
             <a:endParaRPr lang="en-US" sz="1100" dirty="0"/>
           </a:p>
@@ -37044,7 +38346,7 @@
                 <a:ea typeface="Calibri" pitchFamily="34" charset="-122"/>
                 <a:cs typeface="Calibri" pitchFamily="34" charset="-120"/>
               </a:rPr>
-              <a:t>2.  The word 'refresh' contains the root 'fresh'.</a:t>
+              <a:t>2.  'fresh' means 'new; recently made'.</a:t>
             </a:r>
             <a:endParaRPr lang="en-US" sz="1300" dirty="0"/>
           </a:p>
@@ -37183,7 +38485,7 @@
                 <a:ea typeface="Calibri" pitchFamily="34" charset="-122"/>
                 <a:cs typeface="Calibri" pitchFamily="34" charset="-120"/>
               </a:rPr>
-              <a:t>3.  The suffix '-ly' in 'freshly' turns the word into a noun.</a:t>
+              <a:t>3.  'fresh' means 'newly made, grown, or obtained; not stale or old'.</a:t>
             </a:r>
             <a:endParaRPr lang="en-US" sz="1300" dirty="0"/>
           </a:p>
@@ -37206,11 +38508,11 @@
             </a:avLst>
           </a:prstGeom>
           <a:solidFill>
-            <a:srgbClr val="FEE2E2"/>
-          </a:solidFill>
-          <a:ln w="12700">
-            <a:solidFill>
-              <a:srgbClr val="DC2626"/>
+            <a:srgbClr val="DCFCE7"/>
+          </a:solidFill>
+          <a:ln w="12700">
+            <a:solidFill>
+              <a:srgbClr val="16A34A"/>
             </a:solidFill>
             <a:prstDash val="solid"/>
           </a:ln>
@@ -37243,13 +38545,13 @@
             <a:r>
               <a:rPr lang="en-US" sz="1100" b="1" dirty="0">
                 <a:solidFill>
-                  <a:srgbClr val="DC2626"/>
+                  <a:srgbClr val="16A34A"/>
                 </a:solidFill>
                 <a:latin typeface="Trebuchet MS" pitchFamily="34" charset="0"/>
                 <a:ea typeface="Trebuchet MS" pitchFamily="34" charset="-122"/>
                 <a:cs typeface="Trebuchet MS" pitchFamily="34" charset="-120"/>
               </a:rPr>
-              <a:t>FALSE</a:t>
+              <a:t>TRUE</a:t>
             </a:r>
             <a:endParaRPr lang="en-US" sz="1100" dirty="0"/>
           </a:p>
@@ -37322,7 +38624,7 @@
                 <a:ea typeface="Calibri" pitchFamily="34" charset="-122"/>
                 <a:cs typeface="Calibri" pitchFamily="34" charset="-120"/>
               </a:rPr>
-              <a:t>4.  The root 'fresh' comes from the Greek word for water.</a:t>
+              <a:t>4.  'fresh' means 'extremely heavy and difficult to lift'.</a:t>
             </a:r>
             <a:endParaRPr lang="en-US" sz="1300" dirty="0"/>
           </a:p>
@@ -37461,7 +38763,7 @@
                 <a:ea typeface="Calibri" pitchFamily="34" charset="-122"/>
                 <a:cs typeface="Calibri" pitchFamily="34" charset="-120"/>
               </a:rPr>
-              <a:t>5.  Adding 're-' before 'fresh' means to make something fresh again.</a:t>
+              <a:t>5.  'freshen' means 'to make something newer, cleaner, or more lively'.</a:t>
             </a:r>
             <a:endParaRPr lang="en-US" sz="1300" dirty="0"/>
           </a:p>
@@ -37819,7 +39121,7 @@
                 <a:ea typeface="Calibri" pitchFamily="34" charset="-122"/>
                 <a:cs typeface="Calibri" pitchFamily="34" charset="-120"/>
               </a:rPr>
-              <a:t>Word Labs  •  wordlabs.app  •  Root: 'fresh' = new, clean, not stale</a:t>
+              <a:t>Word Labs  •  wordlabs.app  •  Root: 'fresh' = new; recently made</a:t>
             </a:r>
             <a:endParaRPr lang="en-US" sz="800" dirty="0"/>
           </a:p>
@@ -37956,7 +39258,7 @@
                 <a:ea typeface="Trebuchet MS" pitchFamily="34" charset="-122"/>
                 <a:cs typeface="Trebuchet MS" pitchFamily="34" charset="-120"/>
               </a:rPr>
-              <a:t>new, clean, not stale</a:t>
+              <a:t>new; recently made</a:t>
             </a:r>
             <a:endParaRPr lang="en-US" sz="2000" dirty="0"/>
           </a:p>
@@ -37995,7 +39297,7 @@
                 <a:ea typeface="Calibri" pitchFamily="34" charset="-122"/>
                 <a:cs typeface="Calibri" pitchFamily="34" charset="-120"/>
               </a:rPr>
-              <a:t>Origin: Latin: friscus</a:t>
+              <a:t>Origin: Anglo-Saxon (Old English) root</a:t>
             </a:r>
             <a:endParaRPr lang="en-US" sz="1100" dirty="0"/>
           </a:p>
@@ -38100,7 +39402,7 @@
                 <a:ea typeface="Trebuchet MS" pitchFamily="34" charset="-122"/>
                 <a:cs typeface="Trebuchet MS" pitchFamily="34" charset="-120"/>
               </a:rPr>
-              <a:t>freshen</a:t>
+              <a:t>fresh</a:t>
             </a:r>
             <a:endParaRPr lang="en-US" sz="1300" dirty="0"/>
           </a:p>
@@ -38166,7 +39468,7 @@
                 <a:ea typeface="Trebuchet MS" pitchFamily="34" charset="-122"/>
                 <a:cs typeface="Trebuchet MS" pitchFamily="34" charset="-120"/>
               </a:rPr>
-              <a:t>freshly</a:t>
+              <a:t>freshen</a:t>
             </a:r>
             <a:endParaRPr lang="en-US" sz="1300" dirty="0"/>
           </a:p>
@@ -38232,7 +39534,7 @@
                 <a:ea typeface="Trebuchet MS" pitchFamily="34" charset="-122"/>
                 <a:cs typeface="Trebuchet MS" pitchFamily="34" charset="-120"/>
               </a:rPr>
-              <a:t>freshness</a:t>
+              <a:t>fresher</a:t>
             </a:r>
             <a:endParaRPr lang="en-US" sz="1300" dirty="0"/>
           </a:p>
@@ -38298,7 +39600,7 @@
                 <a:ea typeface="Trebuchet MS" pitchFamily="34" charset="-122"/>
                 <a:cs typeface="Trebuchet MS" pitchFamily="34" charset="-120"/>
               </a:rPr>
-              <a:t>refresh</a:t>
+              <a:t>freshly</a:t>
             </a:r>
             <a:endParaRPr lang="en-US" sz="1300" dirty="0"/>
           </a:p>
@@ -38364,7 +39666,7 @@
                 <a:ea typeface="Trebuchet MS" pitchFamily="34" charset="-122"/>
                 <a:cs typeface="Trebuchet MS" pitchFamily="34" charset="-120"/>
               </a:rPr>
-              <a:t>refreshing</a:t>
+              <a:t>refresh</a:t>
             </a:r>
             <a:endParaRPr lang="en-US" sz="1300" dirty="0"/>
           </a:p>
@@ -38430,7 +39732,7 @@
                 <a:ea typeface="Trebuchet MS" pitchFamily="34" charset="-122"/>
                 <a:cs typeface="Trebuchet MS" pitchFamily="34" charset="-120"/>
               </a:rPr>
-              <a:t>refreshment</a:t>
+              <a:t>freshest</a:t>
             </a:r>
             <a:endParaRPr lang="en-US" sz="1300" dirty="0"/>
           </a:p>
@@ -38496,7 +39798,7 @@
                 <a:ea typeface="Trebuchet MS" pitchFamily="34" charset="-122"/>
                 <a:cs typeface="Trebuchet MS" pitchFamily="34" charset="-120"/>
               </a:rPr>
-              <a:t>unfresh</a:t>
+              <a:t>freshened</a:t>
             </a:r>
             <a:endParaRPr lang="en-US" sz="1300" dirty="0"/>
           </a:p>
@@ -38788,7 +40090,7 @@
                 <a:ea typeface="Calibri" pitchFamily="34" charset="-122"/>
                 <a:cs typeface="Calibri" pitchFamily="34" charset="-120"/>
               </a:rPr>
-              <a:t>Word Labs  •  wordlabs.app  •  Root: 'fresh' = new, clean, not stale</a:t>
+              <a:t>Word Labs  •  wordlabs.app  •  Root: 'fresh' = new; recently made</a:t>
             </a:r>
             <a:endParaRPr lang="en-US" sz="800" dirty="0"/>
           </a:p>
@@ -39238,7 +40540,7 @@
             <a:avLst/>
           </a:prstGeom>
           <a:solidFill>
-            <a:srgbClr val="DDD6FE"/>
+            <a:srgbClr val="F1F5F9"/>
           </a:solidFill>
           <a:ln w="12700">
             <a:solidFill>
@@ -39250,18 +40552,68 @@
       </p:sp>
       <p:sp>
         <p:nvSpPr>
-          <p:cNvPr id="24" name="Text 22"/>
-          <p:cNvSpPr/>
-          <p:nvPr/>
-        </p:nvSpPr>
-        <p:spPr>
-          <a:xfrm>
-            <a:off x="640080" y="2212848"/>
+          <p:cNvPr id="24" name="Shape 22"/>
+          <p:cNvSpPr/>
+          <p:nvPr/>
+        </p:nvSpPr>
+        <p:spPr>
+          <a:xfrm>
+            <a:off x="3291840" y="2212848"/>
+            <a:ext cx="1645920" cy="420624"/>
+          </a:xfrm>
+          <a:prstGeom prst="rect">
+            <a:avLst/>
+          </a:prstGeom>
+          <a:solidFill>
+            <a:srgbClr val="F1F5F9"/>
+          </a:solidFill>
+          <a:ln w="12700">
+            <a:solidFill>
+              <a:srgbClr val="E5E7EB"/>
+            </a:solidFill>
+            <a:prstDash val="solid"/>
+          </a:ln>
+        </p:spPr>
+      </p:sp>
+      <p:sp>
+        <p:nvSpPr>
+          <p:cNvPr id="25" name="Shape 23"/>
+          <p:cNvSpPr/>
+          <p:nvPr/>
+        </p:nvSpPr>
+        <p:spPr>
+          <a:xfrm>
+            <a:off x="5943600" y="2212848"/>
             <a:ext cx="1463040" cy="420624"/>
           </a:xfrm>
           <a:prstGeom prst="rect">
             <a:avLst/>
           </a:prstGeom>
+          <a:solidFill>
+            <a:srgbClr val="FCE7F3"/>
+          </a:solidFill>
+          <a:ln w="12700">
+            <a:solidFill>
+              <a:srgbClr val="E5E7EB"/>
+            </a:solidFill>
+            <a:prstDash val="solid"/>
+          </a:ln>
+        </p:spPr>
+      </p:sp>
+      <p:sp>
+        <p:nvSpPr>
+          <p:cNvPr id="26" name="Text 24"/>
+          <p:cNvSpPr/>
+          <p:nvPr/>
+        </p:nvSpPr>
+        <p:spPr>
+          <a:xfrm>
+            <a:off x="5943600" y="2212848"/>
+            <a:ext cx="1463040" cy="420624"/>
+          </a:xfrm>
+          <a:prstGeom prst="rect">
+            <a:avLst/>
+          </a:prstGeom>
           <a:noFill/>
           <a:ln/>
         </p:spPr>
@@ -39275,13 +40627,13 @@
             <a:r>
               <a:rPr lang="en-US" sz="1300" b="1" dirty="0">
                 <a:solidFill>
-                  <a:srgbClr val="4C1D95"/>
+                  <a:srgbClr val="9D174D"/>
                 </a:solidFill>
                 <a:latin typeface="Trebuchet MS" pitchFamily="34" charset="0"/>
                 <a:ea typeface="Trebuchet MS" pitchFamily="34" charset="-122"/>
                 <a:cs typeface="Trebuchet MS" pitchFamily="34" charset="-120"/>
               </a:rPr>
-              <a:t>un-</a:t>
+              <a:t>-er</a:t>
             </a:r>
             <a:endParaRPr lang="en-US" sz="1300" dirty="0"/>
           </a:p>
@@ -39289,20 +40641,45 @@
       </p:sp>
       <p:sp>
         <p:nvSpPr>
-          <p:cNvPr id="25" name="Shape 23"/>
-          <p:cNvSpPr/>
-          <p:nvPr/>
-        </p:nvSpPr>
-        <p:spPr>
-          <a:xfrm>
-            <a:off x="3291840" y="2212848"/>
+          <p:cNvPr id="27" name="Shape 25"/>
+          <p:cNvSpPr/>
+          <p:nvPr/>
+        </p:nvSpPr>
+        <p:spPr>
+          <a:xfrm>
+            <a:off x="640080" y="2670048"/>
+            <a:ext cx="1463040" cy="420624"/>
+          </a:xfrm>
+          <a:prstGeom prst="rect">
+            <a:avLst/>
+          </a:prstGeom>
+          <a:solidFill>
+            <a:srgbClr val="F8FAFC"/>
+          </a:solidFill>
+          <a:ln w="12700">
+            <a:solidFill>
+              <a:srgbClr val="E5E7EB"/>
+            </a:solidFill>
+            <a:prstDash val="solid"/>
+          </a:ln>
+        </p:spPr>
+      </p:sp>
+      <p:sp>
+        <p:nvSpPr>
+          <p:cNvPr id="28" name="Shape 26"/>
+          <p:cNvSpPr/>
+          <p:nvPr/>
+        </p:nvSpPr>
+        <p:spPr>
+          <a:xfrm>
+            <a:off x="3291840" y="2670048"/>
             <a:ext cx="1645920" cy="420624"/>
           </a:xfrm>
           <a:prstGeom prst="rect">
             <a:avLst/>
           </a:prstGeom>
           <a:solidFill>
-            <a:srgbClr val="F1F5F9"/>
+            <a:srgbClr val="F8FAFC"/>
           </a:solidFill>
           <a:ln w="12700">
             <a:solidFill>
@@ -39314,13 +40691,13 @@
       </p:sp>
       <p:sp>
         <p:nvSpPr>
-          <p:cNvPr id="26" name="Shape 24"/>
-          <p:cNvSpPr/>
-          <p:nvPr/>
-        </p:nvSpPr>
-        <p:spPr>
-          <a:xfrm>
-            <a:off x="5943600" y="2212848"/>
+          <p:cNvPr id="29" name="Shape 27"/>
+          <p:cNvSpPr/>
+          <p:nvPr/>
+        </p:nvSpPr>
+        <p:spPr>
+          <a:xfrm>
+            <a:off x="5943600" y="2670048"/>
             <a:ext cx="1463040" cy="420624"/>
           </a:xfrm>
           <a:prstGeom prst="rect">
@@ -39339,13 +40716,13 @@
       </p:sp>
       <p:sp>
         <p:nvSpPr>
-          <p:cNvPr id="27" name="Text 25"/>
-          <p:cNvSpPr/>
-          <p:nvPr/>
-        </p:nvSpPr>
-        <p:spPr>
-          <a:xfrm>
-            <a:off x="5943600" y="2212848"/>
+          <p:cNvPr id="30" name="Text 28"/>
+          <p:cNvSpPr/>
+          <p:nvPr/>
+        </p:nvSpPr>
+        <p:spPr>
+          <a:xfrm>
+            <a:off x="5943600" y="2670048"/>
             <a:ext cx="1463040" cy="420624"/>
           </a:xfrm>
           <a:prstGeom prst="rect">
@@ -39370,7 +40747,7 @@
                 <a:ea typeface="Trebuchet MS" pitchFamily="34" charset="-122"/>
                 <a:cs typeface="Trebuchet MS" pitchFamily="34" charset="-120"/>
               </a:rPr>
-              <a:t>-er</a:t>
+              <a:t>-est</a:t>
             </a:r>
             <a:endParaRPr lang="en-US" sz="1300" dirty="0"/>
           </a:p>
@@ -39378,20 +40755,20 @@
       </p:sp>
       <p:sp>
         <p:nvSpPr>
-          <p:cNvPr id="28" name="Shape 26"/>
-          <p:cNvSpPr/>
-          <p:nvPr/>
-        </p:nvSpPr>
-        <p:spPr>
-          <a:xfrm>
-            <a:off x="640080" y="2670048"/>
+          <p:cNvPr id="31" name="Shape 29"/>
+          <p:cNvSpPr/>
+          <p:nvPr/>
+        </p:nvSpPr>
+        <p:spPr>
+          <a:xfrm>
+            <a:off x="640080" y="3127248"/>
             <a:ext cx="1463040" cy="420624"/>
           </a:xfrm>
           <a:prstGeom prst="rect">
             <a:avLst/>
           </a:prstGeom>
           <a:solidFill>
-            <a:srgbClr val="DDD6FE"/>
+            <a:srgbClr val="F1F5F9"/>
           </a:solidFill>
           <a:ln w="12700">
             <a:solidFill>
@@ -39403,18 +40780,68 @@
       </p:sp>
       <p:sp>
         <p:nvSpPr>
-          <p:cNvPr id="29" name="Text 27"/>
-          <p:cNvSpPr/>
-          <p:nvPr/>
-        </p:nvSpPr>
-        <p:spPr>
-          <a:xfrm>
-            <a:off x="640080" y="2670048"/>
+          <p:cNvPr id="32" name="Shape 30"/>
+          <p:cNvSpPr/>
+          <p:nvPr/>
+        </p:nvSpPr>
+        <p:spPr>
+          <a:xfrm>
+            <a:off x="3291840" y="3127248"/>
+            <a:ext cx="1645920" cy="420624"/>
+          </a:xfrm>
+          <a:prstGeom prst="rect">
+            <a:avLst/>
+          </a:prstGeom>
+          <a:solidFill>
+            <a:srgbClr val="F1F5F9"/>
+          </a:solidFill>
+          <a:ln w="12700">
+            <a:solidFill>
+              <a:srgbClr val="E5E7EB"/>
+            </a:solidFill>
+            <a:prstDash val="solid"/>
+          </a:ln>
+        </p:spPr>
+      </p:sp>
+      <p:sp>
+        <p:nvSpPr>
+          <p:cNvPr id="33" name="Shape 31"/>
+          <p:cNvSpPr/>
+          <p:nvPr/>
+        </p:nvSpPr>
+        <p:spPr>
+          <a:xfrm>
+            <a:off x="5943600" y="3127248"/>
             <a:ext cx="1463040" cy="420624"/>
           </a:xfrm>
           <a:prstGeom prst="rect">
             <a:avLst/>
           </a:prstGeom>
+          <a:solidFill>
+            <a:srgbClr val="FCE7F3"/>
+          </a:solidFill>
+          <a:ln w="12700">
+            <a:solidFill>
+              <a:srgbClr val="E5E7EB"/>
+            </a:solidFill>
+            <a:prstDash val="solid"/>
+          </a:ln>
+        </p:spPr>
+      </p:sp>
+      <p:sp>
+        <p:nvSpPr>
+          <p:cNvPr id="34" name="Text 32"/>
+          <p:cNvSpPr/>
+          <p:nvPr/>
+        </p:nvSpPr>
+        <p:spPr>
+          <a:xfrm>
+            <a:off x="5943600" y="3127248"/>
+            <a:ext cx="1463040" cy="420624"/>
+          </a:xfrm>
+          <a:prstGeom prst="rect">
+            <a:avLst/>
+          </a:prstGeom>
           <a:noFill/>
           <a:ln/>
         </p:spPr>
@@ -39428,13 +40855,13 @@
             <a:r>
               <a:rPr lang="en-US" sz="1300" b="1" dirty="0">
                 <a:solidFill>
-                  <a:srgbClr val="4C1D95"/>
+                  <a:srgbClr val="9D174D"/>
                 </a:solidFill>
                 <a:latin typeface="Trebuchet MS" pitchFamily="34" charset="0"/>
                 <a:ea typeface="Trebuchet MS" pitchFamily="34" charset="-122"/>
                 <a:cs typeface="Trebuchet MS" pitchFamily="34" charset="-120"/>
               </a:rPr>
-              <a:t>ever-</a:t>
+              <a:t>-ly</a:t>
             </a:r>
             <a:endParaRPr lang="en-US" sz="1300" dirty="0"/>
           </a:p>
@@ -39442,13 +40869,38 @@
       </p:sp>
       <p:sp>
         <p:nvSpPr>
-          <p:cNvPr id="30" name="Shape 28"/>
-          <p:cNvSpPr/>
-          <p:nvPr/>
-        </p:nvSpPr>
-        <p:spPr>
-          <a:xfrm>
-            <a:off x="3291840" y="2670048"/>
+          <p:cNvPr id="35" name="Shape 33"/>
+          <p:cNvSpPr/>
+          <p:nvPr/>
+        </p:nvSpPr>
+        <p:spPr>
+          <a:xfrm>
+            <a:off x="640080" y="3584448"/>
+            <a:ext cx="1463040" cy="420624"/>
+          </a:xfrm>
+          <a:prstGeom prst="rect">
+            <a:avLst/>
+          </a:prstGeom>
+          <a:solidFill>
+            <a:srgbClr val="F8FAFC"/>
+          </a:solidFill>
+          <a:ln w="12700">
+            <a:solidFill>
+              <a:srgbClr val="E5E7EB"/>
+            </a:solidFill>
+            <a:prstDash val="solid"/>
+          </a:ln>
+        </p:spPr>
+      </p:sp>
+      <p:sp>
+        <p:nvSpPr>
+          <p:cNvPr id="36" name="Shape 34"/>
+          <p:cNvSpPr/>
+          <p:nvPr/>
+        </p:nvSpPr>
+        <p:spPr>
+          <a:xfrm>
+            <a:off x="3291840" y="3584448"/>
             <a:ext cx="1645920" cy="420624"/>
           </a:xfrm>
           <a:prstGeom prst="rect">
@@ -39467,13 +40919,13 @@
       </p:sp>
       <p:sp>
         <p:nvSpPr>
-          <p:cNvPr id="31" name="Shape 29"/>
-          <p:cNvSpPr/>
-          <p:nvPr/>
-        </p:nvSpPr>
-        <p:spPr>
-          <a:xfrm>
-            <a:off x="5943600" y="2670048"/>
+          <p:cNvPr id="37" name="Shape 35"/>
+          <p:cNvSpPr/>
+          <p:nvPr/>
+        </p:nvSpPr>
+        <p:spPr>
+          <a:xfrm>
+            <a:off x="5943600" y="3584448"/>
             <a:ext cx="1463040" cy="420624"/>
           </a:xfrm>
           <a:prstGeom prst="rect">
@@ -39492,13 +40944,13 @@
       </p:sp>
       <p:sp>
         <p:nvSpPr>
-          <p:cNvPr id="32" name="Text 30"/>
-          <p:cNvSpPr/>
-          <p:nvPr/>
-        </p:nvSpPr>
-        <p:spPr>
-          <a:xfrm>
-            <a:off x="5943600" y="2670048"/>
+          <p:cNvPr id="38" name="Text 36"/>
+          <p:cNvSpPr/>
+          <p:nvPr/>
+        </p:nvSpPr>
+        <p:spPr>
+          <a:xfrm>
+            <a:off x="5943600" y="3584448"/>
             <a:ext cx="1463040" cy="420624"/>
           </a:xfrm>
           <a:prstGeom prst="rect">
@@ -39523,7 +40975,7 @@
                 <a:ea typeface="Trebuchet MS" pitchFamily="34" charset="-122"/>
                 <a:cs typeface="Trebuchet MS" pitchFamily="34" charset="-120"/>
               </a:rPr>
-              <a:t>-ly</a:t>
+              <a:t>-ness</a:t>
             </a:r>
             <a:endParaRPr lang="en-US" sz="1300" dirty="0"/>
           </a:p>
@@ -39531,20 +40983,20 @@
       </p:sp>
       <p:sp>
         <p:nvSpPr>
-          <p:cNvPr id="33" name="Shape 31"/>
-          <p:cNvSpPr/>
-          <p:nvPr/>
-        </p:nvSpPr>
-        <p:spPr>
-          <a:xfrm>
-            <a:off x="640080" y="3127248"/>
+          <p:cNvPr id="39" name="Shape 37"/>
+          <p:cNvSpPr/>
+          <p:nvPr/>
+        </p:nvSpPr>
+        <p:spPr>
+          <a:xfrm>
+            <a:off x="640080" y="4041648"/>
             <a:ext cx="1463040" cy="420624"/>
           </a:xfrm>
           <a:prstGeom prst="rect">
             <a:avLst/>
           </a:prstGeom>
           <a:solidFill>
-            <a:srgbClr val="DDD6FE"/>
+            <a:srgbClr val="F1F5F9"/>
           </a:solidFill>
           <a:ln w="12700">
             <a:solidFill>
@@ -39556,18 +41008,68 @@
       </p:sp>
       <p:sp>
         <p:nvSpPr>
-          <p:cNvPr id="34" name="Text 32"/>
-          <p:cNvSpPr/>
-          <p:nvPr/>
-        </p:nvSpPr>
-        <p:spPr>
-          <a:xfrm>
-            <a:off x="640080" y="3127248"/>
+          <p:cNvPr id="40" name="Shape 38"/>
+          <p:cNvSpPr/>
+          <p:nvPr/>
+        </p:nvSpPr>
+        <p:spPr>
+          <a:xfrm>
+            <a:off x="3291840" y="4041648"/>
+            <a:ext cx="1645920" cy="420624"/>
+          </a:xfrm>
+          <a:prstGeom prst="rect">
+            <a:avLst/>
+          </a:prstGeom>
+          <a:solidFill>
+            <a:srgbClr val="F1F5F9"/>
+          </a:solidFill>
+          <a:ln w="12700">
+            <a:solidFill>
+              <a:srgbClr val="E5E7EB"/>
+            </a:solidFill>
+            <a:prstDash val="solid"/>
+          </a:ln>
+        </p:spPr>
+      </p:sp>
+      <p:sp>
+        <p:nvSpPr>
+          <p:cNvPr id="41" name="Shape 39"/>
+          <p:cNvSpPr/>
+          <p:nvPr/>
+        </p:nvSpPr>
+        <p:spPr>
+          <a:xfrm>
+            <a:off x="5943600" y="4041648"/>
             <a:ext cx="1463040" cy="420624"/>
           </a:xfrm>
           <a:prstGeom prst="rect">
             <a:avLst/>
           </a:prstGeom>
+          <a:solidFill>
+            <a:srgbClr val="FCE7F3"/>
+          </a:solidFill>
+          <a:ln w="12700">
+            <a:solidFill>
+              <a:srgbClr val="E5E7EB"/>
+            </a:solidFill>
+            <a:prstDash val="solid"/>
+          </a:ln>
+        </p:spPr>
+      </p:sp>
+      <p:sp>
+        <p:nvSpPr>
+          <p:cNvPr id="42" name="Text 40"/>
+          <p:cNvSpPr/>
+          <p:nvPr/>
+        </p:nvSpPr>
+        <p:spPr>
+          <a:xfrm>
+            <a:off x="5943600" y="4041648"/>
+            <a:ext cx="1463040" cy="420624"/>
+          </a:xfrm>
+          <a:prstGeom prst="rect">
+            <a:avLst/>
+          </a:prstGeom>
           <a:noFill/>
           <a:ln/>
         </p:spPr>
@@ -39581,13 +41083,13 @@
             <a:r>
               <a:rPr lang="en-US" sz="1300" b="1" dirty="0">
                 <a:solidFill>
-                  <a:srgbClr val="4C1D95"/>
+                  <a:srgbClr val="9D174D"/>
                 </a:solidFill>
                 <a:latin typeface="Trebuchet MS" pitchFamily="34" charset="0"/>
                 <a:ea typeface="Trebuchet MS" pitchFamily="34" charset="-122"/>
                 <a:cs typeface="Trebuchet MS" pitchFamily="34" charset="-120"/>
               </a:rPr>
-              <a:t>semi-</a:t>
+              <a:t>-ed</a:t>
             </a:r>
             <a:endParaRPr lang="en-US" sz="1300" dirty="0"/>
           </a:p>
@@ -39595,255 +41097,13 @@
       </p:sp>
       <p:sp>
         <p:nvSpPr>
-          <p:cNvPr id="35" name="Shape 33"/>
-          <p:cNvSpPr/>
-          <p:nvPr/>
-        </p:nvSpPr>
-        <p:spPr>
-          <a:xfrm>
-            <a:off x="3291840" y="3127248"/>
-            <a:ext cx="1645920" cy="420624"/>
-          </a:xfrm>
-          <a:prstGeom prst="rect">
-            <a:avLst/>
-          </a:prstGeom>
-          <a:solidFill>
-            <a:srgbClr val="F1F5F9"/>
-          </a:solidFill>
-          <a:ln w="12700">
-            <a:solidFill>
-              <a:srgbClr val="E5E7EB"/>
-            </a:solidFill>
-            <a:prstDash val="solid"/>
-          </a:ln>
-        </p:spPr>
-      </p:sp>
-      <p:sp>
-        <p:nvSpPr>
-          <p:cNvPr id="36" name="Shape 34"/>
-          <p:cNvSpPr/>
-          <p:nvPr/>
-        </p:nvSpPr>
-        <p:spPr>
-          <a:xfrm>
-            <a:off x="5943600" y="3127248"/>
-            <a:ext cx="1463040" cy="420624"/>
-          </a:xfrm>
-          <a:prstGeom prst="rect">
-            <a:avLst/>
-          </a:prstGeom>
-          <a:solidFill>
-            <a:srgbClr val="FCE7F3"/>
-          </a:solidFill>
-          <a:ln w="12700">
-            <a:solidFill>
-              <a:srgbClr val="E5E7EB"/>
-            </a:solidFill>
-            <a:prstDash val="solid"/>
-          </a:ln>
-        </p:spPr>
-      </p:sp>
-      <p:sp>
-        <p:nvSpPr>
-          <p:cNvPr id="37" name="Text 35"/>
-          <p:cNvSpPr/>
-          <p:nvPr/>
-        </p:nvSpPr>
-        <p:spPr>
-          <a:xfrm>
-            <a:off x="5943600" y="3127248"/>
-            <a:ext cx="1463040" cy="420624"/>
-          </a:xfrm>
-          <a:prstGeom prst="rect">
-            <a:avLst/>
-          </a:prstGeom>
-          <a:noFill/>
-          <a:ln/>
-        </p:spPr>
-        <p:txBody>
-          <a:bodyPr wrap="square" lIns="0" tIns="0" rIns="0" bIns="0" rtlCol="0" anchor="ctr"/>
-          <a:lstStyle/>
-          <a:p>
-            <a:pPr algn="ctr" indent="0" marL="0">
-              <a:buNone/>
-            </a:pPr>
-            <a:r>
-              <a:rPr lang="en-US" sz="1300" b="1" dirty="0">
-                <a:solidFill>
-                  <a:srgbClr val="9D174D"/>
-                </a:solidFill>
-                <a:latin typeface="Trebuchet MS" pitchFamily="34" charset="0"/>
-                <a:ea typeface="Trebuchet MS" pitchFamily="34" charset="-122"/>
-                <a:cs typeface="Trebuchet MS" pitchFamily="34" charset="-120"/>
-              </a:rPr>
-              <a:t>-ness</a:t>
-            </a:r>
-            <a:endParaRPr lang="en-US" sz="1300" dirty="0"/>
-          </a:p>
-        </p:txBody>
-      </p:sp>
-      <p:sp>
-        <p:nvSpPr>
-          <p:cNvPr id="38" name="Shape 36"/>
-          <p:cNvSpPr/>
-          <p:nvPr/>
-        </p:nvSpPr>
-        <p:spPr>
-          <a:xfrm>
-            <a:off x="640080" y="3584448"/>
-            <a:ext cx="1463040" cy="420624"/>
-          </a:xfrm>
-          <a:prstGeom prst="rect">
-            <a:avLst/>
-          </a:prstGeom>
-          <a:solidFill>
-            <a:srgbClr val="DDD6FE"/>
-          </a:solidFill>
-          <a:ln w="12700">
-            <a:solidFill>
-              <a:srgbClr val="E5E7EB"/>
-            </a:solidFill>
-            <a:prstDash val="solid"/>
-          </a:ln>
-        </p:spPr>
-      </p:sp>
-      <p:sp>
-        <p:nvSpPr>
-          <p:cNvPr id="39" name="Text 37"/>
-          <p:cNvSpPr/>
-          <p:nvPr/>
-        </p:nvSpPr>
-        <p:spPr>
-          <a:xfrm>
-            <a:off x="640080" y="3584448"/>
-            <a:ext cx="1463040" cy="420624"/>
-          </a:xfrm>
-          <a:prstGeom prst="rect">
-            <a:avLst/>
-          </a:prstGeom>
-          <a:noFill/>
-          <a:ln/>
-        </p:spPr>
-        <p:txBody>
-          <a:bodyPr wrap="square" lIns="0" tIns="0" rIns="0" bIns="0" rtlCol="0" anchor="ctr"/>
-          <a:lstStyle/>
-          <a:p>
-            <a:pPr algn="ctr" indent="0" marL="0">
-              <a:buNone/>
-            </a:pPr>
-            <a:r>
-              <a:rPr lang="en-US" sz="1300" b="1" dirty="0">
-                <a:solidFill>
-                  <a:srgbClr val="4C1D95"/>
-                </a:solidFill>
-                <a:latin typeface="Trebuchet MS" pitchFamily="34" charset="0"/>
-                <a:ea typeface="Trebuchet MS" pitchFamily="34" charset="-122"/>
-                <a:cs typeface="Trebuchet MS" pitchFamily="34" charset="-120"/>
-              </a:rPr>
-              <a:t>ultra-</a:t>
-            </a:r>
-            <a:endParaRPr lang="en-US" sz="1300" dirty="0"/>
-          </a:p>
-        </p:txBody>
-      </p:sp>
-      <p:sp>
-        <p:nvSpPr>
-          <p:cNvPr id="40" name="Shape 38"/>
-          <p:cNvSpPr/>
-          <p:nvPr/>
-        </p:nvSpPr>
-        <p:spPr>
-          <a:xfrm>
-            <a:off x="3291840" y="3584448"/>
-            <a:ext cx="1645920" cy="420624"/>
-          </a:xfrm>
-          <a:prstGeom prst="rect">
-            <a:avLst/>
-          </a:prstGeom>
-          <a:solidFill>
-            <a:srgbClr val="F8FAFC"/>
-          </a:solidFill>
-          <a:ln w="12700">
-            <a:solidFill>
-              <a:srgbClr val="E5E7EB"/>
-            </a:solidFill>
-            <a:prstDash val="solid"/>
-          </a:ln>
-        </p:spPr>
-      </p:sp>
-      <p:sp>
-        <p:nvSpPr>
-          <p:cNvPr id="41" name="Shape 39"/>
-          <p:cNvSpPr/>
-          <p:nvPr/>
-        </p:nvSpPr>
-        <p:spPr>
-          <a:xfrm>
-            <a:off x="5943600" y="3584448"/>
-            <a:ext cx="1463040" cy="420624"/>
-          </a:xfrm>
-          <a:prstGeom prst="rect">
-            <a:avLst/>
-          </a:prstGeom>
-          <a:solidFill>
-            <a:srgbClr val="FCE7F3"/>
-          </a:solidFill>
-          <a:ln w="12700">
-            <a:solidFill>
-              <a:srgbClr val="E5E7EB"/>
-            </a:solidFill>
-            <a:prstDash val="solid"/>
-          </a:ln>
-        </p:spPr>
-      </p:sp>
-      <p:sp>
-        <p:nvSpPr>
-          <p:cNvPr id="42" name="Text 40"/>
-          <p:cNvSpPr/>
-          <p:nvPr/>
-        </p:nvSpPr>
-        <p:spPr>
-          <a:xfrm>
-            <a:off x="5943600" y="3584448"/>
-            <a:ext cx="1463040" cy="420624"/>
-          </a:xfrm>
-          <a:prstGeom prst="rect">
-            <a:avLst/>
-          </a:prstGeom>
-          <a:noFill/>
-          <a:ln/>
-        </p:spPr>
-        <p:txBody>
-          <a:bodyPr wrap="square" lIns="0" tIns="0" rIns="0" bIns="0" rtlCol="0" anchor="ctr"/>
-          <a:lstStyle/>
-          <a:p>
-            <a:pPr algn="ctr" indent="0" marL="0">
-              <a:buNone/>
-            </a:pPr>
-            <a:r>
-              <a:rPr lang="en-US" sz="1300" b="1" dirty="0">
-                <a:solidFill>
-                  <a:srgbClr val="9D174D"/>
-                </a:solidFill>
-                <a:latin typeface="Trebuchet MS" pitchFamily="34" charset="0"/>
-                <a:ea typeface="Trebuchet MS" pitchFamily="34" charset="-122"/>
-                <a:cs typeface="Trebuchet MS" pitchFamily="34" charset="-120"/>
-              </a:rPr>
-              <a:t>-ing</a:t>
-            </a:r>
-            <a:endParaRPr lang="en-US" sz="1300" dirty="0"/>
-          </a:p>
-        </p:txBody>
-      </p:sp>
-      <p:sp>
-        <p:nvSpPr>
           <p:cNvPr id="43" name="Text 41"/>
           <p:cNvSpPr/>
           <p:nvPr/>
         </p:nvSpPr>
         <p:spPr>
           <a:xfrm>
-            <a:off x="365760" y="4178808"/>
+            <a:off x="365760" y="4636008"/>
             <a:ext cx="1097280" cy="420624"/>
           </a:xfrm>
           <a:prstGeom prst="rect">
@@ -39882,7 +41142,7 @@
         </p:nvSpPr>
         <p:spPr>
           <a:xfrm>
-            <a:off x="1508760" y="4178808"/>
+            <a:off x="1508760" y="4636008"/>
             <a:ext cx="822960" cy="420624"/>
           </a:xfrm>
           <a:prstGeom prst="rect">
@@ -39916,7 +41176,7 @@
         </p:nvSpPr>
         <p:spPr>
           <a:xfrm>
-            <a:off x="1508760" y="4178808"/>
+            <a:off x="1508760" y="4636008"/>
             <a:ext cx="822960" cy="420624"/>
           </a:xfrm>
           <a:prstGeom prst="rect">
@@ -39955,7 +41215,7 @@
         </p:nvSpPr>
         <p:spPr>
           <a:xfrm>
-            <a:off x="2359152" y="4178808"/>
+            <a:off x="2359152" y="4636008"/>
             <a:ext cx="320040" cy="420624"/>
           </a:xfrm>
           <a:prstGeom prst="rect">
@@ -39994,7 +41254,7 @@
         </p:nvSpPr>
         <p:spPr>
           <a:xfrm>
-            <a:off x="2706624" y="4178808"/>
+            <a:off x="2706624" y="4636008"/>
             <a:ext cx="1389888" cy="420624"/>
           </a:xfrm>
           <a:prstGeom prst="rect">
@@ -40028,7 +41288,7 @@
         </p:nvSpPr>
         <p:spPr>
           <a:xfrm>
-            <a:off x="2706624" y="4178808"/>
+            <a:off x="2706624" y="4636008"/>
             <a:ext cx="1389888" cy="420624"/>
           </a:xfrm>
           <a:prstGeom prst="rect">
@@ -40067,7 +41327,7 @@
         </p:nvSpPr>
         <p:spPr>
           <a:xfrm>
-            <a:off x="4123944" y="4178808"/>
+            <a:off x="4123944" y="4636008"/>
             <a:ext cx="320040" cy="420624"/>
           </a:xfrm>
           <a:prstGeom prst="rect">
@@ -40106,7 +41366,7 @@
         </p:nvSpPr>
         <p:spPr>
           <a:xfrm>
-            <a:off x="4471416" y="4178808"/>
+            <a:off x="4471416" y="4636008"/>
             <a:ext cx="822960" cy="420624"/>
           </a:xfrm>
           <a:prstGeom prst="rect">
@@ -40140,7 +41400,7 @@
         </p:nvSpPr>
         <p:spPr>
           <a:xfrm>
-            <a:off x="4471416" y="4178808"/>
+            <a:off x="4471416" y="4636008"/>
             <a:ext cx="822960" cy="420624"/>
           </a:xfrm>
           <a:prstGeom prst="rect">
@@ -40179,7 +41439,7 @@
         </p:nvSpPr>
         <p:spPr>
           <a:xfrm>
-            <a:off x="5367528" y="4178808"/>
+            <a:off x="5367528" y="4636008"/>
             <a:ext cx="365760" cy="420624"/>
           </a:xfrm>
           <a:prstGeom prst="rect">
@@ -40218,7 +41478,7 @@
         </p:nvSpPr>
         <p:spPr>
           <a:xfrm>
-            <a:off x="5779008" y="4178808"/>
+            <a:off x="5779008" y="4636008"/>
             <a:ext cx="2194560" cy="420624"/>
           </a:xfrm>
           <a:prstGeom prst="rect">
@@ -40245,7 +41505,7 @@
         </p:nvSpPr>
         <p:spPr>
           <a:xfrm>
-            <a:off x="5779008" y="4178808"/>
+            <a:off x="5779008" y="4636008"/>
             <a:ext cx="2194560" cy="420624"/>
           </a:xfrm>
           <a:prstGeom prst="rect">
@@ -40270,7 +41530,7 @@
                 <a:ea typeface="Trebuchet MS" pitchFamily="34" charset="-122"/>
                 <a:cs typeface="Trebuchet MS" pitchFamily="34" charset="-120"/>
               </a:rPr>
-              <a:t>freshen</a:t>
+              <a:t>fresh</a:t>
             </a:r>
             <a:endParaRPr lang="en-US" sz="1400" dirty="0"/>
           </a:p>
@@ -40562,7 +41822,7 @@
                 <a:ea typeface="Calibri" pitchFamily="34" charset="-122"/>
                 <a:cs typeface="Calibri" pitchFamily="34" charset="-120"/>
               </a:rPr>
-              <a:t>Word Labs  •  wordlabs.app  •  Root: 'fresh' = new, clean, not stale</a:t>
+              <a:t>Word Labs  •  wordlabs.app  •  Root: 'fresh' = new; recently made</a:t>
             </a:r>
             <a:endParaRPr lang="en-US" sz="800" dirty="0"/>
           </a:p>
@@ -40674,7 +41934,7 @@
                 <a:ea typeface="Trebuchet MS" pitchFamily="34" charset="-122"/>
                 <a:cs typeface="Trebuchet MS" pitchFamily="34" charset="-120"/>
               </a:rPr>
-              <a:t>freshen</a:t>
+              <a:t>fresh</a:t>
             </a:r>
             <a:endParaRPr lang="en-US" sz="1200" dirty="0"/>
           </a:p>
@@ -40740,7 +42000,7 @@
                 <a:ea typeface="Calibri" pitchFamily="34" charset="-122"/>
                 <a:cs typeface="Calibri" pitchFamily="34" charset="-120"/>
               </a:rPr>
-              <a:t>To make something feel newer, cleaner, or cooler.</a:t>
+              <a:t>newly made, grown, or obtained; not stale or old</a:t>
             </a:r>
             <a:endParaRPr lang="en-US" sz="1200" dirty="0"/>
           </a:p>
@@ -40813,7 +42073,7 @@
                 <a:ea typeface="Trebuchet MS" pitchFamily="34" charset="-122"/>
                 <a:cs typeface="Trebuchet MS" pitchFamily="34" charset="-120"/>
               </a:rPr>
-              <a:t>freshly</a:t>
+              <a:t>freshen</a:t>
             </a:r>
             <a:endParaRPr lang="en-US" sz="1200" dirty="0"/>
           </a:p>
@@ -40879,7 +42139,7 @@
                 <a:ea typeface="Calibri" pitchFamily="34" charset="-122"/>
                 <a:cs typeface="Calibri" pitchFamily="34" charset="-120"/>
               </a:rPr>
-              <a:t>To make something feel new and full of energy again.</a:t>
+              <a:t>recently or newly done</a:t>
             </a:r>
             <a:endParaRPr lang="en-US" sz="1200" dirty="0"/>
           </a:p>
@@ -40952,7 +42212,7 @@
                 <a:ea typeface="Trebuchet MS" pitchFamily="34" charset="-122"/>
                 <a:cs typeface="Trebuchet MS" pitchFamily="34" charset="-120"/>
               </a:rPr>
-              <a:t>freshness</a:t>
+              <a:t>fresher</a:t>
             </a:r>
             <a:endParaRPr lang="en-US" sz="1200" dirty="0"/>
           </a:p>
@@ -41018,7 +42278,7 @@
                 <a:ea typeface="Calibri" pitchFamily="34" charset="-122"/>
                 <a:cs typeface="Calibri" pitchFamily="34" charset="-120"/>
               </a:rPr>
-              <a:t>The quality of being new, clean, and not stale.</a:t>
+              <a:t>more new, clean, or lively</a:t>
             </a:r>
             <a:endParaRPr lang="en-US" sz="1200" dirty="0"/>
           </a:p>
@@ -41091,7 +42351,7 @@
                 <a:ea typeface="Trebuchet MS" pitchFamily="34" charset="-122"/>
                 <a:cs typeface="Trebuchet MS" pitchFamily="34" charset="-120"/>
               </a:rPr>
-              <a:t>refresh</a:t>
+              <a:t>freshly</a:t>
             </a:r>
             <a:endParaRPr lang="en-US" sz="1200" dirty="0"/>
           </a:p>
@@ -41157,7 +42417,7 @@
                 <a:ea typeface="Calibri" pitchFamily="34" charset="-122"/>
                 <a:cs typeface="Calibri" pitchFamily="34" charset="-120"/>
               </a:rPr>
-              <a:t>Something that makes you feel cool, awake, and full of energy.</a:t>
+              <a:t>to make something feel new again, or to reload something like a web page</a:t>
             </a:r>
             <a:endParaRPr lang="en-US" sz="1200" dirty="0"/>
           </a:p>
@@ -41230,7 +42490,7 @@
                 <a:ea typeface="Trebuchet MS" pitchFamily="34" charset="-122"/>
                 <a:cs typeface="Trebuchet MS" pitchFamily="34" charset="-120"/>
               </a:rPr>
-              <a:t>refreshing</a:t>
+              <a:t>refresh</a:t>
             </a:r>
             <a:endParaRPr lang="en-US" sz="1200" dirty="0"/>
           </a:p>
@@ -41296,7 +42556,7 @@
                 <a:ea typeface="Calibri" pitchFamily="34" charset="-122"/>
                 <a:cs typeface="Calibri" pitchFamily="34" charset="-120"/>
               </a:rPr>
-              <a:t>Not new or clean; something that has gone stale or old.</a:t>
+              <a:t>made newer, cleaner, or more lively</a:t>
             </a:r>
             <a:endParaRPr lang="en-US" sz="1200" dirty="0"/>
           </a:p>
@@ -41369,7 +42629,7 @@
                 <a:ea typeface="Trebuchet MS" pitchFamily="34" charset="-122"/>
                 <a:cs typeface="Trebuchet MS" pitchFamily="34" charset="-120"/>
               </a:rPr>
-              <a:t>refreshment</a:t>
+              <a:t>freshest</a:t>
             </a:r>
             <a:endParaRPr lang="en-US" sz="1200" dirty="0"/>
           </a:p>
@@ -41435,7 +42695,7 @@
                 <a:ea typeface="Calibri" pitchFamily="34" charset="-122"/>
                 <a:cs typeface="Calibri" pitchFamily="34" charset="-120"/>
               </a:rPr>
-              <a:t>A drink or snack that gives you energy and makes you feel better.</a:t>
+              <a:t>most new, clean, or lively</a:t>
             </a:r>
             <a:endParaRPr lang="en-US" sz="1200" dirty="0"/>
           </a:p>
@@ -41508,7 +42768,7 @@
                 <a:ea typeface="Trebuchet MS" pitchFamily="34" charset="-122"/>
                 <a:cs typeface="Trebuchet MS" pitchFamily="34" charset="-120"/>
               </a:rPr>
-              <a:t>unfresh</a:t>
+              <a:t>freshened</a:t>
             </a:r>
             <a:endParaRPr lang="en-US" sz="1200" dirty="0"/>
           </a:p>
@@ -41574,7 +42834,7 @@
                 <a:ea typeface="Calibri" pitchFamily="34" charset="-122"/>
                 <a:cs typeface="Calibri" pitchFamily="34" charset="-120"/>
               </a:rPr>
-              <a:t>Done very recently, in a new and clean way.</a:t>
+              <a:t>to make something newer, cleaner, or more lively</a:t>
             </a:r>
             <a:endParaRPr lang="en-US" sz="1200" dirty="0"/>
           </a:p>
@@ -41866,7 +43126,7 @@
                 <a:ea typeface="Calibri" pitchFamily="34" charset="-122"/>
                 <a:cs typeface="Calibri" pitchFamily="34" charset="-120"/>
               </a:rPr>
-              <a:t>Word Labs  •  wordlabs.app  •  Root: 'fresh' = new, clean, not stale</a:t>
+              <a:t>Word Labs  •  wordlabs.app  •  Root: 'fresh' = new; recently made</a:t>
             </a:r>
             <a:endParaRPr lang="en-US" sz="800" dirty="0"/>
           </a:p>
@@ -42069,7 +43329,7 @@
                 <a:ea typeface="Calibri" pitchFamily="34" charset="-122"/>
                 <a:cs typeface="Calibri" pitchFamily="34" charset="-120"/>
               </a:rPr>
-              <a:t>After the long hike, the freshness of the cool mountain air made everyone feel much better.</a:t>
+              <a:t>We bought fresh bread from the bakery this morning.</a:t>
             </a:r>
             <a:endParaRPr lang="en-US" sz="1500" dirty="0"/>
           </a:p>
@@ -42233,7 +43493,7 @@
                 <a:ea typeface="Calibri" pitchFamily="34" charset="-122"/>
                 <a:cs typeface="Calibri" pitchFamily="34" charset="-120"/>
               </a:rPr>
-              <a:t>Mia used a lavender freshener to make her bedroom smell clean and pleasant.</a:t>
+              <a:t>Open a window to freshen the stuffy classroom.</a:t>
             </a:r>
             <a:endParaRPr lang="en-US" sz="1500" dirty="0"/>
           </a:p>
@@ -42397,7 +43657,7 @@
                 <a:ea typeface="Calibri" pitchFamily="34" charset="-122"/>
                 <a:cs typeface="Calibri" pitchFamily="34" charset="-120"/>
               </a:rPr>
-              <a:t>The teacher asked the students to refresh their memory by reading over their notes before the test.</a:t>
+              <a:t>This milk tastes fresher than the carton we bought last week.</a:t>
             </a:r>
             <a:endParaRPr lang="en-US" sz="1500" dirty="0"/>
           </a:p>
